--- a/PPT_370_EmergingTechnologies.pptx
+++ b/PPT_370_EmergingTechnologies.pptx
@@ -158,7 +158,7 @@
 <file path=ppt/revisionInfo.xml><?xml version="1.0" encoding="utf-8"?>
 <p1510:revInfo xmlns:a="http://schemas.openxmlformats.org/drawingml/2006/main" xmlns:r="http://schemas.openxmlformats.org/officeDocument/2006/relationships" xmlns:p1510="http://schemas.microsoft.com/office/powerpoint/2015/10/main">
   <p1510:revLst>
-    <p1510:client id="{C839E10A-5450-46C1-8B96-290942955DEC}" v="45" dt="2026-08-27T07:59:04.602"/>
+    <p1510:client id="{C839E10A-5450-46C1-8B96-290942955DEC}" v="51" dt="2026-09-17T07:56:03.594"/>
   </p1510:revLst>
 </p1510:revInfo>
 </file>
@@ -167,13 +167,13 @@
 <pc:chgInfo xmlns:a="http://schemas.openxmlformats.org/drawingml/2006/main" xmlns:r="http://schemas.openxmlformats.org/officeDocument/2006/relationships" xmlns:ac="http://schemas.microsoft.com/office/drawing/2013/main/command" xmlns:pc="http://schemas.microsoft.com/office/powerpoint/2013/main/command">
   <pc:docChgLst>
     <pc:chgData name="Shreena Solia" userId="ce99177b26c586f9" providerId="LiveId" clId="{1F1047B7-353E-4D5F-BD1C-2AC2A6DBBBA4}"/>
-    <pc:docChg chg="custSel addSld delSld modSld sldOrd">
-      <pc:chgData name="Shreena Solia" userId="ce99177b26c586f9" providerId="LiveId" clId="{1F1047B7-353E-4D5F-BD1C-2AC2A6DBBBA4}" dt="2026-09-01T09:51:02.294" v="474" actId="27636"/>
+    <pc:docChg chg="custSel addSld delSld modSld sldOrd modMainMaster">
+      <pc:chgData name="Shreena Solia" userId="ce99177b26c586f9" providerId="LiveId" clId="{1F1047B7-353E-4D5F-BD1C-2AC2A6DBBBA4}" dt="2026-09-17T07:56:03.593" v="480"/>
       <pc:docMkLst>
         <pc:docMk/>
       </pc:docMkLst>
-      <pc:sldChg chg="addSp delSp modSp mod">
-        <pc:chgData name="Shreena Solia" userId="ce99177b26c586f9" providerId="LiveId" clId="{1F1047B7-353E-4D5F-BD1C-2AC2A6DBBBA4}" dt="2026-08-27T08:00:55.387" v="443" actId="931"/>
+      <pc:sldChg chg="addSp delSp modSp mod modTransition">
+        <pc:chgData name="Shreena Solia" userId="ce99177b26c586f9" providerId="LiveId" clId="{1F1047B7-353E-4D5F-BD1C-2AC2A6DBBBA4}" dt="2026-09-17T07:56:03.593" v="480"/>
         <pc:sldMkLst>
           <pc:docMk/>
           <pc:sldMk cId="1593920805" sldId="262"/>
@@ -203,8 +203,8 @@
           </ac:picMkLst>
         </pc:picChg>
       </pc:sldChg>
-      <pc:sldChg chg="modSp mod">
-        <pc:chgData name="Shreena Solia" userId="ce99177b26c586f9" providerId="LiveId" clId="{1F1047B7-353E-4D5F-BD1C-2AC2A6DBBBA4}" dt="2026-08-27T07:33:05.633" v="87" actId="113"/>
+      <pc:sldChg chg="modSp mod modTransition">
+        <pc:chgData name="Shreena Solia" userId="ce99177b26c586f9" providerId="LiveId" clId="{1F1047B7-353E-4D5F-BD1C-2AC2A6DBBBA4}" dt="2026-09-17T07:56:03.593" v="480"/>
         <pc:sldMkLst>
           <pc:docMk/>
           <pc:sldMk cId="3650340329" sldId="264"/>
@@ -218,8 +218,8 @@
           </ac:spMkLst>
         </pc:spChg>
       </pc:sldChg>
-      <pc:sldChg chg="modSp mod">
-        <pc:chgData name="Shreena Solia" userId="ce99177b26c586f9" providerId="LiveId" clId="{1F1047B7-353E-4D5F-BD1C-2AC2A6DBBBA4}" dt="2026-08-27T07:38:16.967" v="139" actId="1076"/>
+      <pc:sldChg chg="modSp mod modTransition">
+        <pc:chgData name="Shreena Solia" userId="ce99177b26c586f9" providerId="LiveId" clId="{1F1047B7-353E-4D5F-BD1C-2AC2A6DBBBA4}" dt="2026-09-17T07:56:03.593" v="480"/>
         <pc:sldMkLst>
           <pc:docMk/>
           <pc:sldMk cId="920173932" sldId="275"/>
@@ -241,8 +241,8 @@
           </ac:spMkLst>
         </pc:spChg>
       </pc:sldChg>
-      <pc:sldChg chg="addSp delSp modSp mod">
-        <pc:chgData name="Shreena Solia" userId="ce99177b26c586f9" providerId="LiveId" clId="{1F1047B7-353E-4D5F-BD1C-2AC2A6DBBBA4}" dt="2026-08-27T07:30:23.015" v="78" actId="1076"/>
+      <pc:sldChg chg="addSp delSp modSp mod modTransition">
+        <pc:chgData name="Shreena Solia" userId="ce99177b26c586f9" providerId="LiveId" clId="{1F1047B7-353E-4D5F-BD1C-2AC2A6DBBBA4}" dt="2026-09-17T07:56:03.593" v="480"/>
         <pc:sldMkLst>
           <pc:docMk/>
           <pc:sldMk cId="2243494996" sldId="277"/>
@@ -272,8 +272,8 @@
           </ac:picMkLst>
         </pc:picChg>
       </pc:sldChg>
-      <pc:sldChg chg="modSp mod">
-        <pc:chgData name="Shreena Solia" userId="ce99177b26c586f9" providerId="LiveId" clId="{1F1047B7-353E-4D5F-BD1C-2AC2A6DBBBA4}" dt="2026-09-01T09:48:42.800" v="450" actId="6549"/>
+      <pc:sldChg chg="modSp mod modTransition">
+        <pc:chgData name="Shreena Solia" userId="ce99177b26c586f9" providerId="LiveId" clId="{1F1047B7-353E-4D5F-BD1C-2AC2A6DBBBA4}" dt="2026-09-17T07:56:03.593" v="480"/>
         <pc:sldMkLst>
           <pc:docMk/>
           <pc:sldMk cId="4151694508" sldId="286"/>
@@ -303,8 +303,8 @@
           </ac:spMkLst>
         </pc:spChg>
       </pc:sldChg>
-      <pc:sldChg chg="addSp delSp modSp mod">
-        <pc:chgData name="Shreena Solia" userId="ce99177b26c586f9" providerId="LiveId" clId="{1F1047B7-353E-4D5F-BD1C-2AC2A6DBBBA4}" dt="2026-08-27T07:54:09.764" v="343" actId="1076"/>
+      <pc:sldChg chg="addSp delSp modSp mod modTransition">
+        <pc:chgData name="Shreena Solia" userId="ce99177b26c586f9" providerId="LiveId" clId="{1F1047B7-353E-4D5F-BD1C-2AC2A6DBBBA4}" dt="2026-09-17T07:56:03.593" v="480"/>
         <pc:sldMkLst>
           <pc:docMk/>
           <pc:sldMk cId="1472106130" sldId="288"/>
@@ -326,15 +326,8 @@
           </ac:spMkLst>
         </pc:spChg>
       </pc:sldChg>
-      <pc:sldChg chg="del ord">
-        <pc:chgData name="Shreena Solia" userId="ce99177b26c586f9" providerId="LiveId" clId="{1F1047B7-353E-4D5F-BD1C-2AC2A6DBBBA4}" dt="2026-09-01T09:50:37.139" v="465" actId="2696"/>
-        <pc:sldMkLst>
-          <pc:docMk/>
-          <pc:sldMk cId="2561631246" sldId="289"/>
-        </pc:sldMkLst>
-      </pc:sldChg>
-      <pc:sldChg chg="addSp modSp mod">
-        <pc:chgData name="Shreena Solia" userId="ce99177b26c586f9" providerId="LiveId" clId="{1F1047B7-353E-4D5F-BD1C-2AC2A6DBBBA4}" dt="2026-08-27T07:48:50.325" v="288" actId="1076"/>
+      <pc:sldChg chg="addSp modSp mod modTransition">
+        <pc:chgData name="Shreena Solia" userId="ce99177b26c586f9" providerId="LiveId" clId="{1F1047B7-353E-4D5F-BD1C-2AC2A6DBBBA4}" dt="2026-09-17T07:56:03.593" v="480"/>
         <pc:sldMkLst>
           <pc:docMk/>
           <pc:sldMk cId="2436493926" sldId="293"/>
@@ -364,8 +357,8 @@
           </ac:picMkLst>
         </pc:picChg>
       </pc:sldChg>
-      <pc:sldChg chg="modSp mod">
-        <pc:chgData name="Shreena Solia" userId="ce99177b26c586f9" providerId="LiveId" clId="{1F1047B7-353E-4D5F-BD1C-2AC2A6DBBBA4}" dt="2026-09-01T09:51:02.294" v="474" actId="27636"/>
+      <pc:sldChg chg="modSp mod modTransition">
+        <pc:chgData name="Shreena Solia" userId="ce99177b26c586f9" providerId="LiveId" clId="{1F1047B7-353E-4D5F-BD1C-2AC2A6DBBBA4}" dt="2026-09-17T07:56:03.593" v="480"/>
         <pc:sldMkLst>
           <pc:docMk/>
           <pc:sldMk cId="2578554952" sldId="294"/>
@@ -395,8 +388,8 @@
           </ac:spMkLst>
         </pc:spChg>
       </pc:sldChg>
-      <pc:sldChg chg="addSp delSp modSp mod">
-        <pc:chgData name="Shreena Solia" userId="ce99177b26c586f9" providerId="LiveId" clId="{1F1047B7-353E-4D5F-BD1C-2AC2A6DBBBA4}" dt="2026-09-01T09:50:47.158" v="469" actId="478"/>
+      <pc:sldChg chg="addSp delSp modSp mod modTransition">
+        <pc:chgData name="Shreena Solia" userId="ce99177b26c586f9" providerId="LiveId" clId="{1F1047B7-353E-4D5F-BD1C-2AC2A6DBBBA4}" dt="2026-09-17T07:56:03.593" v="480"/>
         <pc:sldMkLst>
           <pc:docMk/>
           <pc:sldMk cId="3830685312" sldId="295"/>
@@ -425,53 +418,16 @@
             <ac:spMk id="6" creationId="{5A6B31B0-7B84-475D-961F-09C0191F91A2}"/>
           </ac:spMkLst>
         </pc:spChg>
-        <pc:graphicFrameChg chg="del modGraphic">
-          <ac:chgData name="Shreena Solia" userId="ce99177b26c586f9" providerId="LiveId" clId="{1F1047B7-353E-4D5F-BD1C-2AC2A6DBBBA4}" dt="2026-09-01T09:50:47.158" v="469" actId="478"/>
-          <ac:graphicFrameMkLst>
-            <pc:docMk/>
-            <pc:sldMk cId="3830685312" sldId="295"/>
-            <ac:graphicFrameMk id="7" creationId="{2B3209A9-DBA3-783A-240E-673257FE1112}"/>
-          </ac:graphicFrameMkLst>
-        </pc:graphicFrameChg>
       </pc:sldChg>
-      <pc:sldChg chg="del">
-        <pc:chgData name="Shreena Solia" userId="ce99177b26c586f9" providerId="LiveId" clId="{1F1047B7-353E-4D5F-BD1C-2AC2A6DBBBA4}" dt="2026-09-01T09:50:32.326" v="464" actId="2696"/>
+      <pc:sldChg chg="modTransition">
+        <pc:chgData name="Shreena Solia" userId="ce99177b26c586f9" providerId="LiveId" clId="{1F1047B7-353E-4D5F-BD1C-2AC2A6DBBBA4}" dt="2026-09-17T07:56:03.593" v="480"/>
         <pc:sldMkLst>
           <pc:docMk/>
-          <pc:sldMk cId="1013586251" sldId="299"/>
+          <pc:sldMk cId="1711019939" sldId="298"/>
         </pc:sldMkLst>
       </pc:sldChg>
-      <pc:sldChg chg="modSp del mod">
-        <pc:chgData name="Shreena Solia" userId="ce99177b26c586f9" providerId="LiveId" clId="{1F1047B7-353E-4D5F-BD1C-2AC2A6DBBBA4}" dt="2026-09-01T09:50:00.230" v="455" actId="2696"/>
-        <pc:sldMkLst>
-          <pc:docMk/>
-          <pc:sldMk cId="1730481778" sldId="300"/>
-        </pc:sldMkLst>
-        <pc:spChg chg="mod">
-          <ac:chgData name="Shreena Solia" userId="ce99177b26c586f9" providerId="LiveId" clId="{1F1047B7-353E-4D5F-BD1C-2AC2A6DBBBA4}" dt="2026-09-01T09:49:56.301" v="454" actId="6549"/>
-          <ac:spMkLst>
-            <pc:docMk/>
-            <pc:sldMk cId="1730481778" sldId="300"/>
-            <ac:spMk id="4" creationId="{EFC8EEE6-5FB5-798B-7D00-0CDE54C241BB}"/>
-          </ac:spMkLst>
-        </pc:spChg>
-      </pc:sldChg>
-      <pc:sldChg chg="del">
-        <pc:chgData name="Shreena Solia" userId="ce99177b26c586f9" providerId="LiveId" clId="{1F1047B7-353E-4D5F-BD1C-2AC2A6DBBBA4}" dt="2026-09-01T09:50:16.913" v="461" actId="2696"/>
-        <pc:sldMkLst>
-          <pc:docMk/>
-          <pc:sldMk cId="3905068818" sldId="301"/>
-        </pc:sldMkLst>
-      </pc:sldChg>
-      <pc:sldChg chg="del">
-        <pc:chgData name="Shreena Solia" userId="ce99177b26c586f9" providerId="LiveId" clId="{1F1047B7-353E-4D5F-BD1C-2AC2A6DBBBA4}" dt="2026-09-01T09:50:52.862" v="470" actId="2696"/>
-        <pc:sldMkLst>
-          <pc:docMk/>
-          <pc:sldMk cId="325392634" sldId="302"/>
-        </pc:sldMkLst>
-      </pc:sldChg>
-      <pc:sldChg chg="modSp add mod ord">
-        <pc:chgData name="Shreena Solia" userId="ce99177b26c586f9" providerId="LiveId" clId="{1F1047B7-353E-4D5F-BD1C-2AC2A6DBBBA4}" dt="2026-09-01T09:50:12.202" v="460" actId="6549"/>
+      <pc:sldChg chg="modSp add mod ord modTransition">
+        <pc:chgData name="Shreena Solia" userId="ce99177b26c586f9" providerId="LiveId" clId="{1F1047B7-353E-4D5F-BD1C-2AC2A6DBBBA4}" dt="2026-09-17T07:56:03.593" v="480"/>
         <pc:sldMkLst>
           <pc:docMk/>
           <pc:sldMk cId="1120807269" sldId="303"/>
@@ -493,8 +449,8 @@
           </ac:spMkLst>
         </pc:spChg>
       </pc:sldChg>
-      <pc:sldChg chg="addSp delSp modSp add mod ord">
-        <pc:chgData name="Shreena Solia" userId="ce99177b26c586f9" providerId="LiveId" clId="{1F1047B7-353E-4D5F-BD1C-2AC2A6DBBBA4}" dt="2026-09-01T09:48:57.575" v="453" actId="478"/>
+      <pc:sldChg chg="addSp delSp modSp add mod ord modTransition">
+        <pc:chgData name="Shreena Solia" userId="ce99177b26c586f9" providerId="LiveId" clId="{1F1047B7-353E-4D5F-BD1C-2AC2A6DBBBA4}" dt="2026-09-17T07:56:03.593" v="480"/>
         <pc:sldMkLst>
           <pc:docMk/>
           <pc:sldMk cId="1034298867" sldId="304"/>
@@ -523,29 +479,13 @@
             <ac:spMk id="6" creationId="{4A356FF8-8CA8-8C48-C00C-E4F86208AE74}"/>
           </ac:spMkLst>
         </pc:spChg>
-        <pc:graphicFrameChg chg="del">
-          <ac:chgData name="Shreena Solia" userId="ce99177b26c586f9" providerId="LiveId" clId="{1F1047B7-353E-4D5F-BD1C-2AC2A6DBBBA4}" dt="2026-09-01T09:48:57.575" v="453" actId="478"/>
-          <ac:graphicFrameMkLst>
-            <pc:docMk/>
-            <pc:sldMk cId="1034298867" sldId="304"/>
-            <ac:graphicFrameMk id="10" creationId="{3F69DD36-A862-369C-72F9-D874D7880BB5}"/>
-          </ac:graphicFrameMkLst>
-        </pc:graphicFrameChg>
       </pc:sldChg>
-      <pc:sldChg chg="addSp delSp modSp add mod ord">
-        <pc:chgData name="Shreena Solia" userId="ce99177b26c586f9" providerId="LiveId" clId="{1F1047B7-353E-4D5F-BD1C-2AC2A6DBBBA4}" dt="2026-09-01T09:50:26.640" v="463" actId="478"/>
+      <pc:sldChg chg="addSp delSp modSp add mod ord modTransition">
+        <pc:chgData name="Shreena Solia" userId="ce99177b26c586f9" providerId="LiveId" clId="{1F1047B7-353E-4D5F-BD1C-2AC2A6DBBBA4}" dt="2026-09-17T07:56:03.593" v="480"/>
         <pc:sldMkLst>
           <pc:docMk/>
           <pc:sldMk cId="1800142194" sldId="305"/>
         </pc:sldMkLst>
-        <pc:spChg chg="del mod">
-          <ac:chgData name="Shreena Solia" userId="ce99177b26c586f9" providerId="LiveId" clId="{1F1047B7-353E-4D5F-BD1C-2AC2A6DBBBA4}" dt="2026-09-01T09:50:26.640" v="463" actId="478"/>
-          <ac:spMkLst>
-            <pc:docMk/>
-            <pc:sldMk cId="1800142194" sldId="305"/>
-            <ac:spMk id="2" creationId="{E713F115-1AA2-D508-9D4A-92C9B4B66AAA}"/>
-          </ac:spMkLst>
-        </pc:spChg>
         <pc:spChg chg="add mod">
           <ac:chgData name="Shreena Solia" userId="ce99177b26c586f9" providerId="LiveId" clId="{1F1047B7-353E-4D5F-BD1C-2AC2A6DBBBA4}" dt="2026-09-01T09:50:26.640" v="463" actId="478"/>
           <ac:spMkLst>
@@ -562,23 +502,118 @@
             <ac:spMk id="6" creationId="{4EC5940D-2553-0022-B5BF-B93CC11A234C}"/>
           </ac:spMkLst>
         </pc:spChg>
-        <pc:picChg chg="del">
-          <ac:chgData name="Shreena Solia" userId="ce99177b26c586f9" providerId="LiveId" clId="{1F1047B7-353E-4D5F-BD1C-2AC2A6DBBBA4}" dt="2026-09-01T09:50:26.640" v="463" actId="478"/>
-          <ac:picMkLst>
+      </pc:sldChg>
+      <pc:sldMasterChg chg="modTransition modSldLayout">
+        <pc:chgData name="Shreena Solia" userId="ce99177b26c586f9" providerId="LiveId" clId="{1F1047B7-353E-4D5F-BD1C-2AC2A6DBBBA4}" dt="2026-09-17T07:56:03.593" v="480"/>
+        <pc:sldMasterMkLst>
+          <pc:docMk/>
+          <pc:sldMasterMk cId="1544047913" sldId="2147483660"/>
+        </pc:sldMasterMkLst>
+        <pc:sldLayoutChg chg="modTransition">
+          <pc:chgData name="Shreena Solia" userId="ce99177b26c586f9" providerId="LiveId" clId="{1F1047B7-353E-4D5F-BD1C-2AC2A6DBBBA4}" dt="2026-09-17T07:56:03.593" v="480"/>
+          <pc:sldLayoutMkLst>
             <pc:docMk/>
-            <pc:sldMk cId="1800142194" sldId="305"/>
-            <ac:picMk id="13" creationId="{86546C17-130D-B615-F9B4-590758216477}"/>
-          </ac:picMkLst>
-        </pc:picChg>
-        <pc:picChg chg="del">
-          <ac:chgData name="Shreena Solia" userId="ce99177b26c586f9" providerId="LiveId" clId="{1F1047B7-353E-4D5F-BD1C-2AC2A6DBBBA4}" dt="2026-09-01T09:50:26.640" v="463" actId="478"/>
-          <ac:picMkLst>
+            <pc:sldMasterMk cId="1544047913" sldId="2147483660"/>
+            <pc:sldLayoutMk cId="4196340225" sldId="2147483663"/>
+          </pc:sldLayoutMkLst>
+        </pc:sldLayoutChg>
+        <pc:sldLayoutChg chg="modTransition">
+          <pc:chgData name="Shreena Solia" userId="ce99177b26c586f9" providerId="LiveId" clId="{1F1047B7-353E-4D5F-BD1C-2AC2A6DBBBA4}" dt="2026-09-17T07:56:03.593" v="480"/>
+          <pc:sldLayoutMkLst>
             <pc:docMk/>
-            <pc:sldMk cId="1800142194" sldId="305"/>
-            <ac:picMk id="21" creationId="{BA7C1292-7C12-5D7E-FE34-64DB4E522F53}"/>
-          </ac:picMkLst>
-        </pc:picChg>
-      </pc:sldChg>
+            <pc:sldMasterMk cId="1544047913" sldId="2147483660"/>
+            <pc:sldLayoutMk cId="355283013" sldId="2147483665"/>
+          </pc:sldLayoutMkLst>
+        </pc:sldLayoutChg>
+        <pc:sldLayoutChg chg="modTransition">
+          <pc:chgData name="Shreena Solia" userId="ce99177b26c586f9" providerId="LiveId" clId="{1F1047B7-353E-4D5F-BD1C-2AC2A6DBBBA4}" dt="2026-09-17T07:56:03.593" v="480"/>
+          <pc:sldLayoutMkLst>
+            <pc:docMk/>
+            <pc:sldMasterMk cId="1544047913" sldId="2147483660"/>
+            <pc:sldLayoutMk cId="1563524165" sldId="2147483679"/>
+          </pc:sldLayoutMkLst>
+        </pc:sldLayoutChg>
+        <pc:sldLayoutChg chg="modTransition">
+          <pc:chgData name="Shreena Solia" userId="ce99177b26c586f9" providerId="LiveId" clId="{1F1047B7-353E-4D5F-BD1C-2AC2A6DBBBA4}" dt="2026-09-17T07:56:03.593" v="480"/>
+          <pc:sldLayoutMkLst>
+            <pc:docMk/>
+            <pc:sldMasterMk cId="1544047913" sldId="2147483660"/>
+            <pc:sldLayoutMk cId="1309884451" sldId="2147483688"/>
+          </pc:sldLayoutMkLst>
+        </pc:sldLayoutChg>
+        <pc:sldLayoutChg chg="modTransition">
+          <pc:chgData name="Shreena Solia" userId="ce99177b26c586f9" providerId="LiveId" clId="{1F1047B7-353E-4D5F-BD1C-2AC2A6DBBBA4}" dt="2026-09-17T07:56:03.593" v="480"/>
+          <pc:sldLayoutMkLst>
+            <pc:docMk/>
+            <pc:sldMasterMk cId="1544047913" sldId="2147483660"/>
+            <pc:sldLayoutMk cId="1884464865" sldId="2147483690"/>
+          </pc:sldLayoutMkLst>
+        </pc:sldLayoutChg>
+        <pc:sldLayoutChg chg="modTransition">
+          <pc:chgData name="Shreena Solia" userId="ce99177b26c586f9" providerId="LiveId" clId="{1F1047B7-353E-4D5F-BD1C-2AC2A6DBBBA4}" dt="2026-09-17T07:56:03.593" v="480"/>
+          <pc:sldLayoutMkLst>
+            <pc:docMk/>
+            <pc:sldMasterMk cId="1544047913" sldId="2147483660"/>
+            <pc:sldLayoutMk cId="1231035317" sldId="2147483692"/>
+          </pc:sldLayoutMkLst>
+        </pc:sldLayoutChg>
+        <pc:sldLayoutChg chg="modTransition">
+          <pc:chgData name="Shreena Solia" userId="ce99177b26c586f9" providerId="LiveId" clId="{1F1047B7-353E-4D5F-BD1C-2AC2A6DBBBA4}" dt="2026-09-17T07:56:03.593" v="480"/>
+          <pc:sldLayoutMkLst>
+            <pc:docMk/>
+            <pc:sldMasterMk cId="1544047913" sldId="2147483660"/>
+            <pc:sldLayoutMk cId="2199545073" sldId="2147483695"/>
+          </pc:sldLayoutMkLst>
+        </pc:sldLayoutChg>
+        <pc:sldLayoutChg chg="modTransition">
+          <pc:chgData name="Shreena Solia" userId="ce99177b26c586f9" providerId="LiveId" clId="{1F1047B7-353E-4D5F-BD1C-2AC2A6DBBBA4}" dt="2026-09-17T07:56:03.593" v="480"/>
+          <pc:sldLayoutMkLst>
+            <pc:docMk/>
+            <pc:sldMasterMk cId="1544047913" sldId="2147483660"/>
+            <pc:sldLayoutMk cId="4045577202" sldId="2147483698"/>
+          </pc:sldLayoutMkLst>
+        </pc:sldLayoutChg>
+        <pc:sldLayoutChg chg="modTransition">
+          <pc:chgData name="Shreena Solia" userId="ce99177b26c586f9" providerId="LiveId" clId="{1F1047B7-353E-4D5F-BD1C-2AC2A6DBBBA4}" dt="2026-09-17T07:56:03.593" v="480"/>
+          <pc:sldLayoutMkLst>
+            <pc:docMk/>
+            <pc:sldMasterMk cId="1544047913" sldId="2147483660"/>
+            <pc:sldLayoutMk cId="3745439134" sldId="2147483699"/>
+          </pc:sldLayoutMkLst>
+        </pc:sldLayoutChg>
+        <pc:sldLayoutChg chg="modTransition">
+          <pc:chgData name="Shreena Solia" userId="ce99177b26c586f9" providerId="LiveId" clId="{1F1047B7-353E-4D5F-BD1C-2AC2A6DBBBA4}" dt="2026-09-17T07:56:03.593" v="480"/>
+          <pc:sldLayoutMkLst>
+            <pc:docMk/>
+            <pc:sldMasterMk cId="1544047913" sldId="2147483660"/>
+            <pc:sldLayoutMk cId="4268806401" sldId="2147483700"/>
+          </pc:sldLayoutMkLst>
+        </pc:sldLayoutChg>
+        <pc:sldLayoutChg chg="modTransition">
+          <pc:chgData name="Shreena Solia" userId="ce99177b26c586f9" providerId="LiveId" clId="{1F1047B7-353E-4D5F-BD1C-2AC2A6DBBBA4}" dt="2026-09-17T07:56:03.593" v="480"/>
+          <pc:sldLayoutMkLst>
+            <pc:docMk/>
+            <pc:sldMasterMk cId="1544047913" sldId="2147483660"/>
+            <pc:sldLayoutMk cId="4033652303" sldId="2147483701"/>
+          </pc:sldLayoutMkLst>
+        </pc:sldLayoutChg>
+        <pc:sldLayoutChg chg="modTransition">
+          <pc:chgData name="Shreena Solia" userId="ce99177b26c586f9" providerId="LiveId" clId="{1F1047B7-353E-4D5F-BD1C-2AC2A6DBBBA4}" dt="2026-09-17T07:56:03.593" v="480"/>
+          <pc:sldLayoutMkLst>
+            <pc:docMk/>
+            <pc:sldMasterMk cId="1544047913" sldId="2147483660"/>
+            <pc:sldLayoutMk cId="2003226232" sldId="2147483702"/>
+          </pc:sldLayoutMkLst>
+        </pc:sldLayoutChg>
+        <pc:sldLayoutChg chg="modTransition">
+          <pc:chgData name="Shreena Solia" userId="ce99177b26c586f9" providerId="LiveId" clId="{1F1047B7-353E-4D5F-BD1C-2AC2A6DBBBA4}" dt="2026-09-17T07:56:03.593" v="480"/>
+          <pc:sldLayoutMkLst>
+            <pc:docMk/>
+            <pc:sldMasterMk cId="1544047913" sldId="2147483660"/>
+            <pc:sldLayoutMk cId="333197987" sldId="2147483704"/>
+          </pc:sldLayoutMkLst>
+        </pc:sldLayoutChg>
+      </pc:sldMasterChg>
     </pc:docChg>
   </pc:docChgLst>
 </pc:chgInfo>
@@ -674,7 +709,7 @@
                   <a:schemeClr val="tx2"/>
                 </a:solidFill>
               </a:rPr>
-              <a:t>9/1/2026</a:t>
+              <a:t>9/17/2026</a:t>
             </a:fld>
             <a:endParaRPr dirty="0">
               <a:solidFill>
@@ -864,7 +899,7 @@
             <a:fld id="{F95CF31C-F757-429C-A789-86504F04C3BE}" type="datetimeFigureOut">
               <a:rPr lang="en-US"/>
               <a:pPr/>
-              <a:t>9/1/2026</a:t>
+              <a:t>9/17/2026</a:t>
             </a:fld>
             <a:endParaRPr dirty="0"/>
           </a:p>
@@ -2381,14 +2416,14 @@
   <p:clrMapOvr>
     <a:masterClrMapping/>
   </p:clrMapOvr>
-  <mc:AlternateContent xmlns:mc="http://schemas.openxmlformats.org/markup-compatibility/2006" xmlns:p14="http://schemas.microsoft.com/office/powerpoint/2010/main">
-    <mc:Choice Requires="p14">
-      <p:transition spd="med" p14:dur="700">
-        <p:fade/>
+  <mc:AlternateContent xmlns:mc="http://schemas.openxmlformats.org/markup-compatibility/2006">
+    <mc:Choice xmlns:p14="http://schemas.microsoft.com/office/powerpoint/2010/main" Requires="p14">
+      <p:transition spd="slow" p14:dur="4000">
+        <p14:vortex dir="r"/>
       </p:transition>
     </mc:Choice>
-    <mc:Fallback xmlns="">
-      <p:transition spd="med">
+    <mc:Fallback>
+      <p:transition spd="slow">
         <p:fade/>
       </p:transition>
     </mc:Fallback>
@@ -3334,14 +3369,14 @@
   <p:clrMapOvr>
     <a:masterClrMapping/>
   </p:clrMapOvr>
-  <mc:AlternateContent xmlns:mc="http://schemas.openxmlformats.org/markup-compatibility/2006" xmlns:p14="http://schemas.microsoft.com/office/powerpoint/2010/main">
-    <mc:Choice Requires="p14">
-      <p:transition spd="med" p14:dur="700">
-        <p:fade/>
+  <mc:AlternateContent xmlns:mc="http://schemas.openxmlformats.org/markup-compatibility/2006">
+    <mc:Choice xmlns:p14="http://schemas.microsoft.com/office/powerpoint/2010/main" Requires="p14">
+      <p:transition spd="slow" p14:dur="4000">
+        <p14:vortex dir="r"/>
       </p:transition>
     </mc:Choice>
-    <mc:Fallback xmlns="">
-      <p:transition spd="med">
+    <mc:Fallback>
+      <p:transition spd="slow">
         <p:fade/>
       </p:transition>
     </mc:Fallback>
@@ -4335,14 +4370,14 @@
   <p:clrMapOvr>
     <a:masterClrMapping/>
   </p:clrMapOvr>
-  <mc:AlternateContent xmlns:mc="http://schemas.openxmlformats.org/markup-compatibility/2006" xmlns:p14="http://schemas.microsoft.com/office/powerpoint/2010/main">
-    <mc:Choice Requires="p14">
-      <p:transition spd="med" p14:dur="700">
-        <p:fade/>
+  <mc:AlternateContent xmlns:mc="http://schemas.openxmlformats.org/markup-compatibility/2006">
+    <mc:Choice xmlns:p14="http://schemas.microsoft.com/office/powerpoint/2010/main" Requires="p14">
+      <p:transition spd="slow" p14:dur="4000">
+        <p14:vortex dir="r"/>
       </p:transition>
     </mc:Choice>
-    <mc:Fallback xmlns="">
-      <p:transition spd="med">
+    <mc:Fallback>
+      <p:transition spd="slow">
         <p:fade/>
       </p:transition>
     </mc:Fallback>
@@ -5088,14 +5123,14 @@
   <p:clrMapOvr>
     <a:masterClrMapping/>
   </p:clrMapOvr>
-  <mc:AlternateContent xmlns:mc="http://schemas.openxmlformats.org/markup-compatibility/2006" xmlns:p14="http://schemas.microsoft.com/office/powerpoint/2010/main">
-    <mc:Choice Requires="p14">
-      <p:transition spd="med" p14:dur="700">
-        <p:fade/>
+  <mc:AlternateContent xmlns:mc="http://schemas.openxmlformats.org/markup-compatibility/2006">
+    <mc:Choice xmlns:p14="http://schemas.microsoft.com/office/powerpoint/2010/main" Requires="p14">
+      <p:transition spd="slow" p14:dur="4000">
+        <p14:vortex dir="r"/>
       </p:transition>
     </mc:Choice>
-    <mc:Fallback xmlns="">
-      <p:transition spd="med">
+    <mc:Fallback>
+      <p:transition spd="slow">
         <p:fade/>
       </p:transition>
     </mc:Fallback>
@@ -5866,14 +5901,14 @@
   <p:clrMapOvr>
     <a:masterClrMapping/>
   </p:clrMapOvr>
-  <mc:AlternateContent xmlns:mc="http://schemas.openxmlformats.org/markup-compatibility/2006" xmlns:p14="http://schemas.microsoft.com/office/powerpoint/2010/main">
-    <mc:Choice Requires="p14">
-      <p:transition spd="med" p14:dur="700">
-        <p:fade/>
+  <mc:AlternateContent xmlns:mc="http://schemas.openxmlformats.org/markup-compatibility/2006">
+    <mc:Choice xmlns:p14="http://schemas.microsoft.com/office/powerpoint/2010/main" Requires="p14">
+      <p:transition spd="slow" p14:dur="4000">
+        <p14:vortex dir="r"/>
       </p:transition>
     </mc:Choice>
-    <mc:Fallback xmlns="">
-      <p:transition spd="med">
+    <mc:Fallback>
+      <p:transition spd="slow">
         <p:fade/>
       </p:transition>
     </mc:Fallback>
@@ -6881,14 +6916,14 @@
   <p:clrMapOvr>
     <a:masterClrMapping/>
   </p:clrMapOvr>
-  <mc:AlternateContent xmlns:mc="http://schemas.openxmlformats.org/markup-compatibility/2006" xmlns:p14="http://schemas.microsoft.com/office/powerpoint/2010/main">
-    <mc:Choice Requires="p14">
-      <p:transition spd="med" p14:dur="700">
-        <p:fade/>
+  <mc:AlternateContent xmlns:mc="http://schemas.openxmlformats.org/markup-compatibility/2006">
+    <mc:Choice xmlns:p14="http://schemas.microsoft.com/office/powerpoint/2010/main" Requires="p14">
+      <p:transition spd="slow" p14:dur="4000">
+        <p14:vortex dir="r"/>
       </p:transition>
     </mc:Choice>
-    <mc:Fallback xmlns="">
-      <p:transition spd="med">
+    <mc:Fallback>
+      <p:transition spd="slow">
         <p:fade/>
       </p:transition>
     </mc:Fallback>
@@ -7820,14 +7855,14 @@
   <p:clrMapOvr>
     <a:masterClrMapping/>
   </p:clrMapOvr>
-  <mc:AlternateContent xmlns:mc="http://schemas.openxmlformats.org/markup-compatibility/2006" xmlns:p14="http://schemas.microsoft.com/office/powerpoint/2010/main">
-    <mc:Choice Requires="p14">
-      <p:transition spd="med" p14:dur="700">
-        <p:fade/>
+  <mc:AlternateContent xmlns:mc="http://schemas.openxmlformats.org/markup-compatibility/2006">
+    <mc:Choice xmlns:p14="http://schemas.microsoft.com/office/powerpoint/2010/main" Requires="p14">
+      <p:transition spd="slow" p14:dur="4000">
+        <p14:vortex dir="r"/>
       </p:transition>
     </mc:Choice>
-    <mc:Fallback xmlns="">
-      <p:transition spd="med">
+    <mc:Fallback>
+      <p:transition spd="slow">
         <p:fade/>
       </p:transition>
     </mc:Fallback>
@@ -8891,14 +8926,14 @@
   <p:clrMapOvr>
     <a:masterClrMapping/>
   </p:clrMapOvr>
-  <mc:AlternateContent xmlns:mc="http://schemas.openxmlformats.org/markup-compatibility/2006" xmlns:p14="http://schemas.microsoft.com/office/powerpoint/2010/main">
-    <mc:Choice Requires="p14">
-      <p:transition spd="med" p14:dur="700">
-        <p:fade/>
+  <mc:AlternateContent xmlns:mc="http://schemas.openxmlformats.org/markup-compatibility/2006">
+    <mc:Choice xmlns:p14="http://schemas.microsoft.com/office/powerpoint/2010/main" Requires="p14">
+      <p:transition spd="slow" p14:dur="4000">
+        <p14:vortex dir="r"/>
       </p:transition>
     </mc:Choice>
-    <mc:Fallback xmlns="">
-      <p:transition spd="med">
+    <mc:Fallback>
+      <p:transition spd="slow">
         <p:fade/>
       </p:transition>
     </mc:Fallback>
@@ -9826,14 +9861,14 @@
   <p:clrMapOvr>
     <a:masterClrMapping/>
   </p:clrMapOvr>
-  <mc:AlternateContent xmlns:mc="http://schemas.openxmlformats.org/markup-compatibility/2006" xmlns:p14="http://schemas.microsoft.com/office/powerpoint/2010/main">
-    <mc:Choice Requires="p14">
-      <p:transition spd="med" p14:dur="700">
-        <p:fade/>
+  <mc:AlternateContent xmlns:mc="http://schemas.openxmlformats.org/markup-compatibility/2006">
+    <mc:Choice xmlns:p14="http://schemas.microsoft.com/office/powerpoint/2010/main" Requires="p14">
+      <p:transition spd="slow" p14:dur="4000">
+        <p14:vortex dir="r"/>
       </p:transition>
     </mc:Choice>
-    <mc:Fallback xmlns="">
-      <p:transition spd="med">
+    <mc:Fallback>
+      <p:transition spd="slow">
         <p:fade/>
       </p:transition>
     </mc:Fallback>
@@ -10915,14 +10950,14 @@
   <p:clrMapOvr>
     <a:masterClrMapping/>
   </p:clrMapOvr>
-  <mc:AlternateContent xmlns:mc="http://schemas.openxmlformats.org/markup-compatibility/2006" xmlns:p14="http://schemas.microsoft.com/office/powerpoint/2010/main">
-    <mc:Choice Requires="p14">
-      <p:transition spd="med" p14:dur="700">
-        <p:fade/>
+  <mc:AlternateContent xmlns:mc="http://schemas.openxmlformats.org/markup-compatibility/2006">
+    <mc:Choice xmlns:p14="http://schemas.microsoft.com/office/powerpoint/2010/main" Requires="p14">
+      <p:transition spd="slow" p14:dur="4000">
+        <p14:vortex dir="r"/>
       </p:transition>
     </mc:Choice>
-    <mc:Fallback xmlns="">
-      <p:transition spd="med">
+    <mc:Fallback>
+      <p:transition spd="slow">
         <p:fade/>
       </p:transition>
     </mc:Fallback>
@@ -11912,14 +11947,14 @@
   <p:clrMapOvr>
     <a:masterClrMapping/>
   </p:clrMapOvr>
-  <mc:AlternateContent xmlns:mc="http://schemas.openxmlformats.org/markup-compatibility/2006" xmlns:p14="http://schemas.microsoft.com/office/powerpoint/2010/main">
-    <mc:Choice Requires="p14">
-      <p:transition spd="med" p14:dur="700">
-        <p:fade/>
+  <mc:AlternateContent xmlns:mc="http://schemas.openxmlformats.org/markup-compatibility/2006">
+    <mc:Choice xmlns:p14="http://schemas.microsoft.com/office/powerpoint/2010/main" Requires="p14">
+      <p:transition spd="slow" p14:dur="4000">
+        <p14:vortex dir="r"/>
       </p:transition>
     </mc:Choice>
-    <mc:Fallback xmlns="">
-      <p:transition spd="med">
+    <mc:Fallback>
+      <p:transition spd="slow">
         <p:fade/>
       </p:transition>
     </mc:Fallback>
@@ -12842,14 +12877,14 @@
   <p:clrMapOvr>
     <a:masterClrMapping/>
   </p:clrMapOvr>
-  <mc:AlternateContent xmlns:mc="http://schemas.openxmlformats.org/markup-compatibility/2006" xmlns:p14="http://schemas.microsoft.com/office/powerpoint/2010/main">
-    <mc:Choice Requires="p14">
-      <p:transition spd="med" p14:dur="700">
-        <p:fade/>
+  <mc:AlternateContent xmlns:mc="http://schemas.openxmlformats.org/markup-compatibility/2006">
+    <mc:Choice xmlns:p14="http://schemas.microsoft.com/office/powerpoint/2010/main" Requires="p14">
+      <p:transition spd="slow" p14:dur="4000">
+        <p14:vortex dir="r"/>
       </p:transition>
     </mc:Choice>
-    <mc:Fallback xmlns="">
-      <p:transition spd="med">
+    <mc:Fallback>
+      <p:transition spd="slow">
         <p:fade/>
       </p:transition>
     </mc:Fallback>
@@ -13522,14 +13557,14 @@
   <p:clrMapOvr>
     <a:masterClrMapping/>
   </p:clrMapOvr>
-  <mc:AlternateContent xmlns:mc="http://schemas.openxmlformats.org/markup-compatibility/2006" xmlns:p14="http://schemas.microsoft.com/office/powerpoint/2010/main">
-    <mc:Choice Requires="p14">
-      <p:transition spd="med" p14:dur="700">
-        <p:fade/>
+  <mc:AlternateContent xmlns:mc="http://schemas.openxmlformats.org/markup-compatibility/2006">
+    <mc:Choice xmlns:p14="http://schemas.microsoft.com/office/powerpoint/2010/main" Requires="p14">
+      <p:transition spd="slow" p14:dur="4000">
+        <p14:vortex dir="r"/>
       </p:transition>
     </mc:Choice>
-    <mc:Fallback xmlns="">
-      <p:transition spd="med">
+    <mc:Fallback>
+      <p:transition spd="slow">
         <p:fade/>
       </p:transition>
     </mc:Fallback>
@@ -13791,14 +13826,14 @@
     <p:sldLayoutId id="2147483699" r:id="rId12"/>
     <p:sldLayoutId id="2147483704" r:id="rId13"/>
   </p:sldLayoutIdLst>
-  <mc:AlternateContent xmlns:mc="http://schemas.openxmlformats.org/markup-compatibility/2006" xmlns:p14="http://schemas.microsoft.com/office/powerpoint/2010/main">
-    <mc:Choice Requires="p14">
-      <p:transition spd="med" p14:dur="700">
-        <p:fade/>
+  <mc:AlternateContent xmlns:mc="http://schemas.openxmlformats.org/markup-compatibility/2006">
+    <mc:Choice xmlns:p14="http://schemas.microsoft.com/office/powerpoint/2010/main" Requires="p14">
+      <p:transition spd="slow" p14:dur="4000">
+        <p14:vortex dir="r"/>
       </p:transition>
     </mc:Choice>
-    <mc:Fallback xmlns="">
-      <p:transition spd="med">
+    <mc:Fallback>
+      <p:transition spd="slow">
         <p:fade/>
       </p:transition>
     </mc:Fallback>
@@ -14197,12 +14232,16 @@
   <p:clrMapOvr>
     <a:masterClrMapping/>
   </p:clrMapOvr>
-  <mc:AlternateContent xmlns:mc="http://schemas.openxmlformats.org/markup-compatibility/2006" xmlns:p14="http://schemas.microsoft.com/office/powerpoint/2010/main">
-    <mc:Choice Requires="p14">
-      <p:transition p14:dur="0"/>
+  <mc:AlternateContent xmlns:mc="http://schemas.openxmlformats.org/markup-compatibility/2006">
+    <mc:Choice xmlns:p14="http://schemas.microsoft.com/office/powerpoint/2010/main" Requires="p14">
+      <p:transition spd="slow" p14:dur="4000">
+        <p14:vortex dir="r"/>
+      </p:transition>
     </mc:Choice>
-    <mc:Fallback xmlns="">
-      <p:transition/>
+    <mc:Fallback>
+      <p:transition spd="slow">
+        <p:fade/>
+      </p:transition>
     </mc:Fallback>
   </mc:AlternateContent>
 </p:sld>
@@ -14277,12 +14316,16 @@
   <p:clrMapOvr>
     <a:masterClrMapping/>
   </p:clrMapOvr>
-  <mc:AlternateContent xmlns:mc="http://schemas.openxmlformats.org/markup-compatibility/2006" xmlns:p14="http://schemas.microsoft.com/office/powerpoint/2010/main">
-    <mc:Choice Requires="p14">
-      <p:transition p14:dur="0"/>
+  <mc:AlternateContent xmlns:mc="http://schemas.openxmlformats.org/markup-compatibility/2006">
+    <mc:Choice xmlns:p14="http://schemas.microsoft.com/office/powerpoint/2010/main" Requires="p14">
+      <p:transition spd="slow" p14:dur="4000">
+        <p14:vortex dir="r"/>
+      </p:transition>
     </mc:Choice>
-    <mc:Fallback xmlns="">
-      <p:transition/>
+    <mc:Fallback>
+      <p:transition spd="slow">
+        <p:fade/>
+      </p:transition>
     </mc:Fallback>
   </mc:AlternateContent>
 </p:sld>
@@ -14424,12 +14467,16 @@
   <p:clrMapOvr>
     <a:masterClrMapping/>
   </p:clrMapOvr>
-  <mc:AlternateContent xmlns:mc="http://schemas.openxmlformats.org/markup-compatibility/2006" xmlns:p14="http://schemas.microsoft.com/office/powerpoint/2010/main">
-    <mc:Choice Requires="p14">
-      <p:transition p14:dur="0"/>
+  <mc:AlternateContent xmlns:mc="http://schemas.openxmlformats.org/markup-compatibility/2006">
+    <mc:Choice xmlns:p14="http://schemas.microsoft.com/office/powerpoint/2010/main" Requires="p14">
+      <p:transition spd="slow" p14:dur="4000">
+        <p14:vortex dir="r"/>
+      </p:transition>
     </mc:Choice>
-    <mc:Fallback xmlns="">
-      <p:transition/>
+    <mc:Fallback>
+      <p:transition spd="slow">
+        <p:fade/>
+      </p:transition>
     </mc:Fallback>
   </mc:AlternateContent>
 </p:sld>
@@ -14604,12 +14651,16 @@
   <p:clrMapOvr>
     <a:masterClrMapping/>
   </p:clrMapOvr>
-  <mc:AlternateContent xmlns:mc="http://schemas.openxmlformats.org/markup-compatibility/2006" xmlns:p14="http://schemas.microsoft.com/office/powerpoint/2010/main">
-    <mc:Choice Requires="p14">
-      <p:transition p14:dur="0"/>
+  <mc:AlternateContent xmlns:mc="http://schemas.openxmlformats.org/markup-compatibility/2006">
+    <mc:Choice xmlns:p14="http://schemas.microsoft.com/office/powerpoint/2010/main" Requires="p14">
+      <p:transition spd="slow" p14:dur="4000">
+        <p14:vortex dir="r"/>
+      </p:transition>
     </mc:Choice>
-    <mc:Fallback xmlns="">
-      <p:transition/>
+    <mc:Fallback>
+      <p:transition spd="slow">
+        <p:fade/>
+      </p:transition>
     </mc:Fallback>
   </mc:AlternateContent>
 </p:sld>
@@ -14677,12 +14728,16 @@
   <p:clrMapOvr>
     <a:masterClrMapping/>
   </p:clrMapOvr>
-  <mc:AlternateContent xmlns:mc="http://schemas.openxmlformats.org/markup-compatibility/2006" xmlns:p14="http://schemas.microsoft.com/office/powerpoint/2010/main">
-    <mc:Choice Requires="p14">
-      <p:transition p14:dur="0"/>
+  <mc:AlternateContent xmlns:mc="http://schemas.openxmlformats.org/markup-compatibility/2006">
+    <mc:Choice xmlns:p14="http://schemas.microsoft.com/office/powerpoint/2010/main" Requires="p14">
+      <p:transition spd="slow" p14:dur="4000">
+        <p14:vortex dir="r"/>
+      </p:transition>
     </mc:Choice>
-    <mc:Fallback xmlns="">
-      <p:transition/>
+    <mc:Fallback>
+      <p:transition spd="slow">
+        <p:fade/>
+      </p:transition>
     </mc:Fallback>
   </mc:AlternateContent>
 </p:sld>
@@ -15048,12 +15103,16 @@
   <p:clrMapOvr>
     <a:masterClrMapping/>
   </p:clrMapOvr>
-  <mc:AlternateContent xmlns:mc="http://schemas.openxmlformats.org/markup-compatibility/2006" xmlns:p14="http://schemas.microsoft.com/office/powerpoint/2010/main">
-    <mc:Choice Requires="p14">
-      <p:transition p14:dur="0"/>
+  <mc:AlternateContent xmlns:mc="http://schemas.openxmlformats.org/markup-compatibility/2006">
+    <mc:Choice xmlns:p14="http://schemas.microsoft.com/office/powerpoint/2010/main" Requires="p14">
+      <p:transition spd="slow" p14:dur="4000">
+        <p14:vortex dir="r"/>
+      </p:transition>
     </mc:Choice>
-    <mc:Fallback xmlns="">
-      <p:transition/>
+    <mc:Fallback>
+      <p:transition spd="slow">
+        <p:fade/>
+      </p:transition>
     </mc:Fallback>
   </mc:AlternateContent>
 </p:sld>
@@ -15320,12 +15379,16 @@
   <p:clrMapOvr>
     <a:masterClrMapping/>
   </p:clrMapOvr>
-  <mc:AlternateContent xmlns:mc="http://schemas.openxmlformats.org/markup-compatibility/2006" xmlns:p14="http://schemas.microsoft.com/office/powerpoint/2010/main">
-    <mc:Choice Requires="p14">
-      <p:transition p14:dur="0"/>
+  <mc:AlternateContent xmlns:mc="http://schemas.openxmlformats.org/markup-compatibility/2006">
+    <mc:Choice xmlns:p14="http://schemas.microsoft.com/office/powerpoint/2010/main" Requires="p14">
+      <p:transition spd="slow" p14:dur="4000">
+        <p14:vortex dir="r"/>
+      </p:transition>
     </mc:Choice>
-    <mc:Fallback xmlns="">
-      <p:transition/>
+    <mc:Fallback>
+      <p:transition spd="slow">
+        <p:fade/>
+      </p:transition>
     </mc:Fallback>
   </mc:AlternateContent>
 </p:sld>
@@ -15561,12 +15624,16 @@
   <p:clrMapOvr>
     <a:masterClrMapping/>
   </p:clrMapOvr>
-  <mc:AlternateContent xmlns:mc="http://schemas.openxmlformats.org/markup-compatibility/2006" xmlns:p14="http://schemas.microsoft.com/office/powerpoint/2010/main">
-    <mc:Choice Requires="p14">
-      <p:transition p14:dur="0"/>
+  <mc:AlternateContent xmlns:mc="http://schemas.openxmlformats.org/markup-compatibility/2006">
+    <mc:Choice xmlns:p14="http://schemas.microsoft.com/office/powerpoint/2010/main" Requires="p14">
+      <p:transition spd="slow" p14:dur="4000">
+        <p14:vortex dir="r"/>
+      </p:transition>
     </mc:Choice>
-    <mc:Fallback xmlns="">
-      <p:transition/>
+    <mc:Fallback>
+      <p:transition spd="slow">
+        <p:fade/>
+      </p:transition>
     </mc:Fallback>
   </mc:AlternateContent>
 </p:sld>
@@ -15801,12 +15868,16 @@
   <p:clrMapOvr>
     <a:masterClrMapping/>
   </p:clrMapOvr>
-  <mc:AlternateContent xmlns:mc="http://schemas.openxmlformats.org/markup-compatibility/2006" xmlns:p14="http://schemas.microsoft.com/office/powerpoint/2010/main">
-    <mc:Choice Requires="p14">
-      <p:transition p14:dur="0"/>
+  <mc:AlternateContent xmlns:mc="http://schemas.openxmlformats.org/markup-compatibility/2006">
+    <mc:Choice xmlns:p14="http://schemas.microsoft.com/office/powerpoint/2010/main" Requires="p14">
+      <p:transition spd="slow" p14:dur="4000">
+        <p14:vortex dir="r"/>
+      </p:transition>
     </mc:Choice>
-    <mc:Fallback xmlns="">
-      <p:transition/>
+    <mc:Fallback>
+      <p:transition spd="slow">
+        <p:fade/>
+      </p:transition>
     </mc:Fallback>
   </mc:AlternateContent>
 </p:sld>
@@ -16054,12 +16125,16 @@
   <p:clrMapOvr>
     <a:masterClrMapping/>
   </p:clrMapOvr>
-  <mc:AlternateContent xmlns:mc="http://schemas.openxmlformats.org/markup-compatibility/2006" xmlns:p14="http://schemas.microsoft.com/office/powerpoint/2010/main">
-    <mc:Choice Requires="p14">
-      <p:transition p14:dur="0"/>
+  <mc:AlternateContent xmlns:mc="http://schemas.openxmlformats.org/markup-compatibility/2006">
+    <mc:Choice xmlns:p14="http://schemas.microsoft.com/office/powerpoint/2010/main" Requires="p14">
+      <p:transition spd="slow" p14:dur="4000">
+        <p14:vortex dir="r"/>
+      </p:transition>
     </mc:Choice>
-    <mc:Fallback xmlns="">
-      <p:transition/>
+    <mc:Fallback>
+      <p:transition spd="slow">
+        <p:fade/>
+      </p:transition>
     </mc:Fallback>
   </mc:AlternateContent>
 </p:sld>
@@ -16215,12 +16290,16 @@
   <p:clrMapOvr>
     <a:masterClrMapping/>
   </p:clrMapOvr>
-  <mc:AlternateContent xmlns:mc="http://schemas.openxmlformats.org/markup-compatibility/2006" xmlns:p14="http://schemas.microsoft.com/office/powerpoint/2010/main">
-    <mc:Choice Requires="p14">
-      <p:transition p14:dur="0"/>
+  <mc:AlternateContent xmlns:mc="http://schemas.openxmlformats.org/markup-compatibility/2006">
+    <mc:Choice xmlns:p14="http://schemas.microsoft.com/office/powerpoint/2010/main" Requires="p14">
+      <p:transition spd="slow" p14:dur="4000">
+        <p14:vortex dir="r"/>
+      </p:transition>
     </mc:Choice>
-    <mc:Fallback xmlns="">
-      <p:transition/>
+    <mc:Fallback>
+      <p:transition spd="slow">
+        <p:fade/>
+      </p:transition>
     </mc:Fallback>
   </mc:AlternateContent>
 </p:sld>
@@ -16374,12 +16453,16 @@
   <p:clrMapOvr>
     <a:masterClrMapping/>
   </p:clrMapOvr>
-  <mc:AlternateContent xmlns:mc="http://schemas.openxmlformats.org/markup-compatibility/2006" xmlns:p14="http://schemas.microsoft.com/office/powerpoint/2010/main">
-    <mc:Choice Requires="p14">
-      <p:transition p14:dur="0"/>
+  <mc:AlternateContent xmlns:mc="http://schemas.openxmlformats.org/markup-compatibility/2006">
+    <mc:Choice xmlns:p14="http://schemas.microsoft.com/office/powerpoint/2010/main" Requires="p14">
+      <p:transition spd="slow" p14:dur="4000">
+        <p14:vortex dir="r"/>
+      </p:transition>
     </mc:Choice>
-    <mc:Fallback xmlns="">
-      <p:transition/>
+    <mc:Fallback>
+      <p:transition spd="slow">
+        <p:fade/>
+      </p:transition>
     </mc:Fallback>
   </mc:AlternateContent>
 </p:sld>
@@ -16529,12 +16612,16 @@
   <p:clrMapOvr>
     <a:masterClrMapping/>
   </p:clrMapOvr>
-  <mc:AlternateContent xmlns:mc="http://schemas.openxmlformats.org/markup-compatibility/2006" xmlns:p14="http://schemas.microsoft.com/office/powerpoint/2010/main">
-    <mc:Choice Requires="p14">
-      <p:transition p14:dur="0"/>
+  <mc:AlternateContent xmlns:mc="http://schemas.openxmlformats.org/markup-compatibility/2006">
+    <mc:Choice xmlns:p14="http://schemas.microsoft.com/office/powerpoint/2010/main" Requires="p14">
+      <p:transition spd="slow" p14:dur="4000">
+        <p14:vortex dir="r"/>
+      </p:transition>
     </mc:Choice>
-    <mc:Fallback xmlns="">
-      <p:transition/>
+    <mc:Fallback>
+      <p:transition spd="slow">
+        <p:fade/>
+      </p:transition>
     </mc:Fallback>
   </mc:AlternateContent>
 </p:sld>
@@ -17290,12 +17377,23 @@
 </file>
 
 <file path=customXml/item1.xml><?xml version="1.0" encoding="utf-8"?>
-<?mso-contentType ?>
-<FormTemplates xmlns="http://schemas.microsoft.com/sharepoint/v3/contenttype/forms">
-  <Display>DocumentLibraryForm</Display>
-  <Edit>DocumentLibraryForm</Edit>
-  <New>DocumentLibraryForm</New>
-</FormTemplates>
+<p:properties xmlns:p="http://schemas.microsoft.com/office/2006/metadata/properties" xmlns:xsi="http://www.w3.org/2001/XMLSchema-instance" xmlns:pc="http://schemas.microsoft.com/office/infopath/2007/PartnerControls">
+  <documentManagement>
+    <_ip_UnifiedCompliancePolicyUIAction xmlns="http://schemas.microsoft.com/sharepoint/v3" xsi:nil="true"/>
+    <Image xmlns="71af3243-3dd4-4a8d-8c0d-dd76da1f02a5">
+      <Url xsi:nil="true"/>
+      <Description xsi:nil="true"/>
+    </Image>
+    <Status xmlns="71af3243-3dd4-4a8d-8c0d-dd76da1f02a5">Not started</Status>
+    <Background xmlns="71af3243-3dd4-4a8d-8c0d-dd76da1f02a5">false</Background>
+    <_ip_UnifiedCompliancePolicyProperties xmlns="http://schemas.microsoft.com/sharepoint/v3" xsi:nil="true"/>
+    <ImageTagsTaxHTField xmlns="71af3243-3dd4-4a8d-8c0d-dd76da1f02a5">
+      <Terms xmlns="http://schemas.microsoft.com/office/infopath/2007/PartnerControls"/>
+    </ImageTagsTaxHTField>
+    <TaxCatchAll xmlns="230e9df3-be65-4c73-a93b-d1236ebd677e" xsi:nil="true"/>
+    <MediaServiceKeyPoints xmlns="71af3243-3dd4-4a8d-8c0d-dd76da1f02a5" xsi:nil="true"/>
+  </documentManagement>
+</p:properties>
 </file>
 
 <file path=customXml/item2.xml><?xml version="1.0" encoding="utf-8"?>
@@ -17611,29 +17709,29 @@
 </file>
 
 <file path=customXml/item3.xml><?xml version="1.0" encoding="utf-8"?>
-<p:properties xmlns:p="http://schemas.microsoft.com/office/2006/metadata/properties" xmlns:xsi="http://www.w3.org/2001/XMLSchema-instance" xmlns:pc="http://schemas.microsoft.com/office/infopath/2007/PartnerControls">
-  <documentManagement>
-    <_ip_UnifiedCompliancePolicyUIAction xmlns="http://schemas.microsoft.com/sharepoint/v3" xsi:nil="true"/>
-    <Image xmlns="71af3243-3dd4-4a8d-8c0d-dd76da1f02a5">
-      <Url xsi:nil="true"/>
-      <Description xsi:nil="true"/>
-    </Image>
-    <Status xmlns="71af3243-3dd4-4a8d-8c0d-dd76da1f02a5">Not started</Status>
-    <Background xmlns="71af3243-3dd4-4a8d-8c0d-dd76da1f02a5">false</Background>
-    <_ip_UnifiedCompliancePolicyProperties xmlns="http://schemas.microsoft.com/sharepoint/v3" xsi:nil="true"/>
-    <ImageTagsTaxHTField xmlns="71af3243-3dd4-4a8d-8c0d-dd76da1f02a5">
-      <Terms xmlns="http://schemas.microsoft.com/office/infopath/2007/PartnerControls"/>
-    </ImageTagsTaxHTField>
-    <TaxCatchAll xmlns="230e9df3-be65-4c73-a93b-d1236ebd677e" xsi:nil="true"/>
-    <MediaServiceKeyPoints xmlns="71af3243-3dd4-4a8d-8c0d-dd76da1f02a5" xsi:nil="true"/>
-  </documentManagement>
-</p:properties>
+<?mso-contentType ?>
+<FormTemplates xmlns="http://schemas.microsoft.com/sharepoint/v3/contenttype/forms">
+  <Display>DocumentLibraryForm</Display>
+  <Edit>DocumentLibraryForm</Edit>
+  <New>DocumentLibraryForm</New>
+</FormTemplates>
 </file>
 
 <file path=customXml/itemProps1.xml><?xml version="1.0" encoding="utf-8"?>
-<ds:datastoreItem xmlns:ds="http://schemas.openxmlformats.org/officeDocument/2006/customXml" ds:itemID="{98BD8C90-A3BA-4A7A-B350-4B9A0D6525A4}">
+<ds:datastoreItem xmlns:ds="http://schemas.openxmlformats.org/officeDocument/2006/customXml" ds:itemID="{C4275B5A-7993-4B5E-9459-F514F3EBE15D}">
   <ds:schemaRefs>
-    <ds:schemaRef ds:uri="http://schemas.microsoft.com/sharepoint/v3/contenttype/forms"/>
+    <ds:schemaRef ds:uri="http://purl.org/dc/dcmitype/"/>
+    <ds:schemaRef ds:uri="http://schemas.microsoft.com/office/2006/documentManagement/types"/>
+    <ds:schemaRef ds:uri="http://purl.org/dc/elements/1.1/"/>
+    <ds:schemaRef ds:uri="230e9df3-be65-4c73-a93b-d1236ebd677e"/>
+    <ds:schemaRef ds:uri="http://schemas.microsoft.com/office/infopath/2007/PartnerControls"/>
+    <ds:schemaRef ds:uri="16c05727-aa75-4e4a-9b5f-8a80a1165891"/>
+    <ds:schemaRef ds:uri="http://schemas.microsoft.com/office/2006/metadata/properties"/>
+    <ds:schemaRef ds:uri="http://schemas.openxmlformats.org/package/2006/metadata/core-properties"/>
+    <ds:schemaRef ds:uri="71af3243-3dd4-4a8d-8c0d-dd76da1f02a5"/>
+    <ds:schemaRef ds:uri="http://schemas.microsoft.com/sharepoint/v3"/>
+    <ds:schemaRef ds:uri="http://www.w3.org/XML/1998/namespace"/>
+    <ds:schemaRef ds:uri="http://purl.org/dc/terms/"/>
   </ds:schemaRefs>
 </ds:datastoreItem>
 </file>
@@ -17660,20 +17758,9 @@
 </file>
 
 <file path=customXml/itemProps3.xml><?xml version="1.0" encoding="utf-8"?>
-<ds:datastoreItem xmlns:ds="http://schemas.openxmlformats.org/officeDocument/2006/customXml" ds:itemID="{C4275B5A-7993-4B5E-9459-F514F3EBE15D}">
+<ds:datastoreItem xmlns:ds="http://schemas.openxmlformats.org/officeDocument/2006/customXml" ds:itemID="{98BD8C90-A3BA-4A7A-B350-4B9A0D6525A4}">
   <ds:schemaRefs>
-    <ds:schemaRef ds:uri="http://purl.org/dc/dcmitype/"/>
-    <ds:schemaRef ds:uri="http://schemas.microsoft.com/office/2006/documentManagement/types"/>
-    <ds:schemaRef ds:uri="http://purl.org/dc/elements/1.1/"/>
-    <ds:schemaRef ds:uri="230e9df3-be65-4c73-a93b-d1236ebd677e"/>
-    <ds:schemaRef ds:uri="http://schemas.microsoft.com/office/infopath/2007/PartnerControls"/>
-    <ds:schemaRef ds:uri="16c05727-aa75-4e4a-9b5f-8a80a1165891"/>
-    <ds:schemaRef ds:uri="http://schemas.microsoft.com/office/2006/metadata/properties"/>
-    <ds:schemaRef ds:uri="http://schemas.openxmlformats.org/package/2006/metadata/core-properties"/>
-    <ds:schemaRef ds:uri="71af3243-3dd4-4a8d-8c0d-dd76da1f02a5"/>
-    <ds:schemaRef ds:uri="http://schemas.microsoft.com/sharepoint/v3"/>
-    <ds:schemaRef ds:uri="http://www.w3.org/XML/1998/namespace"/>
-    <ds:schemaRef ds:uri="http://purl.org/dc/terms/"/>
+    <ds:schemaRef ds:uri="http://schemas.microsoft.com/sharepoint/v3/contenttype/forms"/>
   </ds:schemaRefs>
 </ds:datastoreItem>
 </file>

--- a/PPT_370_EmergingTechnologies.pptx
+++ b/PPT_370_EmergingTechnologies.pptx
@@ -5,10 +5,10 @@
     <p:sldMasterId id="2147483660" r:id="rId4"/>
   </p:sldMasterIdLst>
   <p:notesMasterIdLst>
-    <p:notesMasterId r:id="rId18"/>
+    <p:notesMasterId r:id="rId16"/>
   </p:notesMasterIdLst>
   <p:handoutMasterIdLst>
-    <p:handoutMasterId r:id="rId19"/>
+    <p:handoutMasterId r:id="rId17"/>
   </p:handoutMasterIdLst>
   <p:sldIdLst>
     <p:sldId id="264" r:id="rId5"/>
@@ -20,10 +20,8 @@
     <p:sldId id="286" r:id="rId11"/>
     <p:sldId id="304" r:id="rId12"/>
     <p:sldId id="303" r:id="rId13"/>
-    <p:sldId id="305" r:id="rId14"/>
-    <p:sldId id="295" r:id="rId15"/>
-    <p:sldId id="294" r:id="rId16"/>
-    <p:sldId id="298" r:id="rId17"/>
+    <p:sldId id="294" r:id="rId14"/>
+    <p:sldId id="298" r:id="rId15"/>
   </p:sldIdLst>
   <p:sldSz cx="12188825" cy="6858000"/>
   <p:notesSz cx="6858000" cy="9144000"/>
@@ -158,7 +156,7 @@
 <file path=ppt/revisionInfo.xml><?xml version="1.0" encoding="utf-8"?>
 <p1510:revInfo xmlns:a="http://schemas.openxmlformats.org/drawingml/2006/main" xmlns:r="http://schemas.openxmlformats.org/officeDocument/2006/relationships" xmlns:p1510="http://schemas.microsoft.com/office/powerpoint/2015/10/main">
   <p1510:revLst>
-    <p1510:client id="{C839E10A-5450-46C1-8B96-290942955DEC}" v="51" dt="2026-09-17T07:56:03.594"/>
+    <p1510:client id="{C839E10A-5450-46C1-8B96-290942955DEC}" v="117" dt="2026-09-19T16:16:03.149"/>
   </p1510:revLst>
 </p1510:revInfo>
 </file>
@@ -167,13 +165,13 @@
 <pc:chgInfo xmlns:a="http://schemas.openxmlformats.org/drawingml/2006/main" xmlns:r="http://schemas.openxmlformats.org/officeDocument/2006/relationships" xmlns:ac="http://schemas.microsoft.com/office/drawing/2013/main/command" xmlns:pc="http://schemas.microsoft.com/office/powerpoint/2013/main/command">
   <pc:docChgLst>
     <pc:chgData name="Shreena Solia" userId="ce99177b26c586f9" providerId="LiveId" clId="{1F1047B7-353E-4D5F-BD1C-2AC2A6DBBBA4}"/>
-    <pc:docChg chg="custSel addSld delSld modSld sldOrd modMainMaster">
-      <pc:chgData name="Shreena Solia" userId="ce99177b26c586f9" providerId="LiveId" clId="{1F1047B7-353E-4D5F-BD1C-2AC2A6DBBBA4}" dt="2026-09-17T07:56:03.593" v="480"/>
+    <pc:docChg chg="undo custSel addSld delSld modSld sldOrd modMainMaster">
+      <pc:chgData name="Shreena Solia" userId="ce99177b26c586f9" providerId="LiveId" clId="{1F1047B7-353E-4D5F-BD1C-2AC2A6DBBBA4}" dt="2026-09-19T16:16:03.149" v="596"/>
       <pc:docMkLst>
         <pc:docMk/>
       </pc:docMkLst>
-      <pc:sldChg chg="addSp delSp modSp mod modTransition">
-        <pc:chgData name="Shreena Solia" userId="ce99177b26c586f9" providerId="LiveId" clId="{1F1047B7-353E-4D5F-BD1C-2AC2A6DBBBA4}" dt="2026-09-17T07:56:03.593" v="480"/>
+      <pc:sldChg chg="addSp delSp modSp mod modTransition modAnim">
+        <pc:chgData name="Shreena Solia" userId="ce99177b26c586f9" providerId="LiveId" clId="{1F1047B7-353E-4D5F-BD1C-2AC2A6DBBBA4}" dt="2026-09-19T16:15:23.828" v="588"/>
         <pc:sldMkLst>
           <pc:docMk/>
           <pc:sldMk cId="1593920805" sldId="262"/>
@@ -203,8 +201,8 @@
           </ac:picMkLst>
         </pc:picChg>
       </pc:sldChg>
-      <pc:sldChg chg="modSp mod modTransition">
-        <pc:chgData name="Shreena Solia" userId="ce99177b26c586f9" providerId="LiveId" clId="{1F1047B7-353E-4D5F-BD1C-2AC2A6DBBBA4}" dt="2026-09-17T07:56:03.593" v="480"/>
+      <pc:sldChg chg="modSp mod modTransition modAnim">
+        <pc:chgData name="Shreena Solia" userId="ce99177b26c586f9" providerId="LiveId" clId="{1F1047B7-353E-4D5F-BD1C-2AC2A6DBBBA4}" dt="2026-09-19T16:13:57.031" v="582"/>
         <pc:sldMkLst>
           <pc:docMk/>
           <pc:sldMk cId="3650340329" sldId="264"/>
@@ -218,8 +216,8 @@
           </ac:spMkLst>
         </pc:spChg>
       </pc:sldChg>
-      <pc:sldChg chg="modSp mod modTransition">
-        <pc:chgData name="Shreena Solia" userId="ce99177b26c586f9" providerId="LiveId" clId="{1F1047B7-353E-4D5F-BD1C-2AC2A6DBBBA4}" dt="2026-09-17T07:56:03.593" v="480"/>
+      <pc:sldChg chg="modSp mod modTransition modAnim">
+        <pc:chgData name="Shreena Solia" userId="ce99177b26c586f9" providerId="LiveId" clId="{1F1047B7-353E-4D5F-BD1C-2AC2A6DBBBA4}" dt="2026-09-19T16:14:06.435" v="583"/>
         <pc:sldMkLst>
           <pc:docMk/>
           <pc:sldMk cId="920173932" sldId="275"/>
@@ -241,8 +239,8 @@
           </ac:spMkLst>
         </pc:spChg>
       </pc:sldChg>
-      <pc:sldChg chg="addSp delSp modSp mod modTransition">
-        <pc:chgData name="Shreena Solia" userId="ce99177b26c586f9" providerId="LiveId" clId="{1F1047B7-353E-4D5F-BD1C-2AC2A6DBBBA4}" dt="2026-09-17T07:56:03.593" v="480"/>
+      <pc:sldChg chg="addSp delSp modSp mod modTransition modAnim">
+        <pc:chgData name="Shreena Solia" userId="ce99177b26c586f9" providerId="LiveId" clId="{1F1047B7-353E-4D5F-BD1C-2AC2A6DBBBA4}" dt="2026-09-19T16:13:49.166" v="581"/>
         <pc:sldMkLst>
           <pc:docMk/>
           <pc:sldMk cId="2243494996" sldId="277"/>
@@ -272,14 +270,14 @@
           </ac:picMkLst>
         </pc:picChg>
       </pc:sldChg>
-      <pc:sldChg chg="modSp mod modTransition">
-        <pc:chgData name="Shreena Solia" userId="ce99177b26c586f9" providerId="LiveId" clId="{1F1047B7-353E-4D5F-BD1C-2AC2A6DBBBA4}" dt="2026-09-17T07:56:03.593" v="480"/>
+      <pc:sldChg chg="addSp modSp mod modTransition modAnim">
+        <pc:chgData name="Shreena Solia" userId="ce99177b26c586f9" providerId="LiveId" clId="{1F1047B7-353E-4D5F-BD1C-2AC2A6DBBBA4}" dt="2026-09-19T16:15:41.331" v="591"/>
         <pc:sldMkLst>
           <pc:docMk/>
           <pc:sldMk cId="4151694508" sldId="286"/>
         </pc:sldMkLst>
         <pc:spChg chg="mod">
-          <ac:chgData name="Shreena Solia" userId="ce99177b26c586f9" providerId="LiveId" clId="{1F1047B7-353E-4D5F-BD1C-2AC2A6DBBBA4}" dt="2026-09-01T09:48:37.784" v="448" actId="6549"/>
+          <ac:chgData name="Shreena Solia" userId="ce99177b26c586f9" providerId="LiveId" clId="{1F1047B7-353E-4D5F-BD1C-2AC2A6DBBBA4}" dt="2026-09-19T15:45:26.608" v="481"/>
           <ac:spMkLst>
             <pc:docMk/>
             <pc:sldMk cId="4151694508" sldId="286"/>
@@ -287,7 +285,7 @@
           </ac:spMkLst>
         </pc:spChg>
         <pc:spChg chg="mod">
-          <ac:chgData name="Shreena Solia" userId="ce99177b26c586f9" providerId="LiveId" clId="{1F1047B7-353E-4D5F-BD1C-2AC2A6DBBBA4}" dt="2026-09-01T09:48:40.824" v="449" actId="6549"/>
+          <ac:chgData name="Shreena Solia" userId="ce99177b26c586f9" providerId="LiveId" clId="{1F1047B7-353E-4D5F-BD1C-2AC2A6DBBBA4}" dt="2026-09-19T15:46:53.789" v="493" actId="12"/>
           <ac:spMkLst>
             <pc:docMk/>
             <pc:sldMk cId="4151694508" sldId="286"/>
@@ -295,16 +293,24 @@
           </ac:spMkLst>
         </pc:spChg>
         <pc:spChg chg="mod">
-          <ac:chgData name="Shreena Solia" userId="ce99177b26c586f9" providerId="LiveId" clId="{1F1047B7-353E-4D5F-BD1C-2AC2A6DBBBA4}" dt="2026-09-01T09:48:42.800" v="450" actId="6549"/>
+          <ac:chgData name="Shreena Solia" userId="ce99177b26c586f9" providerId="LiveId" clId="{1F1047B7-353E-4D5F-BD1C-2AC2A6DBBBA4}" dt="2026-09-19T15:48:14.757" v="497" actId="5793"/>
           <ac:spMkLst>
             <pc:docMk/>
             <pc:sldMk cId="4151694508" sldId="286"/>
             <ac:spMk id="11" creationId="{F60EB7D1-7CD7-C7FC-356C-5B772F1FDC30}"/>
           </ac:spMkLst>
         </pc:spChg>
+        <pc:picChg chg="add mod">
+          <ac:chgData name="Shreena Solia" userId="ce99177b26c586f9" providerId="LiveId" clId="{1F1047B7-353E-4D5F-BD1C-2AC2A6DBBBA4}" dt="2026-09-19T15:49:31.153" v="504" actId="1076"/>
+          <ac:picMkLst>
+            <pc:docMk/>
+            <pc:sldMk cId="4151694508" sldId="286"/>
+            <ac:picMk id="2" creationId="{AE9D156C-FA4E-689B-4071-33F00D3C35AB}"/>
+          </ac:picMkLst>
+        </pc:picChg>
       </pc:sldChg>
-      <pc:sldChg chg="addSp delSp modSp mod modTransition">
-        <pc:chgData name="Shreena Solia" userId="ce99177b26c586f9" providerId="LiveId" clId="{1F1047B7-353E-4D5F-BD1C-2AC2A6DBBBA4}" dt="2026-09-17T07:56:03.593" v="480"/>
+      <pc:sldChg chg="addSp delSp modSp mod modTransition modAnim">
+        <pc:chgData name="Shreena Solia" userId="ce99177b26c586f9" providerId="LiveId" clId="{1F1047B7-353E-4D5F-BD1C-2AC2A6DBBBA4}" dt="2026-09-19T16:15:00.032" v="586"/>
         <pc:sldMkLst>
           <pc:docMk/>
           <pc:sldMk cId="1472106130" sldId="288"/>
@@ -326,8 +332,8 @@
           </ac:spMkLst>
         </pc:spChg>
       </pc:sldChg>
-      <pc:sldChg chg="addSp modSp mod modTransition">
-        <pc:chgData name="Shreena Solia" userId="ce99177b26c586f9" providerId="LiveId" clId="{1F1047B7-353E-4D5F-BD1C-2AC2A6DBBBA4}" dt="2026-09-17T07:56:03.593" v="480"/>
+      <pc:sldChg chg="addSp modSp mod modTransition modAnim">
+        <pc:chgData name="Shreena Solia" userId="ce99177b26c586f9" providerId="LiveId" clId="{1F1047B7-353E-4D5F-BD1C-2AC2A6DBBBA4}" dt="2026-09-19T16:14:35.901" v="585"/>
         <pc:sldMkLst>
           <pc:docMk/>
           <pc:sldMk cId="2436493926" sldId="293"/>
@@ -357,14 +363,14 @@
           </ac:picMkLst>
         </pc:picChg>
       </pc:sldChg>
-      <pc:sldChg chg="modSp mod modTransition">
-        <pc:chgData name="Shreena Solia" userId="ce99177b26c586f9" providerId="LiveId" clId="{1F1047B7-353E-4D5F-BD1C-2AC2A6DBBBA4}" dt="2026-09-17T07:56:03.593" v="480"/>
+      <pc:sldChg chg="modSp mod modTransition modAnim">
+        <pc:chgData name="Shreena Solia" userId="ce99177b26c586f9" providerId="LiveId" clId="{1F1047B7-353E-4D5F-BD1C-2AC2A6DBBBA4}" dt="2026-09-19T16:16:03.149" v="596"/>
         <pc:sldMkLst>
           <pc:docMk/>
           <pc:sldMk cId="2578554952" sldId="294"/>
         </pc:sldMkLst>
         <pc:spChg chg="mod">
-          <ac:chgData name="Shreena Solia" userId="ce99177b26c586f9" providerId="LiveId" clId="{1F1047B7-353E-4D5F-BD1C-2AC2A6DBBBA4}" dt="2026-09-01T09:50:56.658" v="471" actId="6549"/>
+          <ac:chgData name="Shreena Solia" userId="ce99177b26c586f9" providerId="LiveId" clId="{1F1047B7-353E-4D5F-BD1C-2AC2A6DBBBA4}" dt="2026-09-19T16:01:42.014" v="530" actId="14100"/>
           <ac:spMkLst>
             <pc:docMk/>
             <pc:sldMk cId="2578554952" sldId="294"/>
@@ -372,7 +378,7 @@
           </ac:spMkLst>
         </pc:spChg>
         <pc:spChg chg="mod">
-          <ac:chgData name="Shreena Solia" userId="ce99177b26c586f9" providerId="LiveId" clId="{1F1047B7-353E-4D5F-BD1C-2AC2A6DBBBA4}" dt="2026-09-01T09:51:00.130" v="472" actId="6549"/>
+          <ac:chgData name="Shreena Solia" userId="ce99177b26c586f9" providerId="LiveId" clId="{1F1047B7-353E-4D5F-BD1C-2AC2A6DBBBA4}" dt="2026-09-19T16:02:30.492" v="538" actId="27636"/>
           <ac:spMkLst>
             <pc:docMk/>
             <pc:sldMk cId="2578554952" sldId="294"/>
@@ -380,7 +386,7 @@
           </ac:spMkLst>
         </pc:spChg>
         <pc:spChg chg="mod">
-          <ac:chgData name="Shreena Solia" userId="ce99177b26c586f9" providerId="LiveId" clId="{1F1047B7-353E-4D5F-BD1C-2AC2A6DBBBA4}" dt="2026-09-01T09:51:02.294" v="474" actId="27636"/>
+          <ac:chgData name="Shreena Solia" userId="ce99177b26c586f9" providerId="LiveId" clId="{1F1047B7-353E-4D5F-BD1C-2AC2A6DBBBA4}" dt="2026-09-19T16:02:20.913" v="536" actId="27636"/>
           <ac:spMkLst>
             <pc:docMk/>
             <pc:sldMk cId="2578554952" sldId="294"/>
@@ -388,52 +394,36 @@
           </ac:spMkLst>
         </pc:spChg>
       </pc:sldChg>
-      <pc:sldChg chg="addSp delSp modSp mod modTransition">
-        <pc:chgData name="Shreena Solia" userId="ce99177b26c586f9" providerId="LiveId" clId="{1F1047B7-353E-4D5F-BD1C-2AC2A6DBBBA4}" dt="2026-09-17T07:56:03.593" v="480"/>
+      <pc:sldChg chg="addSp delSp modSp del mod modTransition">
+        <pc:chgData name="Shreena Solia" userId="ce99177b26c586f9" providerId="LiveId" clId="{1F1047B7-353E-4D5F-BD1C-2AC2A6DBBBA4}" dt="2026-09-19T16:01:20.571" v="528" actId="47"/>
         <pc:sldMkLst>
           <pc:docMk/>
           <pc:sldMk cId="3830685312" sldId="295"/>
         </pc:sldMkLst>
-        <pc:spChg chg="mod">
-          <ac:chgData name="Shreena Solia" userId="ce99177b26c586f9" providerId="LiveId" clId="{1F1047B7-353E-4D5F-BD1C-2AC2A6DBBBA4}" dt="2026-09-01T09:50:39.914" v="466" actId="20577"/>
-          <ac:spMkLst>
-            <pc:docMk/>
-            <pc:sldMk cId="3830685312" sldId="295"/>
-            <ac:spMk id="4" creationId="{FAD2AE59-5630-4D5C-83A9-4CDEF4D7DCFB}"/>
-          </ac:spMkLst>
-        </pc:spChg>
-        <pc:spChg chg="add mod">
-          <ac:chgData name="Shreena Solia" userId="ce99177b26c586f9" providerId="LiveId" clId="{1F1047B7-353E-4D5F-BD1C-2AC2A6DBBBA4}" dt="2026-09-01T09:50:47.158" v="469" actId="478"/>
-          <ac:spMkLst>
-            <pc:docMk/>
-            <pc:sldMk cId="3830685312" sldId="295"/>
-            <ac:spMk id="5" creationId="{F6A39EBF-3A5E-8022-1419-E37CB281B09A}"/>
-          </ac:spMkLst>
-        </pc:spChg>
-        <pc:spChg chg="mod">
-          <ac:chgData name="Shreena Solia" userId="ce99177b26c586f9" providerId="LiveId" clId="{1F1047B7-353E-4D5F-BD1C-2AC2A6DBBBA4}" dt="2026-09-01T09:50:42.073" v="467" actId="20577"/>
-          <ac:spMkLst>
-            <pc:docMk/>
-            <pc:sldMk cId="3830685312" sldId="295"/>
-            <ac:spMk id="6" creationId="{5A6B31B0-7B84-475D-961F-09C0191F91A2}"/>
-          </ac:spMkLst>
-        </pc:spChg>
       </pc:sldChg>
-      <pc:sldChg chg="modTransition">
-        <pc:chgData name="Shreena Solia" userId="ce99177b26c586f9" providerId="LiveId" clId="{1F1047B7-353E-4D5F-BD1C-2AC2A6DBBBA4}" dt="2026-09-17T07:56:03.593" v="480"/>
+      <pc:sldChg chg="modSp mod modTransition modAnim">
+        <pc:chgData name="Shreena Solia" userId="ce99177b26c586f9" providerId="LiveId" clId="{1F1047B7-353E-4D5F-BD1C-2AC2A6DBBBA4}" dt="2026-09-19T16:08:01.688" v="577"/>
         <pc:sldMkLst>
           <pc:docMk/>
           <pc:sldMk cId="1711019939" sldId="298"/>
         </pc:sldMkLst>
+        <pc:spChg chg="mod">
+          <ac:chgData name="Shreena Solia" userId="ce99177b26c586f9" providerId="LiveId" clId="{1F1047B7-353E-4D5F-BD1C-2AC2A6DBBBA4}" dt="2026-09-19T16:07:52.929" v="576" actId="255"/>
+          <ac:spMkLst>
+            <pc:docMk/>
+            <pc:sldMk cId="1711019939" sldId="298"/>
+            <ac:spMk id="2" creationId="{BCCAEE93-8585-46D4-A7EC-F184E317CB2E}"/>
+          </ac:spMkLst>
+        </pc:spChg>
       </pc:sldChg>
-      <pc:sldChg chg="modSp add mod ord modTransition">
-        <pc:chgData name="Shreena Solia" userId="ce99177b26c586f9" providerId="LiveId" clId="{1F1047B7-353E-4D5F-BD1C-2AC2A6DBBBA4}" dt="2026-09-17T07:56:03.593" v="480"/>
+      <pc:sldChg chg="modSp add mod ord modTransition modAnim">
+        <pc:chgData name="Shreena Solia" userId="ce99177b26c586f9" providerId="LiveId" clId="{1F1047B7-353E-4D5F-BD1C-2AC2A6DBBBA4}" dt="2026-09-19T16:15:54.928" v="594"/>
         <pc:sldMkLst>
           <pc:docMk/>
           <pc:sldMk cId="1120807269" sldId="303"/>
         </pc:sldMkLst>
         <pc:spChg chg="mod">
-          <ac:chgData name="Shreena Solia" userId="ce99177b26c586f9" providerId="LiveId" clId="{1F1047B7-353E-4D5F-BD1C-2AC2A6DBBBA4}" dt="2026-09-01T09:50:04.330" v="456" actId="6549"/>
+          <ac:chgData name="Shreena Solia" userId="ce99177b26c586f9" providerId="LiveId" clId="{1F1047B7-353E-4D5F-BD1C-2AC2A6DBBBA4}" dt="2026-09-19T15:55:53.350" v="517" actId="1076"/>
           <ac:spMkLst>
             <pc:docMk/>
             <pc:sldMk cId="1120807269" sldId="303"/>
@@ -441,7 +431,7 @@
           </ac:spMkLst>
         </pc:spChg>
         <pc:spChg chg="mod">
-          <ac:chgData name="Shreena Solia" userId="ce99177b26c586f9" providerId="LiveId" clId="{1F1047B7-353E-4D5F-BD1C-2AC2A6DBBBA4}" dt="2026-09-01T09:50:12.202" v="460" actId="6549"/>
+          <ac:chgData name="Shreena Solia" userId="ce99177b26c586f9" providerId="LiveId" clId="{1F1047B7-353E-4D5F-BD1C-2AC2A6DBBBA4}" dt="2026-09-19T15:57:03.599" v="526" actId="27636"/>
           <ac:spMkLst>
             <pc:docMk/>
             <pc:sldMk cId="1120807269" sldId="303"/>
@@ -449,14 +439,14 @@
           </ac:spMkLst>
         </pc:spChg>
       </pc:sldChg>
-      <pc:sldChg chg="addSp delSp modSp add mod ord modTransition">
-        <pc:chgData name="Shreena Solia" userId="ce99177b26c586f9" providerId="LiveId" clId="{1F1047B7-353E-4D5F-BD1C-2AC2A6DBBBA4}" dt="2026-09-17T07:56:03.593" v="480"/>
+      <pc:sldChg chg="addSp delSp modSp add mod ord modTransition modAnim">
+        <pc:chgData name="Shreena Solia" userId="ce99177b26c586f9" providerId="LiveId" clId="{1F1047B7-353E-4D5F-BD1C-2AC2A6DBBBA4}" dt="2026-09-19T16:15:49.918" v="593"/>
         <pc:sldMkLst>
           <pc:docMk/>
           <pc:sldMk cId="1034298867" sldId="304"/>
         </pc:sldMkLst>
         <pc:spChg chg="mod">
-          <ac:chgData name="Shreena Solia" userId="ce99177b26c586f9" providerId="LiveId" clId="{1F1047B7-353E-4D5F-BD1C-2AC2A6DBBBA4}" dt="2026-09-01T09:48:48.045" v="451" actId="6549"/>
+          <ac:chgData name="Shreena Solia" userId="ce99177b26c586f9" providerId="LiveId" clId="{1F1047B7-353E-4D5F-BD1C-2AC2A6DBBBA4}" dt="2026-09-19T15:49:55.436" v="505"/>
           <ac:spMkLst>
             <pc:docMk/>
             <pc:sldMk cId="1034298867" sldId="304"/>
@@ -464,7 +454,7 @@
           </ac:spMkLst>
         </pc:spChg>
         <pc:spChg chg="mod">
-          <ac:chgData name="Shreena Solia" userId="ce99177b26c586f9" providerId="LiveId" clId="{1F1047B7-353E-4D5F-BD1C-2AC2A6DBBBA4}" dt="2026-09-01T09:48:50.182" v="452" actId="6549"/>
+          <ac:chgData name="Shreena Solia" userId="ce99177b26c586f9" providerId="LiveId" clId="{1F1047B7-353E-4D5F-BD1C-2AC2A6DBBBA4}" dt="2026-09-19T15:50:13.434" v="510" actId="5793"/>
           <ac:spMkLst>
             <pc:docMk/>
             <pc:sldMk cId="1034298867" sldId="304"/>
@@ -472,7 +462,7 @@
           </ac:spMkLst>
         </pc:spChg>
         <pc:spChg chg="add mod">
-          <ac:chgData name="Shreena Solia" userId="ce99177b26c586f9" providerId="LiveId" clId="{1F1047B7-353E-4D5F-BD1C-2AC2A6DBBBA4}" dt="2026-09-01T09:48:57.575" v="453" actId="478"/>
+          <ac:chgData name="Shreena Solia" userId="ce99177b26c586f9" providerId="LiveId" clId="{1F1047B7-353E-4D5F-BD1C-2AC2A6DBBBA4}" dt="2026-09-19T15:50:56.761" v="514" actId="12"/>
           <ac:spMkLst>
             <pc:docMk/>
             <pc:sldMk cId="1034298867" sldId="304"/>
@@ -480,28 +470,43 @@
           </ac:spMkLst>
         </pc:spChg>
       </pc:sldChg>
-      <pc:sldChg chg="addSp delSp modSp add mod ord modTransition">
-        <pc:chgData name="Shreena Solia" userId="ce99177b26c586f9" providerId="LiveId" clId="{1F1047B7-353E-4D5F-BD1C-2AC2A6DBBBA4}" dt="2026-09-17T07:56:03.593" v="480"/>
+      <pc:sldChg chg="modSp add del mod ord">
+        <pc:chgData name="Shreena Solia" userId="ce99177b26c586f9" providerId="LiveId" clId="{1F1047B7-353E-4D5F-BD1C-2AC2A6DBBBA4}" dt="2026-09-19T16:04:10.384" v="546" actId="2696"/>
+        <pc:sldMkLst>
+          <pc:docMk/>
+          <pc:sldMk cId="1288060857" sldId="305"/>
+        </pc:sldMkLst>
+        <pc:spChg chg="mod">
+          <ac:chgData name="Shreena Solia" userId="ce99177b26c586f9" providerId="LiveId" clId="{1F1047B7-353E-4D5F-BD1C-2AC2A6DBBBA4}" dt="2026-09-19T16:04:01.926" v="545" actId="6549"/>
+          <ac:spMkLst>
+            <pc:docMk/>
+            <pc:sldMk cId="1288060857" sldId="305"/>
+            <ac:spMk id="2" creationId="{15BD44B4-DC95-7E34-5179-A67BADCD51DF}"/>
+          </ac:spMkLst>
+        </pc:spChg>
+        <pc:spChg chg="mod">
+          <ac:chgData name="Shreena Solia" userId="ce99177b26c586f9" providerId="LiveId" clId="{1F1047B7-353E-4D5F-BD1C-2AC2A6DBBBA4}" dt="2026-09-19T16:02:58.275" v="543" actId="27636"/>
+          <ac:spMkLst>
+            <pc:docMk/>
+            <pc:sldMk cId="1288060857" sldId="305"/>
+            <ac:spMk id="4" creationId="{862F9C79-8297-AC0B-AAA2-BEFF9A9CD16F}"/>
+          </ac:spMkLst>
+        </pc:spChg>
+        <pc:spChg chg="mod">
+          <ac:chgData name="Shreena Solia" userId="ce99177b26c586f9" providerId="LiveId" clId="{1F1047B7-353E-4D5F-BD1C-2AC2A6DBBBA4}" dt="2026-09-19T16:03:01.643" v="544" actId="6549"/>
+          <ac:spMkLst>
+            <pc:docMk/>
+            <pc:sldMk cId="1288060857" sldId="305"/>
+            <ac:spMk id="6" creationId="{166623A9-CBB5-5220-FB35-083C6EA58236}"/>
+          </ac:spMkLst>
+        </pc:spChg>
+      </pc:sldChg>
+      <pc:sldChg chg="addSp delSp modSp add del mod ord modTransition">
+        <pc:chgData name="Shreena Solia" userId="ce99177b26c586f9" providerId="LiveId" clId="{1F1047B7-353E-4D5F-BD1C-2AC2A6DBBBA4}" dt="2026-09-19T16:00:57.066" v="527" actId="47"/>
         <pc:sldMkLst>
           <pc:docMk/>
           <pc:sldMk cId="1800142194" sldId="305"/>
         </pc:sldMkLst>
-        <pc:spChg chg="add mod">
-          <ac:chgData name="Shreena Solia" userId="ce99177b26c586f9" providerId="LiveId" clId="{1F1047B7-353E-4D5F-BD1C-2AC2A6DBBBA4}" dt="2026-09-01T09:50:26.640" v="463" actId="478"/>
-          <ac:spMkLst>
-            <pc:docMk/>
-            <pc:sldMk cId="1800142194" sldId="305"/>
-            <ac:spMk id="4" creationId="{28AD9FB9-3144-1113-B327-7B522AFAB258}"/>
-          </ac:spMkLst>
-        </pc:spChg>
-        <pc:spChg chg="add mod">
-          <ac:chgData name="Shreena Solia" userId="ce99177b26c586f9" providerId="LiveId" clId="{1F1047B7-353E-4D5F-BD1C-2AC2A6DBBBA4}" dt="2026-09-01T09:50:26.640" v="463" actId="478"/>
-          <ac:spMkLst>
-            <pc:docMk/>
-            <pc:sldMk cId="1800142194" sldId="305"/>
-            <ac:spMk id="6" creationId="{4EC5940D-2553-0022-B5BF-B93CC11A234C}"/>
-          </ac:spMkLst>
-        </pc:spChg>
       </pc:sldChg>
       <pc:sldMasterChg chg="modTransition modSldLayout">
         <pc:chgData name="Shreena Solia" userId="ce99177b26c586f9" providerId="LiveId" clId="{1F1047B7-353E-4D5F-BD1C-2AC2A6DBBBA4}" dt="2026-09-17T07:56:03.593" v="480"/>
@@ -709,7 +714,7 @@
                   <a:schemeClr val="tx2"/>
                 </a:solidFill>
               </a:rPr>
-              <a:t>9/17/2026</a:t>
+              <a:t>9/19/2026</a:t>
             </a:fld>
             <a:endParaRPr dirty="0">
               <a:solidFill>
@@ -899,7 +904,7 @@
             <a:fld id="{F95CF31C-F757-429C-A789-86504F04C3BE}" type="datetimeFigureOut">
               <a:rPr lang="en-US"/>
               <a:pPr/>
-              <a:t>9/17/2026</a:t>
+              <a:t>9/19/2026</a:t>
             </a:fld>
             <a:endParaRPr dirty="0"/>
           </a:p>
@@ -1260,13 +1265,7 @@
   <p:cSld>
     <p:spTree>
       <p:nvGrpSpPr>
-        <p:cNvPr id="1" name="">
-          <a:extLst>
-            <a:ext uri="{FF2B5EF4-FFF2-40B4-BE49-F238E27FC236}">
-              <a16:creationId xmlns:a16="http://schemas.microsoft.com/office/drawing/2014/main" id="{A1779024-0085-A913-A602-75A3FF5A5B72}"/>
-            </a:ext>
-          </a:extLst>
-        </p:cNvPr>
+        <p:cNvPr id="1" name=""/>
         <p:cNvGrpSpPr/>
         <p:nvPr/>
       </p:nvGrpSpPr>
@@ -1280,13 +1279,7 @@
       </p:grpSpPr>
       <p:sp>
         <p:nvSpPr>
-          <p:cNvPr id="2" name="Slide Image Placeholder 1">
-            <a:extLst>
-              <a:ext uri="{FF2B5EF4-FFF2-40B4-BE49-F238E27FC236}">
-                <a16:creationId xmlns:a16="http://schemas.microsoft.com/office/drawing/2014/main" id="{449BD0AB-DB30-AE8E-24F0-B5A76C22D886}"/>
-              </a:ext>
-            </a:extLst>
-          </p:cNvPr>
+          <p:cNvPr id="2" name="Slide Image Placeholder 1"/>
           <p:cNvSpPr>
             <a:spLocks noGrp="1" noRot="1" noChangeAspect="1"/>
           </p:cNvSpPr>
@@ -1298,13 +1291,7 @@
       </p:sp>
       <p:sp>
         <p:nvSpPr>
-          <p:cNvPr id="3" name="Notes Placeholder 2">
-            <a:extLst>
-              <a:ext uri="{FF2B5EF4-FFF2-40B4-BE49-F238E27FC236}">
-                <a16:creationId xmlns:a16="http://schemas.microsoft.com/office/drawing/2014/main" id="{B0010786-1A88-2D80-031F-44FCFDE90B32}"/>
-              </a:ext>
-            </a:extLst>
-          </p:cNvPr>
+          <p:cNvPr id="3" name="Notes Placeholder 2"/>
           <p:cNvSpPr>
             <a:spLocks noGrp="1"/>
           </p:cNvSpPr>
@@ -1317,24 +1304,18 @@
           <a:bodyPr/>
           <a:lstStyle/>
           <a:p>
-            <a:endParaRPr lang="en-US" dirty="0"/>
+            <a:endParaRPr lang="en-IN" dirty="0"/>
           </a:p>
         </p:txBody>
       </p:sp>
       <p:sp>
         <p:nvSpPr>
-          <p:cNvPr id="4" name="Slide Number Placeholder 3">
-            <a:extLst>
-              <a:ext uri="{FF2B5EF4-FFF2-40B4-BE49-F238E27FC236}">
-                <a16:creationId xmlns:a16="http://schemas.microsoft.com/office/drawing/2014/main" id="{337B6FBE-0020-B031-F386-4C8CE227EE98}"/>
-              </a:ext>
-            </a:extLst>
-          </p:cNvPr>
+          <p:cNvPr id="4" name="Slide Number Placeholder 3"/>
           <p:cNvSpPr>
             <a:spLocks noGrp="1"/>
           </p:cNvSpPr>
           <p:nvPr>
-            <p:ph type="sldNum" sz="quarter" idx="10"/>
+            <p:ph type="sldNum" sz="quarter" idx="5"/>
           </p:nvPr>
         </p:nvSpPr>
         <p:spPr/>
@@ -1343,18 +1324,18 @@
           <a:lstStyle/>
           <a:p>
             <a:fld id="{B8796F01-7154-41E0-B48B-A6921757531A}" type="slidenum">
-              <a:rPr lang="en-US" smtClean="0"/>
+              <a:rPr lang="en-IN" smtClean="0"/>
               <a:pPr/>
-              <a:t>10</a:t>
+              <a:t>9</a:t>
             </a:fld>
-            <a:endParaRPr lang="en-US" dirty="0"/>
+            <a:endParaRPr lang="en-IN" dirty="0"/>
           </a:p>
         </p:txBody>
       </p:sp>
     </p:spTree>
     <p:extLst>
       <p:ext uri="{BB962C8B-B14F-4D97-AF65-F5344CB8AC3E}">
-        <p14:creationId xmlns:p14="http://schemas.microsoft.com/office/powerpoint/2010/main" val="3551919294"/>
+        <p14:creationId xmlns:p14="http://schemas.microsoft.com/office/powerpoint/2010/main" val="3078448059"/>
       </p:ext>
     </p:extLst>
   </p:cSld>
@@ -1430,7 +1411,7 @@
             <a:fld id="{B8796F01-7154-41E0-B48B-A6921757531A}" type="slidenum">
               <a:rPr lang="en-IN" smtClean="0"/>
               <a:pPr/>
-              <a:t>13</a:t>
+              <a:t>11</a:t>
             </a:fld>
             <a:endParaRPr lang="en-IN" dirty="0"/>
           </a:p>
@@ -2416,13 +2397,13 @@
   <p:clrMapOvr>
     <a:masterClrMapping/>
   </p:clrMapOvr>
-  <mc:AlternateContent xmlns:mc="http://schemas.openxmlformats.org/markup-compatibility/2006">
-    <mc:Choice xmlns:p14="http://schemas.microsoft.com/office/powerpoint/2010/main" Requires="p14">
+  <mc:AlternateContent xmlns:mc="http://schemas.openxmlformats.org/markup-compatibility/2006" xmlns:p14="http://schemas.microsoft.com/office/powerpoint/2010/main">
+    <mc:Choice Requires="p14">
       <p:transition spd="slow" p14:dur="4000">
         <p14:vortex dir="r"/>
       </p:transition>
     </mc:Choice>
-    <mc:Fallback>
+    <mc:Fallback xmlns="">
       <p:transition spd="slow">
         <p:fade/>
       </p:transition>
@@ -3369,13 +3350,13 @@
   <p:clrMapOvr>
     <a:masterClrMapping/>
   </p:clrMapOvr>
-  <mc:AlternateContent xmlns:mc="http://schemas.openxmlformats.org/markup-compatibility/2006">
-    <mc:Choice xmlns:p14="http://schemas.microsoft.com/office/powerpoint/2010/main" Requires="p14">
+  <mc:AlternateContent xmlns:mc="http://schemas.openxmlformats.org/markup-compatibility/2006" xmlns:p14="http://schemas.microsoft.com/office/powerpoint/2010/main">
+    <mc:Choice Requires="p14">
       <p:transition spd="slow" p14:dur="4000">
         <p14:vortex dir="r"/>
       </p:transition>
     </mc:Choice>
-    <mc:Fallback>
+    <mc:Fallback xmlns="">
       <p:transition spd="slow">
         <p:fade/>
       </p:transition>
@@ -4370,13 +4351,13 @@
   <p:clrMapOvr>
     <a:masterClrMapping/>
   </p:clrMapOvr>
-  <mc:AlternateContent xmlns:mc="http://schemas.openxmlformats.org/markup-compatibility/2006">
-    <mc:Choice xmlns:p14="http://schemas.microsoft.com/office/powerpoint/2010/main" Requires="p14">
+  <mc:AlternateContent xmlns:mc="http://schemas.openxmlformats.org/markup-compatibility/2006" xmlns:p14="http://schemas.microsoft.com/office/powerpoint/2010/main">
+    <mc:Choice Requires="p14">
       <p:transition spd="slow" p14:dur="4000">
         <p14:vortex dir="r"/>
       </p:transition>
     </mc:Choice>
-    <mc:Fallback>
+    <mc:Fallback xmlns="">
       <p:transition spd="slow">
         <p:fade/>
       </p:transition>
@@ -5123,13 +5104,13 @@
   <p:clrMapOvr>
     <a:masterClrMapping/>
   </p:clrMapOvr>
-  <mc:AlternateContent xmlns:mc="http://schemas.openxmlformats.org/markup-compatibility/2006">
-    <mc:Choice xmlns:p14="http://schemas.microsoft.com/office/powerpoint/2010/main" Requires="p14">
+  <mc:AlternateContent xmlns:mc="http://schemas.openxmlformats.org/markup-compatibility/2006" xmlns:p14="http://schemas.microsoft.com/office/powerpoint/2010/main">
+    <mc:Choice Requires="p14">
       <p:transition spd="slow" p14:dur="4000">
         <p14:vortex dir="r"/>
       </p:transition>
     </mc:Choice>
-    <mc:Fallback>
+    <mc:Fallback xmlns="">
       <p:transition spd="slow">
         <p:fade/>
       </p:transition>
@@ -5901,13 +5882,13 @@
   <p:clrMapOvr>
     <a:masterClrMapping/>
   </p:clrMapOvr>
-  <mc:AlternateContent xmlns:mc="http://schemas.openxmlformats.org/markup-compatibility/2006">
-    <mc:Choice xmlns:p14="http://schemas.microsoft.com/office/powerpoint/2010/main" Requires="p14">
+  <mc:AlternateContent xmlns:mc="http://schemas.openxmlformats.org/markup-compatibility/2006" xmlns:p14="http://schemas.microsoft.com/office/powerpoint/2010/main">
+    <mc:Choice Requires="p14">
       <p:transition spd="slow" p14:dur="4000">
         <p14:vortex dir="r"/>
       </p:transition>
     </mc:Choice>
-    <mc:Fallback>
+    <mc:Fallback xmlns="">
       <p:transition spd="slow">
         <p:fade/>
       </p:transition>
@@ -6916,13 +6897,13 @@
   <p:clrMapOvr>
     <a:masterClrMapping/>
   </p:clrMapOvr>
-  <mc:AlternateContent xmlns:mc="http://schemas.openxmlformats.org/markup-compatibility/2006">
-    <mc:Choice xmlns:p14="http://schemas.microsoft.com/office/powerpoint/2010/main" Requires="p14">
+  <mc:AlternateContent xmlns:mc="http://schemas.openxmlformats.org/markup-compatibility/2006" xmlns:p14="http://schemas.microsoft.com/office/powerpoint/2010/main">
+    <mc:Choice Requires="p14">
       <p:transition spd="slow" p14:dur="4000">
         <p14:vortex dir="r"/>
       </p:transition>
     </mc:Choice>
-    <mc:Fallback>
+    <mc:Fallback xmlns="">
       <p:transition spd="slow">
         <p:fade/>
       </p:transition>
@@ -7855,13 +7836,13 @@
   <p:clrMapOvr>
     <a:masterClrMapping/>
   </p:clrMapOvr>
-  <mc:AlternateContent xmlns:mc="http://schemas.openxmlformats.org/markup-compatibility/2006">
-    <mc:Choice xmlns:p14="http://schemas.microsoft.com/office/powerpoint/2010/main" Requires="p14">
+  <mc:AlternateContent xmlns:mc="http://schemas.openxmlformats.org/markup-compatibility/2006" xmlns:p14="http://schemas.microsoft.com/office/powerpoint/2010/main">
+    <mc:Choice Requires="p14">
       <p:transition spd="slow" p14:dur="4000">
         <p14:vortex dir="r"/>
       </p:transition>
     </mc:Choice>
-    <mc:Fallback>
+    <mc:Fallback xmlns="">
       <p:transition spd="slow">
         <p:fade/>
       </p:transition>
@@ -8926,13 +8907,13 @@
   <p:clrMapOvr>
     <a:masterClrMapping/>
   </p:clrMapOvr>
-  <mc:AlternateContent xmlns:mc="http://schemas.openxmlformats.org/markup-compatibility/2006">
-    <mc:Choice xmlns:p14="http://schemas.microsoft.com/office/powerpoint/2010/main" Requires="p14">
+  <mc:AlternateContent xmlns:mc="http://schemas.openxmlformats.org/markup-compatibility/2006" xmlns:p14="http://schemas.microsoft.com/office/powerpoint/2010/main">
+    <mc:Choice Requires="p14">
       <p:transition spd="slow" p14:dur="4000">
         <p14:vortex dir="r"/>
       </p:transition>
     </mc:Choice>
-    <mc:Fallback>
+    <mc:Fallback xmlns="">
       <p:transition spd="slow">
         <p:fade/>
       </p:transition>
@@ -9861,13 +9842,13 @@
   <p:clrMapOvr>
     <a:masterClrMapping/>
   </p:clrMapOvr>
-  <mc:AlternateContent xmlns:mc="http://schemas.openxmlformats.org/markup-compatibility/2006">
-    <mc:Choice xmlns:p14="http://schemas.microsoft.com/office/powerpoint/2010/main" Requires="p14">
+  <mc:AlternateContent xmlns:mc="http://schemas.openxmlformats.org/markup-compatibility/2006" xmlns:p14="http://schemas.microsoft.com/office/powerpoint/2010/main">
+    <mc:Choice Requires="p14">
       <p:transition spd="slow" p14:dur="4000">
         <p14:vortex dir="r"/>
       </p:transition>
     </mc:Choice>
-    <mc:Fallback>
+    <mc:Fallback xmlns="">
       <p:transition spd="slow">
         <p:fade/>
       </p:transition>
@@ -10950,13 +10931,13 @@
   <p:clrMapOvr>
     <a:masterClrMapping/>
   </p:clrMapOvr>
-  <mc:AlternateContent xmlns:mc="http://schemas.openxmlformats.org/markup-compatibility/2006">
-    <mc:Choice xmlns:p14="http://schemas.microsoft.com/office/powerpoint/2010/main" Requires="p14">
+  <mc:AlternateContent xmlns:mc="http://schemas.openxmlformats.org/markup-compatibility/2006" xmlns:p14="http://schemas.microsoft.com/office/powerpoint/2010/main">
+    <mc:Choice Requires="p14">
       <p:transition spd="slow" p14:dur="4000">
         <p14:vortex dir="r"/>
       </p:transition>
     </mc:Choice>
-    <mc:Fallback>
+    <mc:Fallback xmlns="">
       <p:transition spd="slow">
         <p:fade/>
       </p:transition>
@@ -11947,13 +11928,13 @@
   <p:clrMapOvr>
     <a:masterClrMapping/>
   </p:clrMapOvr>
-  <mc:AlternateContent xmlns:mc="http://schemas.openxmlformats.org/markup-compatibility/2006">
-    <mc:Choice xmlns:p14="http://schemas.microsoft.com/office/powerpoint/2010/main" Requires="p14">
+  <mc:AlternateContent xmlns:mc="http://schemas.openxmlformats.org/markup-compatibility/2006" xmlns:p14="http://schemas.microsoft.com/office/powerpoint/2010/main">
+    <mc:Choice Requires="p14">
       <p:transition spd="slow" p14:dur="4000">
         <p14:vortex dir="r"/>
       </p:transition>
     </mc:Choice>
-    <mc:Fallback>
+    <mc:Fallback xmlns="">
       <p:transition spd="slow">
         <p:fade/>
       </p:transition>
@@ -12877,13 +12858,13 @@
   <p:clrMapOvr>
     <a:masterClrMapping/>
   </p:clrMapOvr>
-  <mc:AlternateContent xmlns:mc="http://schemas.openxmlformats.org/markup-compatibility/2006">
-    <mc:Choice xmlns:p14="http://schemas.microsoft.com/office/powerpoint/2010/main" Requires="p14">
+  <mc:AlternateContent xmlns:mc="http://schemas.openxmlformats.org/markup-compatibility/2006" xmlns:p14="http://schemas.microsoft.com/office/powerpoint/2010/main">
+    <mc:Choice Requires="p14">
       <p:transition spd="slow" p14:dur="4000">
         <p14:vortex dir="r"/>
       </p:transition>
     </mc:Choice>
-    <mc:Fallback>
+    <mc:Fallback xmlns="">
       <p:transition spd="slow">
         <p:fade/>
       </p:transition>
@@ -13557,13 +13538,13 @@
   <p:clrMapOvr>
     <a:masterClrMapping/>
   </p:clrMapOvr>
-  <mc:AlternateContent xmlns:mc="http://schemas.openxmlformats.org/markup-compatibility/2006">
-    <mc:Choice xmlns:p14="http://schemas.microsoft.com/office/powerpoint/2010/main" Requires="p14">
+  <mc:AlternateContent xmlns:mc="http://schemas.openxmlformats.org/markup-compatibility/2006" xmlns:p14="http://schemas.microsoft.com/office/powerpoint/2010/main">
+    <mc:Choice Requires="p14">
       <p:transition spd="slow" p14:dur="4000">
         <p14:vortex dir="r"/>
       </p:transition>
     </mc:Choice>
-    <mc:Fallback>
+    <mc:Fallback xmlns="">
       <p:transition spd="slow">
         <p:fade/>
       </p:transition>
@@ -13826,13 +13807,13 @@
     <p:sldLayoutId id="2147483699" r:id="rId12"/>
     <p:sldLayoutId id="2147483704" r:id="rId13"/>
   </p:sldLayoutIdLst>
-  <mc:AlternateContent xmlns:mc="http://schemas.openxmlformats.org/markup-compatibility/2006">
-    <mc:Choice xmlns:p14="http://schemas.microsoft.com/office/powerpoint/2010/main" Requires="p14">
+  <mc:AlternateContent xmlns:mc="http://schemas.openxmlformats.org/markup-compatibility/2006" xmlns:p14="http://schemas.microsoft.com/office/powerpoint/2010/main">
+    <mc:Choice Requires="p14">
       <p:transition spd="slow" p14:dur="4000">
         <p14:vortex dir="r"/>
       </p:transition>
     </mc:Choice>
-    <mc:Fallback>
+    <mc:Fallback xmlns="">
       <p:transition spd="slow">
         <p:fade/>
       </p:transition>
@@ -14232,257 +14213,455 @@
   <p:clrMapOvr>
     <a:masterClrMapping/>
   </p:clrMapOvr>
-  <mc:AlternateContent xmlns:mc="http://schemas.openxmlformats.org/markup-compatibility/2006">
-    <mc:Choice xmlns:p14="http://schemas.microsoft.com/office/powerpoint/2010/main" Requires="p14">
+  <mc:AlternateContent xmlns:mc="http://schemas.openxmlformats.org/markup-compatibility/2006" xmlns:p14="http://schemas.microsoft.com/office/powerpoint/2010/main">
+    <mc:Choice Requires="p14">
       <p:transition spd="slow" p14:dur="4000">
         <p14:vortex dir="r"/>
       </p:transition>
     </mc:Choice>
-    <mc:Fallback>
+    <mc:Fallback xmlns="">
       <p:transition spd="slow">
         <p:fade/>
       </p:transition>
     </mc:Fallback>
   </mc:AlternateContent>
+  <p:timing>
+    <p:tnLst>
+      <p:par>
+        <p:cTn id="1" dur="indefinite" restart="never" nodeType="tmRoot">
+          <p:childTnLst>
+            <p:seq concurrent="1" nextAc="seek">
+              <p:cTn id="2" dur="indefinite" nodeType="mainSeq">
+                <p:childTnLst>
+                  <p:par>
+                    <p:cTn id="3" fill="hold">
+                      <p:stCondLst>
+                        <p:cond delay="indefinite"/>
+                      </p:stCondLst>
+                      <p:childTnLst>
+                        <p:par>
+                          <p:cTn id="4" fill="hold">
+                            <p:stCondLst>
+                              <p:cond delay="0"/>
+                            </p:stCondLst>
+                            <p:childTnLst>
+                              <p:par>
+                                <p:cTn id="5" presetID="26" presetClass="entr" presetSubtype="0" fill="hold" grpId="0" nodeType="clickEffect">
+                                  <p:stCondLst>
+                                    <p:cond delay="0"/>
+                                  </p:stCondLst>
+                                  <p:childTnLst>
+                                    <p:set>
+                                      <p:cBhvr>
+                                        <p:cTn id="6" dur="1" fill="hold">
+                                          <p:stCondLst>
+                                            <p:cond delay="0"/>
+                                          </p:stCondLst>
+                                        </p:cTn>
+                                        <p:tgtEl>
+                                          <p:spTgt spid="2"/>
+                                        </p:tgtEl>
+                                        <p:attrNameLst>
+                                          <p:attrName>style.visibility</p:attrName>
+                                        </p:attrNameLst>
+                                      </p:cBhvr>
+                                      <p:to>
+                                        <p:strVal val="visible"/>
+                                      </p:to>
+                                    </p:set>
+                                    <p:animEffect transition="in" filter="wipe(down)">
+                                      <p:cBhvr>
+                                        <p:cTn id="7" dur="580">
+                                          <p:stCondLst>
+                                            <p:cond delay="0"/>
+                                          </p:stCondLst>
+                                        </p:cTn>
+                                        <p:tgtEl>
+                                          <p:spTgt spid="2"/>
+                                        </p:tgtEl>
+                                      </p:cBhvr>
+                                    </p:animEffect>
+                                    <p:anim calcmode="lin" valueType="num">
+                                      <p:cBhvr>
+                                        <p:cTn id="8" dur="1822" tmFilter="0,0; 0.14,0.36; 0.43,0.73; 0.71,0.91; 1.0,1.0">
+                                          <p:stCondLst>
+                                            <p:cond delay="0"/>
+                                          </p:stCondLst>
+                                        </p:cTn>
+                                        <p:tgtEl>
+                                          <p:spTgt spid="2"/>
+                                        </p:tgtEl>
+                                        <p:attrNameLst>
+                                          <p:attrName>ppt_x</p:attrName>
+                                        </p:attrNameLst>
+                                      </p:cBhvr>
+                                      <p:tavLst>
+                                        <p:tav tm="0">
+                                          <p:val>
+                                            <p:strVal val="#ppt_x-0.25"/>
+                                          </p:val>
+                                        </p:tav>
+                                        <p:tav tm="100000">
+                                          <p:val>
+                                            <p:strVal val="#ppt_x"/>
+                                          </p:val>
+                                        </p:tav>
+                                      </p:tavLst>
+                                    </p:anim>
+                                    <p:anim calcmode="lin" valueType="num">
+                                      <p:cBhvr>
+                                        <p:cTn id="9" dur="664" tmFilter="0.0,0.0; 0.25,0.07; 0.50,0.2; 0.75,0.467; 1.0,1.0">
+                                          <p:stCondLst>
+                                            <p:cond delay="0"/>
+                                          </p:stCondLst>
+                                        </p:cTn>
+                                        <p:tgtEl>
+                                          <p:spTgt spid="2"/>
+                                        </p:tgtEl>
+                                        <p:attrNameLst>
+                                          <p:attrName>ppt_y</p:attrName>
+                                        </p:attrNameLst>
+                                      </p:cBhvr>
+                                      <p:tavLst>
+                                        <p:tav tm="0" fmla="#ppt_y-sin(pi*$)/3">
+                                          <p:val>
+                                            <p:fltVal val="0.5"/>
+                                          </p:val>
+                                        </p:tav>
+                                        <p:tav tm="100000">
+                                          <p:val>
+                                            <p:fltVal val="1"/>
+                                          </p:val>
+                                        </p:tav>
+                                      </p:tavLst>
+                                    </p:anim>
+                                    <p:anim calcmode="lin" valueType="num">
+                                      <p:cBhvr>
+                                        <p:cTn id="10" dur="664" tmFilter="0, 0; 0.125,0.2665; 0.25,0.4; 0.375,0.465; 0.5,0.5;  0.625,0.535; 0.75,0.6; 0.875,0.7335; 1,1">
+                                          <p:stCondLst>
+                                            <p:cond delay="664"/>
+                                          </p:stCondLst>
+                                        </p:cTn>
+                                        <p:tgtEl>
+                                          <p:spTgt spid="2"/>
+                                        </p:tgtEl>
+                                        <p:attrNameLst>
+                                          <p:attrName>ppt_y</p:attrName>
+                                        </p:attrNameLst>
+                                      </p:cBhvr>
+                                      <p:tavLst>
+                                        <p:tav tm="0" fmla="#ppt_y-sin(pi*$)/9">
+                                          <p:val>
+                                            <p:fltVal val="0"/>
+                                          </p:val>
+                                        </p:tav>
+                                        <p:tav tm="100000">
+                                          <p:val>
+                                            <p:fltVal val="1"/>
+                                          </p:val>
+                                        </p:tav>
+                                      </p:tavLst>
+                                    </p:anim>
+                                    <p:anim calcmode="lin" valueType="num">
+                                      <p:cBhvr>
+                                        <p:cTn id="11" dur="332" tmFilter="0, 0; 0.125,0.2665; 0.25,0.4; 0.375,0.465; 0.5,0.5;  0.625,0.535; 0.75,0.6; 0.875,0.7335; 1,1">
+                                          <p:stCondLst>
+                                            <p:cond delay="1324"/>
+                                          </p:stCondLst>
+                                        </p:cTn>
+                                        <p:tgtEl>
+                                          <p:spTgt spid="2"/>
+                                        </p:tgtEl>
+                                        <p:attrNameLst>
+                                          <p:attrName>ppt_y</p:attrName>
+                                        </p:attrNameLst>
+                                      </p:cBhvr>
+                                      <p:tavLst>
+                                        <p:tav tm="0" fmla="#ppt_y-sin(pi*$)/27">
+                                          <p:val>
+                                            <p:fltVal val="0"/>
+                                          </p:val>
+                                        </p:tav>
+                                        <p:tav tm="100000">
+                                          <p:val>
+                                            <p:fltVal val="1"/>
+                                          </p:val>
+                                        </p:tav>
+                                      </p:tavLst>
+                                    </p:anim>
+                                    <p:anim calcmode="lin" valueType="num">
+                                      <p:cBhvr>
+                                        <p:cTn id="12" dur="164" tmFilter="0, 0; 0.125,0.2665; 0.25,0.4; 0.375,0.465; 0.5,0.5;  0.625,0.535; 0.75,0.6; 0.875,0.7335; 1,1">
+                                          <p:stCondLst>
+                                            <p:cond delay="1656"/>
+                                          </p:stCondLst>
+                                        </p:cTn>
+                                        <p:tgtEl>
+                                          <p:spTgt spid="2"/>
+                                        </p:tgtEl>
+                                        <p:attrNameLst>
+                                          <p:attrName>ppt_y</p:attrName>
+                                        </p:attrNameLst>
+                                      </p:cBhvr>
+                                      <p:tavLst>
+                                        <p:tav tm="0" fmla="#ppt_y-sin(pi*$)/81">
+                                          <p:val>
+                                            <p:fltVal val="0"/>
+                                          </p:val>
+                                        </p:tav>
+                                        <p:tav tm="100000">
+                                          <p:val>
+                                            <p:fltVal val="1"/>
+                                          </p:val>
+                                        </p:tav>
+                                      </p:tavLst>
+                                    </p:anim>
+                                    <p:animScale>
+                                      <p:cBhvr>
+                                        <p:cTn id="13" dur="26">
+                                          <p:stCondLst>
+                                            <p:cond delay="650"/>
+                                          </p:stCondLst>
+                                        </p:cTn>
+                                        <p:tgtEl>
+                                          <p:spTgt spid="2"/>
+                                        </p:tgtEl>
+                                      </p:cBhvr>
+                                      <p:to x="100000" y="60000"/>
+                                    </p:animScale>
+                                    <p:animScale>
+                                      <p:cBhvr>
+                                        <p:cTn id="14" dur="166" decel="50000">
+                                          <p:stCondLst>
+                                            <p:cond delay="676"/>
+                                          </p:stCondLst>
+                                        </p:cTn>
+                                        <p:tgtEl>
+                                          <p:spTgt spid="2"/>
+                                        </p:tgtEl>
+                                      </p:cBhvr>
+                                      <p:to x="100000" y="100000"/>
+                                    </p:animScale>
+                                    <p:animScale>
+                                      <p:cBhvr>
+                                        <p:cTn id="15" dur="26">
+                                          <p:stCondLst>
+                                            <p:cond delay="1312"/>
+                                          </p:stCondLst>
+                                        </p:cTn>
+                                        <p:tgtEl>
+                                          <p:spTgt spid="2"/>
+                                        </p:tgtEl>
+                                      </p:cBhvr>
+                                      <p:to x="100000" y="80000"/>
+                                    </p:animScale>
+                                    <p:animScale>
+                                      <p:cBhvr>
+                                        <p:cTn id="16" dur="166" decel="50000">
+                                          <p:stCondLst>
+                                            <p:cond delay="1338"/>
+                                          </p:stCondLst>
+                                        </p:cTn>
+                                        <p:tgtEl>
+                                          <p:spTgt spid="2"/>
+                                        </p:tgtEl>
+                                      </p:cBhvr>
+                                      <p:to x="100000" y="100000"/>
+                                    </p:animScale>
+                                    <p:animScale>
+                                      <p:cBhvr>
+                                        <p:cTn id="17" dur="26">
+                                          <p:stCondLst>
+                                            <p:cond delay="1642"/>
+                                          </p:stCondLst>
+                                        </p:cTn>
+                                        <p:tgtEl>
+                                          <p:spTgt spid="2"/>
+                                        </p:tgtEl>
+                                      </p:cBhvr>
+                                      <p:to x="100000" y="90000"/>
+                                    </p:animScale>
+                                    <p:animScale>
+                                      <p:cBhvr>
+                                        <p:cTn id="18" dur="166" decel="50000">
+                                          <p:stCondLst>
+                                            <p:cond delay="1668"/>
+                                          </p:stCondLst>
+                                        </p:cTn>
+                                        <p:tgtEl>
+                                          <p:spTgt spid="2"/>
+                                        </p:tgtEl>
+                                      </p:cBhvr>
+                                      <p:to x="100000" y="100000"/>
+                                    </p:animScale>
+                                    <p:animScale>
+                                      <p:cBhvr>
+                                        <p:cTn id="19" dur="26">
+                                          <p:stCondLst>
+                                            <p:cond delay="1808"/>
+                                          </p:stCondLst>
+                                        </p:cTn>
+                                        <p:tgtEl>
+                                          <p:spTgt spid="2"/>
+                                        </p:tgtEl>
+                                      </p:cBhvr>
+                                      <p:to x="100000" y="95000"/>
+                                    </p:animScale>
+                                    <p:animScale>
+                                      <p:cBhvr>
+                                        <p:cTn id="20" dur="166" decel="50000">
+                                          <p:stCondLst>
+                                            <p:cond delay="1834"/>
+                                          </p:stCondLst>
+                                        </p:cTn>
+                                        <p:tgtEl>
+                                          <p:spTgt spid="2"/>
+                                        </p:tgtEl>
+                                      </p:cBhvr>
+                                      <p:to x="100000" y="100000"/>
+                                    </p:animScale>
+                                  </p:childTnLst>
+                                </p:cTn>
+                              </p:par>
+                            </p:childTnLst>
+                          </p:cTn>
+                        </p:par>
+                      </p:childTnLst>
+                    </p:cTn>
+                  </p:par>
+                  <p:par>
+                    <p:cTn id="21" fill="hold">
+                      <p:stCondLst>
+                        <p:cond delay="indefinite"/>
+                      </p:stCondLst>
+                      <p:childTnLst>
+                        <p:par>
+                          <p:cTn id="22" fill="hold">
+                            <p:stCondLst>
+                              <p:cond delay="0"/>
+                            </p:stCondLst>
+                            <p:childTnLst>
+                              <p:par>
+                                <p:cTn id="23" presetID="2" presetClass="entr" presetSubtype="4" fill="hold" grpId="0" nodeType="clickEffect">
+                                  <p:stCondLst>
+                                    <p:cond delay="0"/>
+                                  </p:stCondLst>
+                                  <p:childTnLst>
+                                    <p:set>
+                                      <p:cBhvr>
+                                        <p:cTn id="24" dur="1" fill="hold">
+                                          <p:stCondLst>
+                                            <p:cond delay="0"/>
+                                          </p:stCondLst>
+                                        </p:cTn>
+                                        <p:tgtEl>
+                                          <p:spTgt spid="3">
+                                            <p:txEl>
+                                              <p:pRg st="0" end="0"/>
+                                            </p:txEl>
+                                          </p:spTgt>
+                                        </p:tgtEl>
+                                        <p:attrNameLst>
+                                          <p:attrName>style.visibility</p:attrName>
+                                        </p:attrNameLst>
+                                      </p:cBhvr>
+                                      <p:to>
+                                        <p:strVal val="visible"/>
+                                      </p:to>
+                                    </p:set>
+                                    <p:anim calcmode="lin" valueType="num">
+                                      <p:cBhvr additive="base">
+                                        <p:cTn id="25" dur="500" fill="hold"/>
+                                        <p:tgtEl>
+                                          <p:spTgt spid="3">
+                                            <p:txEl>
+                                              <p:pRg st="0" end="0"/>
+                                            </p:txEl>
+                                          </p:spTgt>
+                                        </p:tgtEl>
+                                        <p:attrNameLst>
+                                          <p:attrName>ppt_x</p:attrName>
+                                        </p:attrNameLst>
+                                      </p:cBhvr>
+                                      <p:tavLst>
+                                        <p:tav tm="0">
+                                          <p:val>
+                                            <p:strVal val="#ppt_x"/>
+                                          </p:val>
+                                        </p:tav>
+                                        <p:tav tm="100000">
+                                          <p:val>
+                                            <p:strVal val="#ppt_x"/>
+                                          </p:val>
+                                        </p:tav>
+                                      </p:tavLst>
+                                    </p:anim>
+                                    <p:anim calcmode="lin" valueType="num">
+                                      <p:cBhvr additive="base">
+                                        <p:cTn id="26" dur="500" fill="hold"/>
+                                        <p:tgtEl>
+                                          <p:spTgt spid="3">
+                                            <p:txEl>
+                                              <p:pRg st="0" end="0"/>
+                                            </p:txEl>
+                                          </p:spTgt>
+                                        </p:tgtEl>
+                                        <p:attrNameLst>
+                                          <p:attrName>ppt_y</p:attrName>
+                                        </p:attrNameLst>
+                                      </p:cBhvr>
+                                      <p:tavLst>
+                                        <p:tav tm="0">
+                                          <p:val>
+                                            <p:strVal val="1+#ppt_h/2"/>
+                                          </p:val>
+                                        </p:tav>
+                                        <p:tav tm="100000">
+                                          <p:val>
+                                            <p:strVal val="#ppt_y"/>
+                                          </p:val>
+                                        </p:tav>
+                                      </p:tavLst>
+                                    </p:anim>
+                                  </p:childTnLst>
+                                </p:cTn>
+                              </p:par>
+                            </p:childTnLst>
+                          </p:cTn>
+                        </p:par>
+                      </p:childTnLst>
+                    </p:cTn>
+                  </p:par>
+                </p:childTnLst>
+              </p:cTn>
+              <p:prevCondLst>
+                <p:cond evt="onPrev" delay="0">
+                  <p:tgtEl>
+                    <p:sldTgt/>
+                  </p:tgtEl>
+                </p:cond>
+              </p:prevCondLst>
+              <p:nextCondLst>
+                <p:cond evt="onNext" delay="0">
+                  <p:tgtEl>
+                    <p:sldTgt/>
+                  </p:tgtEl>
+                </p:cond>
+              </p:nextCondLst>
+            </p:seq>
+          </p:childTnLst>
+        </p:cTn>
+      </p:par>
+    </p:tnLst>
+    <p:bldLst>
+      <p:bldP spid="2" grpId="0"/>
+      <p:bldP spid="3" grpId="0" build="p"/>
+    </p:bldLst>
+  </p:timing>
 </p:sld>
 </file>
 
 <file path=ppt/slides/slide10.xml><?xml version="1.0" encoding="utf-8"?>
-<p:sld xmlns:a="http://schemas.openxmlformats.org/drawingml/2006/main" xmlns:r="http://schemas.openxmlformats.org/officeDocument/2006/relationships" xmlns:p="http://schemas.openxmlformats.org/presentationml/2006/main">
-  <p:cSld>
-    <p:spTree>
-      <p:nvGrpSpPr>
-        <p:cNvPr id="1" name="">
-          <a:extLst>
-            <a:ext uri="{FF2B5EF4-FFF2-40B4-BE49-F238E27FC236}">
-              <a16:creationId xmlns:a16="http://schemas.microsoft.com/office/drawing/2014/main" id="{AD86893E-907A-81E0-5FB3-EE1517131642}"/>
-            </a:ext>
-          </a:extLst>
-        </p:cNvPr>
-        <p:cNvGrpSpPr/>
-        <p:nvPr/>
-      </p:nvGrpSpPr>
-      <p:grpSpPr>
-        <a:xfrm>
-          <a:off x="0" y="0"/>
-          <a:ext cx="0" cy="0"/>
-          <a:chOff x="0" y="0"/>
-          <a:chExt cx="0" cy="0"/>
-        </a:xfrm>
-      </p:grpSpPr>
-      <p:sp>
-        <p:nvSpPr>
-          <p:cNvPr id="4" name="Picture Placeholder 3">
-            <a:extLst>
-              <a:ext uri="{FF2B5EF4-FFF2-40B4-BE49-F238E27FC236}">
-                <a16:creationId xmlns:a16="http://schemas.microsoft.com/office/drawing/2014/main" id="{28AD9FB9-3144-1113-B327-7B522AFAB258}"/>
-              </a:ext>
-            </a:extLst>
-          </p:cNvPr>
-          <p:cNvSpPr>
-            <a:spLocks noGrp="1"/>
-          </p:cNvSpPr>
-          <p:nvPr>
-            <p:ph type="pic" sz="quarter" idx="10"/>
-          </p:nvPr>
-        </p:nvSpPr>
-        <p:spPr/>
-      </p:sp>
-      <p:sp>
-        <p:nvSpPr>
-          <p:cNvPr id="6" name="Picture Placeholder 5">
-            <a:extLst>
-              <a:ext uri="{FF2B5EF4-FFF2-40B4-BE49-F238E27FC236}">
-                <a16:creationId xmlns:a16="http://schemas.microsoft.com/office/drawing/2014/main" id="{4EC5940D-2553-0022-B5BF-B93CC11A234C}"/>
-              </a:ext>
-            </a:extLst>
-          </p:cNvPr>
-          <p:cNvSpPr>
-            <a:spLocks noGrp="1"/>
-          </p:cNvSpPr>
-          <p:nvPr>
-            <p:ph type="pic" sz="quarter" idx="11"/>
-          </p:nvPr>
-        </p:nvSpPr>
-        <p:spPr/>
-      </p:sp>
-    </p:spTree>
-    <p:extLst>
-      <p:ext uri="{BB962C8B-B14F-4D97-AF65-F5344CB8AC3E}">
-        <p14:creationId xmlns:p14="http://schemas.microsoft.com/office/powerpoint/2010/main" val="1800142194"/>
-      </p:ext>
-    </p:extLst>
-  </p:cSld>
-  <p:clrMapOvr>
-    <a:masterClrMapping/>
-  </p:clrMapOvr>
-  <mc:AlternateContent xmlns:mc="http://schemas.openxmlformats.org/markup-compatibility/2006">
-    <mc:Choice xmlns:p14="http://schemas.microsoft.com/office/powerpoint/2010/main" Requires="p14">
-      <p:transition spd="slow" p14:dur="4000">
-        <p14:vortex dir="r"/>
-      </p:transition>
-    </mc:Choice>
-    <mc:Fallback>
-      <p:transition spd="slow">
-        <p:fade/>
-      </p:transition>
-    </mc:Fallback>
-  </mc:AlternateContent>
-</p:sld>
-</file>
-
-<file path=ppt/slides/slide11.xml><?xml version="1.0" encoding="utf-8"?>
-<p:sld xmlns:a="http://schemas.openxmlformats.org/drawingml/2006/main" xmlns:r="http://schemas.openxmlformats.org/officeDocument/2006/relationships" xmlns:p="http://schemas.openxmlformats.org/presentationml/2006/main">
-  <p:cSld>
-    <p:spTree>
-      <p:nvGrpSpPr>
-        <p:cNvPr id="1" name=""/>
-        <p:cNvGrpSpPr/>
-        <p:nvPr/>
-      </p:nvGrpSpPr>
-      <p:grpSpPr>
-        <a:xfrm>
-          <a:off x="0" y="0"/>
-          <a:ext cx="0" cy="0"/>
-          <a:chOff x="0" y="0"/>
-          <a:chExt cx="0" cy="0"/>
-        </a:xfrm>
-      </p:grpSpPr>
-      <p:sp>
-        <p:nvSpPr>
-          <p:cNvPr id="4" name="Title 3">
-            <a:extLst>
-              <a:ext uri="{FF2B5EF4-FFF2-40B4-BE49-F238E27FC236}">
-                <a16:creationId xmlns:a16="http://schemas.microsoft.com/office/drawing/2014/main" id="{FAD2AE59-5630-4D5C-83A9-4CDEF4D7DCFB}"/>
-              </a:ext>
-            </a:extLst>
-          </p:cNvPr>
-          <p:cNvSpPr>
-            <a:spLocks noGrp="1"/>
-          </p:cNvSpPr>
-          <p:nvPr>
-            <p:ph type="title"/>
-          </p:nvPr>
-        </p:nvSpPr>
-        <p:spPr>
-          <a:xfrm>
-            <a:off x="684212" y="304800"/>
-            <a:ext cx="10816543" cy="1409696"/>
-          </a:xfrm>
-        </p:spPr>
-        <p:txBody>
-          <a:bodyPr/>
-          <a:lstStyle/>
-          <a:p>
-            <a:endParaRPr lang="en-US" dirty="0"/>
-          </a:p>
-        </p:txBody>
-      </p:sp>
-      <p:sp>
-        <p:nvSpPr>
-          <p:cNvPr id="6" name="Content Placeholder 5">
-            <a:extLst>
-              <a:ext uri="{FF2B5EF4-FFF2-40B4-BE49-F238E27FC236}">
-                <a16:creationId xmlns:a16="http://schemas.microsoft.com/office/drawing/2014/main" id="{5A6B31B0-7B84-475D-961F-09C0191F91A2}"/>
-              </a:ext>
-            </a:extLst>
-          </p:cNvPr>
-          <p:cNvSpPr>
-            <a:spLocks noGrp="1"/>
-          </p:cNvSpPr>
-          <p:nvPr>
-            <p:ph sz="half" idx="2"/>
-          </p:nvPr>
-        </p:nvSpPr>
-        <p:spPr>
-          <a:xfrm>
-            <a:off x="1190685" y="1981199"/>
-            <a:ext cx="4761153" cy="4343403"/>
-          </a:xfrm>
-        </p:spPr>
-        <p:txBody>
-          <a:bodyPr vert="horz" lIns="91416" tIns="45708" rIns="91416" bIns="45708" rtlCol="0" anchor="t">
-            <a:normAutofit/>
-          </a:bodyPr>
-          <a:lstStyle/>
-          <a:p>
-            <a:endParaRPr lang="en-US" dirty="0"/>
-          </a:p>
-        </p:txBody>
-      </p:sp>
-      <p:sp>
-        <p:nvSpPr>
-          <p:cNvPr id="3" name="Slide Number Placeholder 2">
-            <a:extLst>
-              <a:ext uri="{FF2B5EF4-FFF2-40B4-BE49-F238E27FC236}">
-                <a16:creationId xmlns:a16="http://schemas.microsoft.com/office/drawing/2014/main" id="{CC6D299C-3F75-9E6E-051A-8176E999E73B}"/>
-              </a:ext>
-            </a:extLst>
-          </p:cNvPr>
-          <p:cNvSpPr>
-            <a:spLocks noGrp="1"/>
-          </p:cNvSpPr>
-          <p:nvPr>
-            <p:ph type="sldNum" sz="quarter" idx="12"/>
-          </p:nvPr>
-        </p:nvSpPr>
-        <p:spPr/>
-        <p:txBody>
-          <a:bodyPr/>
-          <a:lstStyle/>
-          <a:p>
-            <a:fld id="{EB37DED6-D4C7-42EE-AB49-D2E39E64FDE4}" type="slidenum">
-              <a:rPr lang="en-US" smtClean="0"/>
-              <a:t>11</a:t>
-            </a:fld>
-            <a:endParaRPr lang="en-US" dirty="0"/>
-          </a:p>
-        </p:txBody>
-      </p:sp>
-      <p:sp>
-        <p:nvSpPr>
-          <p:cNvPr id="5" name="Table Placeholder 4">
-            <a:extLst>
-              <a:ext uri="{FF2B5EF4-FFF2-40B4-BE49-F238E27FC236}">
-                <a16:creationId xmlns:a16="http://schemas.microsoft.com/office/drawing/2014/main" id="{F6A39EBF-3A5E-8022-1419-E37CB281B09A}"/>
-              </a:ext>
-            </a:extLst>
-          </p:cNvPr>
-          <p:cNvSpPr>
-            <a:spLocks noGrp="1"/>
-          </p:cNvSpPr>
-          <p:nvPr>
-            <p:ph type="tbl" sz="quarter" idx="13"/>
-          </p:nvPr>
-        </p:nvSpPr>
-        <p:spPr/>
-      </p:sp>
-    </p:spTree>
-    <p:extLst>
-      <p:ext uri="{BB962C8B-B14F-4D97-AF65-F5344CB8AC3E}">
-        <p14:creationId xmlns:p14="http://schemas.microsoft.com/office/powerpoint/2010/main" val="3830685312"/>
-      </p:ext>
-    </p:extLst>
-  </p:cSld>
-  <p:clrMapOvr>
-    <a:masterClrMapping/>
-  </p:clrMapOvr>
-  <mc:AlternateContent xmlns:mc="http://schemas.openxmlformats.org/markup-compatibility/2006">
-    <mc:Choice xmlns:p14="http://schemas.microsoft.com/office/powerpoint/2010/main" Requires="p14">
-      <p:transition spd="slow" p14:dur="4000">
-        <p14:vortex dir="r"/>
-      </p:transition>
-    </mc:Choice>
-    <mc:Fallback>
-      <p:transition spd="slow">
-        <p:fade/>
-      </p:transition>
-    </mc:Fallback>
-  </mc:AlternateContent>
-</p:sld>
-</file>
-
-<file path=ppt/slides/slide12.xml><?xml version="1.0" encoding="utf-8"?>
 <p:sld xmlns:a="http://schemas.openxmlformats.org/drawingml/2006/main" xmlns:r="http://schemas.openxmlformats.org/officeDocument/2006/relationships" xmlns:p="http://schemas.openxmlformats.org/presentationml/2006/main">
   <p:cSld>
     <p:bg>
@@ -14536,14 +14715,18 @@
         </p:nvSpPr>
         <p:spPr>
           <a:xfrm>
-            <a:off x="3656014" y="533400"/>
-            <a:ext cx="8153381" cy="2209801"/>
+            <a:off x="3656014" y="533401"/>
+            <a:ext cx="8153381" cy="1143000"/>
           </a:xfrm>
         </p:spPr>
         <p:txBody>
           <a:bodyPr anchor="ctr"/>
           <a:lstStyle/>
           <a:p>
+            <a:r>
+              <a:rPr lang="en-IN" dirty="0"/>
+              <a:t>Future Outlook &amp; Career Opportunities</a:t>
+            </a:r>
             <a:endParaRPr lang="en-US" dirty="0"/>
           </a:p>
         </p:txBody>
@@ -14566,15 +14749,57 @@
         </p:nvSpPr>
         <p:spPr>
           <a:xfrm>
-            <a:off x="3656014" y="2971800"/>
-            <a:ext cx="4724397" cy="3048000"/>
+            <a:off x="3656014" y="1600200"/>
+            <a:ext cx="4724397" cy="4419600"/>
           </a:xfrm>
         </p:spPr>
         <p:txBody>
           <a:bodyPr vert="horz" lIns="91416" tIns="45708" rIns="91416" bIns="45708" rtlCol="0" anchor="t">
-            <a:normAutofit/>
+            <a:normAutofit fontScale="92500" lnSpcReduction="10000"/>
           </a:bodyPr>
           <a:lstStyle/>
+          <a:p>
+            <a:r>
+              <a:rPr lang="en-IN" b="1" dirty="0"/>
+              <a:t>Career Paths:</a:t>
+            </a:r>
+            <a:endParaRPr lang="en-IN" dirty="0"/>
+          </a:p>
+          <a:p>
+            <a:pPr lvl="0"/>
+            <a:r>
+              <a:rPr lang="en-IN" dirty="0"/>
+              <a:t>AI Engineer – building intelligent systems.</a:t>
+            </a:r>
+          </a:p>
+          <a:p>
+            <a:pPr lvl="0"/>
+            <a:r>
+              <a:rPr lang="en-IN" dirty="0"/>
+              <a:t>Blockchain Developer – designing decentralized apps.</a:t>
+            </a:r>
+          </a:p>
+          <a:p>
+            <a:pPr lvl="0"/>
+            <a:r>
+              <a:rPr lang="en-IN" dirty="0"/>
+              <a:t>Quantum Computing Researcher – solving complex problems.</a:t>
+            </a:r>
+          </a:p>
+          <a:p>
+            <a:pPr lvl="0"/>
+            <a:r>
+              <a:rPr lang="en-IN" dirty="0"/>
+              <a:t>IoT Architect – designing connected ecosystems.</a:t>
+            </a:r>
+          </a:p>
+          <a:p>
+            <a:pPr lvl="0"/>
+            <a:r>
+              <a:rPr lang="en-IN" dirty="0"/>
+              <a:t>Cybersecurity Analyst – protecting digital assets.</a:t>
+            </a:r>
+          </a:p>
           <a:p>
             <a:endParaRPr lang="en-US" dirty="0"/>
           </a:p>
@@ -14598,15 +14823,55 @@
         </p:nvSpPr>
         <p:spPr>
           <a:xfrm>
-            <a:off x="8609012" y="2986053"/>
-            <a:ext cx="3200384" cy="3017418"/>
+            <a:off x="8609012" y="1583871"/>
+            <a:ext cx="3200384" cy="4419600"/>
           </a:xfrm>
         </p:spPr>
         <p:txBody>
           <a:bodyPr anchor="t">
-            <a:normAutofit/>
+            <a:normAutofit fontScale="92500" lnSpcReduction="10000"/>
           </a:bodyPr>
           <a:lstStyle/>
+          <a:p>
+            <a:r>
+              <a:rPr lang="en-IN" b="1" dirty="0"/>
+              <a:t>Emerging Tech Impact:</a:t>
+            </a:r>
+            <a:r>
+              <a:rPr lang="en-IN" dirty="0"/>
+              <a:t> Transforming healthcare, finance, education, manufacturing, and </a:t>
+            </a:r>
+            <a:r>
+              <a:rPr lang="en-IN" dirty="0" err="1"/>
+              <a:t>defense</a:t>
+            </a:r>
+            <a:r>
+              <a:rPr lang="en-IN" dirty="0"/>
+              <a:t>.</a:t>
+            </a:r>
+          </a:p>
+          <a:p>
+            <a:pPr lvl="0"/>
+            <a:r>
+              <a:rPr lang="en-IN" b="1" dirty="0"/>
+              <a:t>Encouragement:</a:t>
+            </a:r>
+            <a:r>
+              <a:rPr lang="en-IN" dirty="0"/>
+              <a:t> Stay updated, keep learning, innovate, and adapt to new technologies.</a:t>
+            </a:r>
+          </a:p>
+          <a:p>
+            <a:pPr lvl="0"/>
+            <a:r>
+              <a:rPr lang="en-IN" b="1" dirty="0"/>
+              <a:t>Global Outlook:</a:t>
+            </a:r>
+            <a:r>
+              <a:rPr lang="en-IN" dirty="0"/>
+              <a:t> Demand for skilled professionals will rise as industries digitize.</a:t>
+            </a:r>
+          </a:p>
           <a:p>
             <a:endParaRPr lang="en-US" dirty="0"/>
           </a:p>
@@ -14635,7 +14900,7 @@
           <a:p>
             <a:fld id="{DA60BA0E-20D0-4E7C-B286-26C960A6788F}" type="slidenum">
               <a:rPr lang="en-US" smtClean="0"/>
-              <a:t>12</a:t>
+              <a:t>10</a:t>
             </a:fld>
             <a:endParaRPr lang="en-US" dirty="0"/>
           </a:p>
@@ -14651,22 +14916,1083 @@
   <p:clrMapOvr>
     <a:masterClrMapping/>
   </p:clrMapOvr>
-  <mc:AlternateContent xmlns:mc="http://schemas.openxmlformats.org/markup-compatibility/2006">
-    <mc:Choice xmlns:p14="http://schemas.microsoft.com/office/powerpoint/2010/main" Requires="p14">
+  <mc:AlternateContent xmlns:mc="http://schemas.openxmlformats.org/markup-compatibility/2006" xmlns:p14="http://schemas.microsoft.com/office/powerpoint/2010/main">
+    <mc:Choice Requires="p14">
       <p:transition spd="slow" p14:dur="4000">
         <p14:vortex dir="r"/>
       </p:transition>
     </mc:Choice>
-    <mc:Fallback>
+    <mc:Fallback xmlns="">
       <p:transition spd="slow">
         <p:fade/>
       </p:transition>
     </mc:Fallback>
   </mc:AlternateContent>
+  <p:timing>
+    <p:tnLst>
+      <p:par>
+        <p:cTn id="1" dur="indefinite" restart="never" nodeType="tmRoot">
+          <p:childTnLst>
+            <p:seq concurrent="1" nextAc="seek">
+              <p:cTn id="2" dur="indefinite" nodeType="mainSeq">
+                <p:childTnLst>
+                  <p:par>
+                    <p:cTn id="3" fill="hold">
+                      <p:stCondLst>
+                        <p:cond delay="indefinite"/>
+                      </p:stCondLst>
+                      <p:childTnLst>
+                        <p:par>
+                          <p:cTn id="4" fill="hold">
+                            <p:stCondLst>
+                              <p:cond delay="0"/>
+                            </p:stCondLst>
+                            <p:childTnLst>
+                              <p:par>
+                                <p:cTn id="5" presetID="53" presetClass="entr" presetSubtype="16" fill="hold" grpId="0" nodeType="clickEffect">
+                                  <p:stCondLst>
+                                    <p:cond delay="0"/>
+                                  </p:stCondLst>
+                                  <p:childTnLst>
+                                    <p:set>
+                                      <p:cBhvr>
+                                        <p:cTn id="6" dur="1" fill="hold">
+                                          <p:stCondLst>
+                                            <p:cond delay="0"/>
+                                          </p:stCondLst>
+                                        </p:cTn>
+                                        <p:tgtEl>
+                                          <p:spTgt spid="2"/>
+                                        </p:tgtEl>
+                                        <p:attrNameLst>
+                                          <p:attrName>style.visibility</p:attrName>
+                                        </p:attrNameLst>
+                                      </p:cBhvr>
+                                      <p:to>
+                                        <p:strVal val="visible"/>
+                                      </p:to>
+                                    </p:set>
+                                    <p:anim calcmode="lin" valueType="num">
+                                      <p:cBhvr>
+                                        <p:cTn id="7" dur="500" fill="hold"/>
+                                        <p:tgtEl>
+                                          <p:spTgt spid="2"/>
+                                        </p:tgtEl>
+                                        <p:attrNameLst>
+                                          <p:attrName>ppt_w</p:attrName>
+                                        </p:attrNameLst>
+                                      </p:cBhvr>
+                                      <p:tavLst>
+                                        <p:tav tm="0">
+                                          <p:val>
+                                            <p:fltVal val="0"/>
+                                          </p:val>
+                                        </p:tav>
+                                        <p:tav tm="100000">
+                                          <p:val>
+                                            <p:strVal val="#ppt_w"/>
+                                          </p:val>
+                                        </p:tav>
+                                      </p:tavLst>
+                                    </p:anim>
+                                    <p:anim calcmode="lin" valueType="num">
+                                      <p:cBhvr>
+                                        <p:cTn id="8" dur="500" fill="hold"/>
+                                        <p:tgtEl>
+                                          <p:spTgt spid="2"/>
+                                        </p:tgtEl>
+                                        <p:attrNameLst>
+                                          <p:attrName>ppt_h</p:attrName>
+                                        </p:attrNameLst>
+                                      </p:cBhvr>
+                                      <p:tavLst>
+                                        <p:tav tm="0">
+                                          <p:val>
+                                            <p:fltVal val="0"/>
+                                          </p:val>
+                                        </p:tav>
+                                        <p:tav tm="100000">
+                                          <p:val>
+                                            <p:strVal val="#ppt_h"/>
+                                          </p:val>
+                                        </p:tav>
+                                      </p:tavLst>
+                                    </p:anim>
+                                    <p:animEffect transition="in" filter="fade">
+                                      <p:cBhvr>
+                                        <p:cTn id="9" dur="500"/>
+                                        <p:tgtEl>
+                                          <p:spTgt spid="2"/>
+                                        </p:tgtEl>
+                                      </p:cBhvr>
+                                    </p:animEffect>
+                                  </p:childTnLst>
+                                </p:cTn>
+                              </p:par>
+                            </p:childTnLst>
+                          </p:cTn>
+                        </p:par>
+                      </p:childTnLst>
+                    </p:cTn>
+                  </p:par>
+                  <p:par>
+                    <p:cTn id="10" fill="hold">
+                      <p:stCondLst>
+                        <p:cond delay="indefinite"/>
+                      </p:stCondLst>
+                      <p:childTnLst>
+                        <p:par>
+                          <p:cTn id="11" fill="hold">
+                            <p:stCondLst>
+                              <p:cond delay="0"/>
+                            </p:stCondLst>
+                            <p:childTnLst>
+                              <p:par>
+                                <p:cTn id="12" presetID="2" presetClass="entr" presetSubtype="4" fill="hold" grpId="0" nodeType="clickEffect">
+                                  <p:stCondLst>
+                                    <p:cond delay="0"/>
+                                  </p:stCondLst>
+                                  <p:childTnLst>
+                                    <p:set>
+                                      <p:cBhvr>
+                                        <p:cTn id="13" dur="1" fill="hold">
+                                          <p:stCondLst>
+                                            <p:cond delay="0"/>
+                                          </p:stCondLst>
+                                        </p:cTn>
+                                        <p:tgtEl>
+                                          <p:spTgt spid="3">
+                                            <p:txEl>
+                                              <p:pRg st="0" end="0"/>
+                                            </p:txEl>
+                                          </p:spTgt>
+                                        </p:tgtEl>
+                                        <p:attrNameLst>
+                                          <p:attrName>style.visibility</p:attrName>
+                                        </p:attrNameLst>
+                                      </p:cBhvr>
+                                      <p:to>
+                                        <p:strVal val="visible"/>
+                                      </p:to>
+                                    </p:set>
+                                    <p:anim calcmode="lin" valueType="num">
+                                      <p:cBhvr additive="base">
+                                        <p:cTn id="14" dur="500" fill="hold"/>
+                                        <p:tgtEl>
+                                          <p:spTgt spid="3">
+                                            <p:txEl>
+                                              <p:pRg st="0" end="0"/>
+                                            </p:txEl>
+                                          </p:spTgt>
+                                        </p:tgtEl>
+                                        <p:attrNameLst>
+                                          <p:attrName>ppt_x</p:attrName>
+                                        </p:attrNameLst>
+                                      </p:cBhvr>
+                                      <p:tavLst>
+                                        <p:tav tm="0">
+                                          <p:val>
+                                            <p:strVal val="#ppt_x"/>
+                                          </p:val>
+                                        </p:tav>
+                                        <p:tav tm="100000">
+                                          <p:val>
+                                            <p:strVal val="#ppt_x"/>
+                                          </p:val>
+                                        </p:tav>
+                                      </p:tavLst>
+                                    </p:anim>
+                                    <p:anim calcmode="lin" valueType="num">
+                                      <p:cBhvr additive="base">
+                                        <p:cTn id="15" dur="500" fill="hold"/>
+                                        <p:tgtEl>
+                                          <p:spTgt spid="3">
+                                            <p:txEl>
+                                              <p:pRg st="0" end="0"/>
+                                            </p:txEl>
+                                          </p:spTgt>
+                                        </p:tgtEl>
+                                        <p:attrNameLst>
+                                          <p:attrName>ppt_y</p:attrName>
+                                        </p:attrNameLst>
+                                      </p:cBhvr>
+                                      <p:tavLst>
+                                        <p:tav tm="0">
+                                          <p:val>
+                                            <p:strVal val="1+#ppt_h/2"/>
+                                          </p:val>
+                                        </p:tav>
+                                        <p:tav tm="100000">
+                                          <p:val>
+                                            <p:strVal val="#ppt_y"/>
+                                          </p:val>
+                                        </p:tav>
+                                      </p:tavLst>
+                                    </p:anim>
+                                  </p:childTnLst>
+                                </p:cTn>
+                              </p:par>
+                            </p:childTnLst>
+                          </p:cTn>
+                        </p:par>
+                      </p:childTnLst>
+                    </p:cTn>
+                  </p:par>
+                  <p:par>
+                    <p:cTn id="16" fill="hold">
+                      <p:stCondLst>
+                        <p:cond delay="indefinite"/>
+                      </p:stCondLst>
+                      <p:childTnLst>
+                        <p:par>
+                          <p:cTn id="17" fill="hold">
+                            <p:stCondLst>
+                              <p:cond delay="0"/>
+                            </p:stCondLst>
+                            <p:childTnLst>
+                              <p:par>
+                                <p:cTn id="18" presetID="2" presetClass="entr" presetSubtype="4" fill="hold" grpId="0" nodeType="clickEffect">
+                                  <p:stCondLst>
+                                    <p:cond delay="0"/>
+                                  </p:stCondLst>
+                                  <p:childTnLst>
+                                    <p:set>
+                                      <p:cBhvr>
+                                        <p:cTn id="19" dur="1" fill="hold">
+                                          <p:stCondLst>
+                                            <p:cond delay="0"/>
+                                          </p:stCondLst>
+                                        </p:cTn>
+                                        <p:tgtEl>
+                                          <p:spTgt spid="3">
+                                            <p:txEl>
+                                              <p:pRg st="1" end="1"/>
+                                            </p:txEl>
+                                          </p:spTgt>
+                                        </p:tgtEl>
+                                        <p:attrNameLst>
+                                          <p:attrName>style.visibility</p:attrName>
+                                        </p:attrNameLst>
+                                      </p:cBhvr>
+                                      <p:to>
+                                        <p:strVal val="visible"/>
+                                      </p:to>
+                                    </p:set>
+                                    <p:anim calcmode="lin" valueType="num">
+                                      <p:cBhvr additive="base">
+                                        <p:cTn id="20" dur="500" fill="hold"/>
+                                        <p:tgtEl>
+                                          <p:spTgt spid="3">
+                                            <p:txEl>
+                                              <p:pRg st="1" end="1"/>
+                                            </p:txEl>
+                                          </p:spTgt>
+                                        </p:tgtEl>
+                                        <p:attrNameLst>
+                                          <p:attrName>ppt_x</p:attrName>
+                                        </p:attrNameLst>
+                                      </p:cBhvr>
+                                      <p:tavLst>
+                                        <p:tav tm="0">
+                                          <p:val>
+                                            <p:strVal val="#ppt_x"/>
+                                          </p:val>
+                                        </p:tav>
+                                        <p:tav tm="100000">
+                                          <p:val>
+                                            <p:strVal val="#ppt_x"/>
+                                          </p:val>
+                                        </p:tav>
+                                      </p:tavLst>
+                                    </p:anim>
+                                    <p:anim calcmode="lin" valueType="num">
+                                      <p:cBhvr additive="base">
+                                        <p:cTn id="21" dur="500" fill="hold"/>
+                                        <p:tgtEl>
+                                          <p:spTgt spid="3">
+                                            <p:txEl>
+                                              <p:pRg st="1" end="1"/>
+                                            </p:txEl>
+                                          </p:spTgt>
+                                        </p:tgtEl>
+                                        <p:attrNameLst>
+                                          <p:attrName>ppt_y</p:attrName>
+                                        </p:attrNameLst>
+                                      </p:cBhvr>
+                                      <p:tavLst>
+                                        <p:tav tm="0">
+                                          <p:val>
+                                            <p:strVal val="1+#ppt_h/2"/>
+                                          </p:val>
+                                        </p:tav>
+                                        <p:tav tm="100000">
+                                          <p:val>
+                                            <p:strVal val="#ppt_y"/>
+                                          </p:val>
+                                        </p:tav>
+                                      </p:tavLst>
+                                    </p:anim>
+                                  </p:childTnLst>
+                                </p:cTn>
+                              </p:par>
+                            </p:childTnLst>
+                          </p:cTn>
+                        </p:par>
+                      </p:childTnLst>
+                    </p:cTn>
+                  </p:par>
+                  <p:par>
+                    <p:cTn id="22" fill="hold">
+                      <p:stCondLst>
+                        <p:cond delay="indefinite"/>
+                      </p:stCondLst>
+                      <p:childTnLst>
+                        <p:par>
+                          <p:cTn id="23" fill="hold">
+                            <p:stCondLst>
+                              <p:cond delay="0"/>
+                            </p:stCondLst>
+                            <p:childTnLst>
+                              <p:par>
+                                <p:cTn id="24" presetID="2" presetClass="entr" presetSubtype="4" fill="hold" grpId="0" nodeType="clickEffect">
+                                  <p:stCondLst>
+                                    <p:cond delay="0"/>
+                                  </p:stCondLst>
+                                  <p:childTnLst>
+                                    <p:set>
+                                      <p:cBhvr>
+                                        <p:cTn id="25" dur="1" fill="hold">
+                                          <p:stCondLst>
+                                            <p:cond delay="0"/>
+                                          </p:stCondLst>
+                                        </p:cTn>
+                                        <p:tgtEl>
+                                          <p:spTgt spid="3">
+                                            <p:txEl>
+                                              <p:pRg st="2" end="2"/>
+                                            </p:txEl>
+                                          </p:spTgt>
+                                        </p:tgtEl>
+                                        <p:attrNameLst>
+                                          <p:attrName>style.visibility</p:attrName>
+                                        </p:attrNameLst>
+                                      </p:cBhvr>
+                                      <p:to>
+                                        <p:strVal val="visible"/>
+                                      </p:to>
+                                    </p:set>
+                                    <p:anim calcmode="lin" valueType="num">
+                                      <p:cBhvr additive="base">
+                                        <p:cTn id="26" dur="500" fill="hold"/>
+                                        <p:tgtEl>
+                                          <p:spTgt spid="3">
+                                            <p:txEl>
+                                              <p:pRg st="2" end="2"/>
+                                            </p:txEl>
+                                          </p:spTgt>
+                                        </p:tgtEl>
+                                        <p:attrNameLst>
+                                          <p:attrName>ppt_x</p:attrName>
+                                        </p:attrNameLst>
+                                      </p:cBhvr>
+                                      <p:tavLst>
+                                        <p:tav tm="0">
+                                          <p:val>
+                                            <p:strVal val="#ppt_x"/>
+                                          </p:val>
+                                        </p:tav>
+                                        <p:tav tm="100000">
+                                          <p:val>
+                                            <p:strVal val="#ppt_x"/>
+                                          </p:val>
+                                        </p:tav>
+                                      </p:tavLst>
+                                    </p:anim>
+                                    <p:anim calcmode="lin" valueType="num">
+                                      <p:cBhvr additive="base">
+                                        <p:cTn id="27" dur="500" fill="hold"/>
+                                        <p:tgtEl>
+                                          <p:spTgt spid="3">
+                                            <p:txEl>
+                                              <p:pRg st="2" end="2"/>
+                                            </p:txEl>
+                                          </p:spTgt>
+                                        </p:tgtEl>
+                                        <p:attrNameLst>
+                                          <p:attrName>ppt_y</p:attrName>
+                                        </p:attrNameLst>
+                                      </p:cBhvr>
+                                      <p:tavLst>
+                                        <p:tav tm="0">
+                                          <p:val>
+                                            <p:strVal val="1+#ppt_h/2"/>
+                                          </p:val>
+                                        </p:tav>
+                                        <p:tav tm="100000">
+                                          <p:val>
+                                            <p:strVal val="#ppt_y"/>
+                                          </p:val>
+                                        </p:tav>
+                                      </p:tavLst>
+                                    </p:anim>
+                                  </p:childTnLst>
+                                </p:cTn>
+                              </p:par>
+                            </p:childTnLst>
+                          </p:cTn>
+                        </p:par>
+                      </p:childTnLst>
+                    </p:cTn>
+                  </p:par>
+                  <p:par>
+                    <p:cTn id="28" fill="hold">
+                      <p:stCondLst>
+                        <p:cond delay="indefinite"/>
+                      </p:stCondLst>
+                      <p:childTnLst>
+                        <p:par>
+                          <p:cTn id="29" fill="hold">
+                            <p:stCondLst>
+                              <p:cond delay="0"/>
+                            </p:stCondLst>
+                            <p:childTnLst>
+                              <p:par>
+                                <p:cTn id="30" presetID="2" presetClass="entr" presetSubtype="4" fill="hold" grpId="0" nodeType="clickEffect">
+                                  <p:stCondLst>
+                                    <p:cond delay="0"/>
+                                  </p:stCondLst>
+                                  <p:childTnLst>
+                                    <p:set>
+                                      <p:cBhvr>
+                                        <p:cTn id="31" dur="1" fill="hold">
+                                          <p:stCondLst>
+                                            <p:cond delay="0"/>
+                                          </p:stCondLst>
+                                        </p:cTn>
+                                        <p:tgtEl>
+                                          <p:spTgt spid="3">
+                                            <p:txEl>
+                                              <p:pRg st="3" end="3"/>
+                                            </p:txEl>
+                                          </p:spTgt>
+                                        </p:tgtEl>
+                                        <p:attrNameLst>
+                                          <p:attrName>style.visibility</p:attrName>
+                                        </p:attrNameLst>
+                                      </p:cBhvr>
+                                      <p:to>
+                                        <p:strVal val="visible"/>
+                                      </p:to>
+                                    </p:set>
+                                    <p:anim calcmode="lin" valueType="num">
+                                      <p:cBhvr additive="base">
+                                        <p:cTn id="32" dur="500" fill="hold"/>
+                                        <p:tgtEl>
+                                          <p:spTgt spid="3">
+                                            <p:txEl>
+                                              <p:pRg st="3" end="3"/>
+                                            </p:txEl>
+                                          </p:spTgt>
+                                        </p:tgtEl>
+                                        <p:attrNameLst>
+                                          <p:attrName>ppt_x</p:attrName>
+                                        </p:attrNameLst>
+                                      </p:cBhvr>
+                                      <p:tavLst>
+                                        <p:tav tm="0">
+                                          <p:val>
+                                            <p:strVal val="#ppt_x"/>
+                                          </p:val>
+                                        </p:tav>
+                                        <p:tav tm="100000">
+                                          <p:val>
+                                            <p:strVal val="#ppt_x"/>
+                                          </p:val>
+                                        </p:tav>
+                                      </p:tavLst>
+                                    </p:anim>
+                                    <p:anim calcmode="lin" valueType="num">
+                                      <p:cBhvr additive="base">
+                                        <p:cTn id="33" dur="500" fill="hold"/>
+                                        <p:tgtEl>
+                                          <p:spTgt spid="3">
+                                            <p:txEl>
+                                              <p:pRg st="3" end="3"/>
+                                            </p:txEl>
+                                          </p:spTgt>
+                                        </p:tgtEl>
+                                        <p:attrNameLst>
+                                          <p:attrName>ppt_y</p:attrName>
+                                        </p:attrNameLst>
+                                      </p:cBhvr>
+                                      <p:tavLst>
+                                        <p:tav tm="0">
+                                          <p:val>
+                                            <p:strVal val="1+#ppt_h/2"/>
+                                          </p:val>
+                                        </p:tav>
+                                        <p:tav tm="100000">
+                                          <p:val>
+                                            <p:strVal val="#ppt_y"/>
+                                          </p:val>
+                                        </p:tav>
+                                      </p:tavLst>
+                                    </p:anim>
+                                  </p:childTnLst>
+                                </p:cTn>
+                              </p:par>
+                            </p:childTnLst>
+                          </p:cTn>
+                        </p:par>
+                      </p:childTnLst>
+                    </p:cTn>
+                  </p:par>
+                  <p:par>
+                    <p:cTn id="34" fill="hold">
+                      <p:stCondLst>
+                        <p:cond delay="indefinite"/>
+                      </p:stCondLst>
+                      <p:childTnLst>
+                        <p:par>
+                          <p:cTn id="35" fill="hold">
+                            <p:stCondLst>
+                              <p:cond delay="0"/>
+                            </p:stCondLst>
+                            <p:childTnLst>
+                              <p:par>
+                                <p:cTn id="36" presetID="2" presetClass="entr" presetSubtype="4" fill="hold" grpId="0" nodeType="clickEffect">
+                                  <p:stCondLst>
+                                    <p:cond delay="0"/>
+                                  </p:stCondLst>
+                                  <p:childTnLst>
+                                    <p:set>
+                                      <p:cBhvr>
+                                        <p:cTn id="37" dur="1" fill="hold">
+                                          <p:stCondLst>
+                                            <p:cond delay="0"/>
+                                          </p:stCondLst>
+                                        </p:cTn>
+                                        <p:tgtEl>
+                                          <p:spTgt spid="3">
+                                            <p:txEl>
+                                              <p:pRg st="4" end="4"/>
+                                            </p:txEl>
+                                          </p:spTgt>
+                                        </p:tgtEl>
+                                        <p:attrNameLst>
+                                          <p:attrName>style.visibility</p:attrName>
+                                        </p:attrNameLst>
+                                      </p:cBhvr>
+                                      <p:to>
+                                        <p:strVal val="visible"/>
+                                      </p:to>
+                                    </p:set>
+                                    <p:anim calcmode="lin" valueType="num">
+                                      <p:cBhvr additive="base">
+                                        <p:cTn id="38" dur="500" fill="hold"/>
+                                        <p:tgtEl>
+                                          <p:spTgt spid="3">
+                                            <p:txEl>
+                                              <p:pRg st="4" end="4"/>
+                                            </p:txEl>
+                                          </p:spTgt>
+                                        </p:tgtEl>
+                                        <p:attrNameLst>
+                                          <p:attrName>ppt_x</p:attrName>
+                                        </p:attrNameLst>
+                                      </p:cBhvr>
+                                      <p:tavLst>
+                                        <p:tav tm="0">
+                                          <p:val>
+                                            <p:strVal val="#ppt_x"/>
+                                          </p:val>
+                                        </p:tav>
+                                        <p:tav tm="100000">
+                                          <p:val>
+                                            <p:strVal val="#ppt_x"/>
+                                          </p:val>
+                                        </p:tav>
+                                      </p:tavLst>
+                                    </p:anim>
+                                    <p:anim calcmode="lin" valueType="num">
+                                      <p:cBhvr additive="base">
+                                        <p:cTn id="39" dur="500" fill="hold"/>
+                                        <p:tgtEl>
+                                          <p:spTgt spid="3">
+                                            <p:txEl>
+                                              <p:pRg st="4" end="4"/>
+                                            </p:txEl>
+                                          </p:spTgt>
+                                        </p:tgtEl>
+                                        <p:attrNameLst>
+                                          <p:attrName>ppt_y</p:attrName>
+                                        </p:attrNameLst>
+                                      </p:cBhvr>
+                                      <p:tavLst>
+                                        <p:tav tm="0">
+                                          <p:val>
+                                            <p:strVal val="1+#ppt_h/2"/>
+                                          </p:val>
+                                        </p:tav>
+                                        <p:tav tm="100000">
+                                          <p:val>
+                                            <p:strVal val="#ppt_y"/>
+                                          </p:val>
+                                        </p:tav>
+                                      </p:tavLst>
+                                    </p:anim>
+                                  </p:childTnLst>
+                                </p:cTn>
+                              </p:par>
+                            </p:childTnLst>
+                          </p:cTn>
+                        </p:par>
+                      </p:childTnLst>
+                    </p:cTn>
+                  </p:par>
+                  <p:par>
+                    <p:cTn id="40" fill="hold">
+                      <p:stCondLst>
+                        <p:cond delay="indefinite"/>
+                      </p:stCondLst>
+                      <p:childTnLst>
+                        <p:par>
+                          <p:cTn id="41" fill="hold">
+                            <p:stCondLst>
+                              <p:cond delay="0"/>
+                            </p:stCondLst>
+                            <p:childTnLst>
+                              <p:par>
+                                <p:cTn id="42" presetID="2" presetClass="entr" presetSubtype="4" fill="hold" grpId="0" nodeType="clickEffect">
+                                  <p:stCondLst>
+                                    <p:cond delay="0"/>
+                                  </p:stCondLst>
+                                  <p:childTnLst>
+                                    <p:set>
+                                      <p:cBhvr>
+                                        <p:cTn id="43" dur="1" fill="hold">
+                                          <p:stCondLst>
+                                            <p:cond delay="0"/>
+                                          </p:stCondLst>
+                                        </p:cTn>
+                                        <p:tgtEl>
+                                          <p:spTgt spid="3">
+                                            <p:txEl>
+                                              <p:pRg st="5" end="5"/>
+                                            </p:txEl>
+                                          </p:spTgt>
+                                        </p:tgtEl>
+                                        <p:attrNameLst>
+                                          <p:attrName>style.visibility</p:attrName>
+                                        </p:attrNameLst>
+                                      </p:cBhvr>
+                                      <p:to>
+                                        <p:strVal val="visible"/>
+                                      </p:to>
+                                    </p:set>
+                                    <p:anim calcmode="lin" valueType="num">
+                                      <p:cBhvr additive="base">
+                                        <p:cTn id="44" dur="500" fill="hold"/>
+                                        <p:tgtEl>
+                                          <p:spTgt spid="3">
+                                            <p:txEl>
+                                              <p:pRg st="5" end="5"/>
+                                            </p:txEl>
+                                          </p:spTgt>
+                                        </p:tgtEl>
+                                        <p:attrNameLst>
+                                          <p:attrName>ppt_x</p:attrName>
+                                        </p:attrNameLst>
+                                      </p:cBhvr>
+                                      <p:tavLst>
+                                        <p:tav tm="0">
+                                          <p:val>
+                                            <p:strVal val="#ppt_x"/>
+                                          </p:val>
+                                        </p:tav>
+                                        <p:tav tm="100000">
+                                          <p:val>
+                                            <p:strVal val="#ppt_x"/>
+                                          </p:val>
+                                        </p:tav>
+                                      </p:tavLst>
+                                    </p:anim>
+                                    <p:anim calcmode="lin" valueType="num">
+                                      <p:cBhvr additive="base">
+                                        <p:cTn id="45" dur="500" fill="hold"/>
+                                        <p:tgtEl>
+                                          <p:spTgt spid="3">
+                                            <p:txEl>
+                                              <p:pRg st="5" end="5"/>
+                                            </p:txEl>
+                                          </p:spTgt>
+                                        </p:tgtEl>
+                                        <p:attrNameLst>
+                                          <p:attrName>ppt_y</p:attrName>
+                                        </p:attrNameLst>
+                                      </p:cBhvr>
+                                      <p:tavLst>
+                                        <p:tav tm="0">
+                                          <p:val>
+                                            <p:strVal val="1+#ppt_h/2"/>
+                                          </p:val>
+                                        </p:tav>
+                                        <p:tav tm="100000">
+                                          <p:val>
+                                            <p:strVal val="#ppt_y"/>
+                                          </p:val>
+                                        </p:tav>
+                                      </p:tavLst>
+                                    </p:anim>
+                                  </p:childTnLst>
+                                </p:cTn>
+                              </p:par>
+                            </p:childTnLst>
+                          </p:cTn>
+                        </p:par>
+                      </p:childTnLst>
+                    </p:cTn>
+                  </p:par>
+                  <p:par>
+                    <p:cTn id="46" fill="hold">
+                      <p:stCondLst>
+                        <p:cond delay="indefinite"/>
+                      </p:stCondLst>
+                      <p:childTnLst>
+                        <p:par>
+                          <p:cTn id="47" fill="hold">
+                            <p:stCondLst>
+                              <p:cond delay="0"/>
+                            </p:stCondLst>
+                            <p:childTnLst>
+                              <p:par>
+                                <p:cTn id="48" presetID="2" presetClass="entr" presetSubtype="4" fill="hold" grpId="0" nodeType="clickEffect">
+                                  <p:stCondLst>
+                                    <p:cond delay="0"/>
+                                  </p:stCondLst>
+                                  <p:childTnLst>
+                                    <p:set>
+                                      <p:cBhvr>
+                                        <p:cTn id="49" dur="1" fill="hold">
+                                          <p:stCondLst>
+                                            <p:cond delay="0"/>
+                                          </p:stCondLst>
+                                        </p:cTn>
+                                        <p:tgtEl>
+                                          <p:spTgt spid="4">
+                                            <p:txEl>
+                                              <p:pRg st="0" end="0"/>
+                                            </p:txEl>
+                                          </p:spTgt>
+                                        </p:tgtEl>
+                                        <p:attrNameLst>
+                                          <p:attrName>style.visibility</p:attrName>
+                                        </p:attrNameLst>
+                                      </p:cBhvr>
+                                      <p:to>
+                                        <p:strVal val="visible"/>
+                                      </p:to>
+                                    </p:set>
+                                    <p:anim calcmode="lin" valueType="num">
+                                      <p:cBhvr additive="base">
+                                        <p:cTn id="50" dur="500" fill="hold"/>
+                                        <p:tgtEl>
+                                          <p:spTgt spid="4">
+                                            <p:txEl>
+                                              <p:pRg st="0" end="0"/>
+                                            </p:txEl>
+                                          </p:spTgt>
+                                        </p:tgtEl>
+                                        <p:attrNameLst>
+                                          <p:attrName>ppt_x</p:attrName>
+                                        </p:attrNameLst>
+                                      </p:cBhvr>
+                                      <p:tavLst>
+                                        <p:tav tm="0">
+                                          <p:val>
+                                            <p:strVal val="#ppt_x"/>
+                                          </p:val>
+                                        </p:tav>
+                                        <p:tav tm="100000">
+                                          <p:val>
+                                            <p:strVal val="#ppt_x"/>
+                                          </p:val>
+                                        </p:tav>
+                                      </p:tavLst>
+                                    </p:anim>
+                                    <p:anim calcmode="lin" valueType="num">
+                                      <p:cBhvr additive="base">
+                                        <p:cTn id="51" dur="500" fill="hold"/>
+                                        <p:tgtEl>
+                                          <p:spTgt spid="4">
+                                            <p:txEl>
+                                              <p:pRg st="0" end="0"/>
+                                            </p:txEl>
+                                          </p:spTgt>
+                                        </p:tgtEl>
+                                        <p:attrNameLst>
+                                          <p:attrName>ppt_y</p:attrName>
+                                        </p:attrNameLst>
+                                      </p:cBhvr>
+                                      <p:tavLst>
+                                        <p:tav tm="0">
+                                          <p:val>
+                                            <p:strVal val="1+#ppt_h/2"/>
+                                          </p:val>
+                                        </p:tav>
+                                        <p:tav tm="100000">
+                                          <p:val>
+                                            <p:strVal val="#ppt_y"/>
+                                          </p:val>
+                                        </p:tav>
+                                      </p:tavLst>
+                                    </p:anim>
+                                  </p:childTnLst>
+                                </p:cTn>
+                              </p:par>
+                            </p:childTnLst>
+                          </p:cTn>
+                        </p:par>
+                      </p:childTnLst>
+                    </p:cTn>
+                  </p:par>
+                  <p:par>
+                    <p:cTn id="52" fill="hold">
+                      <p:stCondLst>
+                        <p:cond delay="indefinite"/>
+                      </p:stCondLst>
+                      <p:childTnLst>
+                        <p:par>
+                          <p:cTn id="53" fill="hold">
+                            <p:stCondLst>
+                              <p:cond delay="0"/>
+                            </p:stCondLst>
+                            <p:childTnLst>
+                              <p:par>
+                                <p:cTn id="54" presetID="2" presetClass="entr" presetSubtype="4" fill="hold" grpId="0" nodeType="clickEffect">
+                                  <p:stCondLst>
+                                    <p:cond delay="0"/>
+                                  </p:stCondLst>
+                                  <p:childTnLst>
+                                    <p:set>
+                                      <p:cBhvr>
+                                        <p:cTn id="55" dur="1" fill="hold">
+                                          <p:stCondLst>
+                                            <p:cond delay="0"/>
+                                          </p:stCondLst>
+                                        </p:cTn>
+                                        <p:tgtEl>
+                                          <p:spTgt spid="4">
+                                            <p:txEl>
+                                              <p:pRg st="1" end="1"/>
+                                            </p:txEl>
+                                          </p:spTgt>
+                                        </p:tgtEl>
+                                        <p:attrNameLst>
+                                          <p:attrName>style.visibility</p:attrName>
+                                        </p:attrNameLst>
+                                      </p:cBhvr>
+                                      <p:to>
+                                        <p:strVal val="visible"/>
+                                      </p:to>
+                                    </p:set>
+                                    <p:anim calcmode="lin" valueType="num">
+                                      <p:cBhvr additive="base">
+                                        <p:cTn id="56" dur="500" fill="hold"/>
+                                        <p:tgtEl>
+                                          <p:spTgt spid="4">
+                                            <p:txEl>
+                                              <p:pRg st="1" end="1"/>
+                                            </p:txEl>
+                                          </p:spTgt>
+                                        </p:tgtEl>
+                                        <p:attrNameLst>
+                                          <p:attrName>ppt_x</p:attrName>
+                                        </p:attrNameLst>
+                                      </p:cBhvr>
+                                      <p:tavLst>
+                                        <p:tav tm="0">
+                                          <p:val>
+                                            <p:strVal val="#ppt_x"/>
+                                          </p:val>
+                                        </p:tav>
+                                        <p:tav tm="100000">
+                                          <p:val>
+                                            <p:strVal val="#ppt_x"/>
+                                          </p:val>
+                                        </p:tav>
+                                      </p:tavLst>
+                                    </p:anim>
+                                    <p:anim calcmode="lin" valueType="num">
+                                      <p:cBhvr additive="base">
+                                        <p:cTn id="57" dur="500" fill="hold"/>
+                                        <p:tgtEl>
+                                          <p:spTgt spid="4">
+                                            <p:txEl>
+                                              <p:pRg st="1" end="1"/>
+                                            </p:txEl>
+                                          </p:spTgt>
+                                        </p:tgtEl>
+                                        <p:attrNameLst>
+                                          <p:attrName>ppt_y</p:attrName>
+                                        </p:attrNameLst>
+                                      </p:cBhvr>
+                                      <p:tavLst>
+                                        <p:tav tm="0">
+                                          <p:val>
+                                            <p:strVal val="1+#ppt_h/2"/>
+                                          </p:val>
+                                        </p:tav>
+                                        <p:tav tm="100000">
+                                          <p:val>
+                                            <p:strVal val="#ppt_y"/>
+                                          </p:val>
+                                        </p:tav>
+                                      </p:tavLst>
+                                    </p:anim>
+                                  </p:childTnLst>
+                                </p:cTn>
+                              </p:par>
+                            </p:childTnLst>
+                          </p:cTn>
+                        </p:par>
+                      </p:childTnLst>
+                    </p:cTn>
+                  </p:par>
+                  <p:par>
+                    <p:cTn id="58" fill="hold">
+                      <p:stCondLst>
+                        <p:cond delay="indefinite"/>
+                      </p:stCondLst>
+                      <p:childTnLst>
+                        <p:par>
+                          <p:cTn id="59" fill="hold">
+                            <p:stCondLst>
+                              <p:cond delay="0"/>
+                            </p:stCondLst>
+                            <p:childTnLst>
+                              <p:par>
+                                <p:cTn id="60" presetID="2" presetClass="entr" presetSubtype="4" fill="hold" grpId="0" nodeType="clickEffect">
+                                  <p:stCondLst>
+                                    <p:cond delay="0"/>
+                                  </p:stCondLst>
+                                  <p:childTnLst>
+                                    <p:set>
+                                      <p:cBhvr>
+                                        <p:cTn id="61" dur="1" fill="hold">
+                                          <p:stCondLst>
+                                            <p:cond delay="0"/>
+                                          </p:stCondLst>
+                                        </p:cTn>
+                                        <p:tgtEl>
+                                          <p:spTgt spid="4">
+                                            <p:txEl>
+                                              <p:pRg st="2" end="2"/>
+                                            </p:txEl>
+                                          </p:spTgt>
+                                        </p:tgtEl>
+                                        <p:attrNameLst>
+                                          <p:attrName>style.visibility</p:attrName>
+                                        </p:attrNameLst>
+                                      </p:cBhvr>
+                                      <p:to>
+                                        <p:strVal val="visible"/>
+                                      </p:to>
+                                    </p:set>
+                                    <p:anim calcmode="lin" valueType="num">
+                                      <p:cBhvr additive="base">
+                                        <p:cTn id="62" dur="500" fill="hold"/>
+                                        <p:tgtEl>
+                                          <p:spTgt spid="4">
+                                            <p:txEl>
+                                              <p:pRg st="2" end="2"/>
+                                            </p:txEl>
+                                          </p:spTgt>
+                                        </p:tgtEl>
+                                        <p:attrNameLst>
+                                          <p:attrName>ppt_x</p:attrName>
+                                        </p:attrNameLst>
+                                      </p:cBhvr>
+                                      <p:tavLst>
+                                        <p:tav tm="0">
+                                          <p:val>
+                                            <p:strVal val="#ppt_x"/>
+                                          </p:val>
+                                        </p:tav>
+                                        <p:tav tm="100000">
+                                          <p:val>
+                                            <p:strVal val="#ppt_x"/>
+                                          </p:val>
+                                        </p:tav>
+                                      </p:tavLst>
+                                    </p:anim>
+                                    <p:anim calcmode="lin" valueType="num">
+                                      <p:cBhvr additive="base">
+                                        <p:cTn id="63" dur="500" fill="hold"/>
+                                        <p:tgtEl>
+                                          <p:spTgt spid="4">
+                                            <p:txEl>
+                                              <p:pRg st="2" end="2"/>
+                                            </p:txEl>
+                                          </p:spTgt>
+                                        </p:tgtEl>
+                                        <p:attrNameLst>
+                                          <p:attrName>ppt_y</p:attrName>
+                                        </p:attrNameLst>
+                                      </p:cBhvr>
+                                      <p:tavLst>
+                                        <p:tav tm="0">
+                                          <p:val>
+                                            <p:strVal val="1+#ppt_h/2"/>
+                                          </p:val>
+                                        </p:tav>
+                                        <p:tav tm="100000">
+                                          <p:val>
+                                            <p:strVal val="#ppt_y"/>
+                                          </p:val>
+                                        </p:tav>
+                                      </p:tavLst>
+                                    </p:anim>
+                                  </p:childTnLst>
+                                </p:cTn>
+                              </p:par>
+                            </p:childTnLst>
+                          </p:cTn>
+                        </p:par>
+                      </p:childTnLst>
+                    </p:cTn>
+                  </p:par>
+                </p:childTnLst>
+              </p:cTn>
+              <p:prevCondLst>
+                <p:cond evt="onPrev" delay="0">
+                  <p:tgtEl>
+                    <p:sldTgt/>
+                  </p:tgtEl>
+                </p:cond>
+              </p:prevCondLst>
+              <p:nextCondLst>
+                <p:cond evt="onNext" delay="0">
+                  <p:tgtEl>
+                    <p:sldTgt/>
+                  </p:tgtEl>
+                </p:cond>
+              </p:nextCondLst>
+            </p:seq>
+          </p:childTnLst>
+        </p:cTn>
+      </p:par>
+    </p:tnLst>
+    <p:bldLst>
+      <p:bldP spid="2" grpId="0"/>
+      <p:bldP spid="3" grpId="0" build="p"/>
+      <p:bldP spid="4" grpId="0" build="p"/>
+    </p:bldLst>
+  </p:timing>
 </p:sld>
 </file>
 
-<file path=ppt/slides/slide13.xml><?xml version="1.0" encoding="utf-8"?>
+<file path=ppt/slides/slide11.xml><?xml version="1.0" encoding="utf-8"?>
 <p:sld xmlns:a="http://schemas.openxmlformats.org/drawingml/2006/main" xmlns:r="http://schemas.openxmlformats.org/officeDocument/2006/relationships" xmlns:p="http://schemas.openxmlformats.org/presentationml/2006/main">
   <p:cSld>
     <p:spTree>
@@ -14701,18 +16027,18 @@
         </p:nvSpPr>
         <p:spPr>
           <a:xfrm>
-            <a:off x="3428934" y="1524000"/>
-            <a:ext cx="5330955" cy="2552700"/>
+            <a:off x="3428934" y="2667000"/>
+            <a:ext cx="5330955" cy="1409700"/>
           </a:xfrm>
         </p:spPr>
         <p:txBody>
           <a:bodyPr>
-            <a:normAutofit/>
+            <a:noAutofit/>
           </a:bodyPr>
           <a:lstStyle/>
           <a:p>
             <a:r>
-              <a:rPr lang="en-US" sz="9600" dirty="0"/>
+              <a:rPr lang="en-US" sz="11000" dirty="0"/>
               <a:t>Thank you</a:t>
             </a:r>
           </a:p>
@@ -14728,18 +16054,347 @@
   <p:clrMapOvr>
     <a:masterClrMapping/>
   </p:clrMapOvr>
-  <mc:AlternateContent xmlns:mc="http://schemas.openxmlformats.org/markup-compatibility/2006">
-    <mc:Choice xmlns:p14="http://schemas.microsoft.com/office/powerpoint/2010/main" Requires="p14">
+  <mc:AlternateContent xmlns:mc="http://schemas.openxmlformats.org/markup-compatibility/2006" xmlns:p14="http://schemas.microsoft.com/office/powerpoint/2010/main">
+    <mc:Choice Requires="p14">
       <p:transition spd="slow" p14:dur="4000">
         <p14:vortex dir="r"/>
       </p:transition>
     </mc:Choice>
-    <mc:Fallback>
+    <mc:Fallback xmlns="">
       <p:transition spd="slow">
         <p:fade/>
       </p:transition>
     </mc:Fallback>
   </mc:AlternateContent>
+  <p:timing>
+    <p:tnLst>
+      <p:par>
+        <p:cTn id="1" dur="indefinite" restart="never" nodeType="tmRoot">
+          <p:childTnLst>
+            <p:seq concurrent="1" nextAc="seek">
+              <p:cTn id="2" dur="indefinite" nodeType="mainSeq">
+                <p:childTnLst>
+                  <p:par>
+                    <p:cTn id="3" fill="hold">
+                      <p:stCondLst>
+                        <p:cond delay="indefinite"/>
+                      </p:stCondLst>
+                      <p:childTnLst>
+                        <p:par>
+                          <p:cTn id="4" fill="hold">
+                            <p:stCondLst>
+                              <p:cond delay="0"/>
+                            </p:stCondLst>
+                            <p:childTnLst>
+                              <p:par>
+                                <p:cTn id="5" presetID="26" presetClass="entr" presetSubtype="0" fill="hold" grpId="0" nodeType="clickEffect">
+                                  <p:stCondLst>
+                                    <p:cond delay="0"/>
+                                  </p:stCondLst>
+                                  <p:childTnLst>
+                                    <p:set>
+                                      <p:cBhvr>
+                                        <p:cTn id="6" dur="1" fill="hold">
+                                          <p:stCondLst>
+                                            <p:cond delay="0"/>
+                                          </p:stCondLst>
+                                        </p:cTn>
+                                        <p:tgtEl>
+                                          <p:spTgt spid="2"/>
+                                        </p:tgtEl>
+                                        <p:attrNameLst>
+                                          <p:attrName>style.visibility</p:attrName>
+                                        </p:attrNameLst>
+                                      </p:cBhvr>
+                                      <p:to>
+                                        <p:strVal val="visible"/>
+                                      </p:to>
+                                    </p:set>
+                                    <p:animEffect transition="in" filter="wipe(down)">
+                                      <p:cBhvr>
+                                        <p:cTn id="7" dur="580">
+                                          <p:stCondLst>
+                                            <p:cond delay="0"/>
+                                          </p:stCondLst>
+                                        </p:cTn>
+                                        <p:tgtEl>
+                                          <p:spTgt spid="2"/>
+                                        </p:tgtEl>
+                                      </p:cBhvr>
+                                    </p:animEffect>
+                                    <p:anim calcmode="lin" valueType="num">
+                                      <p:cBhvr>
+                                        <p:cTn id="8" dur="1822" tmFilter="0,0; 0.14,0.36; 0.43,0.73; 0.71,0.91; 1.0,1.0">
+                                          <p:stCondLst>
+                                            <p:cond delay="0"/>
+                                          </p:stCondLst>
+                                        </p:cTn>
+                                        <p:tgtEl>
+                                          <p:spTgt spid="2"/>
+                                        </p:tgtEl>
+                                        <p:attrNameLst>
+                                          <p:attrName>ppt_x</p:attrName>
+                                        </p:attrNameLst>
+                                      </p:cBhvr>
+                                      <p:tavLst>
+                                        <p:tav tm="0">
+                                          <p:val>
+                                            <p:strVal val="#ppt_x-0.25"/>
+                                          </p:val>
+                                        </p:tav>
+                                        <p:tav tm="100000">
+                                          <p:val>
+                                            <p:strVal val="#ppt_x"/>
+                                          </p:val>
+                                        </p:tav>
+                                      </p:tavLst>
+                                    </p:anim>
+                                    <p:anim calcmode="lin" valueType="num">
+                                      <p:cBhvr>
+                                        <p:cTn id="9" dur="664" tmFilter="0.0,0.0; 0.25,0.07; 0.50,0.2; 0.75,0.467; 1.0,1.0">
+                                          <p:stCondLst>
+                                            <p:cond delay="0"/>
+                                          </p:stCondLst>
+                                        </p:cTn>
+                                        <p:tgtEl>
+                                          <p:spTgt spid="2"/>
+                                        </p:tgtEl>
+                                        <p:attrNameLst>
+                                          <p:attrName>ppt_y</p:attrName>
+                                        </p:attrNameLst>
+                                      </p:cBhvr>
+                                      <p:tavLst>
+                                        <p:tav tm="0" fmla="#ppt_y-sin(pi*$)/3">
+                                          <p:val>
+                                            <p:fltVal val="0.5"/>
+                                          </p:val>
+                                        </p:tav>
+                                        <p:tav tm="100000">
+                                          <p:val>
+                                            <p:fltVal val="1"/>
+                                          </p:val>
+                                        </p:tav>
+                                      </p:tavLst>
+                                    </p:anim>
+                                    <p:anim calcmode="lin" valueType="num">
+                                      <p:cBhvr>
+                                        <p:cTn id="10" dur="664" tmFilter="0, 0; 0.125,0.2665; 0.25,0.4; 0.375,0.465; 0.5,0.5;  0.625,0.535; 0.75,0.6; 0.875,0.7335; 1,1">
+                                          <p:stCondLst>
+                                            <p:cond delay="664"/>
+                                          </p:stCondLst>
+                                        </p:cTn>
+                                        <p:tgtEl>
+                                          <p:spTgt spid="2"/>
+                                        </p:tgtEl>
+                                        <p:attrNameLst>
+                                          <p:attrName>ppt_y</p:attrName>
+                                        </p:attrNameLst>
+                                      </p:cBhvr>
+                                      <p:tavLst>
+                                        <p:tav tm="0" fmla="#ppt_y-sin(pi*$)/9">
+                                          <p:val>
+                                            <p:fltVal val="0"/>
+                                          </p:val>
+                                        </p:tav>
+                                        <p:tav tm="100000">
+                                          <p:val>
+                                            <p:fltVal val="1"/>
+                                          </p:val>
+                                        </p:tav>
+                                      </p:tavLst>
+                                    </p:anim>
+                                    <p:anim calcmode="lin" valueType="num">
+                                      <p:cBhvr>
+                                        <p:cTn id="11" dur="332" tmFilter="0, 0; 0.125,0.2665; 0.25,0.4; 0.375,0.465; 0.5,0.5;  0.625,0.535; 0.75,0.6; 0.875,0.7335; 1,1">
+                                          <p:stCondLst>
+                                            <p:cond delay="1324"/>
+                                          </p:stCondLst>
+                                        </p:cTn>
+                                        <p:tgtEl>
+                                          <p:spTgt spid="2"/>
+                                        </p:tgtEl>
+                                        <p:attrNameLst>
+                                          <p:attrName>ppt_y</p:attrName>
+                                        </p:attrNameLst>
+                                      </p:cBhvr>
+                                      <p:tavLst>
+                                        <p:tav tm="0" fmla="#ppt_y-sin(pi*$)/27">
+                                          <p:val>
+                                            <p:fltVal val="0"/>
+                                          </p:val>
+                                        </p:tav>
+                                        <p:tav tm="100000">
+                                          <p:val>
+                                            <p:fltVal val="1"/>
+                                          </p:val>
+                                        </p:tav>
+                                      </p:tavLst>
+                                    </p:anim>
+                                    <p:anim calcmode="lin" valueType="num">
+                                      <p:cBhvr>
+                                        <p:cTn id="12" dur="164" tmFilter="0, 0; 0.125,0.2665; 0.25,0.4; 0.375,0.465; 0.5,0.5;  0.625,0.535; 0.75,0.6; 0.875,0.7335; 1,1">
+                                          <p:stCondLst>
+                                            <p:cond delay="1656"/>
+                                          </p:stCondLst>
+                                        </p:cTn>
+                                        <p:tgtEl>
+                                          <p:spTgt spid="2"/>
+                                        </p:tgtEl>
+                                        <p:attrNameLst>
+                                          <p:attrName>ppt_y</p:attrName>
+                                        </p:attrNameLst>
+                                      </p:cBhvr>
+                                      <p:tavLst>
+                                        <p:tav tm="0" fmla="#ppt_y-sin(pi*$)/81">
+                                          <p:val>
+                                            <p:fltVal val="0"/>
+                                          </p:val>
+                                        </p:tav>
+                                        <p:tav tm="100000">
+                                          <p:val>
+                                            <p:fltVal val="1"/>
+                                          </p:val>
+                                        </p:tav>
+                                      </p:tavLst>
+                                    </p:anim>
+                                    <p:animScale>
+                                      <p:cBhvr>
+                                        <p:cTn id="13" dur="26">
+                                          <p:stCondLst>
+                                            <p:cond delay="650"/>
+                                          </p:stCondLst>
+                                        </p:cTn>
+                                        <p:tgtEl>
+                                          <p:spTgt spid="2"/>
+                                        </p:tgtEl>
+                                      </p:cBhvr>
+                                      <p:to x="100000" y="60000"/>
+                                    </p:animScale>
+                                    <p:animScale>
+                                      <p:cBhvr>
+                                        <p:cTn id="14" dur="166" decel="50000">
+                                          <p:stCondLst>
+                                            <p:cond delay="676"/>
+                                          </p:stCondLst>
+                                        </p:cTn>
+                                        <p:tgtEl>
+                                          <p:spTgt spid="2"/>
+                                        </p:tgtEl>
+                                      </p:cBhvr>
+                                      <p:to x="100000" y="100000"/>
+                                    </p:animScale>
+                                    <p:animScale>
+                                      <p:cBhvr>
+                                        <p:cTn id="15" dur="26">
+                                          <p:stCondLst>
+                                            <p:cond delay="1312"/>
+                                          </p:stCondLst>
+                                        </p:cTn>
+                                        <p:tgtEl>
+                                          <p:spTgt spid="2"/>
+                                        </p:tgtEl>
+                                      </p:cBhvr>
+                                      <p:to x="100000" y="80000"/>
+                                    </p:animScale>
+                                    <p:animScale>
+                                      <p:cBhvr>
+                                        <p:cTn id="16" dur="166" decel="50000">
+                                          <p:stCondLst>
+                                            <p:cond delay="1338"/>
+                                          </p:stCondLst>
+                                        </p:cTn>
+                                        <p:tgtEl>
+                                          <p:spTgt spid="2"/>
+                                        </p:tgtEl>
+                                      </p:cBhvr>
+                                      <p:to x="100000" y="100000"/>
+                                    </p:animScale>
+                                    <p:animScale>
+                                      <p:cBhvr>
+                                        <p:cTn id="17" dur="26">
+                                          <p:stCondLst>
+                                            <p:cond delay="1642"/>
+                                          </p:stCondLst>
+                                        </p:cTn>
+                                        <p:tgtEl>
+                                          <p:spTgt spid="2"/>
+                                        </p:tgtEl>
+                                      </p:cBhvr>
+                                      <p:to x="100000" y="90000"/>
+                                    </p:animScale>
+                                    <p:animScale>
+                                      <p:cBhvr>
+                                        <p:cTn id="18" dur="166" decel="50000">
+                                          <p:stCondLst>
+                                            <p:cond delay="1668"/>
+                                          </p:stCondLst>
+                                        </p:cTn>
+                                        <p:tgtEl>
+                                          <p:spTgt spid="2"/>
+                                        </p:tgtEl>
+                                      </p:cBhvr>
+                                      <p:to x="100000" y="100000"/>
+                                    </p:animScale>
+                                    <p:animScale>
+                                      <p:cBhvr>
+                                        <p:cTn id="19" dur="26">
+                                          <p:stCondLst>
+                                            <p:cond delay="1808"/>
+                                          </p:stCondLst>
+                                        </p:cTn>
+                                        <p:tgtEl>
+                                          <p:spTgt spid="2"/>
+                                        </p:tgtEl>
+                                      </p:cBhvr>
+                                      <p:to x="100000" y="95000"/>
+                                    </p:animScale>
+                                    <p:animScale>
+                                      <p:cBhvr>
+                                        <p:cTn id="20" dur="166" decel="50000">
+                                          <p:stCondLst>
+                                            <p:cond delay="1834"/>
+                                          </p:stCondLst>
+                                        </p:cTn>
+                                        <p:tgtEl>
+                                          <p:spTgt spid="2"/>
+                                        </p:tgtEl>
+                                      </p:cBhvr>
+                                      <p:to x="100000" y="100000"/>
+                                    </p:animScale>
+                                  </p:childTnLst>
+                                </p:cTn>
+                              </p:par>
+                            </p:childTnLst>
+                          </p:cTn>
+                        </p:par>
+                      </p:childTnLst>
+                    </p:cTn>
+                  </p:par>
+                </p:childTnLst>
+              </p:cTn>
+              <p:prevCondLst>
+                <p:cond evt="onPrev" delay="0">
+                  <p:tgtEl>
+                    <p:sldTgt/>
+                  </p:tgtEl>
+                </p:cond>
+              </p:prevCondLst>
+              <p:nextCondLst>
+                <p:cond evt="onNext" delay="0">
+                  <p:tgtEl>
+                    <p:sldTgt/>
+                  </p:tgtEl>
+                </p:cond>
+              </p:nextCondLst>
+            </p:seq>
+          </p:childTnLst>
+        </p:cTn>
+      </p:par>
+    </p:tnLst>
+    <p:bldLst>
+      <p:bldP spid="2" grpId="0"/>
+    </p:bldLst>
+  </p:timing>
 </p:sld>
 </file>
 
@@ -15103,18 +16758,551 @@
   <p:clrMapOvr>
     <a:masterClrMapping/>
   </p:clrMapOvr>
-  <mc:AlternateContent xmlns:mc="http://schemas.openxmlformats.org/markup-compatibility/2006">
-    <mc:Choice xmlns:p14="http://schemas.microsoft.com/office/powerpoint/2010/main" Requires="p14">
+  <mc:AlternateContent xmlns:mc="http://schemas.openxmlformats.org/markup-compatibility/2006" xmlns:p14="http://schemas.microsoft.com/office/powerpoint/2010/main">
+    <mc:Choice Requires="p14">
       <p:transition spd="slow" p14:dur="4000">
         <p14:vortex dir="r"/>
       </p:transition>
     </mc:Choice>
-    <mc:Fallback>
+    <mc:Fallback xmlns="">
       <p:transition spd="slow">
         <p:fade/>
       </p:transition>
     </mc:Fallback>
   </mc:AlternateContent>
+  <p:timing>
+    <p:tnLst>
+      <p:par>
+        <p:cTn id="1" dur="indefinite" restart="never" nodeType="tmRoot">
+          <p:childTnLst>
+            <p:seq concurrent="1" nextAc="seek">
+              <p:cTn id="2" dur="indefinite" nodeType="mainSeq">
+                <p:childTnLst>
+                  <p:par>
+                    <p:cTn id="3" fill="hold">
+                      <p:stCondLst>
+                        <p:cond delay="indefinite"/>
+                      </p:stCondLst>
+                      <p:childTnLst>
+                        <p:par>
+                          <p:cTn id="4" fill="hold">
+                            <p:stCondLst>
+                              <p:cond delay="0"/>
+                            </p:stCondLst>
+                            <p:childTnLst>
+                              <p:par>
+                                <p:cTn id="5" presetID="53" presetClass="entr" presetSubtype="16" fill="hold" grpId="0" nodeType="clickEffect">
+                                  <p:stCondLst>
+                                    <p:cond delay="0"/>
+                                  </p:stCondLst>
+                                  <p:childTnLst>
+                                    <p:set>
+                                      <p:cBhvr>
+                                        <p:cTn id="6" dur="1" fill="hold">
+                                          <p:stCondLst>
+                                            <p:cond delay="0"/>
+                                          </p:stCondLst>
+                                        </p:cTn>
+                                        <p:tgtEl>
+                                          <p:spTgt spid="2"/>
+                                        </p:tgtEl>
+                                        <p:attrNameLst>
+                                          <p:attrName>style.visibility</p:attrName>
+                                        </p:attrNameLst>
+                                      </p:cBhvr>
+                                      <p:to>
+                                        <p:strVal val="visible"/>
+                                      </p:to>
+                                    </p:set>
+                                    <p:anim calcmode="lin" valueType="num">
+                                      <p:cBhvr>
+                                        <p:cTn id="7" dur="500" fill="hold"/>
+                                        <p:tgtEl>
+                                          <p:spTgt spid="2"/>
+                                        </p:tgtEl>
+                                        <p:attrNameLst>
+                                          <p:attrName>ppt_w</p:attrName>
+                                        </p:attrNameLst>
+                                      </p:cBhvr>
+                                      <p:tavLst>
+                                        <p:tav tm="0">
+                                          <p:val>
+                                            <p:fltVal val="0"/>
+                                          </p:val>
+                                        </p:tav>
+                                        <p:tav tm="100000">
+                                          <p:val>
+                                            <p:strVal val="#ppt_w"/>
+                                          </p:val>
+                                        </p:tav>
+                                      </p:tavLst>
+                                    </p:anim>
+                                    <p:anim calcmode="lin" valueType="num">
+                                      <p:cBhvr>
+                                        <p:cTn id="8" dur="500" fill="hold"/>
+                                        <p:tgtEl>
+                                          <p:spTgt spid="2"/>
+                                        </p:tgtEl>
+                                        <p:attrNameLst>
+                                          <p:attrName>ppt_h</p:attrName>
+                                        </p:attrNameLst>
+                                      </p:cBhvr>
+                                      <p:tavLst>
+                                        <p:tav tm="0">
+                                          <p:val>
+                                            <p:fltVal val="0"/>
+                                          </p:val>
+                                        </p:tav>
+                                        <p:tav tm="100000">
+                                          <p:val>
+                                            <p:strVal val="#ppt_h"/>
+                                          </p:val>
+                                        </p:tav>
+                                      </p:tavLst>
+                                    </p:anim>
+                                    <p:animEffect transition="in" filter="fade">
+                                      <p:cBhvr>
+                                        <p:cTn id="9" dur="500"/>
+                                        <p:tgtEl>
+                                          <p:spTgt spid="2"/>
+                                        </p:tgtEl>
+                                      </p:cBhvr>
+                                    </p:animEffect>
+                                  </p:childTnLst>
+                                </p:cTn>
+                              </p:par>
+                            </p:childTnLst>
+                          </p:cTn>
+                        </p:par>
+                      </p:childTnLst>
+                    </p:cTn>
+                  </p:par>
+                  <p:par>
+                    <p:cTn id="10" fill="hold">
+                      <p:stCondLst>
+                        <p:cond delay="indefinite"/>
+                      </p:stCondLst>
+                      <p:childTnLst>
+                        <p:par>
+                          <p:cTn id="11" fill="hold">
+                            <p:stCondLst>
+                              <p:cond delay="0"/>
+                            </p:stCondLst>
+                            <p:childTnLst>
+                              <p:par>
+                                <p:cTn id="12" presetID="2" presetClass="entr" presetSubtype="4" fill="hold" nodeType="clickEffect">
+                                  <p:stCondLst>
+                                    <p:cond delay="0"/>
+                                  </p:stCondLst>
+                                  <p:childTnLst>
+                                    <p:set>
+                                      <p:cBhvr>
+                                        <p:cTn id="13" dur="1" fill="hold">
+                                          <p:stCondLst>
+                                            <p:cond delay="0"/>
+                                          </p:stCondLst>
+                                        </p:cTn>
+                                        <p:tgtEl>
+                                          <p:spTgt spid="11"/>
+                                        </p:tgtEl>
+                                        <p:attrNameLst>
+                                          <p:attrName>style.visibility</p:attrName>
+                                        </p:attrNameLst>
+                                      </p:cBhvr>
+                                      <p:to>
+                                        <p:strVal val="visible"/>
+                                      </p:to>
+                                    </p:set>
+                                    <p:anim calcmode="lin" valueType="num">
+                                      <p:cBhvr additive="base">
+                                        <p:cTn id="14" dur="500" fill="hold"/>
+                                        <p:tgtEl>
+                                          <p:spTgt spid="11"/>
+                                        </p:tgtEl>
+                                        <p:attrNameLst>
+                                          <p:attrName>ppt_x</p:attrName>
+                                        </p:attrNameLst>
+                                      </p:cBhvr>
+                                      <p:tavLst>
+                                        <p:tav tm="0">
+                                          <p:val>
+                                            <p:strVal val="#ppt_x"/>
+                                          </p:val>
+                                        </p:tav>
+                                        <p:tav tm="100000">
+                                          <p:val>
+                                            <p:strVal val="#ppt_x"/>
+                                          </p:val>
+                                        </p:tav>
+                                      </p:tavLst>
+                                    </p:anim>
+                                    <p:anim calcmode="lin" valueType="num">
+                                      <p:cBhvr additive="base">
+                                        <p:cTn id="15" dur="500" fill="hold"/>
+                                        <p:tgtEl>
+                                          <p:spTgt spid="11"/>
+                                        </p:tgtEl>
+                                        <p:attrNameLst>
+                                          <p:attrName>ppt_y</p:attrName>
+                                        </p:attrNameLst>
+                                      </p:cBhvr>
+                                      <p:tavLst>
+                                        <p:tav tm="0">
+                                          <p:val>
+                                            <p:strVal val="1+#ppt_h/2"/>
+                                          </p:val>
+                                        </p:tav>
+                                        <p:tav tm="100000">
+                                          <p:val>
+                                            <p:strVal val="#ppt_y"/>
+                                          </p:val>
+                                        </p:tav>
+                                      </p:tavLst>
+                                    </p:anim>
+                                  </p:childTnLst>
+                                </p:cTn>
+                              </p:par>
+                            </p:childTnLst>
+                          </p:cTn>
+                        </p:par>
+                      </p:childTnLst>
+                    </p:cTn>
+                  </p:par>
+                  <p:par>
+                    <p:cTn id="16" fill="hold">
+                      <p:stCondLst>
+                        <p:cond delay="indefinite"/>
+                      </p:stCondLst>
+                      <p:childTnLst>
+                        <p:par>
+                          <p:cTn id="17" fill="hold">
+                            <p:stCondLst>
+                              <p:cond delay="0"/>
+                            </p:stCondLst>
+                            <p:childTnLst>
+                              <p:par>
+                                <p:cTn id="18" presetID="2" presetClass="entr" presetSubtype="4" fill="hold" grpId="0" nodeType="clickEffect">
+                                  <p:stCondLst>
+                                    <p:cond delay="0"/>
+                                  </p:stCondLst>
+                                  <p:childTnLst>
+                                    <p:set>
+                                      <p:cBhvr>
+                                        <p:cTn id="19" dur="1" fill="hold">
+                                          <p:stCondLst>
+                                            <p:cond delay="0"/>
+                                          </p:stCondLst>
+                                        </p:cTn>
+                                        <p:tgtEl>
+                                          <p:spTgt spid="3">
+                                            <p:txEl>
+                                              <p:pRg st="0" end="0"/>
+                                            </p:txEl>
+                                          </p:spTgt>
+                                        </p:tgtEl>
+                                        <p:attrNameLst>
+                                          <p:attrName>style.visibility</p:attrName>
+                                        </p:attrNameLst>
+                                      </p:cBhvr>
+                                      <p:to>
+                                        <p:strVal val="visible"/>
+                                      </p:to>
+                                    </p:set>
+                                    <p:anim calcmode="lin" valueType="num">
+                                      <p:cBhvr additive="base">
+                                        <p:cTn id="20" dur="500" fill="hold"/>
+                                        <p:tgtEl>
+                                          <p:spTgt spid="3">
+                                            <p:txEl>
+                                              <p:pRg st="0" end="0"/>
+                                            </p:txEl>
+                                          </p:spTgt>
+                                        </p:tgtEl>
+                                        <p:attrNameLst>
+                                          <p:attrName>ppt_x</p:attrName>
+                                        </p:attrNameLst>
+                                      </p:cBhvr>
+                                      <p:tavLst>
+                                        <p:tav tm="0">
+                                          <p:val>
+                                            <p:strVal val="#ppt_x"/>
+                                          </p:val>
+                                        </p:tav>
+                                        <p:tav tm="100000">
+                                          <p:val>
+                                            <p:strVal val="#ppt_x"/>
+                                          </p:val>
+                                        </p:tav>
+                                      </p:tavLst>
+                                    </p:anim>
+                                    <p:anim calcmode="lin" valueType="num">
+                                      <p:cBhvr additive="base">
+                                        <p:cTn id="21" dur="500" fill="hold"/>
+                                        <p:tgtEl>
+                                          <p:spTgt spid="3">
+                                            <p:txEl>
+                                              <p:pRg st="0" end="0"/>
+                                            </p:txEl>
+                                          </p:spTgt>
+                                        </p:tgtEl>
+                                        <p:attrNameLst>
+                                          <p:attrName>ppt_y</p:attrName>
+                                        </p:attrNameLst>
+                                      </p:cBhvr>
+                                      <p:tavLst>
+                                        <p:tav tm="0">
+                                          <p:val>
+                                            <p:strVal val="1+#ppt_h/2"/>
+                                          </p:val>
+                                        </p:tav>
+                                        <p:tav tm="100000">
+                                          <p:val>
+                                            <p:strVal val="#ppt_y"/>
+                                          </p:val>
+                                        </p:tav>
+                                      </p:tavLst>
+                                    </p:anim>
+                                  </p:childTnLst>
+                                </p:cTn>
+                              </p:par>
+                            </p:childTnLst>
+                          </p:cTn>
+                        </p:par>
+                      </p:childTnLst>
+                    </p:cTn>
+                  </p:par>
+                  <p:par>
+                    <p:cTn id="22" fill="hold">
+                      <p:stCondLst>
+                        <p:cond delay="indefinite"/>
+                      </p:stCondLst>
+                      <p:childTnLst>
+                        <p:par>
+                          <p:cTn id="23" fill="hold">
+                            <p:stCondLst>
+                              <p:cond delay="0"/>
+                            </p:stCondLst>
+                            <p:childTnLst>
+                              <p:par>
+                                <p:cTn id="24" presetID="2" presetClass="entr" presetSubtype="4" fill="hold" grpId="0" nodeType="clickEffect">
+                                  <p:stCondLst>
+                                    <p:cond delay="0"/>
+                                  </p:stCondLst>
+                                  <p:childTnLst>
+                                    <p:set>
+                                      <p:cBhvr>
+                                        <p:cTn id="25" dur="1" fill="hold">
+                                          <p:stCondLst>
+                                            <p:cond delay="0"/>
+                                          </p:stCondLst>
+                                        </p:cTn>
+                                        <p:tgtEl>
+                                          <p:spTgt spid="3">
+                                            <p:txEl>
+                                              <p:pRg st="1" end="1"/>
+                                            </p:txEl>
+                                          </p:spTgt>
+                                        </p:tgtEl>
+                                        <p:attrNameLst>
+                                          <p:attrName>style.visibility</p:attrName>
+                                        </p:attrNameLst>
+                                      </p:cBhvr>
+                                      <p:to>
+                                        <p:strVal val="visible"/>
+                                      </p:to>
+                                    </p:set>
+                                    <p:anim calcmode="lin" valueType="num">
+                                      <p:cBhvr additive="base">
+                                        <p:cTn id="26" dur="500" fill="hold"/>
+                                        <p:tgtEl>
+                                          <p:spTgt spid="3">
+                                            <p:txEl>
+                                              <p:pRg st="1" end="1"/>
+                                            </p:txEl>
+                                          </p:spTgt>
+                                        </p:tgtEl>
+                                        <p:attrNameLst>
+                                          <p:attrName>ppt_x</p:attrName>
+                                        </p:attrNameLst>
+                                      </p:cBhvr>
+                                      <p:tavLst>
+                                        <p:tav tm="0">
+                                          <p:val>
+                                            <p:strVal val="#ppt_x"/>
+                                          </p:val>
+                                        </p:tav>
+                                        <p:tav tm="100000">
+                                          <p:val>
+                                            <p:strVal val="#ppt_x"/>
+                                          </p:val>
+                                        </p:tav>
+                                      </p:tavLst>
+                                    </p:anim>
+                                    <p:anim calcmode="lin" valueType="num">
+                                      <p:cBhvr additive="base">
+                                        <p:cTn id="27" dur="500" fill="hold"/>
+                                        <p:tgtEl>
+                                          <p:spTgt spid="3">
+                                            <p:txEl>
+                                              <p:pRg st="1" end="1"/>
+                                            </p:txEl>
+                                          </p:spTgt>
+                                        </p:tgtEl>
+                                        <p:attrNameLst>
+                                          <p:attrName>ppt_y</p:attrName>
+                                        </p:attrNameLst>
+                                      </p:cBhvr>
+                                      <p:tavLst>
+                                        <p:tav tm="0">
+                                          <p:val>
+                                            <p:strVal val="1+#ppt_h/2"/>
+                                          </p:val>
+                                        </p:tav>
+                                        <p:tav tm="100000">
+                                          <p:val>
+                                            <p:strVal val="#ppt_y"/>
+                                          </p:val>
+                                        </p:tav>
+                                      </p:tavLst>
+                                    </p:anim>
+                                  </p:childTnLst>
+                                </p:cTn>
+                              </p:par>
+                            </p:childTnLst>
+                          </p:cTn>
+                        </p:par>
+                      </p:childTnLst>
+                    </p:cTn>
+                  </p:par>
+                  <p:par>
+                    <p:cTn id="28" fill="hold">
+                      <p:stCondLst>
+                        <p:cond delay="indefinite"/>
+                      </p:stCondLst>
+                      <p:childTnLst>
+                        <p:par>
+                          <p:cTn id="29" fill="hold">
+                            <p:stCondLst>
+                              <p:cond delay="0"/>
+                            </p:stCondLst>
+                            <p:childTnLst>
+                              <p:par>
+                                <p:cTn id="30" presetID="2" presetClass="entr" presetSubtype="4" fill="hold" grpId="0" nodeType="clickEffect">
+                                  <p:stCondLst>
+                                    <p:cond delay="0"/>
+                                  </p:stCondLst>
+                                  <p:childTnLst>
+                                    <p:set>
+                                      <p:cBhvr>
+                                        <p:cTn id="31" dur="1" fill="hold">
+                                          <p:stCondLst>
+                                            <p:cond delay="0"/>
+                                          </p:stCondLst>
+                                        </p:cTn>
+                                        <p:tgtEl>
+                                          <p:spTgt spid="3">
+                                            <p:txEl>
+                                              <p:pRg st="2" end="2"/>
+                                            </p:txEl>
+                                          </p:spTgt>
+                                        </p:tgtEl>
+                                        <p:attrNameLst>
+                                          <p:attrName>style.visibility</p:attrName>
+                                        </p:attrNameLst>
+                                      </p:cBhvr>
+                                      <p:to>
+                                        <p:strVal val="visible"/>
+                                      </p:to>
+                                    </p:set>
+                                    <p:anim calcmode="lin" valueType="num">
+                                      <p:cBhvr additive="base">
+                                        <p:cTn id="32" dur="500" fill="hold"/>
+                                        <p:tgtEl>
+                                          <p:spTgt spid="3">
+                                            <p:txEl>
+                                              <p:pRg st="2" end="2"/>
+                                            </p:txEl>
+                                          </p:spTgt>
+                                        </p:tgtEl>
+                                        <p:attrNameLst>
+                                          <p:attrName>ppt_x</p:attrName>
+                                        </p:attrNameLst>
+                                      </p:cBhvr>
+                                      <p:tavLst>
+                                        <p:tav tm="0">
+                                          <p:val>
+                                            <p:strVal val="#ppt_x"/>
+                                          </p:val>
+                                        </p:tav>
+                                        <p:tav tm="100000">
+                                          <p:val>
+                                            <p:strVal val="#ppt_x"/>
+                                          </p:val>
+                                        </p:tav>
+                                      </p:tavLst>
+                                    </p:anim>
+                                    <p:anim calcmode="lin" valueType="num">
+                                      <p:cBhvr additive="base">
+                                        <p:cTn id="33" dur="500" fill="hold"/>
+                                        <p:tgtEl>
+                                          <p:spTgt spid="3">
+                                            <p:txEl>
+                                              <p:pRg st="2" end="2"/>
+                                            </p:txEl>
+                                          </p:spTgt>
+                                        </p:tgtEl>
+                                        <p:attrNameLst>
+                                          <p:attrName>ppt_y</p:attrName>
+                                        </p:attrNameLst>
+                                      </p:cBhvr>
+                                      <p:tavLst>
+                                        <p:tav tm="0">
+                                          <p:val>
+                                            <p:strVal val="1+#ppt_h/2"/>
+                                          </p:val>
+                                        </p:tav>
+                                        <p:tav tm="100000">
+                                          <p:val>
+                                            <p:strVal val="#ppt_y"/>
+                                          </p:val>
+                                        </p:tav>
+                                      </p:tavLst>
+                                    </p:anim>
+                                  </p:childTnLst>
+                                </p:cTn>
+                              </p:par>
+                            </p:childTnLst>
+                          </p:cTn>
+                        </p:par>
+                      </p:childTnLst>
+                    </p:cTn>
+                  </p:par>
+                </p:childTnLst>
+              </p:cTn>
+              <p:prevCondLst>
+                <p:cond evt="onPrev" delay="0">
+                  <p:tgtEl>
+                    <p:sldTgt/>
+                  </p:tgtEl>
+                </p:cond>
+              </p:prevCondLst>
+              <p:nextCondLst>
+                <p:cond evt="onNext" delay="0">
+                  <p:tgtEl>
+                    <p:sldTgt/>
+                  </p:tgtEl>
+                </p:cond>
+              </p:nextCondLst>
+            </p:seq>
+          </p:childTnLst>
+        </p:cTn>
+      </p:par>
+    </p:tnLst>
+    <p:bldLst>
+      <p:bldP spid="2" grpId="0"/>
+      <p:bldP spid="3" grpId="0" build="p"/>
+    </p:bldLst>
+  </p:timing>
 </p:sld>
 </file>
 
@@ -15379,18 +17567,967 @@
   <p:clrMapOvr>
     <a:masterClrMapping/>
   </p:clrMapOvr>
-  <mc:AlternateContent xmlns:mc="http://schemas.openxmlformats.org/markup-compatibility/2006">
-    <mc:Choice xmlns:p14="http://schemas.microsoft.com/office/powerpoint/2010/main" Requires="p14">
+  <mc:AlternateContent xmlns:mc="http://schemas.openxmlformats.org/markup-compatibility/2006" xmlns:p14="http://schemas.microsoft.com/office/powerpoint/2010/main">
+    <mc:Choice Requires="p14">
       <p:transition spd="slow" p14:dur="4000">
         <p14:vortex dir="r"/>
       </p:transition>
     </mc:Choice>
-    <mc:Fallback>
+    <mc:Fallback xmlns="">
       <p:transition spd="slow">
         <p:fade/>
       </p:transition>
     </mc:Fallback>
   </mc:AlternateContent>
+  <p:timing>
+    <p:tnLst>
+      <p:par>
+        <p:cTn id="1" dur="indefinite" restart="never" nodeType="tmRoot">
+          <p:childTnLst>
+            <p:seq concurrent="1" nextAc="seek">
+              <p:cTn id="2" dur="indefinite" nodeType="mainSeq">
+                <p:childTnLst>
+                  <p:par>
+                    <p:cTn id="3" fill="hold">
+                      <p:stCondLst>
+                        <p:cond delay="indefinite"/>
+                      </p:stCondLst>
+                      <p:childTnLst>
+                        <p:par>
+                          <p:cTn id="4" fill="hold">
+                            <p:stCondLst>
+                              <p:cond delay="0"/>
+                            </p:stCondLst>
+                            <p:childTnLst>
+                              <p:par>
+                                <p:cTn id="5" presetID="23" presetClass="entr" presetSubtype="16" fill="hold" grpId="0" nodeType="clickEffect">
+                                  <p:stCondLst>
+                                    <p:cond delay="0"/>
+                                  </p:stCondLst>
+                                  <p:childTnLst>
+                                    <p:set>
+                                      <p:cBhvr>
+                                        <p:cTn id="6" dur="1" fill="hold">
+                                          <p:stCondLst>
+                                            <p:cond delay="0"/>
+                                          </p:stCondLst>
+                                        </p:cTn>
+                                        <p:tgtEl>
+                                          <p:spTgt spid="2"/>
+                                        </p:tgtEl>
+                                        <p:attrNameLst>
+                                          <p:attrName>style.visibility</p:attrName>
+                                        </p:attrNameLst>
+                                      </p:cBhvr>
+                                      <p:to>
+                                        <p:strVal val="visible"/>
+                                      </p:to>
+                                    </p:set>
+                                    <p:anim calcmode="lin" valueType="num">
+                                      <p:cBhvr>
+                                        <p:cTn id="7" dur="500" fill="hold"/>
+                                        <p:tgtEl>
+                                          <p:spTgt spid="2"/>
+                                        </p:tgtEl>
+                                        <p:attrNameLst>
+                                          <p:attrName>ppt_w</p:attrName>
+                                        </p:attrNameLst>
+                                      </p:cBhvr>
+                                      <p:tavLst>
+                                        <p:tav tm="0">
+                                          <p:val>
+                                            <p:fltVal val="0"/>
+                                          </p:val>
+                                        </p:tav>
+                                        <p:tav tm="100000">
+                                          <p:val>
+                                            <p:strVal val="#ppt_w"/>
+                                          </p:val>
+                                        </p:tav>
+                                      </p:tavLst>
+                                    </p:anim>
+                                    <p:anim calcmode="lin" valueType="num">
+                                      <p:cBhvr>
+                                        <p:cTn id="8" dur="500" fill="hold"/>
+                                        <p:tgtEl>
+                                          <p:spTgt spid="2"/>
+                                        </p:tgtEl>
+                                        <p:attrNameLst>
+                                          <p:attrName>ppt_h</p:attrName>
+                                        </p:attrNameLst>
+                                      </p:cBhvr>
+                                      <p:tavLst>
+                                        <p:tav tm="0">
+                                          <p:val>
+                                            <p:fltVal val="0"/>
+                                          </p:val>
+                                        </p:tav>
+                                        <p:tav tm="100000">
+                                          <p:val>
+                                            <p:strVal val="#ppt_h"/>
+                                          </p:val>
+                                        </p:tav>
+                                      </p:tavLst>
+                                    </p:anim>
+                                  </p:childTnLst>
+                                </p:cTn>
+                              </p:par>
+                            </p:childTnLst>
+                          </p:cTn>
+                        </p:par>
+                      </p:childTnLst>
+                    </p:cTn>
+                  </p:par>
+                  <p:par>
+                    <p:cTn id="9" fill="hold">
+                      <p:stCondLst>
+                        <p:cond delay="indefinite"/>
+                      </p:stCondLst>
+                      <p:childTnLst>
+                        <p:par>
+                          <p:cTn id="10" fill="hold">
+                            <p:stCondLst>
+                              <p:cond delay="0"/>
+                            </p:stCondLst>
+                            <p:childTnLst>
+                              <p:par>
+                                <p:cTn id="11" presetID="2" presetClass="entr" presetSubtype="4" fill="hold" grpId="0" nodeType="clickEffect">
+                                  <p:stCondLst>
+                                    <p:cond delay="0"/>
+                                  </p:stCondLst>
+                                  <p:childTnLst>
+                                    <p:set>
+                                      <p:cBhvr>
+                                        <p:cTn id="12" dur="1" fill="hold">
+                                          <p:stCondLst>
+                                            <p:cond delay="0"/>
+                                          </p:stCondLst>
+                                        </p:cTn>
+                                        <p:tgtEl>
+                                          <p:spTgt spid="3">
+                                            <p:txEl>
+                                              <p:pRg st="0" end="0"/>
+                                            </p:txEl>
+                                          </p:spTgt>
+                                        </p:tgtEl>
+                                        <p:attrNameLst>
+                                          <p:attrName>style.visibility</p:attrName>
+                                        </p:attrNameLst>
+                                      </p:cBhvr>
+                                      <p:to>
+                                        <p:strVal val="visible"/>
+                                      </p:to>
+                                    </p:set>
+                                    <p:anim calcmode="lin" valueType="num">
+                                      <p:cBhvr additive="base">
+                                        <p:cTn id="13" dur="500" fill="hold"/>
+                                        <p:tgtEl>
+                                          <p:spTgt spid="3">
+                                            <p:txEl>
+                                              <p:pRg st="0" end="0"/>
+                                            </p:txEl>
+                                          </p:spTgt>
+                                        </p:tgtEl>
+                                        <p:attrNameLst>
+                                          <p:attrName>ppt_x</p:attrName>
+                                        </p:attrNameLst>
+                                      </p:cBhvr>
+                                      <p:tavLst>
+                                        <p:tav tm="0">
+                                          <p:val>
+                                            <p:strVal val="#ppt_x"/>
+                                          </p:val>
+                                        </p:tav>
+                                        <p:tav tm="100000">
+                                          <p:val>
+                                            <p:strVal val="#ppt_x"/>
+                                          </p:val>
+                                        </p:tav>
+                                      </p:tavLst>
+                                    </p:anim>
+                                    <p:anim calcmode="lin" valueType="num">
+                                      <p:cBhvr additive="base">
+                                        <p:cTn id="14" dur="500" fill="hold"/>
+                                        <p:tgtEl>
+                                          <p:spTgt spid="3">
+                                            <p:txEl>
+                                              <p:pRg st="0" end="0"/>
+                                            </p:txEl>
+                                          </p:spTgt>
+                                        </p:tgtEl>
+                                        <p:attrNameLst>
+                                          <p:attrName>ppt_y</p:attrName>
+                                        </p:attrNameLst>
+                                      </p:cBhvr>
+                                      <p:tavLst>
+                                        <p:tav tm="0">
+                                          <p:val>
+                                            <p:strVal val="1+#ppt_h/2"/>
+                                          </p:val>
+                                        </p:tav>
+                                        <p:tav tm="100000">
+                                          <p:val>
+                                            <p:strVal val="#ppt_y"/>
+                                          </p:val>
+                                        </p:tav>
+                                      </p:tavLst>
+                                    </p:anim>
+                                  </p:childTnLst>
+                                </p:cTn>
+                              </p:par>
+                            </p:childTnLst>
+                          </p:cTn>
+                        </p:par>
+                      </p:childTnLst>
+                    </p:cTn>
+                  </p:par>
+                  <p:par>
+                    <p:cTn id="15" fill="hold">
+                      <p:stCondLst>
+                        <p:cond delay="indefinite"/>
+                      </p:stCondLst>
+                      <p:childTnLst>
+                        <p:par>
+                          <p:cTn id="16" fill="hold">
+                            <p:stCondLst>
+                              <p:cond delay="0"/>
+                            </p:stCondLst>
+                            <p:childTnLst>
+                              <p:par>
+                                <p:cTn id="17" presetID="2" presetClass="entr" presetSubtype="4" fill="hold" grpId="0" nodeType="clickEffect">
+                                  <p:stCondLst>
+                                    <p:cond delay="0"/>
+                                  </p:stCondLst>
+                                  <p:childTnLst>
+                                    <p:set>
+                                      <p:cBhvr>
+                                        <p:cTn id="18" dur="1" fill="hold">
+                                          <p:stCondLst>
+                                            <p:cond delay="0"/>
+                                          </p:stCondLst>
+                                        </p:cTn>
+                                        <p:tgtEl>
+                                          <p:spTgt spid="3">
+                                            <p:txEl>
+                                              <p:pRg st="1" end="1"/>
+                                            </p:txEl>
+                                          </p:spTgt>
+                                        </p:tgtEl>
+                                        <p:attrNameLst>
+                                          <p:attrName>style.visibility</p:attrName>
+                                        </p:attrNameLst>
+                                      </p:cBhvr>
+                                      <p:to>
+                                        <p:strVal val="visible"/>
+                                      </p:to>
+                                    </p:set>
+                                    <p:anim calcmode="lin" valueType="num">
+                                      <p:cBhvr additive="base">
+                                        <p:cTn id="19" dur="500" fill="hold"/>
+                                        <p:tgtEl>
+                                          <p:spTgt spid="3">
+                                            <p:txEl>
+                                              <p:pRg st="1" end="1"/>
+                                            </p:txEl>
+                                          </p:spTgt>
+                                        </p:tgtEl>
+                                        <p:attrNameLst>
+                                          <p:attrName>ppt_x</p:attrName>
+                                        </p:attrNameLst>
+                                      </p:cBhvr>
+                                      <p:tavLst>
+                                        <p:tav tm="0">
+                                          <p:val>
+                                            <p:strVal val="#ppt_x"/>
+                                          </p:val>
+                                        </p:tav>
+                                        <p:tav tm="100000">
+                                          <p:val>
+                                            <p:strVal val="#ppt_x"/>
+                                          </p:val>
+                                        </p:tav>
+                                      </p:tavLst>
+                                    </p:anim>
+                                    <p:anim calcmode="lin" valueType="num">
+                                      <p:cBhvr additive="base">
+                                        <p:cTn id="20" dur="500" fill="hold"/>
+                                        <p:tgtEl>
+                                          <p:spTgt spid="3">
+                                            <p:txEl>
+                                              <p:pRg st="1" end="1"/>
+                                            </p:txEl>
+                                          </p:spTgt>
+                                        </p:tgtEl>
+                                        <p:attrNameLst>
+                                          <p:attrName>ppt_y</p:attrName>
+                                        </p:attrNameLst>
+                                      </p:cBhvr>
+                                      <p:tavLst>
+                                        <p:tav tm="0">
+                                          <p:val>
+                                            <p:strVal val="1+#ppt_h/2"/>
+                                          </p:val>
+                                        </p:tav>
+                                        <p:tav tm="100000">
+                                          <p:val>
+                                            <p:strVal val="#ppt_y"/>
+                                          </p:val>
+                                        </p:tav>
+                                      </p:tavLst>
+                                    </p:anim>
+                                  </p:childTnLst>
+                                </p:cTn>
+                              </p:par>
+                            </p:childTnLst>
+                          </p:cTn>
+                        </p:par>
+                      </p:childTnLst>
+                    </p:cTn>
+                  </p:par>
+                  <p:par>
+                    <p:cTn id="21" fill="hold">
+                      <p:stCondLst>
+                        <p:cond delay="indefinite"/>
+                      </p:stCondLst>
+                      <p:childTnLst>
+                        <p:par>
+                          <p:cTn id="22" fill="hold">
+                            <p:stCondLst>
+                              <p:cond delay="0"/>
+                            </p:stCondLst>
+                            <p:childTnLst>
+                              <p:par>
+                                <p:cTn id="23" presetID="2" presetClass="entr" presetSubtype="4" fill="hold" grpId="0" nodeType="clickEffect">
+                                  <p:stCondLst>
+                                    <p:cond delay="0"/>
+                                  </p:stCondLst>
+                                  <p:childTnLst>
+                                    <p:set>
+                                      <p:cBhvr>
+                                        <p:cTn id="24" dur="1" fill="hold">
+                                          <p:stCondLst>
+                                            <p:cond delay="0"/>
+                                          </p:stCondLst>
+                                        </p:cTn>
+                                        <p:tgtEl>
+                                          <p:spTgt spid="3">
+                                            <p:txEl>
+                                              <p:pRg st="2" end="2"/>
+                                            </p:txEl>
+                                          </p:spTgt>
+                                        </p:tgtEl>
+                                        <p:attrNameLst>
+                                          <p:attrName>style.visibility</p:attrName>
+                                        </p:attrNameLst>
+                                      </p:cBhvr>
+                                      <p:to>
+                                        <p:strVal val="visible"/>
+                                      </p:to>
+                                    </p:set>
+                                    <p:anim calcmode="lin" valueType="num">
+                                      <p:cBhvr additive="base">
+                                        <p:cTn id="25" dur="500" fill="hold"/>
+                                        <p:tgtEl>
+                                          <p:spTgt spid="3">
+                                            <p:txEl>
+                                              <p:pRg st="2" end="2"/>
+                                            </p:txEl>
+                                          </p:spTgt>
+                                        </p:tgtEl>
+                                        <p:attrNameLst>
+                                          <p:attrName>ppt_x</p:attrName>
+                                        </p:attrNameLst>
+                                      </p:cBhvr>
+                                      <p:tavLst>
+                                        <p:tav tm="0">
+                                          <p:val>
+                                            <p:strVal val="#ppt_x"/>
+                                          </p:val>
+                                        </p:tav>
+                                        <p:tav tm="100000">
+                                          <p:val>
+                                            <p:strVal val="#ppt_x"/>
+                                          </p:val>
+                                        </p:tav>
+                                      </p:tavLst>
+                                    </p:anim>
+                                    <p:anim calcmode="lin" valueType="num">
+                                      <p:cBhvr additive="base">
+                                        <p:cTn id="26" dur="500" fill="hold"/>
+                                        <p:tgtEl>
+                                          <p:spTgt spid="3">
+                                            <p:txEl>
+                                              <p:pRg st="2" end="2"/>
+                                            </p:txEl>
+                                          </p:spTgt>
+                                        </p:tgtEl>
+                                        <p:attrNameLst>
+                                          <p:attrName>ppt_y</p:attrName>
+                                        </p:attrNameLst>
+                                      </p:cBhvr>
+                                      <p:tavLst>
+                                        <p:tav tm="0">
+                                          <p:val>
+                                            <p:strVal val="1+#ppt_h/2"/>
+                                          </p:val>
+                                        </p:tav>
+                                        <p:tav tm="100000">
+                                          <p:val>
+                                            <p:strVal val="#ppt_y"/>
+                                          </p:val>
+                                        </p:tav>
+                                      </p:tavLst>
+                                    </p:anim>
+                                  </p:childTnLst>
+                                </p:cTn>
+                              </p:par>
+                            </p:childTnLst>
+                          </p:cTn>
+                        </p:par>
+                      </p:childTnLst>
+                    </p:cTn>
+                  </p:par>
+                  <p:par>
+                    <p:cTn id="27" fill="hold">
+                      <p:stCondLst>
+                        <p:cond delay="indefinite"/>
+                      </p:stCondLst>
+                      <p:childTnLst>
+                        <p:par>
+                          <p:cTn id="28" fill="hold">
+                            <p:stCondLst>
+                              <p:cond delay="0"/>
+                            </p:stCondLst>
+                            <p:childTnLst>
+                              <p:par>
+                                <p:cTn id="29" presetID="2" presetClass="entr" presetSubtype="4" fill="hold" grpId="0" nodeType="clickEffect">
+                                  <p:stCondLst>
+                                    <p:cond delay="0"/>
+                                  </p:stCondLst>
+                                  <p:childTnLst>
+                                    <p:set>
+                                      <p:cBhvr>
+                                        <p:cTn id="30" dur="1" fill="hold">
+                                          <p:stCondLst>
+                                            <p:cond delay="0"/>
+                                          </p:stCondLst>
+                                        </p:cTn>
+                                        <p:tgtEl>
+                                          <p:spTgt spid="3">
+                                            <p:txEl>
+                                              <p:pRg st="3" end="3"/>
+                                            </p:txEl>
+                                          </p:spTgt>
+                                        </p:tgtEl>
+                                        <p:attrNameLst>
+                                          <p:attrName>style.visibility</p:attrName>
+                                        </p:attrNameLst>
+                                      </p:cBhvr>
+                                      <p:to>
+                                        <p:strVal val="visible"/>
+                                      </p:to>
+                                    </p:set>
+                                    <p:anim calcmode="lin" valueType="num">
+                                      <p:cBhvr additive="base">
+                                        <p:cTn id="31" dur="500" fill="hold"/>
+                                        <p:tgtEl>
+                                          <p:spTgt spid="3">
+                                            <p:txEl>
+                                              <p:pRg st="3" end="3"/>
+                                            </p:txEl>
+                                          </p:spTgt>
+                                        </p:tgtEl>
+                                        <p:attrNameLst>
+                                          <p:attrName>ppt_x</p:attrName>
+                                        </p:attrNameLst>
+                                      </p:cBhvr>
+                                      <p:tavLst>
+                                        <p:tav tm="0">
+                                          <p:val>
+                                            <p:strVal val="#ppt_x"/>
+                                          </p:val>
+                                        </p:tav>
+                                        <p:tav tm="100000">
+                                          <p:val>
+                                            <p:strVal val="#ppt_x"/>
+                                          </p:val>
+                                        </p:tav>
+                                      </p:tavLst>
+                                    </p:anim>
+                                    <p:anim calcmode="lin" valueType="num">
+                                      <p:cBhvr additive="base">
+                                        <p:cTn id="32" dur="500" fill="hold"/>
+                                        <p:tgtEl>
+                                          <p:spTgt spid="3">
+                                            <p:txEl>
+                                              <p:pRg st="3" end="3"/>
+                                            </p:txEl>
+                                          </p:spTgt>
+                                        </p:tgtEl>
+                                        <p:attrNameLst>
+                                          <p:attrName>ppt_y</p:attrName>
+                                        </p:attrNameLst>
+                                      </p:cBhvr>
+                                      <p:tavLst>
+                                        <p:tav tm="0">
+                                          <p:val>
+                                            <p:strVal val="1+#ppt_h/2"/>
+                                          </p:val>
+                                        </p:tav>
+                                        <p:tav tm="100000">
+                                          <p:val>
+                                            <p:strVal val="#ppt_y"/>
+                                          </p:val>
+                                        </p:tav>
+                                      </p:tavLst>
+                                    </p:anim>
+                                  </p:childTnLst>
+                                </p:cTn>
+                              </p:par>
+                            </p:childTnLst>
+                          </p:cTn>
+                        </p:par>
+                      </p:childTnLst>
+                    </p:cTn>
+                  </p:par>
+                  <p:par>
+                    <p:cTn id="33" fill="hold">
+                      <p:stCondLst>
+                        <p:cond delay="indefinite"/>
+                      </p:stCondLst>
+                      <p:childTnLst>
+                        <p:par>
+                          <p:cTn id="34" fill="hold">
+                            <p:stCondLst>
+                              <p:cond delay="0"/>
+                            </p:stCondLst>
+                            <p:childTnLst>
+                              <p:par>
+                                <p:cTn id="35" presetID="2" presetClass="entr" presetSubtype="4" fill="hold" grpId="0" nodeType="clickEffect">
+                                  <p:stCondLst>
+                                    <p:cond delay="0"/>
+                                  </p:stCondLst>
+                                  <p:childTnLst>
+                                    <p:set>
+                                      <p:cBhvr>
+                                        <p:cTn id="36" dur="1" fill="hold">
+                                          <p:stCondLst>
+                                            <p:cond delay="0"/>
+                                          </p:stCondLst>
+                                        </p:cTn>
+                                        <p:tgtEl>
+                                          <p:spTgt spid="3">
+                                            <p:txEl>
+                                              <p:pRg st="4" end="4"/>
+                                            </p:txEl>
+                                          </p:spTgt>
+                                        </p:tgtEl>
+                                        <p:attrNameLst>
+                                          <p:attrName>style.visibility</p:attrName>
+                                        </p:attrNameLst>
+                                      </p:cBhvr>
+                                      <p:to>
+                                        <p:strVal val="visible"/>
+                                      </p:to>
+                                    </p:set>
+                                    <p:anim calcmode="lin" valueType="num">
+                                      <p:cBhvr additive="base">
+                                        <p:cTn id="37" dur="500" fill="hold"/>
+                                        <p:tgtEl>
+                                          <p:spTgt spid="3">
+                                            <p:txEl>
+                                              <p:pRg st="4" end="4"/>
+                                            </p:txEl>
+                                          </p:spTgt>
+                                        </p:tgtEl>
+                                        <p:attrNameLst>
+                                          <p:attrName>ppt_x</p:attrName>
+                                        </p:attrNameLst>
+                                      </p:cBhvr>
+                                      <p:tavLst>
+                                        <p:tav tm="0">
+                                          <p:val>
+                                            <p:strVal val="#ppt_x"/>
+                                          </p:val>
+                                        </p:tav>
+                                        <p:tav tm="100000">
+                                          <p:val>
+                                            <p:strVal val="#ppt_x"/>
+                                          </p:val>
+                                        </p:tav>
+                                      </p:tavLst>
+                                    </p:anim>
+                                    <p:anim calcmode="lin" valueType="num">
+                                      <p:cBhvr additive="base">
+                                        <p:cTn id="38" dur="500" fill="hold"/>
+                                        <p:tgtEl>
+                                          <p:spTgt spid="3">
+                                            <p:txEl>
+                                              <p:pRg st="4" end="4"/>
+                                            </p:txEl>
+                                          </p:spTgt>
+                                        </p:tgtEl>
+                                        <p:attrNameLst>
+                                          <p:attrName>ppt_y</p:attrName>
+                                        </p:attrNameLst>
+                                      </p:cBhvr>
+                                      <p:tavLst>
+                                        <p:tav tm="0">
+                                          <p:val>
+                                            <p:strVal val="1+#ppt_h/2"/>
+                                          </p:val>
+                                        </p:tav>
+                                        <p:tav tm="100000">
+                                          <p:val>
+                                            <p:strVal val="#ppt_y"/>
+                                          </p:val>
+                                        </p:tav>
+                                      </p:tavLst>
+                                    </p:anim>
+                                  </p:childTnLst>
+                                </p:cTn>
+                              </p:par>
+                            </p:childTnLst>
+                          </p:cTn>
+                        </p:par>
+                      </p:childTnLst>
+                    </p:cTn>
+                  </p:par>
+                  <p:par>
+                    <p:cTn id="39" fill="hold">
+                      <p:stCondLst>
+                        <p:cond delay="indefinite"/>
+                      </p:stCondLst>
+                      <p:childTnLst>
+                        <p:par>
+                          <p:cTn id="40" fill="hold">
+                            <p:stCondLst>
+                              <p:cond delay="0"/>
+                            </p:stCondLst>
+                            <p:childTnLst>
+                              <p:par>
+                                <p:cTn id="41" presetID="2" presetClass="entr" presetSubtype="4" fill="hold" grpId="0" nodeType="clickEffect">
+                                  <p:stCondLst>
+                                    <p:cond delay="0"/>
+                                  </p:stCondLst>
+                                  <p:childTnLst>
+                                    <p:set>
+                                      <p:cBhvr>
+                                        <p:cTn id="42" dur="1" fill="hold">
+                                          <p:stCondLst>
+                                            <p:cond delay="0"/>
+                                          </p:stCondLst>
+                                        </p:cTn>
+                                        <p:tgtEl>
+                                          <p:spTgt spid="3">
+                                            <p:txEl>
+                                              <p:pRg st="5" end="5"/>
+                                            </p:txEl>
+                                          </p:spTgt>
+                                        </p:tgtEl>
+                                        <p:attrNameLst>
+                                          <p:attrName>style.visibility</p:attrName>
+                                        </p:attrNameLst>
+                                      </p:cBhvr>
+                                      <p:to>
+                                        <p:strVal val="visible"/>
+                                      </p:to>
+                                    </p:set>
+                                    <p:anim calcmode="lin" valueType="num">
+                                      <p:cBhvr additive="base">
+                                        <p:cTn id="43" dur="500" fill="hold"/>
+                                        <p:tgtEl>
+                                          <p:spTgt spid="3">
+                                            <p:txEl>
+                                              <p:pRg st="5" end="5"/>
+                                            </p:txEl>
+                                          </p:spTgt>
+                                        </p:tgtEl>
+                                        <p:attrNameLst>
+                                          <p:attrName>ppt_x</p:attrName>
+                                        </p:attrNameLst>
+                                      </p:cBhvr>
+                                      <p:tavLst>
+                                        <p:tav tm="0">
+                                          <p:val>
+                                            <p:strVal val="#ppt_x"/>
+                                          </p:val>
+                                        </p:tav>
+                                        <p:tav tm="100000">
+                                          <p:val>
+                                            <p:strVal val="#ppt_x"/>
+                                          </p:val>
+                                        </p:tav>
+                                      </p:tavLst>
+                                    </p:anim>
+                                    <p:anim calcmode="lin" valueType="num">
+                                      <p:cBhvr additive="base">
+                                        <p:cTn id="44" dur="500" fill="hold"/>
+                                        <p:tgtEl>
+                                          <p:spTgt spid="3">
+                                            <p:txEl>
+                                              <p:pRg st="5" end="5"/>
+                                            </p:txEl>
+                                          </p:spTgt>
+                                        </p:tgtEl>
+                                        <p:attrNameLst>
+                                          <p:attrName>ppt_y</p:attrName>
+                                        </p:attrNameLst>
+                                      </p:cBhvr>
+                                      <p:tavLst>
+                                        <p:tav tm="0">
+                                          <p:val>
+                                            <p:strVal val="1+#ppt_h/2"/>
+                                          </p:val>
+                                        </p:tav>
+                                        <p:tav tm="100000">
+                                          <p:val>
+                                            <p:strVal val="#ppt_y"/>
+                                          </p:val>
+                                        </p:tav>
+                                      </p:tavLst>
+                                    </p:anim>
+                                  </p:childTnLst>
+                                </p:cTn>
+                              </p:par>
+                            </p:childTnLst>
+                          </p:cTn>
+                        </p:par>
+                      </p:childTnLst>
+                    </p:cTn>
+                  </p:par>
+                  <p:par>
+                    <p:cTn id="45" fill="hold">
+                      <p:stCondLst>
+                        <p:cond delay="indefinite"/>
+                      </p:stCondLst>
+                      <p:childTnLst>
+                        <p:par>
+                          <p:cTn id="46" fill="hold">
+                            <p:stCondLst>
+                              <p:cond delay="0"/>
+                            </p:stCondLst>
+                            <p:childTnLst>
+                              <p:par>
+                                <p:cTn id="47" presetID="2" presetClass="entr" presetSubtype="4" fill="hold" grpId="0" nodeType="clickEffect">
+                                  <p:stCondLst>
+                                    <p:cond delay="0"/>
+                                  </p:stCondLst>
+                                  <p:childTnLst>
+                                    <p:set>
+                                      <p:cBhvr>
+                                        <p:cTn id="48" dur="1" fill="hold">
+                                          <p:stCondLst>
+                                            <p:cond delay="0"/>
+                                          </p:stCondLst>
+                                        </p:cTn>
+                                        <p:tgtEl>
+                                          <p:spTgt spid="3">
+                                            <p:txEl>
+                                              <p:pRg st="6" end="6"/>
+                                            </p:txEl>
+                                          </p:spTgt>
+                                        </p:tgtEl>
+                                        <p:attrNameLst>
+                                          <p:attrName>style.visibility</p:attrName>
+                                        </p:attrNameLst>
+                                      </p:cBhvr>
+                                      <p:to>
+                                        <p:strVal val="visible"/>
+                                      </p:to>
+                                    </p:set>
+                                    <p:anim calcmode="lin" valueType="num">
+                                      <p:cBhvr additive="base">
+                                        <p:cTn id="49" dur="500" fill="hold"/>
+                                        <p:tgtEl>
+                                          <p:spTgt spid="3">
+                                            <p:txEl>
+                                              <p:pRg st="6" end="6"/>
+                                            </p:txEl>
+                                          </p:spTgt>
+                                        </p:tgtEl>
+                                        <p:attrNameLst>
+                                          <p:attrName>ppt_x</p:attrName>
+                                        </p:attrNameLst>
+                                      </p:cBhvr>
+                                      <p:tavLst>
+                                        <p:tav tm="0">
+                                          <p:val>
+                                            <p:strVal val="#ppt_x"/>
+                                          </p:val>
+                                        </p:tav>
+                                        <p:tav tm="100000">
+                                          <p:val>
+                                            <p:strVal val="#ppt_x"/>
+                                          </p:val>
+                                        </p:tav>
+                                      </p:tavLst>
+                                    </p:anim>
+                                    <p:anim calcmode="lin" valueType="num">
+                                      <p:cBhvr additive="base">
+                                        <p:cTn id="50" dur="500" fill="hold"/>
+                                        <p:tgtEl>
+                                          <p:spTgt spid="3">
+                                            <p:txEl>
+                                              <p:pRg st="6" end="6"/>
+                                            </p:txEl>
+                                          </p:spTgt>
+                                        </p:tgtEl>
+                                        <p:attrNameLst>
+                                          <p:attrName>ppt_y</p:attrName>
+                                        </p:attrNameLst>
+                                      </p:cBhvr>
+                                      <p:tavLst>
+                                        <p:tav tm="0">
+                                          <p:val>
+                                            <p:strVal val="1+#ppt_h/2"/>
+                                          </p:val>
+                                        </p:tav>
+                                        <p:tav tm="100000">
+                                          <p:val>
+                                            <p:strVal val="#ppt_y"/>
+                                          </p:val>
+                                        </p:tav>
+                                      </p:tavLst>
+                                    </p:anim>
+                                  </p:childTnLst>
+                                </p:cTn>
+                              </p:par>
+                            </p:childTnLst>
+                          </p:cTn>
+                        </p:par>
+                      </p:childTnLst>
+                    </p:cTn>
+                  </p:par>
+                  <p:par>
+                    <p:cTn id="51" fill="hold">
+                      <p:stCondLst>
+                        <p:cond delay="indefinite"/>
+                      </p:stCondLst>
+                      <p:childTnLst>
+                        <p:par>
+                          <p:cTn id="52" fill="hold">
+                            <p:stCondLst>
+                              <p:cond delay="0"/>
+                            </p:stCondLst>
+                            <p:childTnLst>
+                              <p:par>
+                                <p:cTn id="53" presetID="2" presetClass="entr" presetSubtype="4" fill="hold" grpId="0" nodeType="clickEffect">
+                                  <p:stCondLst>
+                                    <p:cond delay="0"/>
+                                  </p:stCondLst>
+                                  <p:childTnLst>
+                                    <p:set>
+                                      <p:cBhvr>
+                                        <p:cTn id="54" dur="1" fill="hold">
+                                          <p:stCondLst>
+                                            <p:cond delay="0"/>
+                                          </p:stCondLst>
+                                        </p:cTn>
+                                        <p:tgtEl>
+                                          <p:spTgt spid="3">
+                                            <p:txEl>
+                                              <p:pRg st="7" end="7"/>
+                                            </p:txEl>
+                                          </p:spTgt>
+                                        </p:tgtEl>
+                                        <p:attrNameLst>
+                                          <p:attrName>style.visibility</p:attrName>
+                                        </p:attrNameLst>
+                                      </p:cBhvr>
+                                      <p:to>
+                                        <p:strVal val="visible"/>
+                                      </p:to>
+                                    </p:set>
+                                    <p:anim calcmode="lin" valueType="num">
+                                      <p:cBhvr additive="base">
+                                        <p:cTn id="55" dur="500" fill="hold"/>
+                                        <p:tgtEl>
+                                          <p:spTgt spid="3">
+                                            <p:txEl>
+                                              <p:pRg st="7" end="7"/>
+                                            </p:txEl>
+                                          </p:spTgt>
+                                        </p:tgtEl>
+                                        <p:attrNameLst>
+                                          <p:attrName>ppt_x</p:attrName>
+                                        </p:attrNameLst>
+                                      </p:cBhvr>
+                                      <p:tavLst>
+                                        <p:tav tm="0">
+                                          <p:val>
+                                            <p:strVal val="#ppt_x"/>
+                                          </p:val>
+                                        </p:tav>
+                                        <p:tav tm="100000">
+                                          <p:val>
+                                            <p:strVal val="#ppt_x"/>
+                                          </p:val>
+                                        </p:tav>
+                                      </p:tavLst>
+                                    </p:anim>
+                                    <p:anim calcmode="lin" valueType="num">
+                                      <p:cBhvr additive="base">
+                                        <p:cTn id="56" dur="500" fill="hold"/>
+                                        <p:tgtEl>
+                                          <p:spTgt spid="3">
+                                            <p:txEl>
+                                              <p:pRg st="7" end="7"/>
+                                            </p:txEl>
+                                          </p:spTgt>
+                                        </p:tgtEl>
+                                        <p:attrNameLst>
+                                          <p:attrName>ppt_y</p:attrName>
+                                        </p:attrNameLst>
+                                      </p:cBhvr>
+                                      <p:tavLst>
+                                        <p:tav tm="0">
+                                          <p:val>
+                                            <p:strVal val="1+#ppt_h/2"/>
+                                          </p:val>
+                                        </p:tav>
+                                        <p:tav tm="100000">
+                                          <p:val>
+                                            <p:strVal val="#ppt_y"/>
+                                          </p:val>
+                                        </p:tav>
+                                      </p:tavLst>
+                                    </p:anim>
+                                  </p:childTnLst>
+                                </p:cTn>
+                              </p:par>
+                            </p:childTnLst>
+                          </p:cTn>
+                        </p:par>
+                      </p:childTnLst>
+                    </p:cTn>
+                  </p:par>
+                </p:childTnLst>
+              </p:cTn>
+              <p:prevCondLst>
+                <p:cond evt="onPrev" delay="0">
+                  <p:tgtEl>
+                    <p:sldTgt/>
+                  </p:tgtEl>
+                </p:cond>
+              </p:prevCondLst>
+              <p:nextCondLst>
+                <p:cond evt="onNext" delay="0">
+                  <p:tgtEl>
+                    <p:sldTgt/>
+                  </p:tgtEl>
+                </p:cond>
+              </p:nextCondLst>
+            </p:seq>
+          </p:childTnLst>
+        </p:cTn>
+      </p:par>
+    </p:tnLst>
+    <p:bldLst>
+      <p:bldP spid="2" grpId="0"/>
+      <p:bldP spid="3" grpId="0" build="p"/>
+    </p:bldLst>
+  </p:timing>
 </p:sld>
 </file>
 
@@ -15624,18 +18761,551 @@
   <p:clrMapOvr>
     <a:masterClrMapping/>
   </p:clrMapOvr>
-  <mc:AlternateContent xmlns:mc="http://schemas.openxmlformats.org/markup-compatibility/2006">
-    <mc:Choice xmlns:p14="http://schemas.microsoft.com/office/powerpoint/2010/main" Requires="p14">
+  <mc:AlternateContent xmlns:mc="http://schemas.openxmlformats.org/markup-compatibility/2006" xmlns:p14="http://schemas.microsoft.com/office/powerpoint/2010/main">
+    <mc:Choice Requires="p14">
       <p:transition spd="slow" p14:dur="4000">
         <p14:vortex dir="r"/>
       </p:transition>
     </mc:Choice>
-    <mc:Fallback>
+    <mc:Fallback xmlns="">
       <p:transition spd="slow">
         <p:fade/>
       </p:transition>
     </mc:Fallback>
   </mc:AlternateContent>
+  <p:timing>
+    <p:tnLst>
+      <p:par>
+        <p:cTn id="1" dur="indefinite" restart="never" nodeType="tmRoot">
+          <p:childTnLst>
+            <p:seq concurrent="1" nextAc="seek">
+              <p:cTn id="2" dur="indefinite" nodeType="mainSeq">
+                <p:childTnLst>
+                  <p:par>
+                    <p:cTn id="3" fill="hold">
+                      <p:stCondLst>
+                        <p:cond delay="indefinite"/>
+                      </p:stCondLst>
+                      <p:childTnLst>
+                        <p:par>
+                          <p:cTn id="4" fill="hold">
+                            <p:stCondLst>
+                              <p:cond delay="0"/>
+                            </p:stCondLst>
+                            <p:childTnLst>
+                              <p:par>
+                                <p:cTn id="5" presetID="53" presetClass="entr" presetSubtype="16" fill="hold" grpId="0" nodeType="clickEffect">
+                                  <p:stCondLst>
+                                    <p:cond delay="0"/>
+                                  </p:stCondLst>
+                                  <p:childTnLst>
+                                    <p:set>
+                                      <p:cBhvr>
+                                        <p:cTn id="6" dur="1" fill="hold">
+                                          <p:stCondLst>
+                                            <p:cond delay="0"/>
+                                          </p:stCondLst>
+                                        </p:cTn>
+                                        <p:tgtEl>
+                                          <p:spTgt spid="2"/>
+                                        </p:tgtEl>
+                                        <p:attrNameLst>
+                                          <p:attrName>style.visibility</p:attrName>
+                                        </p:attrNameLst>
+                                      </p:cBhvr>
+                                      <p:to>
+                                        <p:strVal val="visible"/>
+                                      </p:to>
+                                    </p:set>
+                                    <p:anim calcmode="lin" valueType="num">
+                                      <p:cBhvr>
+                                        <p:cTn id="7" dur="500" fill="hold"/>
+                                        <p:tgtEl>
+                                          <p:spTgt spid="2"/>
+                                        </p:tgtEl>
+                                        <p:attrNameLst>
+                                          <p:attrName>ppt_w</p:attrName>
+                                        </p:attrNameLst>
+                                      </p:cBhvr>
+                                      <p:tavLst>
+                                        <p:tav tm="0">
+                                          <p:val>
+                                            <p:fltVal val="0"/>
+                                          </p:val>
+                                        </p:tav>
+                                        <p:tav tm="100000">
+                                          <p:val>
+                                            <p:strVal val="#ppt_w"/>
+                                          </p:val>
+                                        </p:tav>
+                                      </p:tavLst>
+                                    </p:anim>
+                                    <p:anim calcmode="lin" valueType="num">
+                                      <p:cBhvr>
+                                        <p:cTn id="8" dur="500" fill="hold"/>
+                                        <p:tgtEl>
+                                          <p:spTgt spid="2"/>
+                                        </p:tgtEl>
+                                        <p:attrNameLst>
+                                          <p:attrName>ppt_h</p:attrName>
+                                        </p:attrNameLst>
+                                      </p:cBhvr>
+                                      <p:tavLst>
+                                        <p:tav tm="0">
+                                          <p:val>
+                                            <p:fltVal val="0"/>
+                                          </p:val>
+                                        </p:tav>
+                                        <p:tav tm="100000">
+                                          <p:val>
+                                            <p:strVal val="#ppt_h"/>
+                                          </p:val>
+                                        </p:tav>
+                                      </p:tavLst>
+                                    </p:anim>
+                                    <p:animEffect transition="in" filter="fade">
+                                      <p:cBhvr>
+                                        <p:cTn id="9" dur="500"/>
+                                        <p:tgtEl>
+                                          <p:spTgt spid="2"/>
+                                        </p:tgtEl>
+                                      </p:cBhvr>
+                                    </p:animEffect>
+                                  </p:childTnLst>
+                                </p:cTn>
+                              </p:par>
+                            </p:childTnLst>
+                          </p:cTn>
+                        </p:par>
+                      </p:childTnLst>
+                    </p:cTn>
+                  </p:par>
+                  <p:par>
+                    <p:cTn id="10" fill="hold">
+                      <p:stCondLst>
+                        <p:cond delay="indefinite"/>
+                      </p:stCondLst>
+                      <p:childTnLst>
+                        <p:par>
+                          <p:cTn id="11" fill="hold">
+                            <p:stCondLst>
+                              <p:cond delay="0"/>
+                            </p:stCondLst>
+                            <p:childTnLst>
+                              <p:par>
+                                <p:cTn id="12" presetID="2" presetClass="entr" presetSubtype="4" fill="hold" nodeType="clickEffect">
+                                  <p:stCondLst>
+                                    <p:cond delay="0"/>
+                                  </p:stCondLst>
+                                  <p:childTnLst>
+                                    <p:set>
+                                      <p:cBhvr>
+                                        <p:cTn id="13" dur="1" fill="hold">
+                                          <p:stCondLst>
+                                            <p:cond delay="0"/>
+                                          </p:stCondLst>
+                                        </p:cTn>
+                                        <p:tgtEl>
+                                          <p:spTgt spid="6"/>
+                                        </p:tgtEl>
+                                        <p:attrNameLst>
+                                          <p:attrName>style.visibility</p:attrName>
+                                        </p:attrNameLst>
+                                      </p:cBhvr>
+                                      <p:to>
+                                        <p:strVal val="visible"/>
+                                      </p:to>
+                                    </p:set>
+                                    <p:anim calcmode="lin" valueType="num">
+                                      <p:cBhvr additive="base">
+                                        <p:cTn id="14" dur="500" fill="hold"/>
+                                        <p:tgtEl>
+                                          <p:spTgt spid="6"/>
+                                        </p:tgtEl>
+                                        <p:attrNameLst>
+                                          <p:attrName>ppt_x</p:attrName>
+                                        </p:attrNameLst>
+                                      </p:cBhvr>
+                                      <p:tavLst>
+                                        <p:tav tm="0">
+                                          <p:val>
+                                            <p:strVal val="#ppt_x"/>
+                                          </p:val>
+                                        </p:tav>
+                                        <p:tav tm="100000">
+                                          <p:val>
+                                            <p:strVal val="#ppt_x"/>
+                                          </p:val>
+                                        </p:tav>
+                                      </p:tavLst>
+                                    </p:anim>
+                                    <p:anim calcmode="lin" valueType="num">
+                                      <p:cBhvr additive="base">
+                                        <p:cTn id="15" dur="500" fill="hold"/>
+                                        <p:tgtEl>
+                                          <p:spTgt spid="6"/>
+                                        </p:tgtEl>
+                                        <p:attrNameLst>
+                                          <p:attrName>ppt_y</p:attrName>
+                                        </p:attrNameLst>
+                                      </p:cBhvr>
+                                      <p:tavLst>
+                                        <p:tav tm="0">
+                                          <p:val>
+                                            <p:strVal val="1+#ppt_h/2"/>
+                                          </p:val>
+                                        </p:tav>
+                                        <p:tav tm="100000">
+                                          <p:val>
+                                            <p:strVal val="#ppt_y"/>
+                                          </p:val>
+                                        </p:tav>
+                                      </p:tavLst>
+                                    </p:anim>
+                                  </p:childTnLst>
+                                </p:cTn>
+                              </p:par>
+                            </p:childTnLst>
+                          </p:cTn>
+                        </p:par>
+                      </p:childTnLst>
+                    </p:cTn>
+                  </p:par>
+                  <p:par>
+                    <p:cTn id="16" fill="hold">
+                      <p:stCondLst>
+                        <p:cond delay="indefinite"/>
+                      </p:stCondLst>
+                      <p:childTnLst>
+                        <p:par>
+                          <p:cTn id="17" fill="hold">
+                            <p:stCondLst>
+                              <p:cond delay="0"/>
+                            </p:stCondLst>
+                            <p:childTnLst>
+                              <p:par>
+                                <p:cTn id="18" presetID="2" presetClass="entr" presetSubtype="4" fill="hold" grpId="0" nodeType="clickEffect">
+                                  <p:stCondLst>
+                                    <p:cond delay="0"/>
+                                  </p:stCondLst>
+                                  <p:childTnLst>
+                                    <p:set>
+                                      <p:cBhvr>
+                                        <p:cTn id="19" dur="1" fill="hold">
+                                          <p:stCondLst>
+                                            <p:cond delay="0"/>
+                                          </p:stCondLst>
+                                        </p:cTn>
+                                        <p:tgtEl>
+                                          <p:spTgt spid="3">
+                                            <p:txEl>
+                                              <p:pRg st="0" end="0"/>
+                                            </p:txEl>
+                                          </p:spTgt>
+                                        </p:tgtEl>
+                                        <p:attrNameLst>
+                                          <p:attrName>style.visibility</p:attrName>
+                                        </p:attrNameLst>
+                                      </p:cBhvr>
+                                      <p:to>
+                                        <p:strVal val="visible"/>
+                                      </p:to>
+                                    </p:set>
+                                    <p:anim calcmode="lin" valueType="num">
+                                      <p:cBhvr additive="base">
+                                        <p:cTn id="20" dur="500" fill="hold"/>
+                                        <p:tgtEl>
+                                          <p:spTgt spid="3">
+                                            <p:txEl>
+                                              <p:pRg st="0" end="0"/>
+                                            </p:txEl>
+                                          </p:spTgt>
+                                        </p:tgtEl>
+                                        <p:attrNameLst>
+                                          <p:attrName>ppt_x</p:attrName>
+                                        </p:attrNameLst>
+                                      </p:cBhvr>
+                                      <p:tavLst>
+                                        <p:tav tm="0">
+                                          <p:val>
+                                            <p:strVal val="#ppt_x"/>
+                                          </p:val>
+                                        </p:tav>
+                                        <p:tav tm="100000">
+                                          <p:val>
+                                            <p:strVal val="#ppt_x"/>
+                                          </p:val>
+                                        </p:tav>
+                                      </p:tavLst>
+                                    </p:anim>
+                                    <p:anim calcmode="lin" valueType="num">
+                                      <p:cBhvr additive="base">
+                                        <p:cTn id="21" dur="500" fill="hold"/>
+                                        <p:tgtEl>
+                                          <p:spTgt spid="3">
+                                            <p:txEl>
+                                              <p:pRg st="0" end="0"/>
+                                            </p:txEl>
+                                          </p:spTgt>
+                                        </p:tgtEl>
+                                        <p:attrNameLst>
+                                          <p:attrName>ppt_y</p:attrName>
+                                        </p:attrNameLst>
+                                      </p:cBhvr>
+                                      <p:tavLst>
+                                        <p:tav tm="0">
+                                          <p:val>
+                                            <p:strVal val="1+#ppt_h/2"/>
+                                          </p:val>
+                                        </p:tav>
+                                        <p:tav tm="100000">
+                                          <p:val>
+                                            <p:strVal val="#ppt_y"/>
+                                          </p:val>
+                                        </p:tav>
+                                      </p:tavLst>
+                                    </p:anim>
+                                  </p:childTnLst>
+                                </p:cTn>
+                              </p:par>
+                            </p:childTnLst>
+                          </p:cTn>
+                        </p:par>
+                      </p:childTnLst>
+                    </p:cTn>
+                  </p:par>
+                  <p:par>
+                    <p:cTn id="22" fill="hold">
+                      <p:stCondLst>
+                        <p:cond delay="indefinite"/>
+                      </p:stCondLst>
+                      <p:childTnLst>
+                        <p:par>
+                          <p:cTn id="23" fill="hold">
+                            <p:stCondLst>
+                              <p:cond delay="0"/>
+                            </p:stCondLst>
+                            <p:childTnLst>
+                              <p:par>
+                                <p:cTn id="24" presetID="2" presetClass="entr" presetSubtype="4" fill="hold" grpId="0" nodeType="clickEffect">
+                                  <p:stCondLst>
+                                    <p:cond delay="0"/>
+                                  </p:stCondLst>
+                                  <p:childTnLst>
+                                    <p:set>
+                                      <p:cBhvr>
+                                        <p:cTn id="25" dur="1" fill="hold">
+                                          <p:stCondLst>
+                                            <p:cond delay="0"/>
+                                          </p:stCondLst>
+                                        </p:cTn>
+                                        <p:tgtEl>
+                                          <p:spTgt spid="3">
+                                            <p:txEl>
+                                              <p:pRg st="1" end="1"/>
+                                            </p:txEl>
+                                          </p:spTgt>
+                                        </p:tgtEl>
+                                        <p:attrNameLst>
+                                          <p:attrName>style.visibility</p:attrName>
+                                        </p:attrNameLst>
+                                      </p:cBhvr>
+                                      <p:to>
+                                        <p:strVal val="visible"/>
+                                      </p:to>
+                                    </p:set>
+                                    <p:anim calcmode="lin" valueType="num">
+                                      <p:cBhvr additive="base">
+                                        <p:cTn id="26" dur="500" fill="hold"/>
+                                        <p:tgtEl>
+                                          <p:spTgt spid="3">
+                                            <p:txEl>
+                                              <p:pRg st="1" end="1"/>
+                                            </p:txEl>
+                                          </p:spTgt>
+                                        </p:tgtEl>
+                                        <p:attrNameLst>
+                                          <p:attrName>ppt_x</p:attrName>
+                                        </p:attrNameLst>
+                                      </p:cBhvr>
+                                      <p:tavLst>
+                                        <p:tav tm="0">
+                                          <p:val>
+                                            <p:strVal val="#ppt_x"/>
+                                          </p:val>
+                                        </p:tav>
+                                        <p:tav tm="100000">
+                                          <p:val>
+                                            <p:strVal val="#ppt_x"/>
+                                          </p:val>
+                                        </p:tav>
+                                      </p:tavLst>
+                                    </p:anim>
+                                    <p:anim calcmode="lin" valueType="num">
+                                      <p:cBhvr additive="base">
+                                        <p:cTn id="27" dur="500" fill="hold"/>
+                                        <p:tgtEl>
+                                          <p:spTgt spid="3">
+                                            <p:txEl>
+                                              <p:pRg st="1" end="1"/>
+                                            </p:txEl>
+                                          </p:spTgt>
+                                        </p:tgtEl>
+                                        <p:attrNameLst>
+                                          <p:attrName>ppt_y</p:attrName>
+                                        </p:attrNameLst>
+                                      </p:cBhvr>
+                                      <p:tavLst>
+                                        <p:tav tm="0">
+                                          <p:val>
+                                            <p:strVal val="1+#ppt_h/2"/>
+                                          </p:val>
+                                        </p:tav>
+                                        <p:tav tm="100000">
+                                          <p:val>
+                                            <p:strVal val="#ppt_y"/>
+                                          </p:val>
+                                        </p:tav>
+                                      </p:tavLst>
+                                    </p:anim>
+                                  </p:childTnLst>
+                                </p:cTn>
+                              </p:par>
+                            </p:childTnLst>
+                          </p:cTn>
+                        </p:par>
+                      </p:childTnLst>
+                    </p:cTn>
+                  </p:par>
+                  <p:par>
+                    <p:cTn id="28" fill="hold">
+                      <p:stCondLst>
+                        <p:cond delay="indefinite"/>
+                      </p:stCondLst>
+                      <p:childTnLst>
+                        <p:par>
+                          <p:cTn id="29" fill="hold">
+                            <p:stCondLst>
+                              <p:cond delay="0"/>
+                            </p:stCondLst>
+                            <p:childTnLst>
+                              <p:par>
+                                <p:cTn id="30" presetID="2" presetClass="entr" presetSubtype="4" fill="hold" grpId="0" nodeType="clickEffect">
+                                  <p:stCondLst>
+                                    <p:cond delay="0"/>
+                                  </p:stCondLst>
+                                  <p:childTnLst>
+                                    <p:set>
+                                      <p:cBhvr>
+                                        <p:cTn id="31" dur="1" fill="hold">
+                                          <p:stCondLst>
+                                            <p:cond delay="0"/>
+                                          </p:stCondLst>
+                                        </p:cTn>
+                                        <p:tgtEl>
+                                          <p:spTgt spid="3">
+                                            <p:txEl>
+                                              <p:pRg st="2" end="2"/>
+                                            </p:txEl>
+                                          </p:spTgt>
+                                        </p:tgtEl>
+                                        <p:attrNameLst>
+                                          <p:attrName>style.visibility</p:attrName>
+                                        </p:attrNameLst>
+                                      </p:cBhvr>
+                                      <p:to>
+                                        <p:strVal val="visible"/>
+                                      </p:to>
+                                    </p:set>
+                                    <p:anim calcmode="lin" valueType="num">
+                                      <p:cBhvr additive="base">
+                                        <p:cTn id="32" dur="500" fill="hold"/>
+                                        <p:tgtEl>
+                                          <p:spTgt spid="3">
+                                            <p:txEl>
+                                              <p:pRg st="2" end="2"/>
+                                            </p:txEl>
+                                          </p:spTgt>
+                                        </p:tgtEl>
+                                        <p:attrNameLst>
+                                          <p:attrName>ppt_x</p:attrName>
+                                        </p:attrNameLst>
+                                      </p:cBhvr>
+                                      <p:tavLst>
+                                        <p:tav tm="0">
+                                          <p:val>
+                                            <p:strVal val="#ppt_x"/>
+                                          </p:val>
+                                        </p:tav>
+                                        <p:tav tm="100000">
+                                          <p:val>
+                                            <p:strVal val="#ppt_x"/>
+                                          </p:val>
+                                        </p:tav>
+                                      </p:tavLst>
+                                    </p:anim>
+                                    <p:anim calcmode="lin" valueType="num">
+                                      <p:cBhvr additive="base">
+                                        <p:cTn id="33" dur="500" fill="hold"/>
+                                        <p:tgtEl>
+                                          <p:spTgt spid="3">
+                                            <p:txEl>
+                                              <p:pRg st="2" end="2"/>
+                                            </p:txEl>
+                                          </p:spTgt>
+                                        </p:tgtEl>
+                                        <p:attrNameLst>
+                                          <p:attrName>ppt_y</p:attrName>
+                                        </p:attrNameLst>
+                                      </p:cBhvr>
+                                      <p:tavLst>
+                                        <p:tav tm="0">
+                                          <p:val>
+                                            <p:strVal val="1+#ppt_h/2"/>
+                                          </p:val>
+                                        </p:tav>
+                                        <p:tav tm="100000">
+                                          <p:val>
+                                            <p:strVal val="#ppt_y"/>
+                                          </p:val>
+                                        </p:tav>
+                                      </p:tavLst>
+                                    </p:anim>
+                                  </p:childTnLst>
+                                </p:cTn>
+                              </p:par>
+                            </p:childTnLst>
+                          </p:cTn>
+                        </p:par>
+                      </p:childTnLst>
+                    </p:cTn>
+                  </p:par>
+                </p:childTnLst>
+              </p:cTn>
+              <p:prevCondLst>
+                <p:cond evt="onPrev" delay="0">
+                  <p:tgtEl>
+                    <p:sldTgt/>
+                  </p:tgtEl>
+                </p:cond>
+              </p:prevCondLst>
+              <p:nextCondLst>
+                <p:cond evt="onNext" delay="0">
+                  <p:tgtEl>
+                    <p:sldTgt/>
+                  </p:tgtEl>
+                </p:cond>
+              </p:nextCondLst>
+            </p:seq>
+          </p:childTnLst>
+        </p:cTn>
+      </p:par>
+    </p:tnLst>
+    <p:bldLst>
+      <p:bldP spid="2" grpId="0"/>
+      <p:bldP spid="3" grpId="0" build="p"/>
+    </p:bldLst>
+  </p:timing>
 </p:sld>
 </file>
 
@@ -15868,18 +19538,975 @@
   <p:clrMapOvr>
     <a:masterClrMapping/>
   </p:clrMapOvr>
-  <mc:AlternateContent xmlns:mc="http://schemas.openxmlformats.org/markup-compatibility/2006">
-    <mc:Choice xmlns:p14="http://schemas.microsoft.com/office/powerpoint/2010/main" Requires="p14">
+  <mc:AlternateContent xmlns:mc="http://schemas.openxmlformats.org/markup-compatibility/2006" xmlns:p14="http://schemas.microsoft.com/office/powerpoint/2010/main">
+    <mc:Choice Requires="p14">
       <p:transition spd="slow" p14:dur="4000">
         <p14:vortex dir="r"/>
       </p:transition>
     </mc:Choice>
-    <mc:Fallback>
+    <mc:Fallback xmlns="">
       <p:transition spd="slow">
         <p:fade/>
       </p:transition>
     </mc:Fallback>
   </mc:AlternateContent>
+  <p:timing>
+    <p:tnLst>
+      <p:par>
+        <p:cTn id="1" dur="indefinite" restart="never" nodeType="tmRoot">
+          <p:childTnLst>
+            <p:seq concurrent="1" nextAc="seek">
+              <p:cTn id="2" dur="indefinite" nodeType="mainSeq">
+                <p:childTnLst>
+                  <p:par>
+                    <p:cTn id="3" fill="hold">
+                      <p:stCondLst>
+                        <p:cond delay="indefinite"/>
+                      </p:stCondLst>
+                      <p:childTnLst>
+                        <p:par>
+                          <p:cTn id="4" fill="hold">
+                            <p:stCondLst>
+                              <p:cond delay="0"/>
+                            </p:stCondLst>
+                            <p:childTnLst>
+                              <p:par>
+                                <p:cTn id="5" presetID="53" presetClass="entr" presetSubtype="16" fill="hold" grpId="0" nodeType="clickEffect">
+                                  <p:stCondLst>
+                                    <p:cond delay="0"/>
+                                  </p:stCondLst>
+                                  <p:childTnLst>
+                                    <p:set>
+                                      <p:cBhvr>
+                                        <p:cTn id="6" dur="1" fill="hold">
+                                          <p:stCondLst>
+                                            <p:cond delay="0"/>
+                                          </p:stCondLst>
+                                        </p:cTn>
+                                        <p:tgtEl>
+                                          <p:spTgt spid="2"/>
+                                        </p:tgtEl>
+                                        <p:attrNameLst>
+                                          <p:attrName>style.visibility</p:attrName>
+                                        </p:attrNameLst>
+                                      </p:cBhvr>
+                                      <p:to>
+                                        <p:strVal val="visible"/>
+                                      </p:to>
+                                    </p:set>
+                                    <p:anim calcmode="lin" valueType="num">
+                                      <p:cBhvr>
+                                        <p:cTn id="7" dur="500" fill="hold"/>
+                                        <p:tgtEl>
+                                          <p:spTgt spid="2"/>
+                                        </p:tgtEl>
+                                        <p:attrNameLst>
+                                          <p:attrName>ppt_w</p:attrName>
+                                        </p:attrNameLst>
+                                      </p:cBhvr>
+                                      <p:tavLst>
+                                        <p:tav tm="0">
+                                          <p:val>
+                                            <p:fltVal val="0"/>
+                                          </p:val>
+                                        </p:tav>
+                                        <p:tav tm="100000">
+                                          <p:val>
+                                            <p:strVal val="#ppt_w"/>
+                                          </p:val>
+                                        </p:tav>
+                                      </p:tavLst>
+                                    </p:anim>
+                                    <p:anim calcmode="lin" valueType="num">
+                                      <p:cBhvr>
+                                        <p:cTn id="8" dur="500" fill="hold"/>
+                                        <p:tgtEl>
+                                          <p:spTgt spid="2"/>
+                                        </p:tgtEl>
+                                        <p:attrNameLst>
+                                          <p:attrName>ppt_h</p:attrName>
+                                        </p:attrNameLst>
+                                      </p:cBhvr>
+                                      <p:tavLst>
+                                        <p:tav tm="0">
+                                          <p:val>
+                                            <p:fltVal val="0"/>
+                                          </p:val>
+                                        </p:tav>
+                                        <p:tav tm="100000">
+                                          <p:val>
+                                            <p:strVal val="#ppt_h"/>
+                                          </p:val>
+                                        </p:tav>
+                                      </p:tavLst>
+                                    </p:anim>
+                                    <p:animEffect transition="in" filter="fade">
+                                      <p:cBhvr>
+                                        <p:cTn id="9" dur="500"/>
+                                        <p:tgtEl>
+                                          <p:spTgt spid="2"/>
+                                        </p:tgtEl>
+                                      </p:cBhvr>
+                                    </p:animEffect>
+                                  </p:childTnLst>
+                                </p:cTn>
+                              </p:par>
+                            </p:childTnLst>
+                          </p:cTn>
+                        </p:par>
+                      </p:childTnLst>
+                    </p:cTn>
+                  </p:par>
+                  <p:par>
+                    <p:cTn id="10" fill="hold">
+                      <p:stCondLst>
+                        <p:cond delay="indefinite"/>
+                      </p:stCondLst>
+                      <p:childTnLst>
+                        <p:par>
+                          <p:cTn id="11" fill="hold">
+                            <p:stCondLst>
+                              <p:cond delay="0"/>
+                            </p:stCondLst>
+                            <p:childTnLst>
+                              <p:par>
+                                <p:cTn id="12" presetID="2" presetClass="entr" presetSubtype="4" fill="hold" grpId="0" nodeType="clickEffect">
+                                  <p:stCondLst>
+                                    <p:cond delay="0"/>
+                                  </p:stCondLst>
+                                  <p:childTnLst>
+                                    <p:set>
+                                      <p:cBhvr>
+                                        <p:cTn id="13" dur="1" fill="hold">
+                                          <p:stCondLst>
+                                            <p:cond delay="0"/>
+                                          </p:stCondLst>
+                                        </p:cTn>
+                                        <p:tgtEl>
+                                          <p:spTgt spid="4">
+                                            <p:txEl>
+                                              <p:pRg st="0" end="0"/>
+                                            </p:txEl>
+                                          </p:spTgt>
+                                        </p:tgtEl>
+                                        <p:attrNameLst>
+                                          <p:attrName>style.visibility</p:attrName>
+                                        </p:attrNameLst>
+                                      </p:cBhvr>
+                                      <p:to>
+                                        <p:strVal val="visible"/>
+                                      </p:to>
+                                    </p:set>
+                                    <p:anim calcmode="lin" valueType="num">
+                                      <p:cBhvr additive="base">
+                                        <p:cTn id="14" dur="500" fill="hold"/>
+                                        <p:tgtEl>
+                                          <p:spTgt spid="4">
+                                            <p:txEl>
+                                              <p:pRg st="0" end="0"/>
+                                            </p:txEl>
+                                          </p:spTgt>
+                                        </p:tgtEl>
+                                        <p:attrNameLst>
+                                          <p:attrName>ppt_x</p:attrName>
+                                        </p:attrNameLst>
+                                      </p:cBhvr>
+                                      <p:tavLst>
+                                        <p:tav tm="0">
+                                          <p:val>
+                                            <p:strVal val="#ppt_x"/>
+                                          </p:val>
+                                        </p:tav>
+                                        <p:tav tm="100000">
+                                          <p:val>
+                                            <p:strVal val="#ppt_x"/>
+                                          </p:val>
+                                        </p:tav>
+                                      </p:tavLst>
+                                    </p:anim>
+                                    <p:anim calcmode="lin" valueType="num">
+                                      <p:cBhvr additive="base">
+                                        <p:cTn id="15" dur="500" fill="hold"/>
+                                        <p:tgtEl>
+                                          <p:spTgt spid="4">
+                                            <p:txEl>
+                                              <p:pRg st="0" end="0"/>
+                                            </p:txEl>
+                                          </p:spTgt>
+                                        </p:tgtEl>
+                                        <p:attrNameLst>
+                                          <p:attrName>ppt_y</p:attrName>
+                                        </p:attrNameLst>
+                                      </p:cBhvr>
+                                      <p:tavLst>
+                                        <p:tav tm="0">
+                                          <p:val>
+                                            <p:strVal val="1+#ppt_h/2"/>
+                                          </p:val>
+                                        </p:tav>
+                                        <p:tav tm="100000">
+                                          <p:val>
+                                            <p:strVal val="#ppt_y"/>
+                                          </p:val>
+                                        </p:tav>
+                                      </p:tavLst>
+                                    </p:anim>
+                                  </p:childTnLst>
+                                </p:cTn>
+                              </p:par>
+                            </p:childTnLst>
+                          </p:cTn>
+                        </p:par>
+                      </p:childTnLst>
+                    </p:cTn>
+                  </p:par>
+                  <p:par>
+                    <p:cTn id="16" fill="hold">
+                      <p:stCondLst>
+                        <p:cond delay="indefinite"/>
+                      </p:stCondLst>
+                      <p:childTnLst>
+                        <p:par>
+                          <p:cTn id="17" fill="hold">
+                            <p:stCondLst>
+                              <p:cond delay="0"/>
+                            </p:stCondLst>
+                            <p:childTnLst>
+                              <p:par>
+                                <p:cTn id="18" presetID="2" presetClass="entr" presetSubtype="4" fill="hold" grpId="0" nodeType="clickEffect">
+                                  <p:stCondLst>
+                                    <p:cond delay="0"/>
+                                  </p:stCondLst>
+                                  <p:childTnLst>
+                                    <p:set>
+                                      <p:cBhvr>
+                                        <p:cTn id="19" dur="1" fill="hold">
+                                          <p:stCondLst>
+                                            <p:cond delay="0"/>
+                                          </p:stCondLst>
+                                        </p:cTn>
+                                        <p:tgtEl>
+                                          <p:spTgt spid="4">
+                                            <p:txEl>
+                                              <p:pRg st="1" end="1"/>
+                                            </p:txEl>
+                                          </p:spTgt>
+                                        </p:tgtEl>
+                                        <p:attrNameLst>
+                                          <p:attrName>style.visibility</p:attrName>
+                                        </p:attrNameLst>
+                                      </p:cBhvr>
+                                      <p:to>
+                                        <p:strVal val="visible"/>
+                                      </p:to>
+                                    </p:set>
+                                    <p:anim calcmode="lin" valueType="num">
+                                      <p:cBhvr additive="base">
+                                        <p:cTn id="20" dur="500" fill="hold"/>
+                                        <p:tgtEl>
+                                          <p:spTgt spid="4">
+                                            <p:txEl>
+                                              <p:pRg st="1" end="1"/>
+                                            </p:txEl>
+                                          </p:spTgt>
+                                        </p:tgtEl>
+                                        <p:attrNameLst>
+                                          <p:attrName>ppt_x</p:attrName>
+                                        </p:attrNameLst>
+                                      </p:cBhvr>
+                                      <p:tavLst>
+                                        <p:tav tm="0">
+                                          <p:val>
+                                            <p:strVal val="#ppt_x"/>
+                                          </p:val>
+                                        </p:tav>
+                                        <p:tav tm="100000">
+                                          <p:val>
+                                            <p:strVal val="#ppt_x"/>
+                                          </p:val>
+                                        </p:tav>
+                                      </p:tavLst>
+                                    </p:anim>
+                                    <p:anim calcmode="lin" valueType="num">
+                                      <p:cBhvr additive="base">
+                                        <p:cTn id="21" dur="500" fill="hold"/>
+                                        <p:tgtEl>
+                                          <p:spTgt spid="4">
+                                            <p:txEl>
+                                              <p:pRg st="1" end="1"/>
+                                            </p:txEl>
+                                          </p:spTgt>
+                                        </p:tgtEl>
+                                        <p:attrNameLst>
+                                          <p:attrName>ppt_y</p:attrName>
+                                        </p:attrNameLst>
+                                      </p:cBhvr>
+                                      <p:tavLst>
+                                        <p:tav tm="0">
+                                          <p:val>
+                                            <p:strVal val="1+#ppt_h/2"/>
+                                          </p:val>
+                                        </p:tav>
+                                        <p:tav tm="100000">
+                                          <p:val>
+                                            <p:strVal val="#ppt_y"/>
+                                          </p:val>
+                                        </p:tav>
+                                      </p:tavLst>
+                                    </p:anim>
+                                  </p:childTnLst>
+                                </p:cTn>
+                              </p:par>
+                            </p:childTnLst>
+                          </p:cTn>
+                        </p:par>
+                      </p:childTnLst>
+                    </p:cTn>
+                  </p:par>
+                  <p:par>
+                    <p:cTn id="22" fill="hold">
+                      <p:stCondLst>
+                        <p:cond delay="indefinite"/>
+                      </p:stCondLst>
+                      <p:childTnLst>
+                        <p:par>
+                          <p:cTn id="23" fill="hold">
+                            <p:stCondLst>
+                              <p:cond delay="0"/>
+                            </p:stCondLst>
+                            <p:childTnLst>
+                              <p:par>
+                                <p:cTn id="24" presetID="2" presetClass="entr" presetSubtype="4" fill="hold" grpId="0" nodeType="clickEffect">
+                                  <p:stCondLst>
+                                    <p:cond delay="0"/>
+                                  </p:stCondLst>
+                                  <p:childTnLst>
+                                    <p:set>
+                                      <p:cBhvr>
+                                        <p:cTn id="25" dur="1" fill="hold">
+                                          <p:stCondLst>
+                                            <p:cond delay="0"/>
+                                          </p:stCondLst>
+                                        </p:cTn>
+                                        <p:tgtEl>
+                                          <p:spTgt spid="4">
+                                            <p:txEl>
+                                              <p:pRg st="2" end="2"/>
+                                            </p:txEl>
+                                          </p:spTgt>
+                                        </p:tgtEl>
+                                        <p:attrNameLst>
+                                          <p:attrName>style.visibility</p:attrName>
+                                        </p:attrNameLst>
+                                      </p:cBhvr>
+                                      <p:to>
+                                        <p:strVal val="visible"/>
+                                      </p:to>
+                                    </p:set>
+                                    <p:anim calcmode="lin" valueType="num">
+                                      <p:cBhvr additive="base">
+                                        <p:cTn id="26" dur="500" fill="hold"/>
+                                        <p:tgtEl>
+                                          <p:spTgt spid="4">
+                                            <p:txEl>
+                                              <p:pRg st="2" end="2"/>
+                                            </p:txEl>
+                                          </p:spTgt>
+                                        </p:tgtEl>
+                                        <p:attrNameLst>
+                                          <p:attrName>ppt_x</p:attrName>
+                                        </p:attrNameLst>
+                                      </p:cBhvr>
+                                      <p:tavLst>
+                                        <p:tav tm="0">
+                                          <p:val>
+                                            <p:strVal val="#ppt_x"/>
+                                          </p:val>
+                                        </p:tav>
+                                        <p:tav tm="100000">
+                                          <p:val>
+                                            <p:strVal val="#ppt_x"/>
+                                          </p:val>
+                                        </p:tav>
+                                      </p:tavLst>
+                                    </p:anim>
+                                    <p:anim calcmode="lin" valueType="num">
+                                      <p:cBhvr additive="base">
+                                        <p:cTn id="27" dur="500" fill="hold"/>
+                                        <p:tgtEl>
+                                          <p:spTgt spid="4">
+                                            <p:txEl>
+                                              <p:pRg st="2" end="2"/>
+                                            </p:txEl>
+                                          </p:spTgt>
+                                        </p:tgtEl>
+                                        <p:attrNameLst>
+                                          <p:attrName>ppt_y</p:attrName>
+                                        </p:attrNameLst>
+                                      </p:cBhvr>
+                                      <p:tavLst>
+                                        <p:tav tm="0">
+                                          <p:val>
+                                            <p:strVal val="1+#ppt_h/2"/>
+                                          </p:val>
+                                        </p:tav>
+                                        <p:tav tm="100000">
+                                          <p:val>
+                                            <p:strVal val="#ppt_y"/>
+                                          </p:val>
+                                        </p:tav>
+                                      </p:tavLst>
+                                    </p:anim>
+                                  </p:childTnLst>
+                                </p:cTn>
+                              </p:par>
+                            </p:childTnLst>
+                          </p:cTn>
+                        </p:par>
+                      </p:childTnLst>
+                    </p:cTn>
+                  </p:par>
+                  <p:par>
+                    <p:cTn id="28" fill="hold">
+                      <p:stCondLst>
+                        <p:cond delay="indefinite"/>
+                      </p:stCondLst>
+                      <p:childTnLst>
+                        <p:par>
+                          <p:cTn id="29" fill="hold">
+                            <p:stCondLst>
+                              <p:cond delay="0"/>
+                            </p:stCondLst>
+                            <p:childTnLst>
+                              <p:par>
+                                <p:cTn id="30" presetID="2" presetClass="entr" presetSubtype="4" fill="hold" grpId="0" nodeType="clickEffect">
+                                  <p:stCondLst>
+                                    <p:cond delay="0"/>
+                                  </p:stCondLst>
+                                  <p:childTnLst>
+                                    <p:set>
+                                      <p:cBhvr>
+                                        <p:cTn id="31" dur="1" fill="hold">
+                                          <p:stCondLst>
+                                            <p:cond delay="0"/>
+                                          </p:stCondLst>
+                                        </p:cTn>
+                                        <p:tgtEl>
+                                          <p:spTgt spid="4">
+                                            <p:txEl>
+                                              <p:pRg st="3" end="3"/>
+                                            </p:txEl>
+                                          </p:spTgt>
+                                        </p:tgtEl>
+                                        <p:attrNameLst>
+                                          <p:attrName>style.visibility</p:attrName>
+                                        </p:attrNameLst>
+                                      </p:cBhvr>
+                                      <p:to>
+                                        <p:strVal val="visible"/>
+                                      </p:to>
+                                    </p:set>
+                                    <p:anim calcmode="lin" valueType="num">
+                                      <p:cBhvr additive="base">
+                                        <p:cTn id="32" dur="500" fill="hold"/>
+                                        <p:tgtEl>
+                                          <p:spTgt spid="4">
+                                            <p:txEl>
+                                              <p:pRg st="3" end="3"/>
+                                            </p:txEl>
+                                          </p:spTgt>
+                                        </p:tgtEl>
+                                        <p:attrNameLst>
+                                          <p:attrName>ppt_x</p:attrName>
+                                        </p:attrNameLst>
+                                      </p:cBhvr>
+                                      <p:tavLst>
+                                        <p:tav tm="0">
+                                          <p:val>
+                                            <p:strVal val="#ppt_x"/>
+                                          </p:val>
+                                        </p:tav>
+                                        <p:tav tm="100000">
+                                          <p:val>
+                                            <p:strVal val="#ppt_x"/>
+                                          </p:val>
+                                        </p:tav>
+                                      </p:tavLst>
+                                    </p:anim>
+                                    <p:anim calcmode="lin" valueType="num">
+                                      <p:cBhvr additive="base">
+                                        <p:cTn id="33" dur="500" fill="hold"/>
+                                        <p:tgtEl>
+                                          <p:spTgt spid="4">
+                                            <p:txEl>
+                                              <p:pRg st="3" end="3"/>
+                                            </p:txEl>
+                                          </p:spTgt>
+                                        </p:tgtEl>
+                                        <p:attrNameLst>
+                                          <p:attrName>ppt_y</p:attrName>
+                                        </p:attrNameLst>
+                                      </p:cBhvr>
+                                      <p:tavLst>
+                                        <p:tav tm="0">
+                                          <p:val>
+                                            <p:strVal val="1+#ppt_h/2"/>
+                                          </p:val>
+                                        </p:tav>
+                                        <p:tav tm="100000">
+                                          <p:val>
+                                            <p:strVal val="#ppt_y"/>
+                                          </p:val>
+                                        </p:tav>
+                                      </p:tavLst>
+                                    </p:anim>
+                                  </p:childTnLst>
+                                </p:cTn>
+                              </p:par>
+                            </p:childTnLst>
+                          </p:cTn>
+                        </p:par>
+                      </p:childTnLst>
+                    </p:cTn>
+                  </p:par>
+                  <p:par>
+                    <p:cTn id="34" fill="hold">
+                      <p:stCondLst>
+                        <p:cond delay="indefinite"/>
+                      </p:stCondLst>
+                      <p:childTnLst>
+                        <p:par>
+                          <p:cTn id="35" fill="hold">
+                            <p:stCondLst>
+                              <p:cond delay="0"/>
+                            </p:stCondLst>
+                            <p:childTnLst>
+                              <p:par>
+                                <p:cTn id="36" presetID="2" presetClass="entr" presetSubtype="4" fill="hold" grpId="0" nodeType="clickEffect">
+                                  <p:stCondLst>
+                                    <p:cond delay="0"/>
+                                  </p:stCondLst>
+                                  <p:childTnLst>
+                                    <p:set>
+                                      <p:cBhvr>
+                                        <p:cTn id="37" dur="1" fill="hold">
+                                          <p:stCondLst>
+                                            <p:cond delay="0"/>
+                                          </p:stCondLst>
+                                        </p:cTn>
+                                        <p:tgtEl>
+                                          <p:spTgt spid="4">
+                                            <p:txEl>
+                                              <p:pRg st="4" end="4"/>
+                                            </p:txEl>
+                                          </p:spTgt>
+                                        </p:tgtEl>
+                                        <p:attrNameLst>
+                                          <p:attrName>style.visibility</p:attrName>
+                                        </p:attrNameLst>
+                                      </p:cBhvr>
+                                      <p:to>
+                                        <p:strVal val="visible"/>
+                                      </p:to>
+                                    </p:set>
+                                    <p:anim calcmode="lin" valueType="num">
+                                      <p:cBhvr additive="base">
+                                        <p:cTn id="38" dur="500" fill="hold"/>
+                                        <p:tgtEl>
+                                          <p:spTgt spid="4">
+                                            <p:txEl>
+                                              <p:pRg st="4" end="4"/>
+                                            </p:txEl>
+                                          </p:spTgt>
+                                        </p:tgtEl>
+                                        <p:attrNameLst>
+                                          <p:attrName>ppt_x</p:attrName>
+                                        </p:attrNameLst>
+                                      </p:cBhvr>
+                                      <p:tavLst>
+                                        <p:tav tm="0">
+                                          <p:val>
+                                            <p:strVal val="#ppt_x"/>
+                                          </p:val>
+                                        </p:tav>
+                                        <p:tav tm="100000">
+                                          <p:val>
+                                            <p:strVal val="#ppt_x"/>
+                                          </p:val>
+                                        </p:tav>
+                                      </p:tavLst>
+                                    </p:anim>
+                                    <p:anim calcmode="lin" valueType="num">
+                                      <p:cBhvr additive="base">
+                                        <p:cTn id="39" dur="500" fill="hold"/>
+                                        <p:tgtEl>
+                                          <p:spTgt spid="4">
+                                            <p:txEl>
+                                              <p:pRg st="4" end="4"/>
+                                            </p:txEl>
+                                          </p:spTgt>
+                                        </p:tgtEl>
+                                        <p:attrNameLst>
+                                          <p:attrName>ppt_y</p:attrName>
+                                        </p:attrNameLst>
+                                      </p:cBhvr>
+                                      <p:tavLst>
+                                        <p:tav tm="0">
+                                          <p:val>
+                                            <p:strVal val="1+#ppt_h/2"/>
+                                          </p:val>
+                                        </p:tav>
+                                        <p:tav tm="100000">
+                                          <p:val>
+                                            <p:strVal val="#ppt_y"/>
+                                          </p:val>
+                                        </p:tav>
+                                      </p:tavLst>
+                                    </p:anim>
+                                  </p:childTnLst>
+                                </p:cTn>
+                              </p:par>
+                            </p:childTnLst>
+                          </p:cTn>
+                        </p:par>
+                      </p:childTnLst>
+                    </p:cTn>
+                  </p:par>
+                  <p:par>
+                    <p:cTn id="40" fill="hold">
+                      <p:stCondLst>
+                        <p:cond delay="indefinite"/>
+                      </p:stCondLst>
+                      <p:childTnLst>
+                        <p:par>
+                          <p:cTn id="41" fill="hold">
+                            <p:stCondLst>
+                              <p:cond delay="0"/>
+                            </p:stCondLst>
+                            <p:childTnLst>
+                              <p:par>
+                                <p:cTn id="42" presetID="2" presetClass="entr" presetSubtype="4" fill="hold" grpId="0" nodeType="clickEffect">
+                                  <p:stCondLst>
+                                    <p:cond delay="0"/>
+                                  </p:stCondLst>
+                                  <p:childTnLst>
+                                    <p:set>
+                                      <p:cBhvr>
+                                        <p:cTn id="43" dur="1" fill="hold">
+                                          <p:stCondLst>
+                                            <p:cond delay="0"/>
+                                          </p:stCondLst>
+                                        </p:cTn>
+                                        <p:tgtEl>
+                                          <p:spTgt spid="4">
+                                            <p:txEl>
+                                              <p:pRg st="5" end="5"/>
+                                            </p:txEl>
+                                          </p:spTgt>
+                                        </p:tgtEl>
+                                        <p:attrNameLst>
+                                          <p:attrName>style.visibility</p:attrName>
+                                        </p:attrNameLst>
+                                      </p:cBhvr>
+                                      <p:to>
+                                        <p:strVal val="visible"/>
+                                      </p:to>
+                                    </p:set>
+                                    <p:anim calcmode="lin" valueType="num">
+                                      <p:cBhvr additive="base">
+                                        <p:cTn id="44" dur="500" fill="hold"/>
+                                        <p:tgtEl>
+                                          <p:spTgt spid="4">
+                                            <p:txEl>
+                                              <p:pRg st="5" end="5"/>
+                                            </p:txEl>
+                                          </p:spTgt>
+                                        </p:tgtEl>
+                                        <p:attrNameLst>
+                                          <p:attrName>ppt_x</p:attrName>
+                                        </p:attrNameLst>
+                                      </p:cBhvr>
+                                      <p:tavLst>
+                                        <p:tav tm="0">
+                                          <p:val>
+                                            <p:strVal val="#ppt_x"/>
+                                          </p:val>
+                                        </p:tav>
+                                        <p:tav tm="100000">
+                                          <p:val>
+                                            <p:strVal val="#ppt_x"/>
+                                          </p:val>
+                                        </p:tav>
+                                      </p:tavLst>
+                                    </p:anim>
+                                    <p:anim calcmode="lin" valueType="num">
+                                      <p:cBhvr additive="base">
+                                        <p:cTn id="45" dur="500" fill="hold"/>
+                                        <p:tgtEl>
+                                          <p:spTgt spid="4">
+                                            <p:txEl>
+                                              <p:pRg st="5" end="5"/>
+                                            </p:txEl>
+                                          </p:spTgt>
+                                        </p:tgtEl>
+                                        <p:attrNameLst>
+                                          <p:attrName>ppt_y</p:attrName>
+                                        </p:attrNameLst>
+                                      </p:cBhvr>
+                                      <p:tavLst>
+                                        <p:tav tm="0">
+                                          <p:val>
+                                            <p:strVal val="1+#ppt_h/2"/>
+                                          </p:val>
+                                        </p:tav>
+                                        <p:tav tm="100000">
+                                          <p:val>
+                                            <p:strVal val="#ppt_y"/>
+                                          </p:val>
+                                        </p:tav>
+                                      </p:tavLst>
+                                    </p:anim>
+                                  </p:childTnLst>
+                                </p:cTn>
+                              </p:par>
+                            </p:childTnLst>
+                          </p:cTn>
+                        </p:par>
+                      </p:childTnLst>
+                    </p:cTn>
+                  </p:par>
+                  <p:par>
+                    <p:cTn id="46" fill="hold">
+                      <p:stCondLst>
+                        <p:cond delay="indefinite"/>
+                      </p:stCondLst>
+                      <p:childTnLst>
+                        <p:par>
+                          <p:cTn id="47" fill="hold">
+                            <p:stCondLst>
+                              <p:cond delay="0"/>
+                            </p:stCondLst>
+                            <p:childTnLst>
+                              <p:par>
+                                <p:cTn id="48" presetID="2" presetClass="entr" presetSubtype="4" fill="hold" grpId="0" nodeType="clickEffect">
+                                  <p:stCondLst>
+                                    <p:cond delay="0"/>
+                                  </p:stCondLst>
+                                  <p:childTnLst>
+                                    <p:set>
+                                      <p:cBhvr>
+                                        <p:cTn id="49" dur="1" fill="hold">
+                                          <p:stCondLst>
+                                            <p:cond delay="0"/>
+                                          </p:stCondLst>
+                                        </p:cTn>
+                                        <p:tgtEl>
+                                          <p:spTgt spid="4">
+                                            <p:txEl>
+                                              <p:pRg st="6" end="6"/>
+                                            </p:txEl>
+                                          </p:spTgt>
+                                        </p:tgtEl>
+                                        <p:attrNameLst>
+                                          <p:attrName>style.visibility</p:attrName>
+                                        </p:attrNameLst>
+                                      </p:cBhvr>
+                                      <p:to>
+                                        <p:strVal val="visible"/>
+                                      </p:to>
+                                    </p:set>
+                                    <p:anim calcmode="lin" valueType="num">
+                                      <p:cBhvr additive="base">
+                                        <p:cTn id="50" dur="500" fill="hold"/>
+                                        <p:tgtEl>
+                                          <p:spTgt spid="4">
+                                            <p:txEl>
+                                              <p:pRg st="6" end="6"/>
+                                            </p:txEl>
+                                          </p:spTgt>
+                                        </p:tgtEl>
+                                        <p:attrNameLst>
+                                          <p:attrName>ppt_x</p:attrName>
+                                        </p:attrNameLst>
+                                      </p:cBhvr>
+                                      <p:tavLst>
+                                        <p:tav tm="0">
+                                          <p:val>
+                                            <p:strVal val="#ppt_x"/>
+                                          </p:val>
+                                        </p:tav>
+                                        <p:tav tm="100000">
+                                          <p:val>
+                                            <p:strVal val="#ppt_x"/>
+                                          </p:val>
+                                        </p:tav>
+                                      </p:tavLst>
+                                    </p:anim>
+                                    <p:anim calcmode="lin" valueType="num">
+                                      <p:cBhvr additive="base">
+                                        <p:cTn id="51" dur="500" fill="hold"/>
+                                        <p:tgtEl>
+                                          <p:spTgt spid="4">
+                                            <p:txEl>
+                                              <p:pRg st="6" end="6"/>
+                                            </p:txEl>
+                                          </p:spTgt>
+                                        </p:tgtEl>
+                                        <p:attrNameLst>
+                                          <p:attrName>ppt_y</p:attrName>
+                                        </p:attrNameLst>
+                                      </p:cBhvr>
+                                      <p:tavLst>
+                                        <p:tav tm="0">
+                                          <p:val>
+                                            <p:strVal val="1+#ppt_h/2"/>
+                                          </p:val>
+                                        </p:tav>
+                                        <p:tav tm="100000">
+                                          <p:val>
+                                            <p:strVal val="#ppt_y"/>
+                                          </p:val>
+                                        </p:tav>
+                                      </p:tavLst>
+                                    </p:anim>
+                                  </p:childTnLst>
+                                </p:cTn>
+                              </p:par>
+                            </p:childTnLst>
+                          </p:cTn>
+                        </p:par>
+                      </p:childTnLst>
+                    </p:cTn>
+                  </p:par>
+                  <p:par>
+                    <p:cTn id="52" fill="hold">
+                      <p:stCondLst>
+                        <p:cond delay="indefinite"/>
+                      </p:stCondLst>
+                      <p:childTnLst>
+                        <p:par>
+                          <p:cTn id="53" fill="hold">
+                            <p:stCondLst>
+                              <p:cond delay="0"/>
+                            </p:stCondLst>
+                            <p:childTnLst>
+                              <p:par>
+                                <p:cTn id="54" presetID="2" presetClass="entr" presetSubtype="4" fill="hold" grpId="0" nodeType="clickEffect">
+                                  <p:stCondLst>
+                                    <p:cond delay="0"/>
+                                  </p:stCondLst>
+                                  <p:childTnLst>
+                                    <p:set>
+                                      <p:cBhvr>
+                                        <p:cTn id="55" dur="1" fill="hold">
+                                          <p:stCondLst>
+                                            <p:cond delay="0"/>
+                                          </p:stCondLst>
+                                        </p:cTn>
+                                        <p:tgtEl>
+                                          <p:spTgt spid="4">
+                                            <p:txEl>
+                                              <p:pRg st="7" end="7"/>
+                                            </p:txEl>
+                                          </p:spTgt>
+                                        </p:tgtEl>
+                                        <p:attrNameLst>
+                                          <p:attrName>style.visibility</p:attrName>
+                                        </p:attrNameLst>
+                                      </p:cBhvr>
+                                      <p:to>
+                                        <p:strVal val="visible"/>
+                                      </p:to>
+                                    </p:set>
+                                    <p:anim calcmode="lin" valueType="num">
+                                      <p:cBhvr additive="base">
+                                        <p:cTn id="56" dur="500" fill="hold"/>
+                                        <p:tgtEl>
+                                          <p:spTgt spid="4">
+                                            <p:txEl>
+                                              <p:pRg st="7" end="7"/>
+                                            </p:txEl>
+                                          </p:spTgt>
+                                        </p:tgtEl>
+                                        <p:attrNameLst>
+                                          <p:attrName>ppt_x</p:attrName>
+                                        </p:attrNameLst>
+                                      </p:cBhvr>
+                                      <p:tavLst>
+                                        <p:tav tm="0">
+                                          <p:val>
+                                            <p:strVal val="#ppt_x"/>
+                                          </p:val>
+                                        </p:tav>
+                                        <p:tav tm="100000">
+                                          <p:val>
+                                            <p:strVal val="#ppt_x"/>
+                                          </p:val>
+                                        </p:tav>
+                                      </p:tavLst>
+                                    </p:anim>
+                                    <p:anim calcmode="lin" valueType="num">
+                                      <p:cBhvr additive="base">
+                                        <p:cTn id="57" dur="500" fill="hold"/>
+                                        <p:tgtEl>
+                                          <p:spTgt spid="4">
+                                            <p:txEl>
+                                              <p:pRg st="7" end="7"/>
+                                            </p:txEl>
+                                          </p:spTgt>
+                                        </p:tgtEl>
+                                        <p:attrNameLst>
+                                          <p:attrName>ppt_y</p:attrName>
+                                        </p:attrNameLst>
+                                      </p:cBhvr>
+                                      <p:tavLst>
+                                        <p:tav tm="0">
+                                          <p:val>
+                                            <p:strVal val="1+#ppt_h/2"/>
+                                          </p:val>
+                                        </p:tav>
+                                        <p:tav tm="100000">
+                                          <p:val>
+                                            <p:strVal val="#ppt_y"/>
+                                          </p:val>
+                                        </p:tav>
+                                      </p:tavLst>
+                                    </p:anim>
+                                  </p:childTnLst>
+                                </p:cTn>
+                              </p:par>
+                            </p:childTnLst>
+                          </p:cTn>
+                        </p:par>
+                      </p:childTnLst>
+                    </p:cTn>
+                  </p:par>
+                </p:childTnLst>
+              </p:cTn>
+              <p:prevCondLst>
+                <p:cond evt="onPrev" delay="0">
+                  <p:tgtEl>
+                    <p:sldTgt/>
+                  </p:tgtEl>
+                </p:cond>
+              </p:prevCondLst>
+              <p:nextCondLst>
+                <p:cond evt="onNext" delay="0">
+                  <p:tgtEl>
+                    <p:sldTgt/>
+                  </p:tgtEl>
+                </p:cond>
+              </p:nextCondLst>
+            </p:seq>
+          </p:childTnLst>
+        </p:cTn>
+      </p:par>
+    </p:tnLst>
+    <p:bldLst>
+      <p:bldP spid="2" grpId="0"/>
+      <p:bldP spid="4" grpId="0" build="p"/>
+    </p:bldLst>
+  </p:timing>
 </p:sld>
 </file>
 
@@ -16125,18 +20752,860 @@
   <p:clrMapOvr>
     <a:masterClrMapping/>
   </p:clrMapOvr>
-  <mc:AlternateContent xmlns:mc="http://schemas.openxmlformats.org/markup-compatibility/2006">
-    <mc:Choice xmlns:p14="http://schemas.microsoft.com/office/powerpoint/2010/main" Requires="p14">
+  <mc:AlternateContent xmlns:mc="http://schemas.openxmlformats.org/markup-compatibility/2006" xmlns:p14="http://schemas.microsoft.com/office/powerpoint/2010/main">
+    <mc:Choice Requires="p14">
       <p:transition spd="slow" p14:dur="4000">
         <p14:vortex dir="r"/>
       </p:transition>
     </mc:Choice>
-    <mc:Fallback>
+    <mc:Fallback xmlns="">
       <p:transition spd="slow">
         <p:fade/>
       </p:transition>
     </mc:Fallback>
   </mc:AlternateContent>
+  <p:timing>
+    <p:tnLst>
+      <p:par>
+        <p:cTn id="1" dur="indefinite" restart="never" nodeType="tmRoot">
+          <p:childTnLst>
+            <p:seq concurrent="1" nextAc="seek">
+              <p:cTn id="2" dur="indefinite" nodeType="mainSeq">
+                <p:childTnLst>
+                  <p:par>
+                    <p:cTn id="3" fill="hold">
+                      <p:stCondLst>
+                        <p:cond delay="indefinite"/>
+                      </p:stCondLst>
+                      <p:childTnLst>
+                        <p:par>
+                          <p:cTn id="4" fill="hold">
+                            <p:stCondLst>
+                              <p:cond delay="0"/>
+                            </p:stCondLst>
+                            <p:childTnLst>
+                              <p:par>
+                                <p:cTn id="5" presetID="53" presetClass="entr" presetSubtype="16" fill="hold" grpId="0" nodeType="clickEffect">
+                                  <p:stCondLst>
+                                    <p:cond delay="0"/>
+                                  </p:stCondLst>
+                                  <p:childTnLst>
+                                    <p:set>
+                                      <p:cBhvr>
+                                        <p:cTn id="6" dur="1" fill="hold">
+                                          <p:stCondLst>
+                                            <p:cond delay="0"/>
+                                          </p:stCondLst>
+                                        </p:cTn>
+                                        <p:tgtEl>
+                                          <p:spTgt spid="2"/>
+                                        </p:tgtEl>
+                                        <p:attrNameLst>
+                                          <p:attrName>style.visibility</p:attrName>
+                                        </p:attrNameLst>
+                                      </p:cBhvr>
+                                      <p:to>
+                                        <p:strVal val="visible"/>
+                                      </p:to>
+                                    </p:set>
+                                    <p:anim calcmode="lin" valueType="num">
+                                      <p:cBhvr>
+                                        <p:cTn id="7" dur="500" fill="hold"/>
+                                        <p:tgtEl>
+                                          <p:spTgt spid="2"/>
+                                        </p:tgtEl>
+                                        <p:attrNameLst>
+                                          <p:attrName>ppt_w</p:attrName>
+                                        </p:attrNameLst>
+                                      </p:cBhvr>
+                                      <p:tavLst>
+                                        <p:tav tm="0">
+                                          <p:val>
+                                            <p:fltVal val="0"/>
+                                          </p:val>
+                                        </p:tav>
+                                        <p:tav tm="100000">
+                                          <p:val>
+                                            <p:strVal val="#ppt_w"/>
+                                          </p:val>
+                                        </p:tav>
+                                      </p:tavLst>
+                                    </p:anim>
+                                    <p:anim calcmode="lin" valueType="num">
+                                      <p:cBhvr>
+                                        <p:cTn id="8" dur="500" fill="hold"/>
+                                        <p:tgtEl>
+                                          <p:spTgt spid="2"/>
+                                        </p:tgtEl>
+                                        <p:attrNameLst>
+                                          <p:attrName>ppt_h</p:attrName>
+                                        </p:attrNameLst>
+                                      </p:cBhvr>
+                                      <p:tavLst>
+                                        <p:tav tm="0">
+                                          <p:val>
+                                            <p:fltVal val="0"/>
+                                          </p:val>
+                                        </p:tav>
+                                        <p:tav tm="100000">
+                                          <p:val>
+                                            <p:strVal val="#ppt_h"/>
+                                          </p:val>
+                                        </p:tav>
+                                      </p:tavLst>
+                                    </p:anim>
+                                    <p:animEffect transition="in" filter="fade">
+                                      <p:cBhvr>
+                                        <p:cTn id="9" dur="500"/>
+                                        <p:tgtEl>
+                                          <p:spTgt spid="2"/>
+                                        </p:tgtEl>
+                                      </p:cBhvr>
+                                    </p:animEffect>
+                                  </p:childTnLst>
+                                </p:cTn>
+                              </p:par>
+                            </p:childTnLst>
+                          </p:cTn>
+                        </p:par>
+                      </p:childTnLst>
+                    </p:cTn>
+                  </p:par>
+                  <p:par>
+                    <p:cTn id="10" fill="hold">
+                      <p:stCondLst>
+                        <p:cond delay="indefinite"/>
+                      </p:stCondLst>
+                      <p:childTnLst>
+                        <p:par>
+                          <p:cTn id="11" fill="hold">
+                            <p:stCondLst>
+                              <p:cond delay="0"/>
+                            </p:stCondLst>
+                            <p:childTnLst>
+                              <p:par>
+                                <p:cTn id="12" presetID="2" presetClass="entr" presetSubtype="4" fill="hold" nodeType="clickEffect">
+                                  <p:stCondLst>
+                                    <p:cond delay="0"/>
+                                  </p:stCondLst>
+                                  <p:childTnLst>
+                                    <p:set>
+                                      <p:cBhvr>
+                                        <p:cTn id="13" dur="1" fill="hold">
+                                          <p:stCondLst>
+                                            <p:cond delay="0"/>
+                                          </p:stCondLst>
+                                        </p:cTn>
+                                        <p:tgtEl>
+                                          <p:spTgt spid="8"/>
+                                        </p:tgtEl>
+                                        <p:attrNameLst>
+                                          <p:attrName>style.visibility</p:attrName>
+                                        </p:attrNameLst>
+                                      </p:cBhvr>
+                                      <p:to>
+                                        <p:strVal val="visible"/>
+                                      </p:to>
+                                    </p:set>
+                                    <p:anim calcmode="lin" valueType="num">
+                                      <p:cBhvr additive="base">
+                                        <p:cTn id="14" dur="500" fill="hold"/>
+                                        <p:tgtEl>
+                                          <p:spTgt spid="8"/>
+                                        </p:tgtEl>
+                                        <p:attrNameLst>
+                                          <p:attrName>ppt_x</p:attrName>
+                                        </p:attrNameLst>
+                                      </p:cBhvr>
+                                      <p:tavLst>
+                                        <p:tav tm="0">
+                                          <p:val>
+                                            <p:strVal val="#ppt_x"/>
+                                          </p:val>
+                                        </p:tav>
+                                        <p:tav tm="100000">
+                                          <p:val>
+                                            <p:strVal val="#ppt_x"/>
+                                          </p:val>
+                                        </p:tav>
+                                      </p:tavLst>
+                                    </p:anim>
+                                    <p:anim calcmode="lin" valueType="num">
+                                      <p:cBhvr additive="base">
+                                        <p:cTn id="15" dur="500" fill="hold"/>
+                                        <p:tgtEl>
+                                          <p:spTgt spid="8"/>
+                                        </p:tgtEl>
+                                        <p:attrNameLst>
+                                          <p:attrName>ppt_y</p:attrName>
+                                        </p:attrNameLst>
+                                      </p:cBhvr>
+                                      <p:tavLst>
+                                        <p:tav tm="0">
+                                          <p:val>
+                                            <p:strVal val="1+#ppt_h/2"/>
+                                          </p:val>
+                                        </p:tav>
+                                        <p:tav tm="100000">
+                                          <p:val>
+                                            <p:strVal val="#ppt_y"/>
+                                          </p:val>
+                                        </p:tav>
+                                      </p:tavLst>
+                                    </p:anim>
+                                  </p:childTnLst>
+                                </p:cTn>
+                              </p:par>
+                            </p:childTnLst>
+                          </p:cTn>
+                        </p:par>
+                      </p:childTnLst>
+                    </p:cTn>
+                  </p:par>
+                  <p:par>
+                    <p:cTn id="16" fill="hold">
+                      <p:stCondLst>
+                        <p:cond delay="indefinite"/>
+                      </p:stCondLst>
+                      <p:childTnLst>
+                        <p:par>
+                          <p:cTn id="17" fill="hold">
+                            <p:stCondLst>
+                              <p:cond delay="0"/>
+                            </p:stCondLst>
+                            <p:childTnLst>
+                              <p:par>
+                                <p:cTn id="18" presetID="2" presetClass="entr" presetSubtype="4" fill="hold" grpId="0" nodeType="clickEffect">
+                                  <p:stCondLst>
+                                    <p:cond delay="0"/>
+                                  </p:stCondLst>
+                                  <p:childTnLst>
+                                    <p:set>
+                                      <p:cBhvr>
+                                        <p:cTn id="19" dur="1" fill="hold">
+                                          <p:stCondLst>
+                                            <p:cond delay="0"/>
+                                          </p:stCondLst>
+                                        </p:cTn>
+                                        <p:tgtEl>
+                                          <p:spTgt spid="3">
+                                            <p:txEl>
+                                              <p:pRg st="0" end="0"/>
+                                            </p:txEl>
+                                          </p:spTgt>
+                                        </p:tgtEl>
+                                        <p:attrNameLst>
+                                          <p:attrName>style.visibility</p:attrName>
+                                        </p:attrNameLst>
+                                      </p:cBhvr>
+                                      <p:to>
+                                        <p:strVal val="visible"/>
+                                      </p:to>
+                                    </p:set>
+                                    <p:anim calcmode="lin" valueType="num">
+                                      <p:cBhvr additive="base">
+                                        <p:cTn id="20" dur="500" fill="hold"/>
+                                        <p:tgtEl>
+                                          <p:spTgt spid="3">
+                                            <p:txEl>
+                                              <p:pRg st="0" end="0"/>
+                                            </p:txEl>
+                                          </p:spTgt>
+                                        </p:tgtEl>
+                                        <p:attrNameLst>
+                                          <p:attrName>ppt_x</p:attrName>
+                                        </p:attrNameLst>
+                                      </p:cBhvr>
+                                      <p:tavLst>
+                                        <p:tav tm="0">
+                                          <p:val>
+                                            <p:strVal val="#ppt_x"/>
+                                          </p:val>
+                                        </p:tav>
+                                        <p:tav tm="100000">
+                                          <p:val>
+                                            <p:strVal val="#ppt_x"/>
+                                          </p:val>
+                                        </p:tav>
+                                      </p:tavLst>
+                                    </p:anim>
+                                    <p:anim calcmode="lin" valueType="num">
+                                      <p:cBhvr additive="base">
+                                        <p:cTn id="21" dur="500" fill="hold"/>
+                                        <p:tgtEl>
+                                          <p:spTgt spid="3">
+                                            <p:txEl>
+                                              <p:pRg st="0" end="0"/>
+                                            </p:txEl>
+                                          </p:spTgt>
+                                        </p:tgtEl>
+                                        <p:attrNameLst>
+                                          <p:attrName>ppt_y</p:attrName>
+                                        </p:attrNameLst>
+                                      </p:cBhvr>
+                                      <p:tavLst>
+                                        <p:tav tm="0">
+                                          <p:val>
+                                            <p:strVal val="1+#ppt_h/2"/>
+                                          </p:val>
+                                        </p:tav>
+                                        <p:tav tm="100000">
+                                          <p:val>
+                                            <p:strVal val="#ppt_y"/>
+                                          </p:val>
+                                        </p:tav>
+                                      </p:tavLst>
+                                    </p:anim>
+                                  </p:childTnLst>
+                                </p:cTn>
+                              </p:par>
+                            </p:childTnLst>
+                          </p:cTn>
+                        </p:par>
+                      </p:childTnLst>
+                    </p:cTn>
+                  </p:par>
+                  <p:par>
+                    <p:cTn id="22" fill="hold">
+                      <p:stCondLst>
+                        <p:cond delay="indefinite"/>
+                      </p:stCondLst>
+                      <p:childTnLst>
+                        <p:par>
+                          <p:cTn id="23" fill="hold">
+                            <p:stCondLst>
+                              <p:cond delay="0"/>
+                            </p:stCondLst>
+                            <p:childTnLst>
+                              <p:par>
+                                <p:cTn id="24" presetID="2" presetClass="entr" presetSubtype="4" fill="hold" grpId="0" nodeType="clickEffect">
+                                  <p:stCondLst>
+                                    <p:cond delay="0"/>
+                                  </p:stCondLst>
+                                  <p:childTnLst>
+                                    <p:set>
+                                      <p:cBhvr>
+                                        <p:cTn id="25" dur="1" fill="hold">
+                                          <p:stCondLst>
+                                            <p:cond delay="0"/>
+                                          </p:stCondLst>
+                                        </p:cTn>
+                                        <p:tgtEl>
+                                          <p:spTgt spid="3">
+                                            <p:txEl>
+                                              <p:pRg st="1" end="1"/>
+                                            </p:txEl>
+                                          </p:spTgt>
+                                        </p:tgtEl>
+                                        <p:attrNameLst>
+                                          <p:attrName>style.visibility</p:attrName>
+                                        </p:attrNameLst>
+                                      </p:cBhvr>
+                                      <p:to>
+                                        <p:strVal val="visible"/>
+                                      </p:to>
+                                    </p:set>
+                                    <p:anim calcmode="lin" valueType="num">
+                                      <p:cBhvr additive="base">
+                                        <p:cTn id="26" dur="500" fill="hold"/>
+                                        <p:tgtEl>
+                                          <p:spTgt spid="3">
+                                            <p:txEl>
+                                              <p:pRg st="1" end="1"/>
+                                            </p:txEl>
+                                          </p:spTgt>
+                                        </p:tgtEl>
+                                        <p:attrNameLst>
+                                          <p:attrName>ppt_x</p:attrName>
+                                        </p:attrNameLst>
+                                      </p:cBhvr>
+                                      <p:tavLst>
+                                        <p:tav tm="0">
+                                          <p:val>
+                                            <p:strVal val="#ppt_x"/>
+                                          </p:val>
+                                        </p:tav>
+                                        <p:tav tm="100000">
+                                          <p:val>
+                                            <p:strVal val="#ppt_x"/>
+                                          </p:val>
+                                        </p:tav>
+                                      </p:tavLst>
+                                    </p:anim>
+                                    <p:anim calcmode="lin" valueType="num">
+                                      <p:cBhvr additive="base">
+                                        <p:cTn id="27" dur="500" fill="hold"/>
+                                        <p:tgtEl>
+                                          <p:spTgt spid="3">
+                                            <p:txEl>
+                                              <p:pRg st="1" end="1"/>
+                                            </p:txEl>
+                                          </p:spTgt>
+                                        </p:tgtEl>
+                                        <p:attrNameLst>
+                                          <p:attrName>ppt_y</p:attrName>
+                                        </p:attrNameLst>
+                                      </p:cBhvr>
+                                      <p:tavLst>
+                                        <p:tav tm="0">
+                                          <p:val>
+                                            <p:strVal val="1+#ppt_h/2"/>
+                                          </p:val>
+                                        </p:tav>
+                                        <p:tav tm="100000">
+                                          <p:val>
+                                            <p:strVal val="#ppt_y"/>
+                                          </p:val>
+                                        </p:tav>
+                                      </p:tavLst>
+                                    </p:anim>
+                                  </p:childTnLst>
+                                </p:cTn>
+                              </p:par>
+                            </p:childTnLst>
+                          </p:cTn>
+                        </p:par>
+                      </p:childTnLst>
+                    </p:cTn>
+                  </p:par>
+                  <p:par>
+                    <p:cTn id="28" fill="hold">
+                      <p:stCondLst>
+                        <p:cond delay="indefinite"/>
+                      </p:stCondLst>
+                      <p:childTnLst>
+                        <p:par>
+                          <p:cTn id="29" fill="hold">
+                            <p:stCondLst>
+                              <p:cond delay="0"/>
+                            </p:stCondLst>
+                            <p:childTnLst>
+                              <p:par>
+                                <p:cTn id="30" presetID="2" presetClass="entr" presetSubtype="4" fill="hold" grpId="0" nodeType="clickEffect">
+                                  <p:stCondLst>
+                                    <p:cond delay="0"/>
+                                  </p:stCondLst>
+                                  <p:childTnLst>
+                                    <p:set>
+                                      <p:cBhvr>
+                                        <p:cTn id="31" dur="1" fill="hold">
+                                          <p:stCondLst>
+                                            <p:cond delay="0"/>
+                                          </p:stCondLst>
+                                        </p:cTn>
+                                        <p:tgtEl>
+                                          <p:spTgt spid="3">
+                                            <p:txEl>
+                                              <p:pRg st="2" end="2"/>
+                                            </p:txEl>
+                                          </p:spTgt>
+                                        </p:tgtEl>
+                                        <p:attrNameLst>
+                                          <p:attrName>style.visibility</p:attrName>
+                                        </p:attrNameLst>
+                                      </p:cBhvr>
+                                      <p:to>
+                                        <p:strVal val="visible"/>
+                                      </p:to>
+                                    </p:set>
+                                    <p:anim calcmode="lin" valueType="num">
+                                      <p:cBhvr additive="base">
+                                        <p:cTn id="32" dur="500" fill="hold"/>
+                                        <p:tgtEl>
+                                          <p:spTgt spid="3">
+                                            <p:txEl>
+                                              <p:pRg st="2" end="2"/>
+                                            </p:txEl>
+                                          </p:spTgt>
+                                        </p:tgtEl>
+                                        <p:attrNameLst>
+                                          <p:attrName>ppt_x</p:attrName>
+                                        </p:attrNameLst>
+                                      </p:cBhvr>
+                                      <p:tavLst>
+                                        <p:tav tm="0">
+                                          <p:val>
+                                            <p:strVal val="#ppt_x"/>
+                                          </p:val>
+                                        </p:tav>
+                                        <p:tav tm="100000">
+                                          <p:val>
+                                            <p:strVal val="#ppt_x"/>
+                                          </p:val>
+                                        </p:tav>
+                                      </p:tavLst>
+                                    </p:anim>
+                                    <p:anim calcmode="lin" valueType="num">
+                                      <p:cBhvr additive="base">
+                                        <p:cTn id="33" dur="500" fill="hold"/>
+                                        <p:tgtEl>
+                                          <p:spTgt spid="3">
+                                            <p:txEl>
+                                              <p:pRg st="2" end="2"/>
+                                            </p:txEl>
+                                          </p:spTgt>
+                                        </p:tgtEl>
+                                        <p:attrNameLst>
+                                          <p:attrName>ppt_y</p:attrName>
+                                        </p:attrNameLst>
+                                      </p:cBhvr>
+                                      <p:tavLst>
+                                        <p:tav tm="0">
+                                          <p:val>
+                                            <p:strVal val="1+#ppt_h/2"/>
+                                          </p:val>
+                                        </p:tav>
+                                        <p:tav tm="100000">
+                                          <p:val>
+                                            <p:strVal val="#ppt_y"/>
+                                          </p:val>
+                                        </p:tav>
+                                      </p:tavLst>
+                                    </p:anim>
+                                  </p:childTnLst>
+                                </p:cTn>
+                              </p:par>
+                            </p:childTnLst>
+                          </p:cTn>
+                        </p:par>
+                      </p:childTnLst>
+                    </p:cTn>
+                  </p:par>
+                  <p:par>
+                    <p:cTn id="34" fill="hold">
+                      <p:stCondLst>
+                        <p:cond delay="indefinite"/>
+                      </p:stCondLst>
+                      <p:childTnLst>
+                        <p:par>
+                          <p:cTn id="35" fill="hold">
+                            <p:stCondLst>
+                              <p:cond delay="0"/>
+                            </p:stCondLst>
+                            <p:childTnLst>
+                              <p:par>
+                                <p:cTn id="36" presetID="2" presetClass="entr" presetSubtype="4" fill="hold" grpId="0" nodeType="clickEffect">
+                                  <p:stCondLst>
+                                    <p:cond delay="0"/>
+                                  </p:stCondLst>
+                                  <p:childTnLst>
+                                    <p:set>
+                                      <p:cBhvr>
+                                        <p:cTn id="37" dur="1" fill="hold">
+                                          <p:stCondLst>
+                                            <p:cond delay="0"/>
+                                          </p:stCondLst>
+                                        </p:cTn>
+                                        <p:tgtEl>
+                                          <p:spTgt spid="3">
+                                            <p:txEl>
+                                              <p:pRg st="3" end="3"/>
+                                            </p:txEl>
+                                          </p:spTgt>
+                                        </p:tgtEl>
+                                        <p:attrNameLst>
+                                          <p:attrName>style.visibility</p:attrName>
+                                        </p:attrNameLst>
+                                      </p:cBhvr>
+                                      <p:to>
+                                        <p:strVal val="visible"/>
+                                      </p:to>
+                                    </p:set>
+                                    <p:anim calcmode="lin" valueType="num">
+                                      <p:cBhvr additive="base">
+                                        <p:cTn id="38" dur="500" fill="hold"/>
+                                        <p:tgtEl>
+                                          <p:spTgt spid="3">
+                                            <p:txEl>
+                                              <p:pRg st="3" end="3"/>
+                                            </p:txEl>
+                                          </p:spTgt>
+                                        </p:tgtEl>
+                                        <p:attrNameLst>
+                                          <p:attrName>ppt_x</p:attrName>
+                                        </p:attrNameLst>
+                                      </p:cBhvr>
+                                      <p:tavLst>
+                                        <p:tav tm="0">
+                                          <p:val>
+                                            <p:strVal val="#ppt_x"/>
+                                          </p:val>
+                                        </p:tav>
+                                        <p:tav tm="100000">
+                                          <p:val>
+                                            <p:strVal val="#ppt_x"/>
+                                          </p:val>
+                                        </p:tav>
+                                      </p:tavLst>
+                                    </p:anim>
+                                    <p:anim calcmode="lin" valueType="num">
+                                      <p:cBhvr additive="base">
+                                        <p:cTn id="39" dur="500" fill="hold"/>
+                                        <p:tgtEl>
+                                          <p:spTgt spid="3">
+                                            <p:txEl>
+                                              <p:pRg st="3" end="3"/>
+                                            </p:txEl>
+                                          </p:spTgt>
+                                        </p:tgtEl>
+                                        <p:attrNameLst>
+                                          <p:attrName>ppt_y</p:attrName>
+                                        </p:attrNameLst>
+                                      </p:cBhvr>
+                                      <p:tavLst>
+                                        <p:tav tm="0">
+                                          <p:val>
+                                            <p:strVal val="1+#ppt_h/2"/>
+                                          </p:val>
+                                        </p:tav>
+                                        <p:tav tm="100000">
+                                          <p:val>
+                                            <p:strVal val="#ppt_y"/>
+                                          </p:val>
+                                        </p:tav>
+                                      </p:tavLst>
+                                    </p:anim>
+                                  </p:childTnLst>
+                                </p:cTn>
+                              </p:par>
+                            </p:childTnLst>
+                          </p:cTn>
+                        </p:par>
+                      </p:childTnLst>
+                    </p:cTn>
+                  </p:par>
+                  <p:par>
+                    <p:cTn id="40" fill="hold">
+                      <p:stCondLst>
+                        <p:cond delay="indefinite"/>
+                      </p:stCondLst>
+                      <p:childTnLst>
+                        <p:par>
+                          <p:cTn id="41" fill="hold">
+                            <p:stCondLst>
+                              <p:cond delay="0"/>
+                            </p:stCondLst>
+                            <p:childTnLst>
+                              <p:par>
+                                <p:cTn id="42" presetID="2" presetClass="entr" presetSubtype="4" fill="hold" grpId="0" nodeType="clickEffect">
+                                  <p:stCondLst>
+                                    <p:cond delay="0"/>
+                                  </p:stCondLst>
+                                  <p:childTnLst>
+                                    <p:set>
+                                      <p:cBhvr>
+                                        <p:cTn id="43" dur="1" fill="hold">
+                                          <p:stCondLst>
+                                            <p:cond delay="0"/>
+                                          </p:stCondLst>
+                                        </p:cTn>
+                                        <p:tgtEl>
+                                          <p:spTgt spid="3">
+                                            <p:txEl>
+                                              <p:pRg st="4" end="4"/>
+                                            </p:txEl>
+                                          </p:spTgt>
+                                        </p:tgtEl>
+                                        <p:attrNameLst>
+                                          <p:attrName>style.visibility</p:attrName>
+                                        </p:attrNameLst>
+                                      </p:cBhvr>
+                                      <p:to>
+                                        <p:strVal val="visible"/>
+                                      </p:to>
+                                    </p:set>
+                                    <p:anim calcmode="lin" valueType="num">
+                                      <p:cBhvr additive="base">
+                                        <p:cTn id="44" dur="500" fill="hold"/>
+                                        <p:tgtEl>
+                                          <p:spTgt spid="3">
+                                            <p:txEl>
+                                              <p:pRg st="4" end="4"/>
+                                            </p:txEl>
+                                          </p:spTgt>
+                                        </p:tgtEl>
+                                        <p:attrNameLst>
+                                          <p:attrName>ppt_x</p:attrName>
+                                        </p:attrNameLst>
+                                      </p:cBhvr>
+                                      <p:tavLst>
+                                        <p:tav tm="0">
+                                          <p:val>
+                                            <p:strVal val="#ppt_x"/>
+                                          </p:val>
+                                        </p:tav>
+                                        <p:tav tm="100000">
+                                          <p:val>
+                                            <p:strVal val="#ppt_x"/>
+                                          </p:val>
+                                        </p:tav>
+                                      </p:tavLst>
+                                    </p:anim>
+                                    <p:anim calcmode="lin" valueType="num">
+                                      <p:cBhvr additive="base">
+                                        <p:cTn id="45" dur="500" fill="hold"/>
+                                        <p:tgtEl>
+                                          <p:spTgt spid="3">
+                                            <p:txEl>
+                                              <p:pRg st="4" end="4"/>
+                                            </p:txEl>
+                                          </p:spTgt>
+                                        </p:tgtEl>
+                                        <p:attrNameLst>
+                                          <p:attrName>ppt_y</p:attrName>
+                                        </p:attrNameLst>
+                                      </p:cBhvr>
+                                      <p:tavLst>
+                                        <p:tav tm="0">
+                                          <p:val>
+                                            <p:strVal val="1+#ppt_h/2"/>
+                                          </p:val>
+                                        </p:tav>
+                                        <p:tav tm="100000">
+                                          <p:val>
+                                            <p:strVal val="#ppt_y"/>
+                                          </p:val>
+                                        </p:tav>
+                                      </p:tavLst>
+                                    </p:anim>
+                                  </p:childTnLst>
+                                </p:cTn>
+                              </p:par>
+                            </p:childTnLst>
+                          </p:cTn>
+                        </p:par>
+                      </p:childTnLst>
+                    </p:cTn>
+                  </p:par>
+                  <p:par>
+                    <p:cTn id="46" fill="hold">
+                      <p:stCondLst>
+                        <p:cond delay="indefinite"/>
+                      </p:stCondLst>
+                      <p:childTnLst>
+                        <p:par>
+                          <p:cTn id="47" fill="hold">
+                            <p:stCondLst>
+                              <p:cond delay="0"/>
+                            </p:stCondLst>
+                            <p:childTnLst>
+                              <p:par>
+                                <p:cTn id="48" presetID="2" presetClass="entr" presetSubtype="4" fill="hold" grpId="0" nodeType="clickEffect">
+                                  <p:stCondLst>
+                                    <p:cond delay="0"/>
+                                  </p:stCondLst>
+                                  <p:childTnLst>
+                                    <p:set>
+                                      <p:cBhvr>
+                                        <p:cTn id="49" dur="1" fill="hold">
+                                          <p:stCondLst>
+                                            <p:cond delay="0"/>
+                                          </p:stCondLst>
+                                        </p:cTn>
+                                        <p:tgtEl>
+                                          <p:spTgt spid="3">
+                                            <p:txEl>
+                                              <p:pRg st="5" end="5"/>
+                                            </p:txEl>
+                                          </p:spTgt>
+                                        </p:tgtEl>
+                                        <p:attrNameLst>
+                                          <p:attrName>style.visibility</p:attrName>
+                                        </p:attrNameLst>
+                                      </p:cBhvr>
+                                      <p:to>
+                                        <p:strVal val="visible"/>
+                                      </p:to>
+                                    </p:set>
+                                    <p:anim calcmode="lin" valueType="num">
+                                      <p:cBhvr additive="base">
+                                        <p:cTn id="50" dur="500" fill="hold"/>
+                                        <p:tgtEl>
+                                          <p:spTgt spid="3">
+                                            <p:txEl>
+                                              <p:pRg st="5" end="5"/>
+                                            </p:txEl>
+                                          </p:spTgt>
+                                        </p:tgtEl>
+                                        <p:attrNameLst>
+                                          <p:attrName>ppt_x</p:attrName>
+                                        </p:attrNameLst>
+                                      </p:cBhvr>
+                                      <p:tavLst>
+                                        <p:tav tm="0">
+                                          <p:val>
+                                            <p:strVal val="#ppt_x"/>
+                                          </p:val>
+                                        </p:tav>
+                                        <p:tav tm="100000">
+                                          <p:val>
+                                            <p:strVal val="#ppt_x"/>
+                                          </p:val>
+                                        </p:tav>
+                                      </p:tavLst>
+                                    </p:anim>
+                                    <p:anim calcmode="lin" valueType="num">
+                                      <p:cBhvr additive="base">
+                                        <p:cTn id="51" dur="500" fill="hold"/>
+                                        <p:tgtEl>
+                                          <p:spTgt spid="3">
+                                            <p:txEl>
+                                              <p:pRg st="5" end="5"/>
+                                            </p:txEl>
+                                          </p:spTgt>
+                                        </p:tgtEl>
+                                        <p:attrNameLst>
+                                          <p:attrName>ppt_y</p:attrName>
+                                        </p:attrNameLst>
+                                      </p:cBhvr>
+                                      <p:tavLst>
+                                        <p:tav tm="0">
+                                          <p:val>
+                                            <p:strVal val="1+#ppt_h/2"/>
+                                          </p:val>
+                                        </p:tav>
+                                        <p:tav tm="100000">
+                                          <p:val>
+                                            <p:strVal val="#ppt_y"/>
+                                          </p:val>
+                                        </p:tav>
+                                      </p:tavLst>
+                                    </p:anim>
+                                  </p:childTnLst>
+                                </p:cTn>
+                              </p:par>
+                            </p:childTnLst>
+                          </p:cTn>
+                        </p:par>
+                      </p:childTnLst>
+                    </p:cTn>
+                  </p:par>
+                </p:childTnLst>
+              </p:cTn>
+              <p:prevCondLst>
+                <p:cond evt="onPrev" delay="0">
+                  <p:tgtEl>
+                    <p:sldTgt/>
+                  </p:tgtEl>
+                </p:cond>
+              </p:prevCondLst>
+              <p:nextCondLst>
+                <p:cond evt="onNext" delay="0">
+                  <p:tgtEl>
+                    <p:sldTgt/>
+                  </p:tgtEl>
+                </p:cond>
+              </p:nextCondLst>
+            </p:seq>
+          </p:childTnLst>
+        </p:cTn>
+      </p:par>
+    </p:tnLst>
+    <p:bldLst>
+      <p:bldP spid="2" grpId="0"/>
+      <p:bldP spid="3" grpId="0" build="p"/>
+    </p:bldLst>
+  </p:timing>
 </p:sld>
 </file>
 
@@ -16183,6 +21652,10 @@
           <a:bodyPr/>
           <a:lstStyle/>
           <a:p>
+            <a:r>
+              <a:rPr lang="en-IN" dirty="0"/>
+              <a:t>Cloud Computing Overview</a:t>
+            </a:r>
             <a:endParaRPr lang="en-US" dirty="0"/>
           </a:p>
         </p:txBody>
@@ -16211,9 +21684,74 @@
         </p:spPr>
         <p:txBody>
           <a:bodyPr vert="horz" lIns="91416" tIns="45708" rIns="91416" bIns="45708" rtlCol="0" anchor="t">
-            <a:normAutofit/>
+            <a:normAutofit fontScale="92500" lnSpcReduction="10000"/>
           </a:bodyPr>
           <a:lstStyle/>
+          <a:p>
+            <a:r>
+              <a:rPr lang="en-IN" b="1" dirty="0"/>
+              <a:t>Definition:</a:t>
+            </a:r>
+            <a:r>
+              <a:rPr lang="en-IN" dirty="0"/>
+              <a:t> On‑demand delivery of computing resources (servers, storage, databases, software) over the internet.</a:t>
+            </a:r>
+          </a:p>
+          <a:p>
+            <a:r>
+              <a:rPr lang="en-IN" b="1" dirty="0"/>
+              <a:t>Models:</a:t>
+            </a:r>
+          </a:p>
+          <a:p>
+            <a:pPr marL="342900" lvl="0" indent="-342900">
+              <a:buFont typeface="+mj-lt"/>
+              <a:buAutoNum type="arabicPeriod"/>
+            </a:pPr>
+            <a:r>
+              <a:rPr lang="en-IN" b="1" dirty="0"/>
+              <a:t>IaaS:</a:t>
+            </a:r>
+            <a:r>
+              <a:rPr lang="en-IN" dirty="0"/>
+              <a:t> Infrastructure as a Service – virtual machines, storage.</a:t>
+            </a:r>
+          </a:p>
+          <a:p>
+            <a:pPr marL="342900" lvl="0" indent="-342900">
+              <a:buFont typeface="+mj-lt"/>
+              <a:buAutoNum type="arabicPeriod"/>
+            </a:pPr>
+            <a:r>
+              <a:rPr lang="en-IN" b="1" dirty="0"/>
+              <a:t>PaaS:</a:t>
+            </a:r>
+            <a:r>
+              <a:rPr lang="en-IN" dirty="0"/>
+              <a:t> Platform as a Service – development platforms, tools.</a:t>
+            </a:r>
+          </a:p>
+          <a:p>
+            <a:pPr marL="342900" lvl="0" indent="-342900">
+              <a:buFont typeface="+mj-lt"/>
+              <a:buAutoNum type="arabicPeriod"/>
+            </a:pPr>
+            <a:r>
+              <a:rPr lang="en-IN" b="1" dirty="0"/>
+              <a:t>SaaS:</a:t>
+            </a:r>
+            <a:r>
+              <a:rPr lang="en-IN" dirty="0"/>
+              <a:t> Software as a Service – applications like Gmail, Office 365.</a:t>
+            </a:r>
+          </a:p>
+          <a:p>
+            <a:pPr marL="342900" indent="-342900">
+              <a:buFont typeface="+mj-lt"/>
+              <a:buAutoNum type="arabicPeriod"/>
+            </a:pPr>
+            <a:endParaRPr lang="en-IN" b="1" dirty="0"/>
+          </a:p>
           <a:p>
             <a:endParaRPr lang="en-US" dirty="0"/>
           </a:p>
@@ -16247,6 +21785,29 @@
           </a:bodyPr>
           <a:lstStyle/>
           <a:p>
+            <a:r>
+              <a:rPr lang="en-IN" b="1" dirty="0"/>
+              <a:t>Benefits:</a:t>
+            </a:r>
+            <a:r>
+              <a:rPr lang="en-IN" dirty="0"/>
+              <a:t> Scalability, flexibility, cost‑efficiency, remote access, disaster recovery.</a:t>
+            </a:r>
+          </a:p>
+          <a:p>
+            <a:r>
+              <a:rPr lang="en-IN" b="1" dirty="0"/>
+              <a:t>Examples:</a:t>
+            </a:r>
+            <a:r>
+              <a:rPr lang="en-IN" dirty="0"/>
+              <a:t> Amazon Web Services (AWS), Microsoft Azure, Google Cloud.</a:t>
+            </a:r>
+          </a:p>
+          <a:p>
+            <a:pPr marL="0" indent="0">
+              <a:buNone/>
+            </a:pPr>
             <a:endParaRPr lang="en-US" dirty="0"/>
           </a:p>
         </p:txBody>
@@ -16280,6 +21841,36 @@
           </a:p>
         </p:txBody>
       </p:sp>
+      <p:pic>
+        <p:nvPicPr>
+          <p:cNvPr id="2" name="Picture 1" descr="GCP Notes (I). Google Cloud Platform is a cloud… | by Ritchie Pulikottil | Level Up Coding">
+            <a:extLst>
+              <a:ext uri="{FF2B5EF4-FFF2-40B4-BE49-F238E27FC236}">
+                <a16:creationId xmlns:a16="http://schemas.microsoft.com/office/drawing/2014/main" id="{AE9D156C-FA4E-689B-4071-33F00D3C35AB}"/>
+              </a:ext>
+            </a:extLst>
+          </p:cNvPr>
+          <p:cNvPicPr>
+            <a:picLocks noChangeAspect="1"/>
+          </p:cNvPicPr>
+          <p:nvPr/>
+        </p:nvPicPr>
+        <p:blipFill>
+          <a:blip r:embed="rId2"/>
+          <a:stretch>
+            <a:fillRect/>
+          </a:stretch>
+        </p:blipFill>
+        <p:spPr>
+          <a:xfrm>
+            <a:off x="6627812" y="4517601"/>
+            <a:ext cx="3429000" cy="1923585"/>
+          </a:xfrm>
+          <a:prstGeom prst="rect">
+            <a:avLst/>
+          </a:prstGeom>
+        </p:spPr>
+      </p:pic>
     </p:spTree>
     <p:extLst>
       <p:ext uri="{BB962C8B-B14F-4D97-AF65-F5344CB8AC3E}">
@@ -16290,18 +21881,964 @@
   <p:clrMapOvr>
     <a:masterClrMapping/>
   </p:clrMapOvr>
-  <mc:AlternateContent xmlns:mc="http://schemas.openxmlformats.org/markup-compatibility/2006">
-    <mc:Choice xmlns:p14="http://schemas.microsoft.com/office/powerpoint/2010/main" Requires="p14">
+  <mc:AlternateContent xmlns:mc="http://schemas.openxmlformats.org/markup-compatibility/2006" xmlns:p14="http://schemas.microsoft.com/office/powerpoint/2010/main">
+    <mc:Choice Requires="p14">
       <p:transition spd="slow" p14:dur="4000">
         <p14:vortex dir="r"/>
       </p:transition>
     </mc:Choice>
-    <mc:Fallback>
+    <mc:Fallback xmlns="">
       <p:transition spd="slow">
         <p:fade/>
       </p:transition>
     </mc:Fallback>
   </mc:AlternateContent>
+  <p:timing>
+    <p:tnLst>
+      <p:par>
+        <p:cTn id="1" dur="indefinite" restart="never" nodeType="tmRoot">
+          <p:childTnLst>
+            <p:seq concurrent="1" nextAc="seek">
+              <p:cTn id="2" dur="indefinite" nodeType="mainSeq">
+                <p:childTnLst>
+                  <p:par>
+                    <p:cTn id="3" fill="hold">
+                      <p:stCondLst>
+                        <p:cond delay="indefinite"/>
+                      </p:stCondLst>
+                      <p:childTnLst>
+                        <p:par>
+                          <p:cTn id="4" fill="hold">
+                            <p:stCondLst>
+                              <p:cond delay="0"/>
+                            </p:stCondLst>
+                            <p:childTnLst>
+                              <p:par>
+                                <p:cTn id="5" presetID="53" presetClass="entr" presetSubtype="16" fill="hold" grpId="0" nodeType="clickEffect">
+                                  <p:stCondLst>
+                                    <p:cond delay="0"/>
+                                  </p:stCondLst>
+                                  <p:childTnLst>
+                                    <p:set>
+                                      <p:cBhvr>
+                                        <p:cTn id="6" dur="1" fill="hold">
+                                          <p:stCondLst>
+                                            <p:cond delay="0"/>
+                                          </p:stCondLst>
+                                        </p:cTn>
+                                        <p:tgtEl>
+                                          <p:spTgt spid="4"/>
+                                        </p:tgtEl>
+                                        <p:attrNameLst>
+                                          <p:attrName>style.visibility</p:attrName>
+                                        </p:attrNameLst>
+                                      </p:cBhvr>
+                                      <p:to>
+                                        <p:strVal val="visible"/>
+                                      </p:to>
+                                    </p:set>
+                                    <p:anim calcmode="lin" valueType="num">
+                                      <p:cBhvr>
+                                        <p:cTn id="7" dur="500" fill="hold"/>
+                                        <p:tgtEl>
+                                          <p:spTgt spid="4"/>
+                                        </p:tgtEl>
+                                        <p:attrNameLst>
+                                          <p:attrName>ppt_w</p:attrName>
+                                        </p:attrNameLst>
+                                      </p:cBhvr>
+                                      <p:tavLst>
+                                        <p:tav tm="0">
+                                          <p:val>
+                                            <p:fltVal val="0"/>
+                                          </p:val>
+                                        </p:tav>
+                                        <p:tav tm="100000">
+                                          <p:val>
+                                            <p:strVal val="#ppt_w"/>
+                                          </p:val>
+                                        </p:tav>
+                                      </p:tavLst>
+                                    </p:anim>
+                                    <p:anim calcmode="lin" valueType="num">
+                                      <p:cBhvr>
+                                        <p:cTn id="8" dur="500" fill="hold"/>
+                                        <p:tgtEl>
+                                          <p:spTgt spid="4"/>
+                                        </p:tgtEl>
+                                        <p:attrNameLst>
+                                          <p:attrName>ppt_h</p:attrName>
+                                        </p:attrNameLst>
+                                      </p:cBhvr>
+                                      <p:tavLst>
+                                        <p:tav tm="0">
+                                          <p:val>
+                                            <p:fltVal val="0"/>
+                                          </p:val>
+                                        </p:tav>
+                                        <p:tav tm="100000">
+                                          <p:val>
+                                            <p:strVal val="#ppt_h"/>
+                                          </p:val>
+                                        </p:tav>
+                                      </p:tavLst>
+                                    </p:anim>
+                                    <p:animEffect transition="in" filter="fade">
+                                      <p:cBhvr>
+                                        <p:cTn id="9" dur="500"/>
+                                        <p:tgtEl>
+                                          <p:spTgt spid="4"/>
+                                        </p:tgtEl>
+                                      </p:cBhvr>
+                                    </p:animEffect>
+                                  </p:childTnLst>
+                                </p:cTn>
+                              </p:par>
+                            </p:childTnLst>
+                          </p:cTn>
+                        </p:par>
+                      </p:childTnLst>
+                    </p:cTn>
+                  </p:par>
+                  <p:par>
+                    <p:cTn id="10" fill="hold">
+                      <p:stCondLst>
+                        <p:cond delay="indefinite"/>
+                      </p:stCondLst>
+                      <p:childTnLst>
+                        <p:par>
+                          <p:cTn id="11" fill="hold">
+                            <p:stCondLst>
+                              <p:cond delay="0"/>
+                            </p:stCondLst>
+                            <p:childTnLst>
+                              <p:par>
+                                <p:cTn id="12" presetID="2" presetClass="entr" presetSubtype="4" fill="hold" nodeType="clickEffect">
+                                  <p:stCondLst>
+                                    <p:cond delay="0"/>
+                                  </p:stCondLst>
+                                  <p:childTnLst>
+                                    <p:set>
+                                      <p:cBhvr>
+                                        <p:cTn id="13" dur="1" fill="hold">
+                                          <p:stCondLst>
+                                            <p:cond delay="0"/>
+                                          </p:stCondLst>
+                                        </p:cTn>
+                                        <p:tgtEl>
+                                          <p:spTgt spid="2"/>
+                                        </p:tgtEl>
+                                        <p:attrNameLst>
+                                          <p:attrName>style.visibility</p:attrName>
+                                        </p:attrNameLst>
+                                      </p:cBhvr>
+                                      <p:to>
+                                        <p:strVal val="visible"/>
+                                      </p:to>
+                                    </p:set>
+                                    <p:anim calcmode="lin" valueType="num">
+                                      <p:cBhvr additive="base">
+                                        <p:cTn id="14" dur="500" fill="hold"/>
+                                        <p:tgtEl>
+                                          <p:spTgt spid="2"/>
+                                        </p:tgtEl>
+                                        <p:attrNameLst>
+                                          <p:attrName>ppt_x</p:attrName>
+                                        </p:attrNameLst>
+                                      </p:cBhvr>
+                                      <p:tavLst>
+                                        <p:tav tm="0">
+                                          <p:val>
+                                            <p:strVal val="#ppt_x"/>
+                                          </p:val>
+                                        </p:tav>
+                                        <p:tav tm="100000">
+                                          <p:val>
+                                            <p:strVal val="#ppt_x"/>
+                                          </p:val>
+                                        </p:tav>
+                                      </p:tavLst>
+                                    </p:anim>
+                                    <p:anim calcmode="lin" valueType="num">
+                                      <p:cBhvr additive="base">
+                                        <p:cTn id="15" dur="500" fill="hold"/>
+                                        <p:tgtEl>
+                                          <p:spTgt spid="2"/>
+                                        </p:tgtEl>
+                                        <p:attrNameLst>
+                                          <p:attrName>ppt_y</p:attrName>
+                                        </p:attrNameLst>
+                                      </p:cBhvr>
+                                      <p:tavLst>
+                                        <p:tav tm="0">
+                                          <p:val>
+                                            <p:strVal val="1+#ppt_h/2"/>
+                                          </p:val>
+                                        </p:tav>
+                                        <p:tav tm="100000">
+                                          <p:val>
+                                            <p:strVal val="#ppt_y"/>
+                                          </p:val>
+                                        </p:tav>
+                                      </p:tavLst>
+                                    </p:anim>
+                                  </p:childTnLst>
+                                </p:cTn>
+                              </p:par>
+                            </p:childTnLst>
+                          </p:cTn>
+                        </p:par>
+                      </p:childTnLst>
+                    </p:cTn>
+                  </p:par>
+                  <p:par>
+                    <p:cTn id="16" fill="hold">
+                      <p:stCondLst>
+                        <p:cond delay="indefinite"/>
+                      </p:stCondLst>
+                      <p:childTnLst>
+                        <p:par>
+                          <p:cTn id="17" fill="hold">
+                            <p:stCondLst>
+                              <p:cond delay="0"/>
+                            </p:stCondLst>
+                            <p:childTnLst>
+                              <p:par>
+                                <p:cTn id="18" presetID="2" presetClass="entr" presetSubtype="4" fill="hold" grpId="0" nodeType="clickEffect">
+                                  <p:stCondLst>
+                                    <p:cond delay="0"/>
+                                  </p:stCondLst>
+                                  <p:childTnLst>
+                                    <p:set>
+                                      <p:cBhvr>
+                                        <p:cTn id="19" dur="1" fill="hold">
+                                          <p:stCondLst>
+                                            <p:cond delay="0"/>
+                                          </p:stCondLst>
+                                        </p:cTn>
+                                        <p:tgtEl>
+                                          <p:spTgt spid="6">
+                                            <p:txEl>
+                                              <p:pRg st="0" end="0"/>
+                                            </p:txEl>
+                                          </p:spTgt>
+                                        </p:tgtEl>
+                                        <p:attrNameLst>
+                                          <p:attrName>style.visibility</p:attrName>
+                                        </p:attrNameLst>
+                                      </p:cBhvr>
+                                      <p:to>
+                                        <p:strVal val="visible"/>
+                                      </p:to>
+                                    </p:set>
+                                    <p:anim calcmode="lin" valueType="num">
+                                      <p:cBhvr additive="base">
+                                        <p:cTn id="20" dur="500" fill="hold"/>
+                                        <p:tgtEl>
+                                          <p:spTgt spid="6">
+                                            <p:txEl>
+                                              <p:pRg st="0" end="0"/>
+                                            </p:txEl>
+                                          </p:spTgt>
+                                        </p:tgtEl>
+                                        <p:attrNameLst>
+                                          <p:attrName>ppt_x</p:attrName>
+                                        </p:attrNameLst>
+                                      </p:cBhvr>
+                                      <p:tavLst>
+                                        <p:tav tm="0">
+                                          <p:val>
+                                            <p:strVal val="#ppt_x"/>
+                                          </p:val>
+                                        </p:tav>
+                                        <p:tav tm="100000">
+                                          <p:val>
+                                            <p:strVal val="#ppt_x"/>
+                                          </p:val>
+                                        </p:tav>
+                                      </p:tavLst>
+                                    </p:anim>
+                                    <p:anim calcmode="lin" valueType="num">
+                                      <p:cBhvr additive="base">
+                                        <p:cTn id="21" dur="500" fill="hold"/>
+                                        <p:tgtEl>
+                                          <p:spTgt spid="6">
+                                            <p:txEl>
+                                              <p:pRg st="0" end="0"/>
+                                            </p:txEl>
+                                          </p:spTgt>
+                                        </p:tgtEl>
+                                        <p:attrNameLst>
+                                          <p:attrName>ppt_y</p:attrName>
+                                        </p:attrNameLst>
+                                      </p:cBhvr>
+                                      <p:tavLst>
+                                        <p:tav tm="0">
+                                          <p:val>
+                                            <p:strVal val="1+#ppt_h/2"/>
+                                          </p:val>
+                                        </p:tav>
+                                        <p:tav tm="100000">
+                                          <p:val>
+                                            <p:strVal val="#ppt_y"/>
+                                          </p:val>
+                                        </p:tav>
+                                      </p:tavLst>
+                                    </p:anim>
+                                  </p:childTnLst>
+                                </p:cTn>
+                              </p:par>
+                            </p:childTnLst>
+                          </p:cTn>
+                        </p:par>
+                      </p:childTnLst>
+                    </p:cTn>
+                  </p:par>
+                  <p:par>
+                    <p:cTn id="22" fill="hold">
+                      <p:stCondLst>
+                        <p:cond delay="indefinite"/>
+                      </p:stCondLst>
+                      <p:childTnLst>
+                        <p:par>
+                          <p:cTn id="23" fill="hold">
+                            <p:stCondLst>
+                              <p:cond delay="0"/>
+                            </p:stCondLst>
+                            <p:childTnLst>
+                              <p:par>
+                                <p:cTn id="24" presetID="2" presetClass="entr" presetSubtype="4" fill="hold" grpId="0" nodeType="clickEffect">
+                                  <p:stCondLst>
+                                    <p:cond delay="0"/>
+                                  </p:stCondLst>
+                                  <p:childTnLst>
+                                    <p:set>
+                                      <p:cBhvr>
+                                        <p:cTn id="25" dur="1" fill="hold">
+                                          <p:stCondLst>
+                                            <p:cond delay="0"/>
+                                          </p:stCondLst>
+                                        </p:cTn>
+                                        <p:tgtEl>
+                                          <p:spTgt spid="6">
+                                            <p:txEl>
+                                              <p:pRg st="1" end="1"/>
+                                            </p:txEl>
+                                          </p:spTgt>
+                                        </p:tgtEl>
+                                        <p:attrNameLst>
+                                          <p:attrName>style.visibility</p:attrName>
+                                        </p:attrNameLst>
+                                      </p:cBhvr>
+                                      <p:to>
+                                        <p:strVal val="visible"/>
+                                      </p:to>
+                                    </p:set>
+                                    <p:anim calcmode="lin" valueType="num">
+                                      <p:cBhvr additive="base">
+                                        <p:cTn id="26" dur="500" fill="hold"/>
+                                        <p:tgtEl>
+                                          <p:spTgt spid="6">
+                                            <p:txEl>
+                                              <p:pRg st="1" end="1"/>
+                                            </p:txEl>
+                                          </p:spTgt>
+                                        </p:tgtEl>
+                                        <p:attrNameLst>
+                                          <p:attrName>ppt_x</p:attrName>
+                                        </p:attrNameLst>
+                                      </p:cBhvr>
+                                      <p:tavLst>
+                                        <p:tav tm="0">
+                                          <p:val>
+                                            <p:strVal val="#ppt_x"/>
+                                          </p:val>
+                                        </p:tav>
+                                        <p:tav tm="100000">
+                                          <p:val>
+                                            <p:strVal val="#ppt_x"/>
+                                          </p:val>
+                                        </p:tav>
+                                      </p:tavLst>
+                                    </p:anim>
+                                    <p:anim calcmode="lin" valueType="num">
+                                      <p:cBhvr additive="base">
+                                        <p:cTn id="27" dur="500" fill="hold"/>
+                                        <p:tgtEl>
+                                          <p:spTgt spid="6">
+                                            <p:txEl>
+                                              <p:pRg st="1" end="1"/>
+                                            </p:txEl>
+                                          </p:spTgt>
+                                        </p:tgtEl>
+                                        <p:attrNameLst>
+                                          <p:attrName>ppt_y</p:attrName>
+                                        </p:attrNameLst>
+                                      </p:cBhvr>
+                                      <p:tavLst>
+                                        <p:tav tm="0">
+                                          <p:val>
+                                            <p:strVal val="1+#ppt_h/2"/>
+                                          </p:val>
+                                        </p:tav>
+                                        <p:tav tm="100000">
+                                          <p:val>
+                                            <p:strVal val="#ppt_y"/>
+                                          </p:val>
+                                        </p:tav>
+                                      </p:tavLst>
+                                    </p:anim>
+                                  </p:childTnLst>
+                                </p:cTn>
+                              </p:par>
+                            </p:childTnLst>
+                          </p:cTn>
+                        </p:par>
+                      </p:childTnLst>
+                    </p:cTn>
+                  </p:par>
+                  <p:par>
+                    <p:cTn id="28" fill="hold">
+                      <p:stCondLst>
+                        <p:cond delay="indefinite"/>
+                      </p:stCondLst>
+                      <p:childTnLst>
+                        <p:par>
+                          <p:cTn id="29" fill="hold">
+                            <p:stCondLst>
+                              <p:cond delay="0"/>
+                            </p:stCondLst>
+                            <p:childTnLst>
+                              <p:par>
+                                <p:cTn id="30" presetID="2" presetClass="entr" presetSubtype="4" fill="hold" grpId="0" nodeType="clickEffect">
+                                  <p:stCondLst>
+                                    <p:cond delay="0"/>
+                                  </p:stCondLst>
+                                  <p:childTnLst>
+                                    <p:set>
+                                      <p:cBhvr>
+                                        <p:cTn id="31" dur="1" fill="hold">
+                                          <p:stCondLst>
+                                            <p:cond delay="0"/>
+                                          </p:stCondLst>
+                                        </p:cTn>
+                                        <p:tgtEl>
+                                          <p:spTgt spid="6">
+                                            <p:txEl>
+                                              <p:pRg st="2" end="2"/>
+                                            </p:txEl>
+                                          </p:spTgt>
+                                        </p:tgtEl>
+                                        <p:attrNameLst>
+                                          <p:attrName>style.visibility</p:attrName>
+                                        </p:attrNameLst>
+                                      </p:cBhvr>
+                                      <p:to>
+                                        <p:strVal val="visible"/>
+                                      </p:to>
+                                    </p:set>
+                                    <p:anim calcmode="lin" valueType="num">
+                                      <p:cBhvr additive="base">
+                                        <p:cTn id="32" dur="500" fill="hold"/>
+                                        <p:tgtEl>
+                                          <p:spTgt spid="6">
+                                            <p:txEl>
+                                              <p:pRg st="2" end="2"/>
+                                            </p:txEl>
+                                          </p:spTgt>
+                                        </p:tgtEl>
+                                        <p:attrNameLst>
+                                          <p:attrName>ppt_x</p:attrName>
+                                        </p:attrNameLst>
+                                      </p:cBhvr>
+                                      <p:tavLst>
+                                        <p:tav tm="0">
+                                          <p:val>
+                                            <p:strVal val="#ppt_x"/>
+                                          </p:val>
+                                        </p:tav>
+                                        <p:tav tm="100000">
+                                          <p:val>
+                                            <p:strVal val="#ppt_x"/>
+                                          </p:val>
+                                        </p:tav>
+                                      </p:tavLst>
+                                    </p:anim>
+                                    <p:anim calcmode="lin" valueType="num">
+                                      <p:cBhvr additive="base">
+                                        <p:cTn id="33" dur="500" fill="hold"/>
+                                        <p:tgtEl>
+                                          <p:spTgt spid="6">
+                                            <p:txEl>
+                                              <p:pRg st="2" end="2"/>
+                                            </p:txEl>
+                                          </p:spTgt>
+                                        </p:tgtEl>
+                                        <p:attrNameLst>
+                                          <p:attrName>ppt_y</p:attrName>
+                                        </p:attrNameLst>
+                                      </p:cBhvr>
+                                      <p:tavLst>
+                                        <p:tav tm="0">
+                                          <p:val>
+                                            <p:strVal val="1+#ppt_h/2"/>
+                                          </p:val>
+                                        </p:tav>
+                                        <p:tav tm="100000">
+                                          <p:val>
+                                            <p:strVal val="#ppt_y"/>
+                                          </p:val>
+                                        </p:tav>
+                                      </p:tavLst>
+                                    </p:anim>
+                                  </p:childTnLst>
+                                </p:cTn>
+                              </p:par>
+                            </p:childTnLst>
+                          </p:cTn>
+                        </p:par>
+                      </p:childTnLst>
+                    </p:cTn>
+                  </p:par>
+                  <p:par>
+                    <p:cTn id="34" fill="hold">
+                      <p:stCondLst>
+                        <p:cond delay="indefinite"/>
+                      </p:stCondLst>
+                      <p:childTnLst>
+                        <p:par>
+                          <p:cTn id="35" fill="hold">
+                            <p:stCondLst>
+                              <p:cond delay="0"/>
+                            </p:stCondLst>
+                            <p:childTnLst>
+                              <p:par>
+                                <p:cTn id="36" presetID="2" presetClass="entr" presetSubtype="4" fill="hold" grpId="0" nodeType="clickEffect">
+                                  <p:stCondLst>
+                                    <p:cond delay="0"/>
+                                  </p:stCondLst>
+                                  <p:childTnLst>
+                                    <p:set>
+                                      <p:cBhvr>
+                                        <p:cTn id="37" dur="1" fill="hold">
+                                          <p:stCondLst>
+                                            <p:cond delay="0"/>
+                                          </p:stCondLst>
+                                        </p:cTn>
+                                        <p:tgtEl>
+                                          <p:spTgt spid="6">
+                                            <p:txEl>
+                                              <p:pRg st="3" end="3"/>
+                                            </p:txEl>
+                                          </p:spTgt>
+                                        </p:tgtEl>
+                                        <p:attrNameLst>
+                                          <p:attrName>style.visibility</p:attrName>
+                                        </p:attrNameLst>
+                                      </p:cBhvr>
+                                      <p:to>
+                                        <p:strVal val="visible"/>
+                                      </p:to>
+                                    </p:set>
+                                    <p:anim calcmode="lin" valueType="num">
+                                      <p:cBhvr additive="base">
+                                        <p:cTn id="38" dur="500" fill="hold"/>
+                                        <p:tgtEl>
+                                          <p:spTgt spid="6">
+                                            <p:txEl>
+                                              <p:pRg st="3" end="3"/>
+                                            </p:txEl>
+                                          </p:spTgt>
+                                        </p:tgtEl>
+                                        <p:attrNameLst>
+                                          <p:attrName>ppt_x</p:attrName>
+                                        </p:attrNameLst>
+                                      </p:cBhvr>
+                                      <p:tavLst>
+                                        <p:tav tm="0">
+                                          <p:val>
+                                            <p:strVal val="#ppt_x"/>
+                                          </p:val>
+                                        </p:tav>
+                                        <p:tav tm="100000">
+                                          <p:val>
+                                            <p:strVal val="#ppt_x"/>
+                                          </p:val>
+                                        </p:tav>
+                                      </p:tavLst>
+                                    </p:anim>
+                                    <p:anim calcmode="lin" valueType="num">
+                                      <p:cBhvr additive="base">
+                                        <p:cTn id="39" dur="500" fill="hold"/>
+                                        <p:tgtEl>
+                                          <p:spTgt spid="6">
+                                            <p:txEl>
+                                              <p:pRg st="3" end="3"/>
+                                            </p:txEl>
+                                          </p:spTgt>
+                                        </p:tgtEl>
+                                        <p:attrNameLst>
+                                          <p:attrName>ppt_y</p:attrName>
+                                        </p:attrNameLst>
+                                      </p:cBhvr>
+                                      <p:tavLst>
+                                        <p:tav tm="0">
+                                          <p:val>
+                                            <p:strVal val="1+#ppt_h/2"/>
+                                          </p:val>
+                                        </p:tav>
+                                        <p:tav tm="100000">
+                                          <p:val>
+                                            <p:strVal val="#ppt_y"/>
+                                          </p:val>
+                                        </p:tav>
+                                      </p:tavLst>
+                                    </p:anim>
+                                  </p:childTnLst>
+                                </p:cTn>
+                              </p:par>
+                            </p:childTnLst>
+                          </p:cTn>
+                        </p:par>
+                      </p:childTnLst>
+                    </p:cTn>
+                  </p:par>
+                  <p:par>
+                    <p:cTn id="40" fill="hold">
+                      <p:stCondLst>
+                        <p:cond delay="indefinite"/>
+                      </p:stCondLst>
+                      <p:childTnLst>
+                        <p:par>
+                          <p:cTn id="41" fill="hold">
+                            <p:stCondLst>
+                              <p:cond delay="0"/>
+                            </p:stCondLst>
+                            <p:childTnLst>
+                              <p:par>
+                                <p:cTn id="42" presetID="2" presetClass="entr" presetSubtype="4" fill="hold" grpId="0" nodeType="clickEffect">
+                                  <p:stCondLst>
+                                    <p:cond delay="0"/>
+                                  </p:stCondLst>
+                                  <p:childTnLst>
+                                    <p:set>
+                                      <p:cBhvr>
+                                        <p:cTn id="43" dur="1" fill="hold">
+                                          <p:stCondLst>
+                                            <p:cond delay="0"/>
+                                          </p:stCondLst>
+                                        </p:cTn>
+                                        <p:tgtEl>
+                                          <p:spTgt spid="6">
+                                            <p:txEl>
+                                              <p:pRg st="4" end="4"/>
+                                            </p:txEl>
+                                          </p:spTgt>
+                                        </p:tgtEl>
+                                        <p:attrNameLst>
+                                          <p:attrName>style.visibility</p:attrName>
+                                        </p:attrNameLst>
+                                      </p:cBhvr>
+                                      <p:to>
+                                        <p:strVal val="visible"/>
+                                      </p:to>
+                                    </p:set>
+                                    <p:anim calcmode="lin" valueType="num">
+                                      <p:cBhvr additive="base">
+                                        <p:cTn id="44" dur="500" fill="hold"/>
+                                        <p:tgtEl>
+                                          <p:spTgt spid="6">
+                                            <p:txEl>
+                                              <p:pRg st="4" end="4"/>
+                                            </p:txEl>
+                                          </p:spTgt>
+                                        </p:tgtEl>
+                                        <p:attrNameLst>
+                                          <p:attrName>ppt_x</p:attrName>
+                                        </p:attrNameLst>
+                                      </p:cBhvr>
+                                      <p:tavLst>
+                                        <p:tav tm="0">
+                                          <p:val>
+                                            <p:strVal val="#ppt_x"/>
+                                          </p:val>
+                                        </p:tav>
+                                        <p:tav tm="100000">
+                                          <p:val>
+                                            <p:strVal val="#ppt_x"/>
+                                          </p:val>
+                                        </p:tav>
+                                      </p:tavLst>
+                                    </p:anim>
+                                    <p:anim calcmode="lin" valueType="num">
+                                      <p:cBhvr additive="base">
+                                        <p:cTn id="45" dur="500" fill="hold"/>
+                                        <p:tgtEl>
+                                          <p:spTgt spid="6">
+                                            <p:txEl>
+                                              <p:pRg st="4" end="4"/>
+                                            </p:txEl>
+                                          </p:spTgt>
+                                        </p:tgtEl>
+                                        <p:attrNameLst>
+                                          <p:attrName>ppt_y</p:attrName>
+                                        </p:attrNameLst>
+                                      </p:cBhvr>
+                                      <p:tavLst>
+                                        <p:tav tm="0">
+                                          <p:val>
+                                            <p:strVal val="1+#ppt_h/2"/>
+                                          </p:val>
+                                        </p:tav>
+                                        <p:tav tm="100000">
+                                          <p:val>
+                                            <p:strVal val="#ppt_y"/>
+                                          </p:val>
+                                        </p:tav>
+                                      </p:tavLst>
+                                    </p:anim>
+                                  </p:childTnLst>
+                                </p:cTn>
+                              </p:par>
+                            </p:childTnLst>
+                          </p:cTn>
+                        </p:par>
+                      </p:childTnLst>
+                    </p:cTn>
+                  </p:par>
+                  <p:par>
+                    <p:cTn id="46" fill="hold">
+                      <p:stCondLst>
+                        <p:cond delay="indefinite"/>
+                      </p:stCondLst>
+                      <p:childTnLst>
+                        <p:par>
+                          <p:cTn id="47" fill="hold">
+                            <p:stCondLst>
+                              <p:cond delay="0"/>
+                            </p:stCondLst>
+                            <p:childTnLst>
+                              <p:par>
+                                <p:cTn id="48" presetID="2" presetClass="entr" presetSubtype="4" fill="hold" grpId="0" nodeType="clickEffect">
+                                  <p:stCondLst>
+                                    <p:cond delay="0"/>
+                                  </p:stCondLst>
+                                  <p:childTnLst>
+                                    <p:set>
+                                      <p:cBhvr>
+                                        <p:cTn id="49" dur="1" fill="hold">
+                                          <p:stCondLst>
+                                            <p:cond delay="0"/>
+                                          </p:stCondLst>
+                                        </p:cTn>
+                                        <p:tgtEl>
+                                          <p:spTgt spid="11">
+                                            <p:txEl>
+                                              <p:pRg st="0" end="0"/>
+                                            </p:txEl>
+                                          </p:spTgt>
+                                        </p:tgtEl>
+                                        <p:attrNameLst>
+                                          <p:attrName>style.visibility</p:attrName>
+                                        </p:attrNameLst>
+                                      </p:cBhvr>
+                                      <p:to>
+                                        <p:strVal val="visible"/>
+                                      </p:to>
+                                    </p:set>
+                                    <p:anim calcmode="lin" valueType="num">
+                                      <p:cBhvr additive="base">
+                                        <p:cTn id="50" dur="500" fill="hold"/>
+                                        <p:tgtEl>
+                                          <p:spTgt spid="11">
+                                            <p:txEl>
+                                              <p:pRg st="0" end="0"/>
+                                            </p:txEl>
+                                          </p:spTgt>
+                                        </p:tgtEl>
+                                        <p:attrNameLst>
+                                          <p:attrName>ppt_x</p:attrName>
+                                        </p:attrNameLst>
+                                      </p:cBhvr>
+                                      <p:tavLst>
+                                        <p:tav tm="0">
+                                          <p:val>
+                                            <p:strVal val="#ppt_x"/>
+                                          </p:val>
+                                        </p:tav>
+                                        <p:tav tm="100000">
+                                          <p:val>
+                                            <p:strVal val="#ppt_x"/>
+                                          </p:val>
+                                        </p:tav>
+                                      </p:tavLst>
+                                    </p:anim>
+                                    <p:anim calcmode="lin" valueType="num">
+                                      <p:cBhvr additive="base">
+                                        <p:cTn id="51" dur="500" fill="hold"/>
+                                        <p:tgtEl>
+                                          <p:spTgt spid="11">
+                                            <p:txEl>
+                                              <p:pRg st="0" end="0"/>
+                                            </p:txEl>
+                                          </p:spTgt>
+                                        </p:tgtEl>
+                                        <p:attrNameLst>
+                                          <p:attrName>ppt_y</p:attrName>
+                                        </p:attrNameLst>
+                                      </p:cBhvr>
+                                      <p:tavLst>
+                                        <p:tav tm="0">
+                                          <p:val>
+                                            <p:strVal val="1+#ppt_h/2"/>
+                                          </p:val>
+                                        </p:tav>
+                                        <p:tav tm="100000">
+                                          <p:val>
+                                            <p:strVal val="#ppt_y"/>
+                                          </p:val>
+                                        </p:tav>
+                                      </p:tavLst>
+                                    </p:anim>
+                                  </p:childTnLst>
+                                </p:cTn>
+                              </p:par>
+                            </p:childTnLst>
+                          </p:cTn>
+                        </p:par>
+                      </p:childTnLst>
+                    </p:cTn>
+                  </p:par>
+                  <p:par>
+                    <p:cTn id="52" fill="hold">
+                      <p:stCondLst>
+                        <p:cond delay="indefinite"/>
+                      </p:stCondLst>
+                      <p:childTnLst>
+                        <p:par>
+                          <p:cTn id="53" fill="hold">
+                            <p:stCondLst>
+                              <p:cond delay="0"/>
+                            </p:stCondLst>
+                            <p:childTnLst>
+                              <p:par>
+                                <p:cTn id="54" presetID="2" presetClass="entr" presetSubtype="4" fill="hold" grpId="0" nodeType="clickEffect">
+                                  <p:stCondLst>
+                                    <p:cond delay="0"/>
+                                  </p:stCondLst>
+                                  <p:childTnLst>
+                                    <p:set>
+                                      <p:cBhvr>
+                                        <p:cTn id="55" dur="1" fill="hold">
+                                          <p:stCondLst>
+                                            <p:cond delay="0"/>
+                                          </p:stCondLst>
+                                        </p:cTn>
+                                        <p:tgtEl>
+                                          <p:spTgt spid="11">
+                                            <p:txEl>
+                                              <p:pRg st="1" end="1"/>
+                                            </p:txEl>
+                                          </p:spTgt>
+                                        </p:tgtEl>
+                                        <p:attrNameLst>
+                                          <p:attrName>style.visibility</p:attrName>
+                                        </p:attrNameLst>
+                                      </p:cBhvr>
+                                      <p:to>
+                                        <p:strVal val="visible"/>
+                                      </p:to>
+                                    </p:set>
+                                    <p:anim calcmode="lin" valueType="num">
+                                      <p:cBhvr additive="base">
+                                        <p:cTn id="56" dur="500" fill="hold"/>
+                                        <p:tgtEl>
+                                          <p:spTgt spid="11">
+                                            <p:txEl>
+                                              <p:pRg st="1" end="1"/>
+                                            </p:txEl>
+                                          </p:spTgt>
+                                        </p:tgtEl>
+                                        <p:attrNameLst>
+                                          <p:attrName>ppt_x</p:attrName>
+                                        </p:attrNameLst>
+                                      </p:cBhvr>
+                                      <p:tavLst>
+                                        <p:tav tm="0">
+                                          <p:val>
+                                            <p:strVal val="#ppt_x"/>
+                                          </p:val>
+                                        </p:tav>
+                                        <p:tav tm="100000">
+                                          <p:val>
+                                            <p:strVal val="#ppt_x"/>
+                                          </p:val>
+                                        </p:tav>
+                                      </p:tavLst>
+                                    </p:anim>
+                                    <p:anim calcmode="lin" valueType="num">
+                                      <p:cBhvr additive="base">
+                                        <p:cTn id="57" dur="500" fill="hold"/>
+                                        <p:tgtEl>
+                                          <p:spTgt spid="11">
+                                            <p:txEl>
+                                              <p:pRg st="1" end="1"/>
+                                            </p:txEl>
+                                          </p:spTgt>
+                                        </p:tgtEl>
+                                        <p:attrNameLst>
+                                          <p:attrName>ppt_y</p:attrName>
+                                        </p:attrNameLst>
+                                      </p:cBhvr>
+                                      <p:tavLst>
+                                        <p:tav tm="0">
+                                          <p:val>
+                                            <p:strVal val="1+#ppt_h/2"/>
+                                          </p:val>
+                                        </p:tav>
+                                        <p:tav tm="100000">
+                                          <p:val>
+                                            <p:strVal val="#ppt_y"/>
+                                          </p:val>
+                                        </p:tav>
+                                      </p:tavLst>
+                                    </p:anim>
+                                  </p:childTnLst>
+                                </p:cTn>
+                              </p:par>
+                            </p:childTnLst>
+                          </p:cTn>
+                        </p:par>
+                      </p:childTnLst>
+                    </p:cTn>
+                  </p:par>
+                </p:childTnLst>
+              </p:cTn>
+              <p:prevCondLst>
+                <p:cond evt="onPrev" delay="0">
+                  <p:tgtEl>
+                    <p:sldTgt/>
+                  </p:tgtEl>
+                </p:cond>
+              </p:prevCondLst>
+              <p:nextCondLst>
+                <p:cond evt="onNext" delay="0">
+                  <p:tgtEl>
+                    <p:sldTgt/>
+                  </p:tgtEl>
+                </p:cond>
+              </p:nextCondLst>
+            </p:seq>
+          </p:childTnLst>
+        </p:cTn>
+      </p:par>
+    </p:tnLst>
+    <p:bldLst>
+      <p:bldP spid="4" grpId="0"/>
+      <p:bldP spid="6" grpId="0" build="p"/>
+      <p:bldP spid="11" grpId="0" build="p"/>
+    </p:bldLst>
+  </p:timing>
 </p:sld>
 </file>
 
@@ -16354,6 +22891,10 @@
           <a:bodyPr anchor="ctr"/>
           <a:lstStyle/>
           <a:p>
+            <a:r>
+              <a:rPr lang="en-IN" dirty="0"/>
+              <a:t>Edge Computing Overview</a:t>
+            </a:r>
             <a:endParaRPr lang="en-US" dirty="0"/>
           </a:p>
         </p:txBody>
@@ -16381,9 +22922,46 @@
           </a:xfrm>
         </p:spPr>
         <p:txBody>
-          <a:bodyPr/>
+          <a:bodyPr>
+            <a:normAutofit fontScale="92500"/>
+          </a:bodyPr>
           <a:lstStyle/>
           <a:p>
+            <a:r>
+              <a:rPr lang="en-IN" b="1" dirty="0"/>
+              <a:t>Definition:</a:t>
+            </a:r>
+            <a:r>
+              <a:rPr lang="en-IN" dirty="0"/>
+              <a:t> Data processing closer to devices (the “edge”) rather than centralized cloud servers.</a:t>
+            </a:r>
+          </a:p>
+          <a:p>
+            <a:pPr lvl="0"/>
+            <a:r>
+              <a:rPr lang="en-IN" b="1" dirty="0"/>
+              <a:t>Applications:</a:t>
+            </a:r>
+            <a:r>
+              <a:rPr lang="en-IN" dirty="0"/>
+              <a:t> Smart cities, autonomous vehicles, industrial IoT, AR/VR.</a:t>
+            </a:r>
+          </a:p>
+          <a:p>
+            <a:pPr lvl="0"/>
+            <a:r>
+              <a:rPr lang="en-IN" b="1" dirty="0"/>
+              <a:t>Impact:</a:t>
+            </a:r>
+            <a:r>
+              <a:rPr lang="en-IN" dirty="0"/>
+              <a:t> Enables faster, localized computing for time‑sensitive tasks.</a:t>
+            </a:r>
+          </a:p>
+          <a:p>
+            <a:pPr marL="0" indent="0">
+              <a:buNone/>
+            </a:pPr>
             <a:endParaRPr lang="en-US" dirty="0"/>
           </a:p>
         </p:txBody>
@@ -16439,7 +23017,41 @@
           <a:bodyPr/>
           <a:lstStyle/>
           <a:p>
-            <a:endParaRPr lang="en-IN"/>
+            <a:r>
+              <a:rPr lang="en-IN" b="1" dirty="0"/>
+              <a:t>Advantages:</a:t>
+            </a:r>
+            <a:endParaRPr lang="en-IN" dirty="0"/>
+          </a:p>
+          <a:p>
+            <a:pPr marL="342900" lvl="0" indent="-342900">
+              <a:buFont typeface="+mj-lt"/>
+              <a:buAutoNum type="arabicPeriod"/>
+            </a:pPr>
+            <a:r>
+              <a:rPr lang="en-IN" dirty="0"/>
+              <a:t>Real‑time response for critical systems.</a:t>
+            </a:r>
+          </a:p>
+          <a:p>
+            <a:pPr marL="342900" lvl="0" indent="-342900">
+              <a:buFont typeface="+mj-lt"/>
+              <a:buAutoNum type="arabicPeriod"/>
+            </a:pPr>
+            <a:r>
+              <a:rPr lang="en-IN" dirty="0"/>
+              <a:t>Reduced latency and faster decision‑making.</a:t>
+            </a:r>
+          </a:p>
+          <a:p>
+            <a:pPr marL="342900" lvl="0" indent="-342900">
+              <a:buFont typeface="+mj-lt"/>
+              <a:buAutoNum type="arabicPeriod"/>
+            </a:pPr>
+            <a:r>
+              <a:rPr lang="en-IN" dirty="0"/>
+              <a:t>Lower bandwidth usage and cost savings.</a:t>
+            </a:r>
           </a:p>
         </p:txBody>
       </p:sp>
@@ -16453,18 +23065,873 @@
   <p:clrMapOvr>
     <a:masterClrMapping/>
   </p:clrMapOvr>
-  <mc:AlternateContent xmlns:mc="http://schemas.openxmlformats.org/markup-compatibility/2006">
-    <mc:Choice xmlns:p14="http://schemas.microsoft.com/office/powerpoint/2010/main" Requires="p14">
+  <mc:AlternateContent xmlns:mc="http://schemas.openxmlformats.org/markup-compatibility/2006" xmlns:p14="http://schemas.microsoft.com/office/powerpoint/2010/main">
+    <mc:Choice Requires="p14">
       <p:transition spd="slow" p14:dur="4000">
         <p14:vortex dir="r"/>
       </p:transition>
     </mc:Choice>
-    <mc:Fallback>
+    <mc:Fallback xmlns="">
       <p:transition spd="slow">
         <p:fade/>
       </p:transition>
     </mc:Fallback>
   </mc:AlternateContent>
+  <p:timing>
+    <p:tnLst>
+      <p:par>
+        <p:cTn id="1" dur="indefinite" restart="never" nodeType="tmRoot">
+          <p:childTnLst>
+            <p:seq concurrent="1" nextAc="seek">
+              <p:cTn id="2" dur="indefinite" nodeType="mainSeq">
+                <p:childTnLst>
+                  <p:par>
+                    <p:cTn id="3" fill="hold">
+                      <p:stCondLst>
+                        <p:cond delay="indefinite"/>
+                      </p:stCondLst>
+                      <p:childTnLst>
+                        <p:par>
+                          <p:cTn id="4" fill="hold">
+                            <p:stCondLst>
+                              <p:cond delay="0"/>
+                            </p:stCondLst>
+                            <p:childTnLst>
+                              <p:par>
+                                <p:cTn id="5" presetID="53" presetClass="entr" presetSubtype="16" fill="hold" grpId="0" nodeType="clickEffect">
+                                  <p:stCondLst>
+                                    <p:cond delay="0"/>
+                                  </p:stCondLst>
+                                  <p:childTnLst>
+                                    <p:set>
+                                      <p:cBhvr>
+                                        <p:cTn id="6" dur="1" fill="hold">
+                                          <p:stCondLst>
+                                            <p:cond delay="0"/>
+                                          </p:stCondLst>
+                                        </p:cTn>
+                                        <p:tgtEl>
+                                          <p:spTgt spid="2"/>
+                                        </p:tgtEl>
+                                        <p:attrNameLst>
+                                          <p:attrName>style.visibility</p:attrName>
+                                        </p:attrNameLst>
+                                      </p:cBhvr>
+                                      <p:to>
+                                        <p:strVal val="visible"/>
+                                      </p:to>
+                                    </p:set>
+                                    <p:anim calcmode="lin" valueType="num">
+                                      <p:cBhvr>
+                                        <p:cTn id="7" dur="500" fill="hold"/>
+                                        <p:tgtEl>
+                                          <p:spTgt spid="2"/>
+                                        </p:tgtEl>
+                                        <p:attrNameLst>
+                                          <p:attrName>ppt_w</p:attrName>
+                                        </p:attrNameLst>
+                                      </p:cBhvr>
+                                      <p:tavLst>
+                                        <p:tav tm="0">
+                                          <p:val>
+                                            <p:fltVal val="0"/>
+                                          </p:val>
+                                        </p:tav>
+                                        <p:tav tm="100000">
+                                          <p:val>
+                                            <p:strVal val="#ppt_w"/>
+                                          </p:val>
+                                        </p:tav>
+                                      </p:tavLst>
+                                    </p:anim>
+                                    <p:anim calcmode="lin" valueType="num">
+                                      <p:cBhvr>
+                                        <p:cTn id="8" dur="500" fill="hold"/>
+                                        <p:tgtEl>
+                                          <p:spTgt spid="2"/>
+                                        </p:tgtEl>
+                                        <p:attrNameLst>
+                                          <p:attrName>ppt_h</p:attrName>
+                                        </p:attrNameLst>
+                                      </p:cBhvr>
+                                      <p:tavLst>
+                                        <p:tav tm="0">
+                                          <p:val>
+                                            <p:fltVal val="0"/>
+                                          </p:val>
+                                        </p:tav>
+                                        <p:tav tm="100000">
+                                          <p:val>
+                                            <p:strVal val="#ppt_h"/>
+                                          </p:val>
+                                        </p:tav>
+                                      </p:tavLst>
+                                    </p:anim>
+                                    <p:animEffect transition="in" filter="fade">
+                                      <p:cBhvr>
+                                        <p:cTn id="9" dur="500"/>
+                                        <p:tgtEl>
+                                          <p:spTgt spid="2"/>
+                                        </p:tgtEl>
+                                      </p:cBhvr>
+                                    </p:animEffect>
+                                  </p:childTnLst>
+                                </p:cTn>
+                              </p:par>
+                            </p:childTnLst>
+                          </p:cTn>
+                        </p:par>
+                      </p:childTnLst>
+                    </p:cTn>
+                  </p:par>
+                  <p:par>
+                    <p:cTn id="10" fill="hold">
+                      <p:stCondLst>
+                        <p:cond delay="indefinite"/>
+                      </p:stCondLst>
+                      <p:childTnLst>
+                        <p:par>
+                          <p:cTn id="11" fill="hold">
+                            <p:stCondLst>
+                              <p:cond delay="0"/>
+                            </p:stCondLst>
+                            <p:childTnLst>
+                              <p:par>
+                                <p:cTn id="12" presetID="2" presetClass="entr" presetSubtype="4" fill="hold" grpId="0" nodeType="clickEffect">
+                                  <p:stCondLst>
+                                    <p:cond delay="0"/>
+                                  </p:stCondLst>
+                                  <p:childTnLst>
+                                    <p:set>
+                                      <p:cBhvr>
+                                        <p:cTn id="13" dur="1" fill="hold">
+                                          <p:stCondLst>
+                                            <p:cond delay="0"/>
+                                          </p:stCondLst>
+                                        </p:cTn>
+                                        <p:tgtEl>
+                                          <p:spTgt spid="4">
+                                            <p:txEl>
+                                              <p:pRg st="0" end="0"/>
+                                            </p:txEl>
+                                          </p:spTgt>
+                                        </p:tgtEl>
+                                        <p:attrNameLst>
+                                          <p:attrName>style.visibility</p:attrName>
+                                        </p:attrNameLst>
+                                      </p:cBhvr>
+                                      <p:to>
+                                        <p:strVal val="visible"/>
+                                      </p:to>
+                                    </p:set>
+                                    <p:anim calcmode="lin" valueType="num">
+                                      <p:cBhvr additive="base">
+                                        <p:cTn id="14" dur="500" fill="hold"/>
+                                        <p:tgtEl>
+                                          <p:spTgt spid="4">
+                                            <p:txEl>
+                                              <p:pRg st="0" end="0"/>
+                                            </p:txEl>
+                                          </p:spTgt>
+                                        </p:tgtEl>
+                                        <p:attrNameLst>
+                                          <p:attrName>ppt_x</p:attrName>
+                                        </p:attrNameLst>
+                                      </p:cBhvr>
+                                      <p:tavLst>
+                                        <p:tav tm="0">
+                                          <p:val>
+                                            <p:strVal val="#ppt_x"/>
+                                          </p:val>
+                                        </p:tav>
+                                        <p:tav tm="100000">
+                                          <p:val>
+                                            <p:strVal val="#ppt_x"/>
+                                          </p:val>
+                                        </p:tav>
+                                      </p:tavLst>
+                                    </p:anim>
+                                    <p:anim calcmode="lin" valueType="num">
+                                      <p:cBhvr additive="base">
+                                        <p:cTn id="15" dur="500" fill="hold"/>
+                                        <p:tgtEl>
+                                          <p:spTgt spid="4">
+                                            <p:txEl>
+                                              <p:pRg st="0" end="0"/>
+                                            </p:txEl>
+                                          </p:spTgt>
+                                        </p:tgtEl>
+                                        <p:attrNameLst>
+                                          <p:attrName>ppt_y</p:attrName>
+                                        </p:attrNameLst>
+                                      </p:cBhvr>
+                                      <p:tavLst>
+                                        <p:tav tm="0">
+                                          <p:val>
+                                            <p:strVal val="1+#ppt_h/2"/>
+                                          </p:val>
+                                        </p:tav>
+                                        <p:tav tm="100000">
+                                          <p:val>
+                                            <p:strVal val="#ppt_y"/>
+                                          </p:val>
+                                        </p:tav>
+                                      </p:tavLst>
+                                    </p:anim>
+                                  </p:childTnLst>
+                                </p:cTn>
+                              </p:par>
+                            </p:childTnLst>
+                          </p:cTn>
+                        </p:par>
+                      </p:childTnLst>
+                    </p:cTn>
+                  </p:par>
+                  <p:par>
+                    <p:cTn id="16" fill="hold">
+                      <p:stCondLst>
+                        <p:cond delay="indefinite"/>
+                      </p:stCondLst>
+                      <p:childTnLst>
+                        <p:par>
+                          <p:cTn id="17" fill="hold">
+                            <p:stCondLst>
+                              <p:cond delay="0"/>
+                            </p:stCondLst>
+                            <p:childTnLst>
+                              <p:par>
+                                <p:cTn id="18" presetID="2" presetClass="entr" presetSubtype="4" fill="hold" grpId="0" nodeType="clickEffect">
+                                  <p:stCondLst>
+                                    <p:cond delay="0"/>
+                                  </p:stCondLst>
+                                  <p:childTnLst>
+                                    <p:set>
+                                      <p:cBhvr>
+                                        <p:cTn id="19" dur="1" fill="hold">
+                                          <p:stCondLst>
+                                            <p:cond delay="0"/>
+                                          </p:stCondLst>
+                                        </p:cTn>
+                                        <p:tgtEl>
+                                          <p:spTgt spid="4">
+                                            <p:txEl>
+                                              <p:pRg st="1" end="1"/>
+                                            </p:txEl>
+                                          </p:spTgt>
+                                        </p:tgtEl>
+                                        <p:attrNameLst>
+                                          <p:attrName>style.visibility</p:attrName>
+                                        </p:attrNameLst>
+                                      </p:cBhvr>
+                                      <p:to>
+                                        <p:strVal val="visible"/>
+                                      </p:to>
+                                    </p:set>
+                                    <p:anim calcmode="lin" valueType="num">
+                                      <p:cBhvr additive="base">
+                                        <p:cTn id="20" dur="500" fill="hold"/>
+                                        <p:tgtEl>
+                                          <p:spTgt spid="4">
+                                            <p:txEl>
+                                              <p:pRg st="1" end="1"/>
+                                            </p:txEl>
+                                          </p:spTgt>
+                                        </p:tgtEl>
+                                        <p:attrNameLst>
+                                          <p:attrName>ppt_x</p:attrName>
+                                        </p:attrNameLst>
+                                      </p:cBhvr>
+                                      <p:tavLst>
+                                        <p:tav tm="0">
+                                          <p:val>
+                                            <p:strVal val="#ppt_x"/>
+                                          </p:val>
+                                        </p:tav>
+                                        <p:tav tm="100000">
+                                          <p:val>
+                                            <p:strVal val="#ppt_x"/>
+                                          </p:val>
+                                        </p:tav>
+                                      </p:tavLst>
+                                    </p:anim>
+                                    <p:anim calcmode="lin" valueType="num">
+                                      <p:cBhvr additive="base">
+                                        <p:cTn id="21" dur="500" fill="hold"/>
+                                        <p:tgtEl>
+                                          <p:spTgt spid="4">
+                                            <p:txEl>
+                                              <p:pRg st="1" end="1"/>
+                                            </p:txEl>
+                                          </p:spTgt>
+                                        </p:tgtEl>
+                                        <p:attrNameLst>
+                                          <p:attrName>ppt_y</p:attrName>
+                                        </p:attrNameLst>
+                                      </p:cBhvr>
+                                      <p:tavLst>
+                                        <p:tav tm="0">
+                                          <p:val>
+                                            <p:strVal val="1+#ppt_h/2"/>
+                                          </p:val>
+                                        </p:tav>
+                                        <p:tav tm="100000">
+                                          <p:val>
+                                            <p:strVal val="#ppt_y"/>
+                                          </p:val>
+                                        </p:tav>
+                                      </p:tavLst>
+                                    </p:anim>
+                                  </p:childTnLst>
+                                </p:cTn>
+                              </p:par>
+                            </p:childTnLst>
+                          </p:cTn>
+                        </p:par>
+                      </p:childTnLst>
+                    </p:cTn>
+                  </p:par>
+                  <p:par>
+                    <p:cTn id="22" fill="hold">
+                      <p:stCondLst>
+                        <p:cond delay="indefinite"/>
+                      </p:stCondLst>
+                      <p:childTnLst>
+                        <p:par>
+                          <p:cTn id="23" fill="hold">
+                            <p:stCondLst>
+                              <p:cond delay="0"/>
+                            </p:stCondLst>
+                            <p:childTnLst>
+                              <p:par>
+                                <p:cTn id="24" presetID="2" presetClass="entr" presetSubtype="4" fill="hold" grpId="0" nodeType="clickEffect">
+                                  <p:stCondLst>
+                                    <p:cond delay="0"/>
+                                  </p:stCondLst>
+                                  <p:childTnLst>
+                                    <p:set>
+                                      <p:cBhvr>
+                                        <p:cTn id="25" dur="1" fill="hold">
+                                          <p:stCondLst>
+                                            <p:cond delay="0"/>
+                                          </p:stCondLst>
+                                        </p:cTn>
+                                        <p:tgtEl>
+                                          <p:spTgt spid="4">
+                                            <p:txEl>
+                                              <p:pRg st="2" end="2"/>
+                                            </p:txEl>
+                                          </p:spTgt>
+                                        </p:tgtEl>
+                                        <p:attrNameLst>
+                                          <p:attrName>style.visibility</p:attrName>
+                                        </p:attrNameLst>
+                                      </p:cBhvr>
+                                      <p:to>
+                                        <p:strVal val="visible"/>
+                                      </p:to>
+                                    </p:set>
+                                    <p:anim calcmode="lin" valueType="num">
+                                      <p:cBhvr additive="base">
+                                        <p:cTn id="26" dur="500" fill="hold"/>
+                                        <p:tgtEl>
+                                          <p:spTgt spid="4">
+                                            <p:txEl>
+                                              <p:pRg st="2" end="2"/>
+                                            </p:txEl>
+                                          </p:spTgt>
+                                        </p:tgtEl>
+                                        <p:attrNameLst>
+                                          <p:attrName>ppt_x</p:attrName>
+                                        </p:attrNameLst>
+                                      </p:cBhvr>
+                                      <p:tavLst>
+                                        <p:tav tm="0">
+                                          <p:val>
+                                            <p:strVal val="#ppt_x"/>
+                                          </p:val>
+                                        </p:tav>
+                                        <p:tav tm="100000">
+                                          <p:val>
+                                            <p:strVal val="#ppt_x"/>
+                                          </p:val>
+                                        </p:tav>
+                                      </p:tavLst>
+                                    </p:anim>
+                                    <p:anim calcmode="lin" valueType="num">
+                                      <p:cBhvr additive="base">
+                                        <p:cTn id="27" dur="500" fill="hold"/>
+                                        <p:tgtEl>
+                                          <p:spTgt spid="4">
+                                            <p:txEl>
+                                              <p:pRg st="2" end="2"/>
+                                            </p:txEl>
+                                          </p:spTgt>
+                                        </p:tgtEl>
+                                        <p:attrNameLst>
+                                          <p:attrName>ppt_y</p:attrName>
+                                        </p:attrNameLst>
+                                      </p:cBhvr>
+                                      <p:tavLst>
+                                        <p:tav tm="0">
+                                          <p:val>
+                                            <p:strVal val="1+#ppt_h/2"/>
+                                          </p:val>
+                                        </p:tav>
+                                        <p:tav tm="100000">
+                                          <p:val>
+                                            <p:strVal val="#ppt_y"/>
+                                          </p:val>
+                                        </p:tav>
+                                      </p:tavLst>
+                                    </p:anim>
+                                  </p:childTnLst>
+                                </p:cTn>
+                              </p:par>
+                            </p:childTnLst>
+                          </p:cTn>
+                        </p:par>
+                      </p:childTnLst>
+                    </p:cTn>
+                  </p:par>
+                  <p:par>
+                    <p:cTn id="28" fill="hold">
+                      <p:stCondLst>
+                        <p:cond delay="indefinite"/>
+                      </p:stCondLst>
+                      <p:childTnLst>
+                        <p:par>
+                          <p:cTn id="29" fill="hold">
+                            <p:stCondLst>
+                              <p:cond delay="0"/>
+                            </p:stCondLst>
+                            <p:childTnLst>
+                              <p:par>
+                                <p:cTn id="30" presetID="2" presetClass="entr" presetSubtype="4" fill="hold" grpId="0" nodeType="clickEffect">
+                                  <p:stCondLst>
+                                    <p:cond delay="0"/>
+                                  </p:stCondLst>
+                                  <p:childTnLst>
+                                    <p:set>
+                                      <p:cBhvr>
+                                        <p:cTn id="31" dur="1" fill="hold">
+                                          <p:stCondLst>
+                                            <p:cond delay="0"/>
+                                          </p:stCondLst>
+                                        </p:cTn>
+                                        <p:tgtEl>
+                                          <p:spTgt spid="6">
+                                            <p:txEl>
+                                              <p:pRg st="0" end="0"/>
+                                            </p:txEl>
+                                          </p:spTgt>
+                                        </p:tgtEl>
+                                        <p:attrNameLst>
+                                          <p:attrName>style.visibility</p:attrName>
+                                        </p:attrNameLst>
+                                      </p:cBhvr>
+                                      <p:to>
+                                        <p:strVal val="visible"/>
+                                      </p:to>
+                                    </p:set>
+                                    <p:anim calcmode="lin" valueType="num">
+                                      <p:cBhvr additive="base">
+                                        <p:cTn id="32" dur="500" fill="hold"/>
+                                        <p:tgtEl>
+                                          <p:spTgt spid="6">
+                                            <p:txEl>
+                                              <p:pRg st="0" end="0"/>
+                                            </p:txEl>
+                                          </p:spTgt>
+                                        </p:tgtEl>
+                                        <p:attrNameLst>
+                                          <p:attrName>ppt_x</p:attrName>
+                                        </p:attrNameLst>
+                                      </p:cBhvr>
+                                      <p:tavLst>
+                                        <p:tav tm="0">
+                                          <p:val>
+                                            <p:strVal val="#ppt_x"/>
+                                          </p:val>
+                                        </p:tav>
+                                        <p:tav tm="100000">
+                                          <p:val>
+                                            <p:strVal val="#ppt_x"/>
+                                          </p:val>
+                                        </p:tav>
+                                      </p:tavLst>
+                                    </p:anim>
+                                    <p:anim calcmode="lin" valueType="num">
+                                      <p:cBhvr additive="base">
+                                        <p:cTn id="33" dur="500" fill="hold"/>
+                                        <p:tgtEl>
+                                          <p:spTgt spid="6">
+                                            <p:txEl>
+                                              <p:pRg st="0" end="0"/>
+                                            </p:txEl>
+                                          </p:spTgt>
+                                        </p:tgtEl>
+                                        <p:attrNameLst>
+                                          <p:attrName>ppt_y</p:attrName>
+                                        </p:attrNameLst>
+                                      </p:cBhvr>
+                                      <p:tavLst>
+                                        <p:tav tm="0">
+                                          <p:val>
+                                            <p:strVal val="1+#ppt_h/2"/>
+                                          </p:val>
+                                        </p:tav>
+                                        <p:tav tm="100000">
+                                          <p:val>
+                                            <p:strVal val="#ppt_y"/>
+                                          </p:val>
+                                        </p:tav>
+                                      </p:tavLst>
+                                    </p:anim>
+                                  </p:childTnLst>
+                                </p:cTn>
+                              </p:par>
+                            </p:childTnLst>
+                          </p:cTn>
+                        </p:par>
+                      </p:childTnLst>
+                    </p:cTn>
+                  </p:par>
+                  <p:par>
+                    <p:cTn id="34" fill="hold">
+                      <p:stCondLst>
+                        <p:cond delay="indefinite"/>
+                      </p:stCondLst>
+                      <p:childTnLst>
+                        <p:par>
+                          <p:cTn id="35" fill="hold">
+                            <p:stCondLst>
+                              <p:cond delay="0"/>
+                            </p:stCondLst>
+                            <p:childTnLst>
+                              <p:par>
+                                <p:cTn id="36" presetID="2" presetClass="entr" presetSubtype="4" fill="hold" grpId="0" nodeType="clickEffect">
+                                  <p:stCondLst>
+                                    <p:cond delay="0"/>
+                                  </p:stCondLst>
+                                  <p:childTnLst>
+                                    <p:set>
+                                      <p:cBhvr>
+                                        <p:cTn id="37" dur="1" fill="hold">
+                                          <p:stCondLst>
+                                            <p:cond delay="0"/>
+                                          </p:stCondLst>
+                                        </p:cTn>
+                                        <p:tgtEl>
+                                          <p:spTgt spid="6">
+                                            <p:txEl>
+                                              <p:pRg st="1" end="1"/>
+                                            </p:txEl>
+                                          </p:spTgt>
+                                        </p:tgtEl>
+                                        <p:attrNameLst>
+                                          <p:attrName>style.visibility</p:attrName>
+                                        </p:attrNameLst>
+                                      </p:cBhvr>
+                                      <p:to>
+                                        <p:strVal val="visible"/>
+                                      </p:to>
+                                    </p:set>
+                                    <p:anim calcmode="lin" valueType="num">
+                                      <p:cBhvr additive="base">
+                                        <p:cTn id="38" dur="500" fill="hold"/>
+                                        <p:tgtEl>
+                                          <p:spTgt spid="6">
+                                            <p:txEl>
+                                              <p:pRg st="1" end="1"/>
+                                            </p:txEl>
+                                          </p:spTgt>
+                                        </p:tgtEl>
+                                        <p:attrNameLst>
+                                          <p:attrName>ppt_x</p:attrName>
+                                        </p:attrNameLst>
+                                      </p:cBhvr>
+                                      <p:tavLst>
+                                        <p:tav tm="0">
+                                          <p:val>
+                                            <p:strVal val="#ppt_x"/>
+                                          </p:val>
+                                        </p:tav>
+                                        <p:tav tm="100000">
+                                          <p:val>
+                                            <p:strVal val="#ppt_x"/>
+                                          </p:val>
+                                        </p:tav>
+                                      </p:tavLst>
+                                    </p:anim>
+                                    <p:anim calcmode="lin" valueType="num">
+                                      <p:cBhvr additive="base">
+                                        <p:cTn id="39" dur="500" fill="hold"/>
+                                        <p:tgtEl>
+                                          <p:spTgt spid="6">
+                                            <p:txEl>
+                                              <p:pRg st="1" end="1"/>
+                                            </p:txEl>
+                                          </p:spTgt>
+                                        </p:tgtEl>
+                                        <p:attrNameLst>
+                                          <p:attrName>ppt_y</p:attrName>
+                                        </p:attrNameLst>
+                                      </p:cBhvr>
+                                      <p:tavLst>
+                                        <p:tav tm="0">
+                                          <p:val>
+                                            <p:strVal val="1+#ppt_h/2"/>
+                                          </p:val>
+                                        </p:tav>
+                                        <p:tav tm="100000">
+                                          <p:val>
+                                            <p:strVal val="#ppt_y"/>
+                                          </p:val>
+                                        </p:tav>
+                                      </p:tavLst>
+                                    </p:anim>
+                                  </p:childTnLst>
+                                </p:cTn>
+                              </p:par>
+                            </p:childTnLst>
+                          </p:cTn>
+                        </p:par>
+                      </p:childTnLst>
+                    </p:cTn>
+                  </p:par>
+                  <p:par>
+                    <p:cTn id="40" fill="hold">
+                      <p:stCondLst>
+                        <p:cond delay="indefinite"/>
+                      </p:stCondLst>
+                      <p:childTnLst>
+                        <p:par>
+                          <p:cTn id="41" fill="hold">
+                            <p:stCondLst>
+                              <p:cond delay="0"/>
+                            </p:stCondLst>
+                            <p:childTnLst>
+                              <p:par>
+                                <p:cTn id="42" presetID="2" presetClass="entr" presetSubtype="4" fill="hold" grpId="0" nodeType="clickEffect">
+                                  <p:stCondLst>
+                                    <p:cond delay="0"/>
+                                  </p:stCondLst>
+                                  <p:childTnLst>
+                                    <p:set>
+                                      <p:cBhvr>
+                                        <p:cTn id="43" dur="1" fill="hold">
+                                          <p:stCondLst>
+                                            <p:cond delay="0"/>
+                                          </p:stCondLst>
+                                        </p:cTn>
+                                        <p:tgtEl>
+                                          <p:spTgt spid="6">
+                                            <p:txEl>
+                                              <p:pRg st="2" end="2"/>
+                                            </p:txEl>
+                                          </p:spTgt>
+                                        </p:tgtEl>
+                                        <p:attrNameLst>
+                                          <p:attrName>style.visibility</p:attrName>
+                                        </p:attrNameLst>
+                                      </p:cBhvr>
+                                      <p:to>
+                                        <p:strVal val="visible"/>
+                                      </p:to>
+                                    </p:set>
+                                    <p:anim calcmode="lin" valueType="num">
+                                      <p:cBhvr additive="base">
+                                        <p:cTn id="44" dur="500" fill="hold"/>
+                                        <p:tgtEl>
+                                          <p:spTgt spid="6">
+                                            <p:txEl>
+                                              <p:pRg st="2" end="2"/>
+                                            </p:txEl>
+                                          </p:spTgt>
+                                        </p:tgtEl>
+                                        <p:attrNameLst>
+                                          <p:attrName>ppt_x</p:attrName>
+                                        </p:attrNameLst>
+                                      </p:cBhvr>
+                                      <p:tavLst>
+                                        <p:tav tm="0">
+                                          <p:val>
+                                            <p:strVal val="#ppt_x"/>
+                                          </p:val>
+                                        </p:tav>
+                                        <p:tav tm="100000">
+                                          <p:val>
+                                            <p:strVal val="#ppt_x"/>
+                                          </p:val>
+                                        </p:tav>
+                                      </p:tavLst>
+                                    </p:anim>
+                                    <p:anim calcmode="lin" valueType="num">
+                                      <p:cBhvr additive="base">
+                                        <p:cTn id="45" dur="500" fill="hold"/>
+                                        <p:tgtEl>
+                                          <p:spTgt spid="6">
+                                            <p:txEl>
+                                              <p:pRg st="2" end="2"/>
+                                            </p:txEl>
+                                          </p:spTgt>
+                                        </p:tgtEl>
+                                        <p:attrNameLst>
+                                          <p:attrName>ppt_y</p:attrName>
+                                        </p:attrNameLst>
+                                      </p:cBhvr>
+                                      <p:tavLst>
+                                        <p:tav tm="0">
+                                          <p:val>
+                                            <p:strVal val="1+#ppt_h/2"/>
+                                          </p:val>
+                                        </p:tav>
+                                        <p:tav tm="100000">
+                                          <p:val>
+                                            <p:strVal val="#ppt_y"/>
+                                          </p:val>
+                                        </p:tav>
+                                      </p:tavLst>
+                                    </p:anim>
+                                  </p:childTnLst>
+                                </p:cTn>
+                              </p:par>
+                            </p:childTnLst>
+                          </p:cTn>
+                        </p:par>
+                      </p:childTnLst>
+                    </p:cTn>
+                  </p:par>
+                  <p:par>
+                    <p:cTn id="46" fill="hold">
+                      <p:stCondLst>
+                        <p:cond delay="indefinite"/>
+                      </p:stCondLst>
+                      <p:childTnLst>
+                        <p:par>
+                          <p:cTn id="47" fill="hold">
+                            <p:stCondLst>
+                              <p:cond delay="0"/>
+                            </p:stCondLst>
+                            <p:childTnLst>
+                              <p:par>
+                                <p:cTn id="48" presetID="2" presetClass="entr" presetSubtype="4" fill="hold" grpId="0" nodeType="clickEffect">
+                                  <p:stCondLst>
+                                    <p:cond delay="0"/>
+                                  </p:stCondLst>
+                                  <p:childTnLst>
+                                    <p:set>
+                                      <p:cBhvr>
+                                        <p:cTn id="49" dur="1" fill="hold">
+                                          <p:stCondLst>
+                                            <p:cond delay="0"/>
+                                          </p:stCondLst>
+                                        </p:cTn>
+                                        <p:tgtEl>
+                                          <p:spTgt spid="6">
+                                            <p:txEl>
+                                              <p:pRg st="3" end="3"/>
+                                            </p:txEl>
+                                          </p:spTgt>
+                                        </p:tgtEl>
+                                        <p:attrNameLst>
+                                          <p:attrName>style.visibility</p:attrName>
+                                        </p:attrNameLst>
+                                      </p:cBhvr>
+                                      <p:to>
+                                        <p:strVal val="visible"/>
+                                      </p:to>
+                                    </p:set>
+                                    <p:anim calcmode="lin" valueType="num">
+                                      <p:cBhvr additive="base">
+                                        <p:cTn id="50" dur="500" fill="hold"/>
+                                        <p:tgtEl>
+                                          <p:spTgt spid="6">
+                                            <p:txEl>
+                                              <p:pRg st="3" end="3"/>
+                                            </p:txEl>
+                                          </p:spTgt>
+                                        </p:tgtEl>
+                                        <p:attrNameLst>
+                                          <p:attrName>ppt_x</p:attrName>
+                                        </p:attrNameLst>
+                                      </p:cBhvr>
+                                      <p:tavLst>
+                                        <p:tav tm="0">
+                                          <p:val>
+                                            <p:strVal val="#ppt_x"/>
+                                          </p:val>
+                                        </p:tav>
+                                        <p:tav tm="100000">
+                                          <p:val>
+                                            <p:strVal val="#ppt_x"/>
+                                          </p:val>
+                                        </p:tav>
+                                      </p:tavLst>
+                                    </p:anim>
+                                    <p:anim calcmode="lin" valueType="num">
+                                      <p:cBhvr additive="base">
+                                        <p:cTn id="51" dur="500" fill="hold"/>
+                                        <p:tgtEl>
+                                          <p:spTgt spid="6">
+                                            <p:txEl>
+                                              <p:pRg st="3" end="3"/>
+                                            </p:txEl>
+                                          </p:spTgt>
+                                        </p:tgtEl>
+                                        <p:attrNameLst>
+                                          <p:attrName>ppt_y</p:attrName>
+                                        </p:attrNameLst>
+                                      </p:cBhvr>
+                                      <p:tavLst>
+                                        <p:tav tm="0">
+                                          <p:val>
+                                            <p:strVal val="1+#ppt_h/2"/>
+                                          </p:val>
+                                        </p:tav>
+                                        <p:tav tm="100000">
+                                          <p:val>
+                                            <p:strVal val="#ppt_y"/>
+                                          </p:val>
+                                        </p:tav>
+                                      </p:tavLst>
+                                    </p:anim>
+                                  </p:childTnLst>
+                                </p:cTn>
+                              </p:par>
+                            </p:childTnLst>
+                          </p:cTn>
+                        </p:par>
+                      </p:childTnLst>
+                    </p:cTn>
+                  </p:par>
+                </p:childTnLst>
+              </p:cTn>
+              <p:prevCondLst>
+                <p:cond evt="onPrev" delay="0">
+                  <p:tgtEl>
+                    <p:sldTgt/>
+                  </p:tgtEl>
+                </p:cond>
+              </p:prevCondLst>
+              <p:nextCondLst>
+                <p:cond evt="onNext" delay="0">
+                  <p:tgtEl>
+                    <p:sldTgt/>
+                  </p:tgtEl>
+                </p:cond>
+              </p:nextCondLst>
+            </p:seq>
+          </p:childTnLst>
+        </p:cTn>
+      </p:par>
+    </p:tnLst>
+    <p:bldLst>
+      <p:bldP spid="2" grpId="0"/>
+      <p:bldP spid="4" grpId="0" build="p"/>
+      <p:bldP spid="6" grpId="0" build="p"/>
+    </p:bldLst>
+  </p:timing>
 </p:sld>
 </file>
 
@@ -16474,7 +23941,7 @@
     <p:bg>
       <p:bgPr>
         <a:blipFill dpi="0" rotWithShape="1">
-          <a:blip r:embed="rId2" cstate="screen">
+          <a:blip r:embed="rId3" cstate="screen">
             <a:lum/>
             <a:extLst>
               <a:ext uri="{28A0092B-C50C-407E-A947-70E740481C1C}">
@@ -16528,14 +23995,20 @@
         </p:nvSpPr>
         <p:spPr>
           <a:xfrm>
-            <a:off x="3275807" y="171451"/>
+            <a:off x="3273424" y="914400"/>
             <a:ext cx="5637210" cy="1028700"/>
           </a:xfrm>
         </p:spPr>
         <p:txBody>
-          <a:bodyPr/>
+          <a:bodyPr>
+            <a:normAutofit fontScale="90000"/>
+          </a:bodyPr>
           <a:lstStyle/>
           <a:p>
+            <a:r>
+              <a:rPr lang="en-IN" dirty="0"/>
+              <a:t>Cybersecurity in Emerging Tech</a:t>
+            </a:r>
             <a:endParaRPr lang="en-US" dirty="0"/>
           </a:p>
         </p:txBody>
@@ -16558,8 +24031,8 @@
         </p:nvSpPr>
         <p:spPr>
           <a:xfrm>
-            <a:off x="3275807" y="3543300"/>
-            <a:ext cx="5637210" cy="2628899"/>
+            <a:off x="3273424" y="2114550"/>
+            <a:ext cx="5637210" cy="4514850"/>
           </a:xfrm>
         </p:spPr>
         <p:txBody>
@@ -16567,6 +24040,76 @@
             <a:normAutofit/>
           </a:bodyPr>
           <a:lstStyle/>
+          <a:p>
+            <a:pPr marL="285750" lvl="0" indent="-285750" algn="l">
+              <a:buFont typeface="Arial" panose="020B0604020202020204" pitchFamily="34" charset="0"/>
+              <a:buChar char="•"/>
+            </a:pPr>
+            <a:r>
+              <a:rPr lang="en-IN" b="1" dirty="0"/>
+              <a:t>Definition:</a:t>
+            </a:r>
+            <a:r>
+              <a:rPr lang="en-IN" dirty="0"/>
+              <a:t> Protecting systems, networks, and data from unauthorized access and cyberattacks.</a:t>
+            </a:r>
+          </a:p>
+          <a:p>
+            <a:pPr marL="285750" lvl="0" indent="-285750" algn="l">
+              <a:buFont typeface="Arial" panose="020B0604020202020204" pitchFamily="34" charset="0"/>
+              <a:buChar char="•"/>
+            </a:pPr>
+            <a:r>
+              <a:rPr lang="en-IN" b="1" dirty="0"/>
+              <a:t>Threats:</a:t>
+            </a:r>
+            <a:r>
+              <a:rPr lang="en-IN" dirty="0"/>
+              <a:t> Malware, phishing, ransomware, insider threats, data breaches.</a:t>
+            </a:r>
+          </a:p>
+          <a:p>
+            <a:pPr marL="285750" lvl="0" indent="-285750" algn="l">
+              <a:buFont typeface="Arial" panose="020B0604020202020204" pitchFamily="34" charset="0"/>
+              <a:buChar char="•"/>
+            </a:pPr>
+            <a:r>
+              <a:rPr lang="en-IN" b="1" dirty="0"/>
+              <a:t>Solutions:</a:t>
+            </a:r>
+            <a:r>
+              <a:rPr lang="en-IN" dirty="0"/>
+              <a:t> Encryption, firewalls, multi‑factor authentication, AI‑based threat detection.</a:t>
+            </a:r>
+          </a:p>
+          <a:p>
+            <a:pPr marL="285750" lvl="0" indent="-285750" algn="l">
+              <a:buFont typeface="Arial" panose="020B0604020202020204" pitchFamily="34" charset="0"/>
+              <a:buChar char="•"/>
+            </a:pPr>
+            <a:r>
+              <a:rPr lang="en-IN" b="1" dirty="0"/>
+              <a:t>Impact:</a:t>
+            </a:r>
+            <a:r>
+              <a:rPr lang="en-IN" dirty="0"/>
+              <a:t> Builds trust, ensures privacy, and secures adoption of emerging technologies.</a:t>
+            </a:r>
+          </a:p>
+          <a:p>
+            <a:pPr marL="285750" lvl="0" indent="-285750" algn="l">
+              <a:buFont typeface="Arial" panose="020B0604020202020204" pitchFamily="34" charset="0"/>
+              <a:buChar char="•"/>
+            </a:pPr>
+            <a:r>
+              <a:rPr lang="en-IN" b="1" dirty="0"/>
+              <a:t>Future Scope:</a:t>
+            </a:r>
+            <a:r>
+              <a:rPr lang="en-IN" dirty="0"/>
+              <a:t> AI‑driven security, blockchain‑based identity, quantum‑safe cryptography.</a:t>
+            </a:r>
+          </a:p>
           <a:p>
             <a:endParaRPr lang="en-US" dirty="0"/>
           </a:p>
@@ -16612,18 +24155,666 @@
   <p:clrMapOvr>
     <a:masterClrMapping/>
   </p:clrMapOvr>
-  <mc:AlternateContent xmlns:mc="http://schemas.openxmlformats.org/markup-compatibility/2006">
-    <mc:Choice xmlns:p14="http://schemas.microsoft.com/office/powerpoint/2010/main" Requires="p14">
+  <mc:AlternateContent xmlns:mc="http://schemas.openxmlformats.org/markup-compatibility/2006" xmlns:p14="http://schemas.microsoft.com/office/powerpoint/2010/main">
+    <mc:Choice Requires="p14">
       <p:transition spd="slow" p14:dur="4000">
         <p14:vortex dir="r"/>
       </p:transition>
     </mc:Choice>
-    <mc:Fallback>
+    <mc:Fallback xmlns="">
       <p:transition spd="slow">
         <p:fade/>
       </p:transition>
     </mc:Fallback>
   </mc:AlternateContent>
+  <p:timing>
+    <p:tnLst>
+      <p:par>
+        <p:cTn id="1" dur="indefinite" restart="never" nodeType="tmRoot">
+          <p:childTnLst>
+            <p:seq concurrent="1" nextAc="seek">
+              <p:cTn id="2" dur="indefinite" nodeType="mainSeq">
+                <p:childTnLst>
+                  <p:par>
+                    <p:cTn id="3" fill="hold">
+                      <p:stCondLst>
+                        <p:cond delay="indefinite"/>
+                      </p:stCondLst>
+                      <p:childTnLst>
+                        <p:par>
+                          <p:cTn id="4" fill="hold">
+                            <p:stCondLst>
+                              <p:cond delay="0"/>
+                            </p:stCondLst>
+                            <p:childTnLst>
+                              <p:par>
+                                <p:cTn id="5" presetID="53" presetClass="entr" presetSubtype="16" fill="hold" grpId="0" nodeType="clickEffect">
+                                  <p:stCondLst>
+                                    <p:cond delay="0"/>
+                                  </p:stCondLst>
+                                  <p:childTnLst>
+                                    <p:set>
+                                      <p:cBhvr>
+                                        <p:cTn id="6" dur="1" fill="hold">
+                                          <p:stCondLst>
+                                            <p:cond delay="0"/>
+                                          </p:stCondLst>
+                                        </p:cTn>
+                                        <p:tgtEl>
+                                          <p:spTgt spid="2"/>
+                                        </p:tgtEl>
+                                        <p:attrNameLst>
+                                          <p:attrName>style.visibility</p:attrName>
+                                        </p:attrNameLst>
+                                      </p:cBhvr>
+                                      <p:to>
+                                        <p:strVal val="visible"/>
+                                      </p:to>
+                                    </p:set>
+                                    <p:anim calcmode="lin" valueType="num">
+                                      <p:cBhvr>
+                                        <p:cTn id="7" dur="500" fill="hold"/>
+                                        <p:tgtEl>
+                                          <p:spTgt spid="2"/>
+                                        </p:tgtEl>
+                                        <p:attrNameLst>
+                                          <p:attrName>ppt_w</p:attrName>
+                                        </p:attrNameLst>
+                                      </p:cBhvr>
+                                      <p:tavLst>
+                                        <p:tav tm="0">
+                                          <p:val>
+                                            <p:fltVal val="0"/>
+                                          </p:val>
+                                        </p:tav>
+                                        <p:tav tm="100000">
+                                          <p:val>
+                                            <p:strVal val="#ppt_w"/>
+                                          </p:val>
+                                        </p:tav>
+                                      </p:tavLst>
+                                    </p:anim>
+                                    <p:anim calcmode="lin" valueType="num">
+                                      <p:cBhvr>
+                                        <p:cTn id="8" dur="500" fill="hold"/>
+                                        <p:tgtEl>
+                                          <p:spTgt spid="2"/>
+                                        </p:tgtEl>
+                                        <p:attrNameLst>
+                                          <p:attrName>ppt_h</p:attrName>
+                                        </p:attrNameLst>
+                                      </p:cBhvr>
+                                      <p:tavLst>
+                                        <p:tav tm="0">
+                                          <p:val>
+                                            <p:fltVal val="0"/>
+                                          </p:val>
+                                        </p:tav>
+                                        <p:tav tm="100000">
+                                          <p:val>
+                                            <p:strVal val="#ppt_h"/>
+                                          </p:val>
+                                        </p:tav>
+                                      </p:tavLst>
+                                    </p:anim>
+                                    <p:animEffect transition="in" filter="fade">
+                                      <p:cBhvr>
+                                        <p:cTn id="9" dur="500"/>
+                                        <p:tgtEl>
+                                          <p:spTgt spid="2"/>
+                                        </p:tgtEl>
+                                      </p:cBhvr>
+                                    </p:animEffect>
+                                  </p:childTnLst>
+                                </p:cTn>
+                              </p:par>
+                            </p:childTnLst>
+                          </p:cTn>
+                        </p:par>
+                      </p:childTnLst>
+                    </p:cTn>
+                  </p:par>
+                  <p:par>
+                    <p:cTn id="10" fill="hold">
+                      <p:stCondLst>
+                        <p:cond delay="indefinite"/>
+                      </p:stCondLst>
+                      <p:childTnLst>
+                        <p:par>
+                          <p:cTn id="11" fill="hold">
+                            <p:stCondLst>
+                              <p:cond delay="0"/>
+                            </p:stCondLst>
+                            <p:childTnLst>
+                              <p:par>
+                                <p:cTn id="12" presetID="2" presetClass="entr" presetSubtype="4" fill="hold" grpId="0" nodeType="clickEffect">
+                                  <p:stCondLst>
+                                    <p:cond delay="0"/>
+                                  </p:stCondLst>
+                                  <p:childTnLst>
+                                    <p:set>
+                                      <p:cBhvr>
+                                        <p:cTn id="13" dur="1" fill="hold">
+                                          <p:stCondLst>
+                                            <p:cond delay="0"/>
+                                          </p:stCondLst>
+                                        </p:cTn>
+                                        <p:tgtEl>
+                                          <p:spTgt spid="3">
+                                            <p:txEl>
+                                              <p:pRg st="0" end="0"/>
+                                            </p:txEl>
+                                          </p:spTgt>
+                                        </p:tgtEl>
+                                        <p:attrNameLst>
+                                          <p:attrName>style.visibility</p:attrName>
+                                        </p:attrNameLst>
+                                      </p:cBhvr>
+                                      <p:to>
+                                        <p:strVal val="visible"/>
+                                      </p:to>
+                                    </p:set>
+                                    <p:anim calcmode="lin" valueType="num">
+                                      <p:cBhvr additive="base">
+                                        <p:cTn id="14" dur="500" fill="hold"/>
+                                        <p:tgtEl>
+                                          <p:spTgt spid="3">
+                                            <p:txEl>
+                                              <p:pRg st="0" end="0"/>
+                                            </p:txEl>
+                                          </p:spTgt>
+                                        </p:tgtEl>
+                                        <p:attrNameLst>
+                                          <p:attrName>ppt_x</p:attrName>
+                                        </p:attrNameLst>
+                                      </p:cBhvr>
+                                      <p:tavLst>
+                                        <p:tav tm="0">
+                                          <p:val>
+                                            <p:strVal val="#ppt_x"/>
+                                          </p:val>
+                                        </p:tav>
+                                        <p:tav tm="100000">
+                                          <p:val>
+                                            <p:strVal val="#ppt_x"/>
+                                          </p:val>
+                                        </p:tav>
+                                      </p:tavLst>
+                                    </p:anim>
+                                    <p:anim calcmode="lin" valueType="num">
+                                      <p:cBhvr additive="base">
+                                        <p:cTn id="15" dur="500" fill="hold"/>
+                                        <p:tgtEl>
+                                          <p:spTgt spid="3">
+                                            <p:txEl>
+                                              <p:pRg st="0" end="0"/>
+                                            </p:txEl>
+                                          </p:spTgt>
+                                        </p:tgtEl>
+                                        <p:attrNameLst>
+                                          <p:attrName>ppt_y</p:attrName>
+                                        </p:attrNameLst>
+                                      </p:cBhvr>
+                                      <p:tavLst>
+                                        <p:tav tm="0">
+                                          <p:val>
+                                            <p:strVal val="1+#ppt_h/2"/>
+                                          </p:val>
+                                        </p:tav>
+                                        <p:tav tm="100000">
+                                          <p:val>
+                                            <p:strVal val="#ppt_y"/>
+                                          </p:val>
+                                        </p:tav>
+                                      </p:tavLst>
+                                    </p:anim>
+                                  </p:childTnLst>
+                                </p:cTn>
+                              </p:par>
+                            </p:childTnLst>
+                          </p:cTn>
+                        </p:par>
+                      </p:childTnLst>
+                    </p:cTn>
+                  </p:par>
+                  <p:par>
+                    <p:cTn id="16" fill="hold">
+                      <p:stCondLst>
+                        <p:cond delay="indefinite"/>
+                      </p:stCondLst>
+                      <p:childTnLst>
+                        <p:par>
+                          <p:cTn id="17" fill="hold">
+                            <p:stCondLst>
+                              <p:cond delay="0"/>
+                            </p:stCondLst>
+                            <p:childTnLst>
+                              <p:par>
+                                <p:cTn id="18" presetID="2" presetClass="entr" presetSubtype="4" fill="hold" grpId="0" nodeType="clickEffect">
+                                  <p:stCondLst>
+                                    <p:cond delay="0"/>
+                                  </p:stCondLst>
+                                  <p:childTnLst>
+                                    <p:set>
+                                      <p:cBhvr>
+                                        <p:cTn id="19" dur="1" fill="hold">
+                                          <p:stCondLst>
+                                            <p:cond delay="0"/>
+                                          </p:stCondLst>
+                                        </p:cTn>
+                                        <p:tgtEl>
+                                          <p:spTgt spid="3">
+                                            <p:txEl>
+                                              <p:pRg st="1" end="1"/>
+                                            </p:txEl>
+                                          </p:spTgt>
+                                        </p:tgtEl>
+                                        <p:attrNameLst>
+                                          <p:attrName>style.visibility</p:attrName>
+                                        </p:attrNameLst>
+                                      </p:cBhvr>
+                                      <p:to>
+                                        <p:strVal val="visible"/>
+                                      </p:to>
+                                    </p:set>
+                                    <p:anim calcmode="lin" valueType="num">
+                                      <p:cBhvr additive="base">
+                                        <p:cTn id="20" dur="500" fill="hold"/>
+                                        <p:tgtEl>
+                                          <p:spTgt spid="3">
+                                            <p:txEl>
+                                              <p:pRg st="1" end="1"/>
+                                            </p:txEl>
+                                          </p:spTgt>
+                                        </p:tgtEl>
+                                        <p:attrNameLst>
+                                          <p:attrName>ppt_x</p:attrName>
+                                        </p:attrNameLst>
+                                      </p:cBhvr>
+                                      <p:tavLst>
+                                        <p:tav tm="0">
+                                          <p:val>
+                                            <p:strVal val="#ppt_x"/>
+                                          </p:val>
+                                        </p:tav>
+                                        <p:tav tm="100000">
+                                          <p:val>
+                                            <p:strVal val="#ppt_x"/>
+                                          </p:val>
+                                        </p:tav>
+                                      </p:tavLst>
+                                    </p:anim>
+                                    <p:anim calcmode="lin" valueType="num">
+                                      <p:cBhvr additive="base">
+                                        <p:cTn id="21" dur="500" fill="hold"/>
+                                        <p:tgtEl>
+                                          <p:spTgt spid="3">
+                                            <p:txEl>
+                                              <p:pRg st="1" end="1"/>
+                                            </p:txEl>
+                                          </p:spTgt>
+                                        </p:tgtEl>
+                                        <p:attrNameLst>
+                                          <p:attrName>ppt_y</p:attrName>
+                                        </p:attrNameLst>
+                                      </p:cBhvr>
+                                      <p:tavLst>
+                                        <p:tav tm="0">
+                                          <p:val>
+                                            <p:strVal val="1+#ppt_h/2"/>
+                                          </p:val>
+                                        </p:tav>
+                                        <p:tav tm="100000">
+                                          <p:val>
+                                            <p:strVal val="#ppt_y"/>
+                                          </p:val>
+                                        </p:tav>
+                                      </p:tavLst>
+                                    </p:anim>
+                                  </p:childTnLst>
+                                </p:cTn>
+                              </p:par>
+                            </p:childTnLst>
+                          </p:cTn>
+                        </p:par>
+                      </p:childTnLst>
+                    </p:cTn>
+                  </p:par>
+                  <p:par>
+                    <p:cTn id="22" fill="hold">
+                      <p:stCondLst>
+                        <p:cond delay="indefinite"/>
+                      </p:stCondLst>
+                      <p:childTnLst>
+                        <p:par>
+                          <p:cTn id="23" fill="hold">
+                            <p:stCondLst>
+                              <p:cond delay="0"/>
+                            </p:stCondLst>
+                            <p:childTnLst>
+                              <p:par>
+                                <p:cTn id="24" presetID="2" presetClass="entr" presetSubtype="4" fill="hold" grpId="0" nodeType="clickEffect">
+                                  <p:stCondLst>
+                                    <p:cond delay="0"/>
+                                  </p:stCondLst>
+                                  <p:childTnLst>
+                                    <p:set>
+                                      <p:cBhvr>
+                                        <p:cTn id="25" dur="1" fill="hold">
+                                          <p:stCondLst>
+                                            <p:cond delay="0"/>
+                                          </p:stCondLst>
+                                        </p:cTn>
+                                        <p:tgtEl>
+                                          <p:spTgt spid="3">
+                                            <p:txEl>
+                                              <p:pRg st="2" end="2"/>
+                                            </p:txEl>
+                                          </p:spTgt>
+                                        </p:tgtEl>
+                                        <p:attrNameLst>
+                                          <p:attrName>style.visibility</p:attrName>
+                                        </p:attrNameLst>
+                                      </p:cBhvr>
+                                      <p:to>
+                                        <p:strVal val="visible"/>
+                                      </p:to>
+                                    </p:set>
+                                    <p:anim calcmode="lin" valueType="num">
+                                      <p:cBhvr additive="base">
+                                        <p:cTn id="26" dur="500" fill="hold"/>
+                                        <p:tgtEl>
+                                          <p:spTgt spid="3">
+                                            <p:txEl>
+                                              <p:pRg st="2" end="2"/>
+                                            </p:txEl>
+                                          </p:spTgt>
+                                        </p:tgtEl>
+                                        <p:attrNameLst>
+                                          <p:attrName>ppt_x</p:attrName>
+                                        </p:attrNameLst>
+                                      </p:cBhvr>
+                                      <p:tavLst>
+                                        <p:tav tm="0">
+                                          <p:val>
+                                            <p:strVal val="#ppt_x"/>
+                                          </p:val>
+                                        </p:tav>
+                                        <p:tav tm="100000">
+                                          <p:val>
+                                            <p:strVal val="#ppt_x"/>
+                                          </p:val>
+                                        </p:tav>
+                                      </p:tavLst>
+                                    </p:anim>
+                                    <p:anim calcmode="lin" valueType="num">
+                                      <p:cBhvr additive="base">
+                                        <p:cTn id="27" dur="500" fill="hold"/>
+                                        <p:tgtEl>
+                                          <p:spTgt spid="3">
+                                            <p:txEl>
+                                              <p:pRg st="2" end="2"/>
+                                            </p:txEl>
+                                          </p:spTgt>
+                                        </p:tgtEl>
+                                        <p:attrNameLst>
+                                          <p:attrName>ppt_y</p:attrName>
+                                        </p:attrNameLst>
+                                      </p:cBhvr>
+                                      <p:tavLst>
+                                        <p:tav tm="0">
+                                          <p:val>
+                                            <p:strVal val="1+#ppt_h/2"/>
+                                          </p:val>
+                                        </p:tav>
+                                        <p:tav tm="100000">
+                                          <p:val>
+                                            <p:strVal val="#ppt_y"/>
+                                          </p:val>
+                                        </p:tav>
+                                      </p:tavLst>
+                                    </p:anim>
+                                  </p:childTnLst>
+                                </p:cTn>
+                              </p:par>
+                            </p:childTnLst>
+                          </p:cTn>
+                        </p:par>
+                      </p:childTnLst>
+                    </p:cTn>
+                  </p:par>
+                  <p:par>
+                    <p:cTn id="28" fill="hold">
+                      <p:stCondLst>
+                        <p:cond delay="indefinite"/>
+                      </p:stCondLst>
+                      <p:childTnLst>
+                        <p:par>
+                          <p:cTn id="29" fill="hold">
+                            <p:stCondLst>
+                              <p:cond delay="0"/>
+                            </p:stCondLst>
+                            <p:childTnLst>
+                              <p:par>
+                                <p:cTn id="30" presetID="2" presetClass="entr" presetSubtype="4" fill="hold" grpId="0" nodeType="clickEffect">
+                                  <p:stCondLst>
+                                    <p:cond delay="0"/>
+                                  </p:stCondLst>
+                                  <p:childTnLst>
+                                    <p:set>
+                                      <p:cBhvr>
+                                        <p:cTn id="31" dur="1" fill="hold">
+                                          <p:stCondLst>
+                                            <p:cond delay="0"/>
+                                          </p:stCondLst>
+                                        </p:cTn>
+                                        <p:tgtEl>
+                                          <p:spTgt spid="3">
+                                            <p:txEl>
+                                              <p:pRg st="3" end="3"/>
+                                            </p:txEl>
+                                          </p:spTgt>
+                                        </p:tgtEl>
+                                        <p:attrNameLst>
+                                          <p:attrName>style.visibility</p:attrName>
+                                        </p:attrNameLst>
+                                      </p:cBhvr>
+                                      <p:to>
+                                        <p:strVal val="visible"/>
+                                      </p:to>
+                                    </p:set>
+                                    <p:anim calcmode="lin" valueType="num">
+                                      <p:cBhvr additive="base">
+                                        <p:cTn id="32" dur="500" fill="hold"/>
+                                        <p:tgtEl>
+                                          <p:spTgt spid="3">
+                                            <p:txEl>
+                                              <p:pRg st="3" end="3"/>
+                                            </p:txEl>
+                                          </p:spTgt>
+                                        </p:tgtEl>
+                                        <p:attrNameLst>
+                                          <p:attrName>ppt_x</p:attrName>
+                                        </p:attrNameLst>
+                                      </p:cBhvr>
+                                      <p:tavLst>
+                                        <p:tav tm="0">
+                                          <p:val>
+                                            <p:strVal val="#ppt_x"/>
+                                          </p:val>
+                                        </p:tav>
+                                        <p:tav tm="100000">
+                                          <p:val>
+                                            <p:strVal val="#ppt_x"/>
+                                          </p:val>
+                                        </p:tav>
+                                      </p:tavLst>
+                                    </p:anim>
+                                    <p:anim calcmode="lin" valueType="num">
+                                      <p:cBhvr additive="base">
+                                        <p:cTn id="33" dur="500" fill="hold"/>
+                                        <p:tgtEl>
+                                          <p:spTgt spid="3">
+                                            <p:txEl>
+                                              <p:pRg st="3" end="3"/>
+                                            </p:txEl>
+                                          </p:spTgt>
+                                        </p:tgtEl>
+                                        <p:attrNameLst>
+                                          <p:attrName>ppt_y</p:attrName>
+                                        </p:attrNameLst>
+                                      </p:cBhvr>
+                                      <p:tavLst>
+                                        <p:tav tm="0">
+                                          <p:val>
+                                            <p:strVal val="1+#ppt_h/2"/>
+                                          </p:val>
+                                        </p:tav>
+                                        <p:tav tm="100000">
+                                          <p:val>
+                                            <p:strVal val="#ppt_y"/>
+                                          </p:val>
+                                        </p:tav>
+                                      </p:tavLst>
+                                    </p:anim>
+                                  </p:childTnLst>
+                                </p:cTn>
+                              </p:par>
+                            </p:childTnLst>
+                          </p:cTn>
+                        </p:par>
+                      </p:childTnLst>
+                    </p:cTn>
+                  </p:par>
+                  <p:par>
+                    <p:cTn id="34" fill="hold">
+                      <p:stCondLst>
+                        <p:cond delay="indefinite"/>
+                      </p:stCondLst>
+                      <p:childTnLst>
+                        <p:par>
+                          <p:cTn id="35" fill="hold">
+                            <p:stCondLst>
+                              <p:cond delay="0"/>
+                            </p:stCondLst>
+                            <p:childTnLst>
+                              <p:par>
+                                <p:cTn id="36" presetID="2" presetClass="entr" presetSubtype="4" fill="hold" grpId="0" nodeType="clickEffect">
+                                  <p:stCondLst>
+                                    <p:cond delay="0"/>
+                                  </p:stCondLst>
+                                  <p:childTnLst>
+                                    <p:set>
+                                      <p:cBhvr>
+                                        <p:cTn id="37" dur="1" fill="hold">
+                                          <p:stCondLst>
+                                            <p:cond delay="0"/>
+                                          </p:stCondLst>
+                                        </p:cTn>
+                                        <p:tgtEl>
+                                          <p:spTgt spid="3">
+                                            <p:txEl>
+                                              <p:pRg st="4" end="4"/>
+                                            </p:txEl>
+                                          </p:spTgt>
+                                        </p:tgtEl>
+                                        <p:attrNameLst>
+                                          <p:attrName>style.visibility</p:attrName>
+                                        </p:attrNameLst>
+                                      </p:cBhvr>
+                                      <p:to>
+                                        <p:strVal val="visible"/>
+                                      </p:to>
+                                    </p:set>
+                                    <p:anim calcmode="lin" valueType="num">
+                                      <p:cBhvr additive="base">
+                                        <p:cTn id="38" dur="500" fill="hold"/>
+                                        <p:tgtEl>
+                                          <p:spTgt spid="3">
+                                            <p:txEl>
+                                              <p:pRg st="4" end="4"/>
+                                            </p:txEl>
+                                          </p:spTgt>
+                                        </p:tgtEl>
+                                        <p:attrNameLst>
+                                          <p:attrName>ppt_x</p:attrName>
+                                        </p:attrNameLst>
+                                      </p:cBhvr>
+                                      <p:tavLst>
+                                        <p:tav tm="0">
+                                          <p:val>
+                                            <p:strVal val="#ppt_x"/>
+                                          </p:val>
+                                        </p:tav>
+                                        <p:tav tm="100000">
+                                          <p:val>
+                                            <p:strVal val="#ppt_x"/>
+                                          </p:val>
+                                        </p:tav>
+                                      </p:tavLst>
+                                    </p:anim>
+                                    <p:anim calcmode="lin" valueType="num">
+                                      <p:cBhvr additive="base">
+                                        <p:cTn id="39" dur="500" fill="hold"/>
+                                        <p:tgtEl>
+                                          <p:spTgt spid="3">
+                                            <p:txEl>
+                                              <p:pRg st="4" end="4"/>
+                                            </p:txEl>
+                                          </p:spTgt>
+                                        </p:tgtEl>
+                                        <p:attrNameLst>
+                                          <p:attrName>ppt_y</p:attrName>
+                                        </p:attrNameLst>
+                                      </p:cBhvr>
+                                      <p:tavLst>
+                                        <p:tav tm="0">
+                                          <p:val>
+                                            <p:strVal val="1+#ppt_h/2"/>
+                                          </p:val>
+                                        </p:tav>
+                                        <p:tav tm="100000">
+                                          <p:val>
+                                            <p:strVal val="#ppt_y"/>
+                                          </p:val>
+                                        </p:tav>
+                                      </p:tavLst>
+                                    </p:anim>
+                                  </p:childTnLst>
+                                </p:cTn>
+                              </p:par>
+                            </p:childTnLst>
+                          </p:cTn>
+                        </p:par>
+                      </p:childTnLst>
+                    </p:cTn>
+                  </p:par>
+                </p:childTnLst>
+              </p:cTn>
+              <p:prevCondLst>
+                <p:cond evt="onPrev" delay="0">
+                  <p:tgtEl>
+                    <p:sldTgt/>
+                  </p:tgtEl>
+                </p:cond>
+              </p:prevCondLst>
+              <p:nextCondLst>
+                <p:cond evt="onNext" delay="0">
+                  <p:tgtEl>
+                    <p:sldTgt/>
+                  </p:tgtEl>
+                </p:cond>
+              </p:nextCondLst>
+            </p:seq>
+          </p:childTnLst>
+        </p:cTn>
+      </p:par>
+    </p:tnLst>
+    <p:bldLst>
+      <p:bldP spid="2" grpId="0"/>
+      <p:bldP spid="3" grpId="0" build="p"/>
+    </p:bldLst>
+  </p:timing>
 </p:sld>
 </file>
 
@@ -17377,23 +25568,12 @@
 </file>
 
 <file path=customXml/item1.xml><?xml version="1.0" encoding="utf-8"?>
-<p:properties xmlns:p="http://schemas.microsoft.com/office/2006/metadata/properties" xmlns:xsi="http://www.w3.org/2001/XMLSchema-instance" xmlns:pc="http://schemas.microsoft.com/office/infopath/2007/PartnerControls">
-  <documentManagement>
-    <_ip_UnifiedCompliancePolicyUIAction xmlns="http://schemas.microsoft.com/sharepoint/v3" xsi:nil="true"/>
-    <Image xmlns="71af3243-3dd4-4a8d-8c0d-dd76da1f02a5">
-      <Url xsi:nil="true"/>
-      <Description xsi:nil="true"/>
-    </Image>
-    <Status xmlns="71af3243-3dd4-4a8d-8c0d-dd76da1f02a5">Not started</Status>
-    <Background xmlns="71af3243-3dd4-4a8d-8c0d-dd76da1f02a5">false</Background>
-    <_ip_UnifiedCompliancePolicyProperties xmlns="http://schemas.microsoft.com/sharepoint/v3" xsi:nil="true"/>
-    <ImageTagsTaxHTField xmlns="71af3243-3dd4-4a8d-8c0d-dd76da1f02a5">
-      <Terms xmlns="http://schemas.microsoft.com/office/infopath/2007/PartnerControls"/>
-    </ImageTagsTaxHTField>
-    <TaxCatchAll xmlns="230e9df3-be65-4c73-a93b-d1236ebd677e" xsi:nil="true"/>
-    <MediaServiceKeyPoints xmlns="71af3243-3dd4-4a8d-8c0d-dd76da1f02a5" xsi:nil="true"/>
-  </documentManagement>
-</p:properties>
+<?mso-contentType ?>
+<FormTemplates xmlns="http://schemas.microsoft.com/sharepoint/v3/contenttype/forms">
+  <Display>DocumentLibraryForm</Display>
+  <Edit>DocumentLibraryForm</Edit>
+  <New>DocumentLibraryForm</New>
+</FormTemplates>
 </file>
 
 <file path=customXml/item2.xml><?xml version="1.0" encoding="utf-8"?>
@@ -17709,29 +25889,29 @@
 </file>
 
 <file path=customXml/item3.xml><?xml version="1.0" encoding="utf-8"?>
-<?mso-contentType ?>
-<FormTemplates xmlns="http://schemas.microsoft.com/sharepoint/v3/contenttype/forms">
-  <Display>DocumentLibraryForm</Display>
-  <Edit>DocumentLibraryForm</Edit>
-  <New>DocumentLibraryForm</New>
-</FormTemplates>
+<p:properties xmlns:p="http://schemas.microsoft.com/office/2006/metadata/properties" xmlns:xsi="http://www.w3.org/2001/XMLSchema-instance" xmlns:pc="http://schemas.microsoft.com/office/infopath/2007/PartnerControls">
+  <documentManagement>
+    <_ip_UnifiedCompliancePolicyUIAction xmlns="http://schemas.microsoft.com/sharepoint/v3" xsi:nil="true"/>
+    <Image xmlns="71af3243-3dd4-4a8d-8c0d-dd76da1f02a5">
+      <Url xsi:nil="true"/>
+      <Description xsi:nil="true"/>
+    </Image>
+    <Status xmlns="71af3243-3dd4-4a8d-8c0d-dd76da1f02a5">Not started</Status>
+    <Background xmlns="71af3243-3dd4-4a8d-8c0d-dd76da1f02a5">false</Background>
+    <_ip_UnifiedCompliancePolicyProperties xmlns="http://schemas.microsoft.com/sharepoint/v3" xsi:nil="true"/>
+    <ImageTagsTaxHTField xmlns="71af3243-3dd4-4a8d-8c0d-dd76da1f02a5">
+      <Terms xmlns="http://schemas.microsoft.com/office/infopath/2007/PartnerControls"/>
+    </ImageTagsTaxHTField>
+    <TaxCatchAll xmlns="230e9df3-be65-4c73-a93b-d1236ebd677e" xsi:nil="true"/>
+    <MediaServiceKeyPoints xmlns="71af3243-3dd4-4a8d-8c0d-dd76da1f02a5" xsi:nil="true"/>
+  </documentManagement>
+</p:properties>
 </file>
 
 <file path=customXml/itemProps1.xml><?xml version="1.0" encoding="utf-8"?>
-<ds:datastoreItem xmlns:ds="http://schemas.openxmlformats.org/officeDocument/2006/customXml" ds:itemID="{C4275B5A-7993-4B5E-9459-F514F3EBE15D}">
+<ds:datastoreItem xmlns:ds="http://schemas.openxmlformats.org/officeDocument/2006/customXml" ds:itemID="{98BD8C90-A3BA-4A7A-B350-4B9A0D6525A4}">
   <ds:schemaRefs>
-    <ds:schemaRef ds:uri="http://purl.org/dc/dcmitype/"/>
-    <ds:schemaRef ds:uri="http://schemas.microsoft.com/office/2006/documentManagement/types"/>
-    <ds:schemaRef ds:uri="http://purl.org/dc/elements/1.1/"/>
-    <ds:schemaRef ds:uri="230e9df3-be65-4c73-a93b-d1236ebd677e"/>
-    <ds:schemaRef ds:uri="http://schemas.microsoft.com/office/infopath/2007/PartnerControls"/>
-    <ds:schemaRef ds:uri="16c05727-aa75-4e4a-9b5f-8a80a1165891"/>
-    <ds:schemaRef ds:uri="http://schemas.microsoft.com/office/2006/metadata/properties"/>
-    <ds:schemaRef ds:uri="http://schemas.openxmlformats.org/package/2006/metadata/core-properties"/>
-    <ds:schemaRef ds:uri="71af3243-3dd4-4a8d-8c0d-dd76da1f02a5"/>
-    <ds:schemaRef ds:uri="http://schemas.microsoft.com/sharepoint/v3"/>
-    <ds:schemaRef ds:uri="http://www.w3.org/XML/1998/namespace"/>
-    <ds:schemaRef ds:uri="http://purl.org/dc/terms/"/>
+    <ds:schemaRef ds:uri="http://schemas.microsoft.com/sharepoint/v3/contenttype/forms"/>
   </ds:schemaRefs>
 </ds:datastoreItem>
 </file>
@@ -17758,9 +25938,20 @@
 </file>
 
 <file path=customXml/itemProps3.xml><?xml version="1.0" encoding="utf-8"?>
-<ds:datastoreItem xmlns:ds="http://schemas.openxmlformats.org/officeDocument/2006/customXml" ds:itemID="{98BD8C90-A3BA-4A7A-B350-4B9A0D6525A4}">
+<ds:datastoreItem xmlns:ds="http://schemas.openxmlformats.org/officeDocument/2006/customXml" ds:itemID="{C4275B5A-7993-4B5E-9459-F514F3EBE15D}">
   <ds:schemaRefs>
-    <ds:schemaRef ds:uri="http://schemas.microsoft.com/sharepoint/v3/contenttype/forms"/>
+    <ds:schemaRef ds:uri="http://purl.org/dc/dcmitype/"/>
+    <ds:schemaRef ds:uri="http://schemas.microsoft.com/office/2006/documentManagement/types"/>
+    <ds:schemaRef ds:uri="http://purl.org/dc/elements/1.1/"/>
+    <ds:schemaRef ds:uri="230e9df3-be65-4c73-a93b-d1236ebd677e"/>
+    <ds:schemaRef ds:uri="http://schemas.microsoft.com/office/infopath/2007/PartnerControls"/>
+    <ds:schemaRef ds:uri="16c05727-aa75-4e4a-9b5f-8a80a1165891"/>
+    <ds:schemaRef ds:uri="http://schemas.microsoft.com/office/2006/metadata/properties"/>
+    <ds:schemaRef ds:uri="http://schemas.openxmlformats.org/package/2006/metadata/core-properties"/>
+    <ds:schemaRef ds:uri="71af3243-3dd4-4a8d-8c0d-dd76da1f02a5"/>
+    <ds:schemaRef ds:uri="http://schemas.microsoft.com/sharepoint/v3"/>
+    <ds:schemaRef ds:uri="http://www.w3.org/XML/1998/namespace"/>
+    <ds:schemaRef ds:uri="http://purl.org/dc/terms/"/>
   </ds:schemaRefs>
 </ds:datastoreItem>
 </file>
